--- a/thesis/presentation.pptx
+++ b/thesis/presentation.pptx
@@ -5,16 +5,20 @@
     <p:sldMasterId id="2147483648" r:id="rId1"/>
   </p:sldMasterIdLst>
   <p:notesMasterIdLst>
-    <p:notesMasterId r:id="rId9"/>
+    <p:notesMasterId r:id="rId13"/>
   </p:notesMasterIdLst>
   <p:sldIdLst>
     <p:sldId id="256" r:id="rId2"/>
-    <p:sldId id="271" r:id="rId3"/>
-    <p:sldId id="270" r:id="rId4"/>
-    <p:sldId id="273" r:id="rId5"/>
-    <p:sldId id="274" r:id="rId6"/>
-    <p:sldId id="275" r:id="rId7"/>
-    <p:sldId id="269" r:id="rId8"/>
+    <p:sldId id="270" r:id="rId3"/>
+    <p:sldId id="273" r:id="rId4"/>
+    <p:sldId id="276" r:id="rId5"/>
+    <p:sldId id="277" r:id="rId6"/>
+    <p:sldId id="278" r:id="rId7"/>
+    <p:sldId id="274" r:id="rId8"/>
+    <p:sldId id="271" r:id="rId9"/>
+    <p:sldId id="280" r:id="rId10"/>
+    <p:sldId id="275" r:id="rId11"/>
+    <p:sldId id="269" r:id="rId12"/>
   </p:sldIdLst>
   <p:sldSz cx="9144000" cy="5143500" type="screen16x9"/>
   <p:notesSz cx="6858000" cy="9144000"/>
@@ -119,10 +123,14 @@
         <p14:section name="Default Section" id="{5FCDA9A2-867F-514A-8A60-9F0671933454}">
           <p14:sldIdLst>
             <p14:sldId id="256"/>
-            <p14:sldId id="271"/>
             <p14:sldId id="270"/>
             <p14:sldId id="273"/>
+            <p14:sldId id="276"/>
+            <p14:sldId id="277"/>
+            <p14:sldId id="278"/>
             <p14:sldId id="274"/>
+            <p14:sldId id="271"/>
+            <p14:sldId id="280"/>
             <p14:sldId id="275"/>
             <p14:sldId id="269"/>
           </p14:sldIdLst>
@@ -528,9 +536,1320 @@
           <a:lstStyle/>
           <a:p>
             <a:r>
+              <a:rPr lang="en-GB" dirty="0"/>
+              <a:t>Good morning to the commission and to my supervisor, Professor Malnati.</a:t>
+            </a:r>
+          </a:p>
+          <a:p>
+            <a:endParaRPr lang="en-GB" dirty="0"/>
+          </a:p>
+          <a:p>
+            <a:r>
+              <a:rPr lang="en-GB" dirty="0"/>
+              <a:t>Today I will present my thesis work: the </a:t>
+            </a:r>
+            <a:r>
+              <a:rPr lang="en-GB" b="1" dirty="0"/>
+              <a:t>Design and Implementation of a Cloud-Native Reactive Architecture</a:t>
+            </a:r>
+            <a:r>
+              <a:rPr lang="en-GB" dirty="0"/>
+              <a:t>.</a:t>
+            </a:r>
+          </a:p>
+          <a:p>
+            <a:r>
+              <a:rPr lang="en-GB" dirty="0"/>
+              <a:t>To test how these architectural patterns behave in practice, I developed a concrete case study: the </a:t>
+            </a:r>
+            <a:r>
+              <a:rPr lang="en-GB" b="1" dirty="0"/>
+              <a:t>Smart Travel Platform</a:t>
+            </a:r>
+            <a:r>
+              <a:rPr lang="en-GB" dirty="0"/>
+              <a:t>, a microservice-based e-commerce application.</a:t>
+            </a:r>
+          </a:p>
+          <a:p>
+            <a:r>
+              <a:rPr lang="en-GB" dirty="0"/>
+              <a:t>Over the next few minutes, I will walk you through the technical choices behind this platform and show how this approach can help to solve the scalability and data consistency problems typical of traditional travel booking systems.</a:t>
+            </a:r>
+          </a:p>
+          <a:p>
+            <a:endParaRPr lang="en-IT" dirty="0"/>
+          </a:p>
+        </p:txBody>
+      </p:sp>
+      <p:sp>
+        <p:nvSpPr>
+          <p:cNvPr id="4" name="Slide Number Placeholder 3"/>
+          <p:cNvSpPr>
+            <a:spLocks noGrp="1"/>
+          </p:cNvSpPr>
+          <p:nvPr>
+            <p:ph type="sldNum" sz="quarter" idx="5"/>
+          </p:nvPr>
+        </p:nvSpPr>
+        <p:spPr/>
+        <p:txBody>
+          <a:bodyPr/>
+          <a:lstStyle/>
+          <a:p>
+            <a:fld id="{A1FD4C87-9CAF-0C4E-93E7-020DE1465132}" type="slidenum">
+              <a:rPr lang="en-IT" smtClean="0"/>
+              <a:t>1</a:t>
+            </a:fld>
+            <a:endParaRPr lang="en-IT"/>
+          </a:p>
+        </p:txBody>
+      </p:sp>
+    </p:spTree>
+    <p:extLst>
+      <p:ext uri="{BB962C8B-B14F-4D97-AF65-F5344CB8AC3E}">
+        <p14:creationId xmlns:p14="http://schemas.microsoft.com/office/powerpoint/2010/main" val="1050271060"/>
+      </p:ext>
+    </p:extLst>
+  </p:cSld>
+  <p:clrMapOvr>
+    <a:masterClrMapping/>
+  </p:clrMapOvr>
+</p:notes>
+</file>
+
+<file path=ppt/notesSlides/notesSlide10.xml><?xml version="1.0" encoding="utf-8"?>
+<p:notes xmlns:a="http://schemas.openxmlformats.org/drawingml/2006/main" xmlns:r="http://schemas.openxmlformats.org/officeDocument/2006/relationships" xmlns:p="http://schemas.openxmlformats.org/presentationml/2006/main">
+  <p:cSld>
+    <p:spTree>
+      <p:nvGrpSpPr>
+        <p:cNvPr id="1" name="">
+          <a:extLst>
+            <a:ext uri="{FF2B5EF4-FFF2-40B4-BE49-F238E27FC236}">
+              <a16:creationId xmlns:a16="http://schemas.microsoft.com/office/drawing/2014/main" id="{1D9DB3DC-B4BF-EA17-6AD6-91D30E87214E}"/>
+            </a:ext>
+          </a:extLst>
+        </p:cNvPr>
+        <p:cNvGrpSpPr/>
+        <p:nvPr/>
+      </p:nvGrpSpPr>
+      <p:grpSpPr>
+        <a:xfrm>
+          <a:off x="0" y="0"/>
+          <a:ext cx="0" cy="0"/>
+          <a:chOff x="0" y="0"/>
+          <a:chExt cx="0" cy="0"/>
+        </a:xfrm>
+      </p:grpSpPr>
+      <p:sp>
+        <p:nvSpPr>
+          <p:cNvPr id="2" name="Slide Image Placeholder 1">
+            <a:extLst>
+              <a:ext uri="{FF2B5EF4-FFF2-40B4-BE49-F238E27FC236}">
+                <a16:creationId xmlns:a16="http://schemas.microsoft.com/office/drawing/2014/main" id="{9E70F7D5-E622-0859-7B59-EB6CEAD26772}"/>
+              </a:ext>
+            </a:extLst>
+          </p:cNvPr>
+          <p:cNvSpPr>
+            <a:spLocks noGrp="1" noRot="1" noChangeAspect="1"/>
+          </p:cNvSpPr>
+          <p:nvPr>
+            <p:ph type="sldImg"/>
+          </p:nvPr>
+        </p:nvSpPr>
+        <p:spPr/>
+      </p:sp>
+      <p:sp>
+        <p:nvSpPr>
+          <p:cNvPr id="3" name="Notes Placeholder 2">
+            <a:extLst>
+              <a:ext uri="{FF2B5EF4-FFF2-40B4-BE49-F238E27FC236}">
+                <a16:creationId xmlns:a16="http://schemas.microsoft.com/office/drawing/2014/main" id="{C3561704-D80D-BE1A-D2AB-55B82C031F06}"/>
+              </a:ext>
+            </a:extLst>
+          </p:cNvPr>
+          <p:cNvSpPr>
+            <a:spLocks noGrp="1"/>
+          </p:cNvSpPr>
+          <p:nvPr>
+            <p:ph type="body" idx="1"/>
+          </p:nvPr>
+        </p:nvSpPr>
+        <p:spPr/>
+        <p:txBody>
+          <a:bodyPr/>
+          <a:lstStyle/>
+          <a:p>
+            <a:r>
+              <a:rPr lang="en-GB" dirty="0"/>
+              <a:t>This diagram represents the complete topology of the Smart Travel platform. Let’s break it down into its core components.</a:t>
+            </a:r>
+          </a:p>
+          <a:p>
+            <a:endParaRPr lang="en-GB" dirty="0"/>
+          </a:p>
+          <a:p>
+            <a:r>
+              <a:rPr lang="en-GB" b="1" dirty="0"/>
+              <a:t>[1. Core Microservices]</a:t>
+            </a:r>
+            <a:r>
+              <a:rPr lang="en-GB" dirty="0"/>
+              <a:t> </a:t>
+            </a:r>
+          </a:p>
+          <a:p>
+            <a:r>
+              <a:rPr lang="en-GB" dirty="0"/>
+              <a:t>At the </a:t>
+            </a:r>
+            <a:r>
+              <a:rPr lang="en-GB" dirty="0" err="1"/>
+              <a:t>center</a:t>
+            </a:r>
+            <a:r>
+              <a:rPr lang="en-GB" dirty="0"/>
+              <a:t> of the architecture, we have the core business logic decomposed into four distinct microservices:</a:t>
+            </a:r>
+          </a:p>
+          <a:p>
+            <a:pPr marL="228600" indent="-228600">
+              <a:buFont typeface="+mj-lt"/>
+              <a:buAutoNum type="arabicPeriod"/>
+            </a:pPr>
+            <a:r>
+              <a:rPr lang="en-GB" dirty="0"/>
+              <a:t>the </a:t>
+            </a:r>
+            <a:r>
+              <a:rPr lang="en-GB" b="1" dirty="0"/>
+              <a:t>Travel </a:t>
+            </a:r>
+            <a:r>
+              <a:rPr lang="en-GB" b="1" dirty="0" err="1"/>
+              <a:t>Catalog</a:t>
+            </a:r>
+            <a:r>
+              <a:rPr lang="en-GB" b="1" dirty="0"/>
+              <a:t> API</a:t>
+            </a:r>
+            <a:r>
+              <a:rPr lang="en-GB" dirty="0"/>
+              <a:t> built with </a:t>
+            </a:r>
+            <a:r>
+              <a:rPr lang="en-GB" dirty="0" err="1"/>
+              <a:t>Quarkus</a:t>
+            </a:r>
+            <a:r>
+              <a:rPr lang="en-GB" dirty="0"/>
+              <a:t>, </a:t>
+            </a:r>
+          </a:p>
+          <a:p>
+            <a:pPr marL="228600" indent="-228600">
+              <a:buFont typeface="+mj-lt"/>
+              <a:buAutoNum type="arabicPeriod"/>
+            </a:pPr>
+            <a:r>
+              <a:rPr lang="en-GB" dirty="0"/>
+              <a:t>the </a:t>
+            </a:r>
+            <a:r>
+              <a:rPr lang="en-GB" b="1" dirty="0"/>
+              <a:t>User API and Order APIs</a:t>
+            </a:r>
+            <a:r>
+              <a:rPr lang="en-GB" dirty="0"/>
+              <a:t> built with Spring Boot. </a:t>
+            </a:r>
+          </a:p>
+          <a:p>
+            <a:pPr marL="228600" indent="-228600">
+              <a:buFont typeface="+mj-lt"/>
+              <a:buAutoNum type="arabicPeriod"/>
+            </a:pPr>
+            <a:r>
+              <a:rPr lang="en-GB" dirty="0"/>
+              <a:t>The Order API</a:t>
+            </a:r>
+          </a:p>
+          <a:p>
+            <a:pPr marL="228600" indent="-228600">
+              <a:buFont typeface="+mj-lt"/>
+              <a:buAutoNum type="arabicPeriod"/>
+            </a:pPr>
+            <a:endParaRPr lang="en-GB" dirty="0"/>
+          </a:p>
+          <a:p>
+            <a:pPr marL="0" indent="0">
+              <a:buFont typeface="+mj-lt"/>
+              <a:buNone/>
+            </a:pPr>
+            <a:r>
+              <a:rPr lang="en-GB" dirty="0"/>
+              <a:t>To guarantee strict isolation and fault tolerance, each of these services manages its own dedicated MongoDB database. This ensures that a heavy load on the </a:t>
+            </a:r>
+            <a:r>
+              <a:rPr lang="en-GB" dirty="0" err="1"/>
+              <a:t>catalog</a:t>
+            </a:r>
+            <a:r>
+              <a:rPr lang="en-GB" dirty="0"/>
+              <a:t> doesn't impact our ability to process orders.</a:t>
+            </a:r>
+          </a:p>
+          <a:p>
+            <a:pPr marL="0" indent="0">
+              <a:buFont typeface="+mj-lt"/>
+              <a:buNone/>
+            </a:pPr>
+            <a:endParaRPr lang="en-GB" dirty="0"/>
+          </a:p>
+          <a:p>
+            <a:r>
+              <a:rPr lang="en-GB" b="1" dirty="0"/>
+              <a:t>[2. BFF, </a:t>
+            </a:r>
+            <a:r>
+              <a:rPr lang="en-GB" b="1" dirty="0" err="1"/>
+              <a:t>GraphQL</a:t>
+            </a:r>
+            <a:r>
+              <a:rPr lang="en-GB" b="1" dirty="0"/>
+              <a:t>, and Frontend]</a:t>
+            </a:r>
+            <a:r>
+              <a:rPr lang="en-GB" dirty="0"/>
+              <a:t> </a:t>
+            </a:r>
+          </a:p>
+          <a:p>
+            <a:r>
+              <a:rPr lang="en-GB" dirty="0"/>
+              <a:t>Moving to the left, we have the client side. To connect our Angular frontend to these distributed backend services, I implemented a </a:t>
+            </a:r>
+            <a:r>
+              <a:rPr lang="en-GB" b="1" dirty="0"/>
+              <a:t>Backend-For-Frontend (BFF)</a:t>
+            </a:r>
+            <a:r>
+              <a:rPr lang="en-GB" dirty="0"/>
+              <a:t>. Instead of the client making dozens of REST requests to different services, it simply sends a single </a:t>
+            </a:r>
+            <a:r>
+              <a:rPr lang="en-GB" b="1" dirty="0" err="1"/>
+              <a:t>GraphQL</a:t>
+            </a:r>
+            <a:r>
+              <a:rPr lang="en-GB" dirty="0"/>
+              <a:t> query to the BFF. The BFF acts as an API Gateway, dynamically fetching and aggregating only the requested data from the downstream microservices. This effectively eliminates network latency and frontend over-fetching.</a:t>
+            </a:r>
+          </a:p>
+          <a:p>
+            <a:endParaRPr lang="en-GB" b="1" dirty="0"/>
+          </a:p>
+          <a:p>
+            <a:r>
+              <a:rPr lang="en-GB" b="1" dirty="0"/>
+              <a:t>[3. JWT Authentication]</a:t>
+            </a:r>
+          </a:p>
+          <a:p>
+            <a:r>
+              <a:rPr lang="en-GB" dirty="0"/>
+              <a:t>Furthermore, this BFF serves as the system’s primary security perimeter. All incoming traffic is intercepted here and authenticated using stateless </a:t>
+            </a:r>
+            <a:r>
+              <a:rPr lang="en-GB" b="1" dirty="0"/>
+              <a:t>JSON Web Tokens (JWT)</a:t>
+            </a:r>
+            <a:r>
+              <a:rPr lang="en-GB" dirty="0"/>
+              <a:t>. The BFF verifies the cryptographic signature and enforces strict Role-Based Access Control before any request is allowed inside the internal network. This keeps the downstream microservices secure and strictly focused on their business logic.</a:t>
+            </a:r>
+          </a:p>
+          <a:p>
+            <a:endParaRPr lang="en-GB" b="1" dirty="0"/>
+          </a:p>
+          <a:p>
+            <a:r>
+              <a:rPr lang="en-GB" b="1" dirty="0"/>
+              <a:t>[4. Payment Flow, </a:t>
+            </a:r>
+            <a:r>
+              <a:rPr lang="en-GB" b="1" dirty="0" err="1"/>
+              <a:t>Debezium</a:t>
+            </a:r>
+            <a:r>
+              <a:rPr lang="en-GB" b="1" dirty="0"/>
+              <a:t>, and RabbitMQ]</a:t>
+            </a:r>
+          </a:p>
+          <a:p>
+            <a:r>
+              <a:rPr lang="en-GB" dirty="0"/>
+              <a:t>Finally, at the bottom of the diagram, we have the event-driven layer. The most complex challenge I faced here was the famous </a:t>
+            </a:r>
+            <a:r>
+              <a:rPr lang="en-GB" b="1" dirty="0"/>
+              <a:t>dual-write problem</a:t>
+            </a:r>
+            <a:r>
+              <a:rPr lang="en-GB" dirty="0"/>
+              <a:t> during the checkout phase.</a:t>
+            </a:r>
+          </a:p>
+          <a:p>
+            <a:r>
+              <a:rPr lang="en-GB" dirty="0"/>
+              <a:t>When a user completes a payment, the Order API needs to do two things: save the updated order to MongoDB and publish a notification event to RabbitMQ. Because these are two separate systems, they cannot share a single transaction.</a:t>
+            </a:r>
+          </a:p>
+          <a:p>
+            <a:r>
+              <a:rPr lang="en-GB" dirty="0"/>
+              <a:t>If we simply execute them sequentially, we risk data inconsistency. If the MongoDB transaction succeeds but a network glitch prevents the message from reaching the broker, the message is lost forever. </a:t>
+            </a:r>
+          </a:p>
+          <a:p>
+            <a:r>
+              <a:rPr lang="en-GB" dirty="0"/>
+              <a:t>Conversely, if we publish to the broker first, but the database transaction rolls back, the system sends a confirmation email for an order that doesn't exist.</a:t>
+            </a:r>
+          </a:p>
+          <a:p>
+            <a:r>
+              <a:rPr lang="en-GB" dirty="0"/>
+              <a:t>To guarantee absolute data consistency, I implemented the </a:t>
+            </a:r>
+            <a:r>
+              <a:rPr lang="en-GB" b="1" dirty="0"/>
+              <a:t>Transactional Outbox Pattern</a:t>
+            </a:r>
+            <a:r>
+              <a:rPr lang="en-GB" dirty="0"/>
+              <a:t>. The Order API atomically saves the order and an 'event record' into MongoDB in a single, local transaction. </a:t>
+            </a:r>
+          </a:p>
+          <a:p>
+            <a:r>
+              <a:rPr lang="en-GB" dirty="0"/>
+              <a:t>Then, a standalone </a:t>
+            </a:r>
+            <a:r>
+              <a:rPr lang="en-GB" b="1" dirty="0" err="1"/>
+              <a:t>Debezium</a:t>
+            </a:r>
+            <a:r>
+              <a:rPr lang="en-GB" dirty="0"/>
+              <a:t> service continuously tails the database logs, detects this atomic insertion, and securely publishes the payload to </a:t>
+            </a:r>
+            <a:r>
+              <a:rPr lang="en-GB" b="1" dirty="0"/>
+              <a:t>RabbitMQ</a:t>
+            </a:r>
+            <a:r>
+              <a:rPr lang="en-GB" dirty="0"/>
+              <a:t>. </a:t>
+            </a:r>
+          </a:p>
+          <a:p>
+            <a:r>
+              <a:rPr lang="en-GB" dirty="0"/>
+              <a:t>This decoupled architecture guarantees at-least-once message delivery, ensuring that temporary broker failures never compromise the integrity of the financial transaction.</a:t>
+            </a:r>
+          </a:p>
+          <a:p>
+            <a:endParaRPr lang="en-IT" dirty="0"/>
+          </a:p>
+        </p:txBody>
+      </p:sp>
+      <p:sp>
+        <p:nvSpPr>
+          <p:cNvPr id="4" name="Slide Number Placeholder 3">
+            <a:extLst>
+              <a:ext uri="{FF2B5EF4-FFF2-40B4-BE49-F238E27FC236}">
+                <a16:creationId xmlns:a16="http://schemas.microsoft.com/office/drawing/2014/main" id="{7D4860AA-AD9A-1246-A9A9-EB906ECFDD27}"/>
+              </a:ext>
+            </a:extLst>
+          </p:cNvPr>
+          <p:cNvSpPr>
+            <a:spLocks noGrp="1"/>
+          </p:cNvSpPr>
+          <p:nvPr>
+            <p:ph type="sldNum" sz="quarter" idx="5"/>
+          </p:nvPr>
+        </p:nvSpPr>
+        <p:spPr/>
+        <p:txBody>
+          <a:bodyPr/>
+          <a:lstStyle/>
+          <a:p>
+            <a:fld id="{A1FD4C87-9CAF-0C4E-93E7-020DE1465132}" type="slidenum">
+              <a:rPr lang="en-IT" smtClean="0"/>
+              <a:t>10</a:t>
+            </a:fld>
+            <a:endParaRPr lang="en-IT"/>
+          </a:p>
+        </p:txBody>
+      </p:sp>
+    </p:spTree>
+    <p:extLst>
+      <p:ext uri="{BB962C8B-B14F-4D97-AF65-F5344CB8AC3E}">
+        <p14:creationId xmlns:p14="http://schemas.microsoft.com/office/powerpoint/2010/main" val="1054108748"/>
+      </p:ext>
+    </p:extLst>
+  </p:cSld>
+  <p:clrMapOvr>
+    <a:masterClrMapping/>
+  </p:clrMapOvr>
+</p:notes>
+</file>
+
+<file path=ppt/notesSlides/notesSlide2.xml><?xml version="1.0" encoding="utf-8"?>
+<p:notes xmlns:a="http://schemas.openxmlformats.org/drawingml/2006/main" xmlns:r="http://schemas.openxmlformats.org/officeDocument/2006/relationships" xmlns:p="http://schemas.openxmlformats.org/presentationml/2006/main">
+  <p:cSld>
+    <p:spTree>
+      <p:nvGrpSpPr>
+        <p:cNvPr id="1" name="">
+          <a:extLst>
+            <a:ext uri="{FF2B5EF4-FFF2-40B4-BE49-F238E27FC236}">
+              <a16:creationId xmlns:a16="http://schemas.microsoft.com/office/drawing/2014/main" id="{2BEC29F4-FD1D-0D0B-AAD1-D47CA0C1D828}"/>
+            </a:ext>
+          </a:extLst>
+        </p:cNvPr>
+        <p:cNvGrpSpPr/>
+        <p:nvPr/>
+      </p:nvGrpSpPr>
+      <p:grpSpPr>
+        <a:xfrm>
+          <a:off x="0" y="0"/>
+          <a:ext cx="0" cy="0"/>
+          <a:chOff x="0" y="0"/>
+          <a:chExt cx="0" cy="0"/>
+        </a:xfrm>
+      </p:grpSpPr>
+      <p:sp>
+        <p:nvSpPr>
+          <p:cNvPr id="2" name="Slide Image Placeholder 1">
+            <a:extLst>
+              <a:ext uri="{FF2B5EF4-FFF2-40B4-BE49-F238E27FC236}">
+                <a16:creationId xmlns:a16="http://schemas.microsoft.com/office/drawing/2014/main" id="{AE98789B-8E0C-6FE2-737F-9961051AE6A2}"/>
+              </a:ext>
+            </a:extLst>
+          </p:cNvPr>
+          <p:cNvSpPr>
+            <a:spLocks noGrp="1" noRot="1" noChangeAspect="1"/>
+          </p:cNvSpPr>
+          <p:nvPr>
+            <p:ph type="sldImg"/>
+          </p:nvPr>
+        </p:nvSpPr>
+        <p:spPr/>
+      </p:sp>
+      <p:sp>
+        <p:nvSpPr>
+          <p:cNvPr id="3" name="Notes Placeholder 2">
+            <a:extLst>
+              <a:ext uri="{FF2B5EF4-FFF2-40B4-BE49-F238E27FC236}">
+                <a16:creationId xmlns:a16="http://schemas.microsoft.com/office/drawing/2014/main" id="{DCF20990-BE5E-2CC3-9C3D-3B4F336259F3}"/>
+              </a:ext>
+            </a:extLst>
+          </p:cNvPr>
+          <p:cNvSpPr>
+            <a:spLocks noGrp="1"/>
+          </p:cNvSpPr>
+          <p:nvPr>
+            <p:ph type="body" idx="1"/>
+          </p:nvPr>
+        </p:nvSpPr>
+        <p:spPr/>
+        <p:txBody>
+          <a:bodyPr/>
+          <a:lstStyle/>
+          <a:p>
+            <a:endParaRPr lang="en-IT" dirty="0"/>
+          </a:p>
+        </p:txBody>
+      </p:sp>
+      <p:sp>
+        <p:nvSpPr>
+          <p:cNvPr id="4" name="Slide Number Placeholder 3">
+            <a:extLst>
+              <a:ext uri="{FF2B5EF4-FFF2-40B4-BE49-F238E27FC236}">
+                <a16:creationId xmlns:a16="http://schemas.microsoft.com/office/drawing/2014/main" id="{DB9F2F12-B31B-A585-28C8-2AF6B70DE66F}"/>
+              </a:ext>
+            </a:extLst>
+          </p:cNvPr>
+          <p:cNvSpPr>
+            <a:spLocks noGrp="1"/>
+          </p:cNvSpPr>
+          <p:nvPr>
+            <p:ph type="sldNum" sz="quarter" idx="5"/>
+          </p:nvPr>
+        </p:nvSpPr>
+        <p:spPr/>
+        <p:txBody>
+          <a:bodyPr/>
+          <a:lstStyle/>
+          <a:p>
+            <a:fld id="{A1FD4C87-9CAF-0C4E-93E7-020DE1465132}" type="slidenum">
+              <a:rPr lang="en-IT" smtClean="0"/>
+              <a:t>2</a:t>
+            </a:fld>
+            <a:endParaRPr lang="en-IT"/>
+          </a:p>
+        </p:txBody>
+      </p:sp>
+    </p:spTree>
+    <p:extLst>
+      <p:ext uri="{BB962C8B-B14F-4D97-AF65-F5344CB8AC3E}">
+        <p14:creationId xmlns:p14="http://schemas.microsoft.com/office/powerpoint/2010/main" val="1723885041"/>
+      </p:ext>
+    </p:extLst>
+  </p:cSld>
+  <p:clrMapOvr>
+    <a:masterClrMapping/>
+  </p:clrMapOvr>
+</p:notes>
+</file>
+
+<file path=ppt/notesSlides/notesSlide3.xml><?xml version="1.0" encoding="utf-8"?>
+<p:notes xmlns:a="http://schemas.openxmlformats.org/drawingml/2006/main" xmlns:r="http://schemas.openxmlformats.org/officeDocument/2006/relationships" xmlns:p="http://schemas.openxmlformats.org/presentationml/2006/main">
+  <p:cSld>
+    <p:spTree>
+      <p:nvGrpSpPr>
+        <p:cNvPr id="1" name="">
+          <a:extLst>
+            <a:ext uri="{FF2B5EF4-FFF2-40B4-BE49-F238E27FC236}">
+              <a16:creationId xmlns:a16="http://schemas.microsoft.com/office/drawing/2014/main" id="{303719DB-9665-3148-BD6B-860AB3D71989}"/>
+            </a:ext>
+          </a:extLst>
+        </p:cNvPr>
+        <p:cNvGrpSpPr/>
+        <p:nvPr/>
+      </p:nvGrpSpPr>
+      <p:grpSpPr>
+        <a:xfrm>
+          <a:off x="0" y="0"/>
+          <a:ext cx="0" cy="0"/>
+          <a:chOff x="0" y="0"/>
+          <a:chExt cx="0" cy="0"/>
+        </a:xfrm>
+      </p:grpSpPr>
+      <p:sp>
+        <p:nvSpPr>
+          <p:cNvPr id="2" name="Slide Image Placeholder 1">
+            <a:extLst>
+              <a:ext uri="{FF2B5EF4-FFF2-40B4-BE49-F238E27FC236}">
+                <a16:creationId xmlns:a16="http://schemas.microsoft.com/office/drawing/2014/main" id="{85372964-627A-AE03-A9BD-BAFB316B9F42}"/>
+              </a:ext>
+            </a:extLst>
+          </p:cNvPr>
+          <p:cNvSpPr>
+            <a:spLocks noGrp="1" noRot="1" noChangeAspect="1"/>
+          </p:cNvSpPr>
+          <p:nvPr>
+            <p:ph type="sldImg"/>
+          </p:nvPr>
+        </p:nvSpPr>
+        <p:spPr/>
+      </p:sp>
+      <p:sp>
+        <p:nvSpPr>
+          <p:cNvPr id="3" name="Notes Placeholder 2">
+            <a:extLst>
+              <a:ext uri="{FF2B5EF4-FFF2-40B4-BE49-F238E27FC236}">
+                <a16:creationId xmlns:a16="http://schemas.microsoft.com/office/drawing/2014/main" id="{6FF31B90-2FA4-BB3B-CB64-D5D041430D2C}"/>
+              </a:ext>
+            </a:extLst>
+          </p:cNvPr>
+          <p:cNvSpPr>
+            <a:spLocks noGrp="1"/>
+          </p:cNvSpPr>
+          <p:nvPr>
+            <p:ph type="body" idx="1"/>
+          </p:nvPr>
+        </p:nvSpPr>
+        <p:spPr/>
+        <p:txBody>
+          <a:bodyPr/>
+          <a:lstStyle/>
+          <a:p>
+            <a:r>
+              <a:rPr lang="en-GB" dirty="0"/>
+              <a:t>The system was designed around three distinct users types:</a:t>
+            </a:r>
+          </a:p>
+          <a:p>
+            <a:pPr marL="171450" indent="-171450">
+              <a:buFont typeface="Arial" panose="020B0604020202020204" pitchFamily="34" charset="0"/>
+              <a:buChar char="•"/>
+            </a:pPr>
+            <a:r>
+              <a:rPr lang="en-GB" dirty="0"/>
+              <a:t>First, we have the </a:t>
+            </a:r>
+            <a:r>
+              <a:rPr lang="en-GB" b="1" dirty="0"/>
+              <a:t>Customer</a:t>
+            </a:r>
+            <a:r>
+              <a:rPr lang="en-GB" dirty="0"/>
+              <a:t>. This is the standard end-user who search for trips, make purchases, and track their order history.</a:t>
+            </a:r>
+          </a:p>
+          <a:p>
+            <a:pPr marL="171450" indent="-171450">
+              <a:buFont typeface="Arial" panose="020B0604020202020204" pitchFamily="34" charset="0"/>
+              <a:buChar char="•"/>
+            </a:pPr>
+            <a:r>
+              <a:rPr lang="en-GB" dirty="0"/>
+              <a:t>Then we have the </a:t>
+            </a:r>
+            <a:r>
+              <a:rPr lang="en-GB" b="1" dirty="0"/>
+              <a:t>Travel Agent</a:t>
+            </a:r>
+            <a:r>
+              <a:rPr lang="en-GB" dirty="0"/>
+              <a:t>. Agents access a dedicated dashboard where they can create new travel packages, publish or archive them, and monitor incoming orders and payments.</a:t>
+            </a:r>
+          </a:p>
+          <a:p>
+            <a:pPr marL="171450" indent="-171450">
+              <a:buFont typeface="Arial" panose="020B0604020202020204" pitchFamily="34" charset="0"/>
+              <a:buChar char="•"/>
+            </a:pPr>
+            <a:r>
+              <a:rPr lang="en-GB" dirty="0"/>
+              <a:t>Finally, the </a:t>
+            </a:r>
+            <a:r>
+              <a:rPr lang="en-GB" b="1" dirty="0"/>
+              <a:t>Administrator</a:t>
+            </a:r>
+            <a:r>
+              <a:rPr lang="en-GB" dirty="0"/>
+              <a:t> inherit all the operational capabilities of the Travel Agent, but with the added authority to manage the system's users, such as creating new accounts or removing obsolete ones.</a:t>
+            </a:r>
+          </a:p>
+          <a:p>
+            <a:pPr marL="171450" indent="-171450">
+              <a:buFont typeface="Arial" panose="020B0604020202020204" pitchFamily="34" charset="0"/>
+              <a:buChar char="•"/>
+            </a:pPr>
+            <a:endParaRPr lang="en-GB" dirty="0"/>
+          </a:p>
+          <a:p>
+            <a:pPr marL="0" indent="0">
+              <a:buFont typeface="Arial" panose="020B0604020202020204" pitchFamily="34" charset="0"/>
+              <a:buNone/>
+            </a:pPr>
+            <a:r>
+              <a:rPr lang="en-GB" dirty="0"/>
+              <a:t>It’s not mentioned here, but also an unlogged guest user can visualize all the travel products without the possibility of buying them.</a:t>
+            </a:r>
+          </a:p>
+          <a:p>
+            <a:endParaRPr lang="en-IT" dirty="0"/>
+          </a:p>
+        </p:txBody>
+      </p:sp>
+      <p:sp>
+        <p:nvSpPr>
+          <p:cNvPr id="4" name="Slide Number Placeholder 3">
+            <a:extLst>
+              <a:ext uri="{FF2B5EF4-FFF2-40B4-BE49-F238E27FC236}">
+                <a16:creationId xmlns:a16="http://schemas.microsoft.com/office/drawing/2014/main" id="{13A908DB-582D-7FC3-5D3D-62F7C0B066A1}"/>
+              </a:ext>
+            </a:extLst>
+          </p:cNvPr>
+          <p:cNvSpPr>
+            <a:spLocks noGrp="1"/>
+          </p:cNvSpPr>
+          <p:nvPr>
+            <p:ph type="sldNum" sz="quarter" idx="5"/>
+          </p:nvPr>
+        </p:nvSpPr>
+        <p:spPr/>
+        <p:txBody>
+          <a:bodyPr/>
+          <a:lstStyle/>
+          <a:p>
+            <a:fld id="{A1FD4C87-9CAF-0C4E-93E7-020DE1465132}" type="slidenum">
+              <a:rPr lang="en-IT" smtClean="0"/>
+              <a:t>3</a:t>
+            </a:fld>
+            <a:endParaRPr lang="en-IT"/>
+          </a:p>
+        </p:txBody>
+      </p:sp>
+    </p:spTree>
+    <p:extLst>
+      <p:ext uri="{BB962C8B-B14F-4D97-AF65-F5344CB8AC3E}">
+        <p14:creationId xmlns:p14="http://schemas.microsoft.com/office/powerpoint/2010/main" val="2520598896"/>
+      </p:ext>
+    </p:extLst>
+  </p:cSld>
+  <p:clrMapOvr>
+    <a:masterClrMapping/>
+  </p:clrMapOvr>
+</p:notes>
+</file>
+
+<file path=ppt/notesSlides/notesSlide4.xml><?xml version="1.0" encoding="utf-8"?>
+<p:notes xmlns:a="http://schemas.openxmlformats.org/drawingml/2006/main" xmlns:r="http://schemas.openxmlformats.org/officeDocument/2006/relationships" xmlns:p="http://schemas.openxmlformats.org/presentationml/2006/main">
+  <p:cSld>
+    <p:spTree>
+      <p:nvGrpSpPr>
+        <p:cNvPr id="1" name="">
+          <a:extLst>
+            <a:ext uri="{FF2B5EF4-FFF2-40B4-BE49-F238E27FC236}">
+              <a16:creationId xmlns:a16="http://schemas.microsoft.com/office/drawing/2014/main" id="{DF7CE810-256F-2792-75E9-472DCCAB9104}"/>
+            </a:ext>
+          </a:extLst>
+        </p:cNvPr>
+        <p:cNvGrpSpPr/>
+        <p:nvPr/>
+      </p:nvGrpSpPr>
+      <p:grpSpPr>
+        <a:xfrm>
+          <a:off x="0" y="0"/>
+          <a:ext cx="0" cy="0"/>
+          <a:chOff x="0" y="0"/>
+          <a:chExt cx="0" cy="0"/>
+        </a:xfrm>
+      </p:grpSpPr>
+      <p:sp>
+        <p:nvSpPr>
+          <p:cNvPr id="2" name="Slide Image Placeholder 1">
+            <a:extLst>
+              <a:ext uri="{FF2B5EF4-FFF2-40B4-BE49-F238E27FC236}">
+                <a16:creationId xmlns:a16="http://schemas.microsoft.com/office/drawing/2014/main" id="{9CE9A4EF-2DD0-DDAA-0394-07D2F0300258}"/>
+              </a:ext>
+            </a:extLst>
+          </p:cNvPr>
+          <p:cNvSpPr>
+            <a:spLocks noGrp="1" noRot="1" noChangeAspect="1"/>
+          </p:cNvSpPr>
+          <p:nvPr>
+            <p:ph type="sldImg"/>
+          </p:nvPr>
+        </p:nvSpPr>
+        <p:spPr/>
+      </p:sp>
+      <p:sp>
+        <p:nvSpPr>
+          <p:cNvPr id="3" name="Notes Placeholder 2">
+            <a:extLst>
+              <a:ext uri="{FF2B5EF4-FFF2-40B4-BE49-F238E27FC236}">
+                <a16:creationId xmlns:a16="http://schemas.microsoft.com/office/drawing/2014/main" id="{FA8699AA-8C9F-E7B5-419F-943285758A13}"/>
+              </a:ext>
+            </a:extLst>
+          </p:cNvPr>
+          <p:cNvSpPr>
+            <a:spLocks noGrp="1"/>
+          </p:cNvSpPr>
+          <p:nvPr>
+            <p:ph type="body" idx="1"/>
+          </p:nvPr>
+        </p:nvSpPr>
+        <p:spPr/>
+        <p:txBody>
+          <a:bodyPr/>
+          <a:lstStyle/>
+          <a:p>
+            <a:endParaRPr lang="en-IT" dirty="0"/>
+          </a:p>
+        </p:txBody>
+      </p:sp>
+      <p:sp>
+        <p:nvSpPr>
+          <p:cNvPr id="4" name="Slide Number Placeholder 3">
+            <a:extLst>
+              <a:ext uri="{FF2B5EF4-FFF2-40B4-BE49-F238E27FC236}">
+                <a16:creationId xmlns:a16="http://schemas.microsoft.com/office/drawing/2014/main" id="{47D3A6C2-0E5A-42D6-4F65-DBCC4D43ED98}"/>
+              </a:ext>
+            </a:extLst>
+          </p:cNvPr>
+          <p:cNvSpPr>
+            <a:spLocks noGrp="1"/>
+          </p:cNvSpPr>
+          <p:nvPr>
+            <p:ph type="sldNum" sz="quarter" idx="5"/>
+          </p:nvPr>
+        </p:nvSpPr>
+        <p:spPr/>
+        <p:txBody>
+          <a:bodyPr/>
+          <a:lstStyle/>
+          <a:p>
+            <a:fld id="{A1FD4C87-9CAF-0C4E-93E7-020DE1465132}" type="slidenum">
+              <a:rPr lang="en-IT" smtClean="0"/>
+              <a:t>4</a:t>
+            </a:fld>
+            <a:endParaRPr lang="en-IT"/>
+          </a:p>
+        </p:txBody>
+      </p:sp>
+    </p:spTree>
+    <p:extLst>
+      <p:ext uri="{BB962C8B-B14F-4D97-AF65-F5344CB8AC3E}">
+        <p14:creationId xmlns:p14="http://schemas.microsoft.com/office/powerpoint/2010/main" val="1908778012"/>
+      </p:ext>
+    </p:extLst>
+  </p:cSld>
+  <p:clrMapOvr>
+    <a:masterClrMapping/>
+  </p:clrMapOvr>
+</p:notes>
+</file>
+
+<file path=ppt/notesSlides/notesSlide5.xml><?xml version="1.0" encoding="utf-8"?>
+<p:notes xmlns:a="http://schemas.openxmlformats.org/drawingml/2006/main" xmlns:r="http://schemas.openxmlformats.org/officeDocument/2006/relationships" xmlns:p="http://schemas.openxmlformats.org/presentationml/2006/main">
+  <p:cSld>
+    <p:spTree>
+      <p:nvGrpSpPr>
+        <p:cNvPr id="1" name="">
+          <a:extLst>
+            <a:ext uri="{FF2B5EF4-FFF2-40B4-BE49-F238E27FC236}">
+              <a16:creationId xmlns:a16="http://schemas.microsoft.com/office/drawing/2014/main" id="{21734478-D0B3-B15A-CFF1-F5D363CB51A5}"/>
+            </a:ext>
+          </a:extLst>
+        </p:cNvPr>
+        <p:cNvGrpSpPr/>
+        <p:nvPr/>
+      </p:nvGrpSpPr>
+      <p:grpSpPr>
+        <a:xfrm>
+          <a:off x="0" y="0"/>
+          <a:ext cx="0" cy="0"/>
+          <a:chOff x="0" y="0"/>
+          <a:chExt cx="0" cy="0"/>
+        </a:xfrm>
+      </p:grpSpPr>
+      <p:sp>
+        <p:nvSpPr>
+          <p:cNvPr id="2" name="Slide Image Placeholder 1">
+            <a:extLst>
+              <a:ext uri="{FF2B5EF4-FFF2-40B4-BE49-F238E27FC236}">
+                <a16:creationId xmlns:a16="http://schemas.microsoft.com/office/drawing/2014/main" id="{EE64A034-2455-91AD-969F-C470EF49C26C}"/>
+              </a:ext>
+            </a:extLst>
+          </p:cNvPr>
+          <p:cNvSpPr>
+            <a:spLocks noGrp="1" noRot="1" noChangeAspect="1"/>
+          </p:cNvSpPr>
+          <p:nvPr>
+            <p:ph type="sldImg"/>
+          </p:nvPr>
+        </p:nvSpPr>
+        <p:spPr/>
+      </p:sp>
+      <p:sp>
+        <p:nvSpPr>
+          <p:cNvPr id="3" name="Notes Placeholder 2">
+            <a:extLst>
+              <a:ext uri="{FF2B5EF4-FFF2-40B4-BE49-F238E27FC236}">
+                <a16:creationId xmlns:a16="http://schemas.microsoft.com/office/drawing/2014/main" id="{8EDA350E-5926-071A-57E1-7333DD6C1D92}"/>
+              </a:ext>
+            </a:extLst>
+          </p:cNvPr>
+          <p:cNvSpPr>
+            <a:spLocks noGrp="1"/>
+          </p:cNvSpPr>
+          <p:nvPr>
+            <p:ph type="body" idx="1"/>
+          </p:nvPr>
+        </p:nvSpPr>
+        <p:spPr/>
+        <p:txBody>
+          <a:bodyPr/>
+          <a:lstStyle/>
+          <a:p>
+            <a:endParaRPr lang="en-IT" dirty="0"/>
+          </a:p>
+        </p:txBody>
+      </p:sp>
+      <p:sp>
+        <p:nvSpPr>
+          <p:cNvPr id="4" name="Slide Number Placeholder 3">
+            <a:extLst>
+              <a:ext uri="{FF2B5EF4-FFF2-40B4-BE49-F238E27FC236}">
+                <a16:creationId xmlns:a16="http://schemas.microsoft.com/office/drawing/2014/main" id="{F16C02A5-3A26-4A1F-1B45-05A59F320142}"/>
+              </a:ext>
+            </a:extLst>
+          </p:cNvPr>
+          <p:cNvSpPr>
+            <a:spLocks noGrp="1"/>
+          </p:cNvSpPr>
+          <p:nvPr>
+            <p:ph type="sldNum" sz="quarter" idx="5"/>
+          </p:nvPr>
+        </p:nvSpPr>
+        <p:spPr/>
+        <p:txBody>
+          <a:bodyPr/>
+          <a:lstStyle/>
+          <a:p>
+            <a:fld id="{A1FD4C87-9CAF-0C4E-93E7-020DE1465132}" type="slidenum">
+              <a:rPr lang="en-IT" smtClean="0"/>
+              <a:t>5</a:t>
+            </a:fld>
+            <a:endParaRPr lang="en-IT"/>
+          </a:p>
+        </p:txBody>
+      </p:sp>
+    </p:spTree>
+    <p:extLst>
+      <p:ext uri="{BB962C8B-B14F-4D97-AF65-F5344CB8AC3E}">
+        <p14:creationId xmlns:p14="http://schemas.microsoft.com/office/powerpoint/2010/main" val="2369379671"/>
+      </p:ext>
+    </p:extLst>
+  </p:cSld>
+  <p:clrMapOvr>
+    <a:masterClrMapping/>
+  </p:clrMapOvr>
+</p:notes>
+</file>
+
+<file path=ppt/notesSlides/notesSlide6.xml><?xml version="1.0" encoding="utf-8"?>
+<p:notes xmlns:a="http://schemas.openxmlformats.org/drawingml/2006/main" xmlns:r="http://schemas.openxmlformats.org/officeDocument/2006/relationships" xmlns:p="http://schemas.openxmlformats.org/presentationml/2006/main">
+  <p:cSld>
+    <p:spTree>
+      <p:nvGrpSpPr>
+        <p:cNvPr id="1" name="">
+          <a:extLst>
+            <a:ext uri="{FF2B5EF4-FFF2-40B4-BE49-F238E27FC236}">
+              <a16:creationId xmlns:a16="http://schemas.microsoft.com/office/drawing/2014/main" id="{0B204521-AB50-14A4-E20D-8E9E2E01F6F6}"/>
+            </a:ext>
+          </a:extLst>
+        </p:cNvPr>
+        <p:cNvGrpSpPr/>
+        <p:nvPr/>
+      </p:nvGrpSpPr>
+      <p:grpSpPr>
+        <a:xfrm>
+          <a:off x="0" y="0"/>
+          <a:ext cx="0" cy="0"/>
+          <a:chOff x="0" y="0"/>
+          <a:chExt cx="0" cy="0"/>
+        </a:xfrm>
+      </p:grpSpPr>
+      <p:sp>
+        <p:nvSpPr>
+          <p:cNvPr id="2" name="Slide Image Placeholder 1">
+            <a:extLst>
+              <a:ext uri="{FF2B5EF4-FFF2-40B4-BE49-F238E27FC236}">
+                <a16:creationId xmlns:a16="http://schemas.microsoft.com/office/drawing/2014/main" id="{C2A262E8-1B92-FDD8-3853-1808D07BA5AA}"/>
+              </a:ext>
+            </a:extLst>
+          </p:cNvPr>
+          <p:cNvSpPr>
+            <a:spLocks noGrp="1" noRot="1" noChangeAspect="1"/>
+          </p:cNvSpPr>
+          <p:nvPr>
+            <p:ph type="sldImg"/>
+          </p:nvPr>
+        </p:nvSpPr>
+        <p:spPr/>
+      </p:sp>
+      <p:sp>
+        <p:nvSpPr>
+          <p:cNvPr id="3" name="Notes Placeholder 2">
+            <a:extLst>
+              <a:ext uri="{FF2B5EF4-FFF2-40B4-BE49-F238E27FC236}">
+                <a16:creationId xmlns:a16="http://schemas.microsoft.com/office/drawing/2014/main" id="{D783C3E1-9705-A899-EC10-A4E4B03D392A}"/>
+              </a:ext>
+            </a:extLst>
+          </p:cNvPr>
+          <p:cNvSpPr>
+            <a:spLocks noGrp="1"/>
+          </p:cNvSpPr>
+          <p:nvPr>
+            <p:ph type="body" idx="1"/>
+          </p:nvPr>
+        </p:nvSpPr>
+        <p:spPr/>
+        <p:txBody>
+          <a:bodyPr/>
+          <a:lstStyle/>
+          <a:p>
+            <a:endParaRPr lang="en-IT" dirty="0"/>
+          </a:p>
+        </p:txBody>
+      </p:sp>
+      <p:sp>
+        <p:nvSpPr>
+          <p:cNvPr id="4" name="Slide Number Placeholder 3">
+            <a:extLst>
+              <a:ext uri="{FF2B5EF4-FFF2-40B4-BE49-F238E27FC236}">
+                <a16:creationId xmlns:a16="http://schemas.microsoft.com/office/drawing/2014/main" id="{F358AC34-B21D-8B75-FF1D-3A508F7C000D}"/>
+              </a:ext>
+            </a:extLst>
+          </p:cNvPr>
+          <p:cNvSpPr>
+            <a:spLocks noGrp="1"/>
+          </p:cNvSpPr>
+          <p:nvPr>
+            <p:ph type="sldNum" sz="quarter" idx="5"/>
+          </p:nvPr>
+        </p:nvSpPr>
+        <p:spPr/>
+        <p:txBody>
+          <a:bodyPr/>
+          <a:lstStyle/>
+          <a:p>
+            <a:fld id="{A1FD4C87-9CAF-0C4E-93E7-020DE1465132}" type="slidenum">
+              <a:rPr lang="en-IT" smtClean="0"/>
+              <a:t>6</a:t>
+            </a:fld>
+            <a:endParaRPr lang="en-IT"/>
+          </a:p>
+        </p:txBody>
+      </p:sp>
+    </p:spTree>
+    <p:extLst>
+      <p:ext uri="{BB962C8B-B14F-4D97-AF65-F5344CB8AC3E}">
+        <p14:creationId xmlns:p14="http://schemas.microsoft.com/office/powerpoint/2010/main" val="3676294636"/>
+      </p:ext>
+    </p:extLst>
+  </p:cSld>
+  <p:clrMapOvr>
+    <a:masterClrMapping/>
+  </p:clrMapOvr>
+</p:notes>
+</file>
+
+<file path=ppt/notesSlides/notesSlide7.xml><?xml version="1.0" encoding="utf-8"?>
+<p:notes xmlns:a="http://schemas.openxmlformats.org/drawingml/2006/main" xmlns:r="http://schemas.openxmlformats.org/officeDocument/2006/relationships" xmlns:p="http://schemas.openxmlformats.org/presentationml/2006/main">
+  <p:cSld>
+    <p:spTree>
+      <p:nvGrpSpPr>
+        <p:cNvPr id="1" name="">
+          <a:extLst>
+            <a:ext uri="{FF2B5EF4-FFF2-40B4-BE49-F238E27FC236}">
+              <a16:creationId xmlns:a16="http://schemas.microsoft.com/office/drawing/2014/main" id="{790FC870-CCC2-8042-5705-A35AE093F379}"/>
+            </a:ext>
+          </a:extLst>
+        </p:cNvPr>
+        <p:cNvGrpSpPr/>
+        <p:nvPr/>
+      </p:nvGrpSpPr>
+      <p:grpSpPr>
+        <a:xfrm>
+          <a:off x="0" y="0"/>
+          <a:ext cx="0" cy="0"/>
+          <a:chOff x="0" y="0"/>
+          <a:chExt cx="0" cy="0"/>
+        </a:xfrm>
+      </p:grpSpPr>
+      <p:sp>
+        <p:nvSpPr>
+          <p:cNvPr id="2" name="Slide Image Placeholder 1">
+            <a:extLst>
+              <a:ext uri="{FF2B5EF4-FFF2-40B4-BE49-F238E27FC236}">
+                <a16:creationId xmlns:a16="http://schemas.microsoft.com/office/drawing/2014/main" id="{E838542E-4482-3463-86CB-BECD934C6CD5}"/>
+              </a:ext>
+            </a:extLst>
+          </p:cNvPr>
+          <p:cNvSpPr>
+            <a:spLocks noGrp="1" noRot="1" noChangeAspect="1"/>
+          </p:cNvSpPr>
+          <p:nvPr>
+            <p:ph type="sldImg"/>
+          </p:nvPr>
+        </p:nvSpPr>
+        <p:spPr/>
+      </p:sp>
+      <p:sp>
+        <p:nvSpPr>
+          <p:cNvPr id="3" name="Notes Placeholder 2">
+            <a:extLst>
+              <a:ext uri="{FF2B5EF4-FFF2-40B4-BE49-F238E27FC236}">
+                <a16:creationId xmlns:a16="http://schemas.microsoft.com/office/drawing/2014/main" id="{9A9B00D2-5BCC-9A21-8C65-0A9C6423F43B}"/>
+              </a:ext>
+            </a:extLst>
+          </p:cNvPr>
+          <p:cNvSpPr>
+            <a:spLocks noGrp="1"/>
+          </p:cNvSpPr>
+          <p:nvPr>
+            <p:ph type="body" idx="1"/>
+          </p:nvPr>
+        </p:nvSpPr>
+        <p:spPr/>
+        <p:txBody>
+          <a:bodyPr/>
+          <a:lstStyle/>
+          <a:p>
+            <a:r>
+              <a:rPr lang="en-IT" dirty="0"/>
+              <a:t>Here a quick overview about the technologies used to create Smart Travel.</a:t>
+            </a:r>
+            <a:br>
+              <a:rPr lang="en-IT" dirty="0"/>
+            </a:br>
+            <a:r>
+              <a:rPr lang="en-IT" dirty="0"/>
+              <a:t>The frontend is made with the Angular frameowork and PrimeNG as UI components library.</a:t>
+            </a:r>
+          </a:p>
+          <a:p>
+            <a:r>
+              <a:rPr lang="en-GB" dirty="0"/>
+              <a:t>For the backend, I used a combination of Spring Boot and </a:t>
+            </a:r>
+            <a:r>
+              <a:rPr lang="en-GB" dirty="0" err="1"/>
+              <a:t>Quarkus</a:t>
+            </a:r>
+            <a:r>
+              <a:rPr lang="en-GB" dirty="0"/>
+              <a:t> Java frameworks to build the microservices, with each service relying on its own isolated MongoDB instance for data persistence.</a:t>
+            </a:r>
+          </a:p>
+          <a:p>
+            <a:r>
+              <a:rPr lang="en-GB" dirty="0"/>
+              <a:t>A key part of the system is the </a:t>
+            </a:r>
+            <a:r>
+              <a:rPr lang="en-GB" b="1" dirty="0"/>
+              <a:t>Event Handling</a:t>
+            </a:r>
+            <a:r>
+              <a:rPr lang="en-GB" dirty="0"/>
+              <a:t> layer, where I leveraged </a:t>
+            </a:r>
+            <a:r>
+              <a:rPr lang="en-GB" dirty="0" err="1"/>
+              <a:t>Debezium</a:t>
+            </a:r>
+            <a:r>
+              <a:rPr lang="en-GB" dirty="0"/>
+              <a:t> and RabbitMQ to manage asynchronous communication and guarantee data consistency across the distributed services.</a:t>
+            </a:r>
+          </a:p>
+          <a:p>
+            <a:r>
+              <a:rPr lang="en-GB" dirty="0"/>
+              <a:t>Finally, the entire application lifecycle – from code to production - was fully automated using </a:t>
+            </a:r>
+            <a:r>
+              <a:rPr lang="en-GB" b="1" dirty="0"/>
+              <a:t>DevOps</a:t>
+            </a:r>
+            <a:r>
+              <a:rPr lang="en-GB" dirty="0"/>
+              <a:t> tools like Jenkins to create CI/CD pipelines and OKD as cluster to orchestrate running containers.</a:t>
+            </a:r>
+            <a:endParaRPr lang="en-IT" dirty="0"/>
+          </a:p>
+        </p:txBody>
+      </p:sp>
+      <p:sp>
+        <p:nvSpPr>
+          <p:cNvPr id="4" name="Slide Number Placeholder 3">
+            <a:extLst>
+              <a:ext uri="{FF2B5EF4-FFF2-40B4-BE49-F238E27FC236}">
+                <a16:creationId xmlns:a16="http://schemas.microsoft.com/office/drawing/2014/main" id="{D8227DD4-1996-A242-88AD-759176E23A35}"/>
+              </a:ext>
+            </a:extLst>
+          </p:cNvPr>
+          <p:cNvSpPr>
+            <a:spLocks noGrp="1"/>
+          </p:cNvSpPr>
+          <p:nvPr>
+            <p:ph type="sldNum" sz="quarter" idx="5"/>
+          </p:nvPr>
+        </p:nvSpPr>
+        <p:spPr/>
+        <p:txBody>
+          <a:bodyPr/>
+          <a:lstStyle/>
+          <a:p>
+            <a:fld id="{A1FD4C87-9CAF-0C4E-93E7-020DE1465132}" type="slidenum">
+              <a:rPr lang="en-IT" smtClean="0"/>
+              <a:t>7</a:t>
+            </a:fld>
+            <a:endParaRPr lang="en-IT"/>
+          </a:p>
+        </p:txBody>
+      </p:sp>
+    </p:spTree>
+    <p:extLst>
+      <p:ext uri="{BB962C8B-B14F-4D97-AF65-F5344CB8AC3E}">
+        <p14:creationId xmlns:p14="http://schemas.microsoft.com/office/powerpoint/2010/main" val="880904337"/>
+      </p:ext>
+    </p:extLst>
+  </p:cSld>
+  <p:clrMapOvr>
+    <a:masterClrMapping/>
+  </p:clrMapOvr>
+</p:notes>
+</file>
+
+<file path=ppt/notesSlides/notesSlide8.xml><?xml version="1.0" encoding="utf-8"?>
+<p:notes xmlns:a="http://schemas.openxmlformats.org/drawingml/2006/main" xmlns:r="http://schemas.openxmlformats.org/officeDocument/2006/relationships" xmlns:p="http://schemas.openxmlformats.org/presentationml/2006/main">
+  <p:cSld>
+    <p:spTree>
+      <p:nvGrpSpPr>
+        <p:cNvPr id="1" name=""/>
+        <p:cNvGrpSpPr/>
+        <p:nvPr/>
+      </p:nvGrpSpPr>
+      <p:grpSpPr>
+        <a:xfrm>
+          <a:off x="0" y="0"/>
+          <a:ext cx="0" cy="0"/>
+          <a:chOff x="0" y="0"/>
+          <a:chExt cx="0" cy="0"/>
+        </a:xfrm>
+      </p:grpSpPr>
+      <p:sp>
+        <p:nvSpPr>
+          <p:cNvPr id="2" name="Slide Image Placeholder 1"/>
+          <p:cNvSpPr>
+            <a:spLocks noGrp="1" noRot="1" noChangeAspect="1"/>
+          </p:cNvSpPr>
+          <p:nvPr>
+            <p:ph type="sldImg"/>
+          </p:nvPr>
+        </p:nvSpPr>
+        <p:spPr/>
+      </p:sp>
+      <p:sp>
+        <p:nvSpPr>
+          <p:cNvPr id="3" name="Notes Placeholder 2"/>
+          <p:cNvSpPr>
+            <a:spLocks noGrp="1"/>
+          </p:cNvSpPr>
+          <p:nvPr>
+            <p:ph type="body" idx="1"/>
+          </p:nvPr>
+        </p:nvSpPr>
+        <p:spPr/>
+        <p:txBody>
+          <a:bodyPr/>
+          <a:lstStyle/>
+          <a:p>
+            <a:r>
               <a:rPr lang="en-GB" sz="1600" dirty="0"/>
-              <a:t>Before diving into the architecture of Smart Travel, it is important to understand the context of this project and why I chose a cloud-native approach.</a:t>
+              <a:t>Before diving into the architecture of the platform, it is important to understand why I chose a cloud-native approach over a monolithic architecture.</a:t>
             </a:r>
+          </a:p>
+          <a:p>
+            <a:r>
+              <a:rPr lang="en-GB" sz="1600" dirty="0"/>
+              <a:t>Cloud-native means designing the application specifically to leverage cloud infrastructure. </a:t>
+            </a:r>
+          </a:p>
+          <a:p>
+            <a:endParaRPr lang="en-GB" sz="1600" dirty="0"/>
           </a:p>
           <a:p>
             <a:r>
@@ -647,16 +1966,12 @@
             </a:r>
           </a:p>
           <a:p>
-            <a:pPr marL="0" indent="0">
-              <a:buFont typeface="Arial" panose="020B0604020202020204" pitchFamily="34" charset="0"/>
-              <a:buNone/>
-            </a:pPr>
             <a:endParaRPr lang="en-GB" sz="3600" b="1" dirty="0"/>
           </a:p>
           <a:p>
             <a:r>
               <a:rPr lang="en-GB" dirty="0"/>
-              <a:t>Cloud-native means designing the application specifically to leverage cloud infrastructure. To achieve it I did the following:</a:t>
+              <a:t>To achieve it I did the following:</a:t>
             </a:r>
             <a:endParaRPr lang="en-GB" b="1" dirty="0"/>
           </a:p>
@@ -671,7 +1986,7 @@
             </a:r>
             <a:r>
               <a:rPr lang="en-GB" dirty="0"/>
-              <a:t> I packaged every microservice into a Docker image. This guarantees that the code runs exactly the same on any kind of execution environment.</a:t>
+              <a:t> I packaged every microservice into a Docker image. This guarantees that the code runs the same on any kind of execution environment.</a:t>
             </a:r>
           </a:p>
           <a:p>
@@ -685,7 +2000,7 @@
             </a:r>
             <a:r>
               <a:rPr lang="en-GB" dirty="0"/>
-              <a:t> The microservices do not store user sessions in memory, instead they use stateless JSON Web Tokens validated by the BFF. By doing this, OKD can safely destroy or duplicate any Pod at any time without logging the user out or losing data.</a:t>
+              <a:t> The microservices do not store user sessions in memory, instead they use stateless JSON Web Tokens validated by the BFF. By doing this, we can safely destroy or duplicate any Pod/container at any time without losing data.</a:t>
             </a:r>
           </a:p>
           <a:p>
@@ -745,7 +2060,7 @@
           <a:p>
             <a:fld id="{A1FD4C87-9CAF-0C4E-93E7-020DE1465132}" type="slidenum">
               <a:rPr lang="en-IT" smtClean="0"/>
-              <a:t>2</a:t>
+              <a:t>8</a:t>
             </a:fld>
             <a:endParaRPr lang="en-IT"/>
           </a:p>
@@ -764,7 +2079,7 @@
 </p:notes>
 </file>
 
-<file path=ppt/notesSlides/notesSlide2.xml><?xml version="1.0" encoding="utf-8"?>
+<file path=ppt/notesSlides/notesSlide9.xml><?xml version="1.0" encoding="utf-8"?>
 <p:notes xmlns:a="http://schemas.openxmlformats.org/drawingml/2006/main" xmlns:r="http://schemas.openxmlformats.org/officeDocument/2006/relationships" xmlns:p="http://schemas.openxmlformats.org/presentationml/2006/main">
   <p:cSld>
     <p:spTree>
@@ -772,7 +2087,7 @@
         <p:cNvPr id="1" name="">
           <a:extLst>
             <a:ext uri="{FF2B5EF4-FFF2-40B4-BE49-F238E27FC236}">
-              <a16:creationId xmlns:a16="http://schemas.microsoft.com/office/drawing/2014/main" id="{2BEC29F4-FD1D-0D0B-AAD1-D47CA0C1D828}"/>
+              <a16:creationId xmlns:a16="http://schemas.microsoft.com/office/drawing/2014/main" id="{37632C36-C06D-746B-D9B1-89A5D179E760}"/>
             </a:ext>
           </a:extLst>
         </p:cNvPr>
@@ -792,7 +2107,7 @@
           <p:cNvPr id="2" name="Slide Image Placeholder 1">
             <a:extLst>
               <a:ext uri="{FF2B5EF4-FFF2-40B4-BE49-F238E27FC236}">
-                <a16:creationId xmlns:a16="http://schemas.microsoft.com/office/drawing/2014/main" id="{AE98789B-8E0C-6FE2-737F-9961051AE6A2}"/>
+                <a16:creationId xmlns:a16="http://schemas.microsoft.com/office/drawing/2014/main" id="{55B58AF9-3557-A5DF-7F25-208EB130F1E3}"/>
               </a:ext>
             </a:extLst>
           </p:cNvPr>
@@ -810,7 +2125,7 @@
           <p:cNvPr id="3" name="Notes Placeholder 2">
             <a:extLst>
               <a:ext uri="{FF2B5EF4-FFF2-40B4-BE49-F238E27FC236}">
-                <a16:creationId xmlns:a16="http://schemas.microsoft.com/office/drawing/2014/main" id="{DCF20990-BE5E-2CC3-9C3D-3B4F336259F3}"/>
+                <a16:creationId xmlns:a16="http://schemas.microsoft.com/office/drawing/2014/main" id="{987B57C0-D69D-2415-DA33-432D5E505448}"/>
               </a:ext>
             </a:extLst>
           </p:cNvPr>
@@ -826,6 +2141,299 @@
           <a:bodyPr/>
           <a:lstStyle/>
           <a:p>
+            <a:pPr defTabSz="914400">
+              <a:lnSpc>
+                <a:spcPct val="150000"/>
+              </a:lnSpc>
+              <a:tabLst>
+                <a:tab pos="0" algn="l"/>
+              </a:tabLst>
+            </a:pPr>
+            <a:r>
+              <a:rPr lang="en-US" sz="1400" b="1" dirty="0">
+                <a:solidFill>
+                  <a:schemeClr val="dk1"/>
+                </a:solidFill>
+                <a:latin typeface="Manrope"/>
+              </a:rPr>
+              <a:t>Imperative model</a:t>
+            </a:r>
+            <a:endParaRPr lang="en-US" sz="1400" dirty="0">
+              <a:solidFill>
+                <a:schemeClr val="dk1"/>
+              </a:solidFill>
+              <a:latin typeface="Manrope"/>
+            </a:endParaRPr>
+          </a:p>
+          <a:p>
+            <a:pPr marL="285750" indent="-285750">
+              <a:lnSpc>
+                <a:spcPct val="150000"/>
+              </a:lnSpc>
+              <a:buFont typeface="Arial" panose="020B0604020202020204" pitchFamily="34" charset="0"/>
+              <a:buChar char="•"/>
+              <a:tabLst>
+                <a:tab pos="0" algn="l"/>
+              </a:tabLst>
+            </a:pPr>
+            <a:r>
+              <a:rPr lang="en-US" sz="1200" dirty="0">
+                <a:solidFill>
+                  <a:schemeClr val="dk1"/>
+                </a:solidFill>
+                <a:latin typeface="Manrope"/>
+              </a:rPr>
+              <a:t>Each request is handled by a dedicated thread, which remains occupied until processing is complete (</a:t>
+            </a:r>
+            <a:r>
+              <a:rPr lang="en-US" sz="1200" b="1" dirty="0">
+                <a:solidFill>
+                  <a:schemeClr val="dk1"/>
+                </a:solidFill>
+                <a:latin typeface="Manrope"/>
+              </a:rPr>
+              <a:t>worker thread</a:t>
+            </a:r>
+            <a:r>
+              <a:rPr lang="en-US" sz="1200" dirty="0">
+                <a:solidFill>
+                  <a:schemeClr val="dk1"/>
+                </a:solidFill>
+                <a:latin typeface="Manrope"/>
+              </a:rPr>
+              <a:t>).</a:t>
+            </a:r>
+          </a:p>
+          <a:p>
+            <a:pPr marL="285750" indent="-285750">
+              <a:lnSpc>
+                <a:spcPct val="150000"/>
+              </a:lnSpc>
+              <a:buFont typeface="Arial" panose="020B0604020202020204" pitchFamily="34" charset="0"/>
+              <a:buChar char="•"/>
+              <a:tabLst>
+                <a:tab pos="0" algn="l"/>
+              </a:tabLst>
+            </a:pPr>
+            <a:r>
+              <a:rPr lang="en-US" sz="1200" u="sng" dirty="0">
+                <a:solidFill>
+                  <a:schemeClr val="dk1"/>
+                </a:solidFill>
+                <a:latin typeface="Manrope"/>
+              </a:rPr>
+              <a:t>Blocking I/O operations</a:t>
+            </a:r>
+            <a:r>
+              <a:rPr lang="en-US" sz="1200" dirty="0">
+                <a:solidFill>
+                  <a:schemeClr val="dk1"/>
+                </a:solidFill>
+                <a:latin typeface="Manrope"/>
+              </a:rPr>
+              <a:t>: the thread remains idle while waiting for a response from a database or external service.</a:t>
+            </a:r>
+          </a:p>
+          <a:p>
+            <a:pPr marL="285750" indent="-285750">
+              <a:lnSpc>
+                <a:spcPct val="150000"/>
+              </a:lnSpc>
+              <a:buFont typeface="Arial" panose="020B0604020202020204" pitchFamily="34" charset="0"/>
+              <a:buChar char="•"/>
+              <a:tabLst>
+                <a:tab pos="0" algn="l"/>
+              </a:tabLst>
+            </a:pPr>
+            <a:r>
+              <a:rPr lang="en-US" sz="1200" dirty="0">
+                <a:solidFill>
+                  <a:schemeClr val="dk1"/>
+                </a:solidFill>
+                <a:latin typeface="Manrope"/>
+              </a:rPr>
+              <a:t>Limited scalability: more requests = more threads = high memory and CPU consumption.</a:t>
+            </a:r>
+          </a:p>
+          <a:p>
+            <a:pPr marL="285750" indent="-285750">
+              <a:lnSpc>
+                <a:spcPct val="150000"/>
+              </a:lnSpc>
+              <a:buFont typeface="Arial" panose="020B0604020202020204" pitchFamily="34" charset="0"/>
+              <a:buChar char="•"/>
+              <a:tabLst>
+                <a:tab pos="0" algn="l"/>
+              </a:tabLst>
+            </a:pPr>
+            <a:r>
+              <a:rPr lang="en-US" sz="1200" dirty="0">
+                <a:solidFill>
+                  <a:schemeClr val="dk1"/>
+                </a:solidFill>
+                <a:latin typeface="Manrope"/>
+              </a:rPr>
+              <a:t>Simpler programming model and sequential code.</a:t>
+            </a:r>
+          </a:p>
+          <a:p>
+            <a:pPr marL="0" indent="0">
+              <a:lnSpc>
+                <a:spcPct val="150000"/>
+              </a:lnSpc>
+              <a:buFont typeface="Arial" panose="020B0604020202020204" pitchFamily="34" charset="0"/>
+              <a:buNone/>
+              <a:tabLst>
+                <a:tab pos="0" algn="l"/>
+              </a:tabLst>
+            </a:pPr>
+            <a:endParaRPr lang="en-US" sz="1200" dirty="0">
+              <a:solidFill>
+                <a:schemeClr val="dk1"/>
+              </a:solidFill>
+              <a:latin typeface="Manrope"/>
+            </a:endParaRPr>
+          </a:p>
+          <a:p>
+            <a:pPr>
+              <a:lnSpc>
+                <a:spcPct val="150000"/>
+              </a:lnSpc>
+              <a:tabLst>
+                <a:tab pos="0" algn="l"/>
+              </a:tabLst>
+            </a:pPr>
+            <a:r>
+              <a:rPr lang="en-US" sz="1400" b="1" dirty="0">
+                <a:solidFill>
+                  <a:schemeClr val="dk1"/>
+                </a:solidFill>
+                <a:latin typeface="Manrope"/>
+              </a:rPr>
+              <a:t>Reactive model</a:t>
+            </a:r>
+            <a:endParaRPr lang="en-US" sz="1400" dirty="0">
+              <a:solidFill>
+                <a:schemeClr val="dk1"/>
+              </a:solidFill>
+              <a:latin typeface="Manrope"/>
+            </a:endParaRPr>
+          </a:p>
+          <a:p>
+            <a:pPr marL="285750" indent="-285750">
+              <a:lnSpc>
+                <a:spcPct val="150000"/>
+              </a:lnSpc>
+              <a:buFont typeface="Arial" panose="020B0604020202020204" pitchFamily="34" charset="0"/>
+              <a:buChar char="•"/>
+              <a:tabLst>
+                <a:tab pos="0" algn="l"/>
+              </a:tabLst>
+            </a:pPr>
+            <a:r>
+              <a:rPr lang="en-US" sz="1200" dirty="0">
+                <a:solidFill>
+                  <a:schemeClr val="dk1"/>
+                </a:solidFill>
+                <a:latin typeface="Manrope"/>
+              </a:rPr>
+              <a:t>A small number of threads can handle multiple concurrent requests (</a:t>
+            </a:r>
+            <a:r>
+              <a:rPr lang="en-US" sz="1200" b="1" dirty="0">
+                <a:solidFill>
+                  <a:schemeClr val="dk1"/>
+                </a:solidFill>
+                <a:latin typeface="Manrope"/>
+              </a:rPr>
+              <a:t>I/O thread</a:t>
+            </a:r>
+            <a:r>
+              <a:rPr lang="en-US" sz="1200" dirty="0">
+                <a:solidFill>
+                  <a:schemeClr val="dk1"/>
+                </a:solidFill>
+                <a:latin typeface="Manrope"/>
+              </a:rPr>
+              <a:t>).</a:t>
+            </a:r>
+          </a:p>
+          <a:p>
+            <a:pPr marL="285750" indent="-285750">
+              <a:lnSpc>
+                <a:spcPct val="150000"/>
+              </a:lnSpc>
+              <a:buFont typeface="Arial" panose="020B0604020202020204" pitchFamily="34" charset="0"/>
+              <a:buChar char="•"/>
+              <a:tabLst>
+                <a:tab pos="0" algn="l"/>
+              </a:tabLst>
+            </a:pPr>
+            <a:r>
+              <a:rPr lang="en-US" sz="1200" u="sng" dirty="0">
+                <a:solidFill>
+                  <a:schemeClr val="dk1"/>
+                </a:solidFill>
+                <a:latin typeface="Manrope"/>
+              </a:rPr>
+              <a:t>Non-blocking I/O operations</a:t>
+            </a:r>
+            <a:r>
+              <a:rPr lang="en-US" sz="1200" dirty="0">
+                <a:solidFill>
+                  <a:schemeClr val="dk1"/>
+                </a:solidFill>
+                <a:latin typeface="Manrope"/>
+              </a:rPr>
+              <a:t>: the thread is released while waiting for the response, allowing it to process other tasks.</a:t>
+            </a:r>
+          </a:p>
+          <a:p>
+            <a:pPr marL="285750" indent="-285750">
+              <a:lnSpc>
+                <a:spcPct val="150000"/>
+              </a:lnSpc>
+              <a:buFont typeface="Arial" panose="020B0604020202020204" pitchFamily="34" charset="0"/>
+              <a:buChar char="•"/>
+              <a:tabLst>
+                <a:tab pos="0" algn="l"/>
+              </a:tabLst>
+            </a:pPr>
+            <a:r>
+              <a:rPr lang="en-US" sz="1200" dirty="0">
+                <a:solidFill>
+                  <a:schemeClr val="dk1"/>
+                </a:solidFill>
+                <a:latin typeface="Manrope"/>
+              </a:rPr>
+              <a:t>High concurrency: the same thread can handle multiple requests in parallel, drastically reducing memory and CPU impact.</a:t>
+            </a:r>
+          </a:p>
+          <a:p>
+            <a:pPr marL="285750" indent="-285750">
+              <a:lnSpc>
+                <a:spcPct val="150000"/>
+              </a:lnSpc>
+              <a:buFont typeface="Arial" panose="020B0604020202020204" pitchFamily="34" charset="0"/>
+              <a:buChar char="•"/>
+              <a:tabLst>
+                <a:tab pos="0" algn="l"/>
+              </a:tabLst>
+            </a:pPr>
+            <a:r>
+              <a:rPr lang="en-US" sz="1200" dirty="0">
+                <a:solidFill>
+                  <a:schemeClr val="dk1"/>
+                </a:solidFill>
+                <a:latin typeface="Manrope"/>
+              </a:rPr>
+              <a:t>Programming is based on continuations (callbacks, reactive streams, reactive libraries).</a:t>
+            </a:r>
+          </a:p>
+          <a:p>
+            <a:endParaRPr lang="en-IT" dirty="0"/>
+          </a:p>
+          <a:p>
             <a:endParaRPr lang="en-IT" dirty="0"/>
           </a:p>
         </p:txBody>
@@ -835,7 +2443,7 @@
           <p:cNvPr id="4" name="Slide Number Placeholder 3">
             <a:extLst>
               <a:ext uri="{FF2B5EF4-FFF2-40B4-BE49-F238E27FC236}">
-                <a16:creationId xmlns:a16="http://schemas.microsoft.com/office/drawing/2014/main" id="{DB9F2F12-B31B-A585-28C8-2AF6B70DE66F}"/>
+                <a16:creationId xmlns:a16="http://schemas.microsoft.com/office/drawing/2014/main" id="{85EC93F4-9CC5-4366-3DB6-299F90BE3DA6}"/>
               </a:ext>
             </a:extLst>
           </p:cNvPr>
@@ -853,7 +2461,7 @@
           <a:p>
             <a:fld id="{A1FD4C87-9CAF-0C4E-93E7-020DE1465132}" type="slidenum">
               <a:rPr lang="en-IT" smtClean="0"/>
-              <a:t>3</a:t>
+              <a:t>9</a:t>
             </a:fld>
             <a:endParaRPr lang="en-IT"/>
           </a:p>
@@ -862,331 +2470,7 @@
     </p:spTree>
     <p:extLst>
       <p:ext uri="{BB962C8B-B14F-4D97-AF65-F5344CB8AC3E}">
-        <p14:creationId xmlns:p14="http://schemas.microsoft.com/office/powerpoint/2010/main" val="1723885041"/>
-      </p:ext>
-    </p:extLst>
-  </p:cSld>
-  <p:clrMapOvr>
-    <a:masterClrMapping/>
-  </p:clrMapOvr>
-</p:notes>
-</file>
-
-<file path=ppt/notesSlides/notesSlide3.xml><?xml version="1.0" encoding="utf-8"?>
-<p:notes xmlns:a="http://schemas.openxmlformats.org/drawingml/2006/main" xmlns:r="http://schemas.openxmlformats.org/officeDocument/2006/relationships" xmlns:p="http://schemas.openxmlformats.org/presentationml/2006/main">
-  <p:cSld>
-    <p:spTree>
-      <p:nvGrpSpPr>
-        <p:cNvPr id="1" name="">
-          <a:extLst>
-            <a:ext uri="{FF2B5EF4-FFF2-40B4-BE49-F238E27FC236}">
-              <a16:creationId xmlns:a16="http://schemas.microsoft.com/office/drawing/2014/main" id="{303719DB-9665-3148-BD6B-860AB3D71989}"/>
-            </a:ext>
-          </a:extLst>
-        </p:cNvPr>
-        <p:cNvGrpSpPr/>
-        <p:nvPr/>
-      </p:nvGrpSpPr>
-      <p:grpSpPr>
-        <a:xfrm>
-          <a:off x="0" y="0"/>
-          <a:ext cx="0" cy="0"/>
-          <a:chOff x="0" y="0"/>
-          <a:chExt cx="0" cy="0"/>
-        </a:xfrm>
-      </p:grpSpPr>
-      <p:sp>
-        <p:nvSpPr>
-          <p:cNvPr id="2" name="Slide Image Placeholder 1">
-            <a:extLst>
-              <a:ext uri="{FF2B5EF4-FFF2-40B4-BE49-F238E27FC236}">
-                <a16:creationId xmlns:a16="http://schemas.microsoft.com/office/drawing/2014/main" id="{85372964-627A-AE03-A9BD-BAFB316B9F42}"/>
-              </a:ext>
-            </a:extLst>
-          </p:cNvPr>
-          <p:cNvSpPr>
-            <a:spLocks noGrp="1" noRot="1" noChangeAspect="1"/>
-          </p:cNvSpPr>
-          <p:nvPr>
-            <p:ph type="sldImg"/>
-          </p:nvPr>
-        </p:nvSpPr>
-        <p:spPr/>
-      </p:sp>
-      <p:sp>
-        <p:nvSpPr>
-          <p:cNvPr id="3" name="Notes Placeholder 2">
-            <a:extLst>
-              <a:ext uri="{FF2B5EF4-FFF2-40B4-BE49-F238E27FC236}">
-                <a16:creationId xmlns:a16="http://schemas.microsoft.com/office/drawing/2014/main" id="{6FF31B90-2FA4-BB3B-CB64-D5D041430D2C}"/>
-              </a:ext>
-            </a:extLst>
-          </p:cNvPr>
-          <p:cNvSpPr>
-            <a:spLocks noGrp="1"/>
-          </p:cNvSpPr>
-          <p:nvPr>
-            <p:ph type="body" idx="1"/>
-          </p:nvPr>
-        </p:nvSpPr>
-        <p:spPr/>
-        <p:txBody>
-          <a:bodyPr/>
-          <a:lstStyle/>
-          <a:p>
-            <a:endParaRPr lang="en-IT" dirty="0"/>
-          </a:p>
-        </p:txBody>
-      </p:sp>
-      <p:sp>
-        <p:nvSpPr>
-          <p:cNvPr id="4" name="Slide Number Placeholder 3">
-            <a:extLst>
-              <a:ext uri="{FF2B5EF4-FFF2-40B4-BE49-F238E27FC236}">
-                <a16:creationId xmlns:a16="http://schemas.microsoft.com/office/drawing/2014/main" id="{13A908DB-582D-7FC3-5D3D-62F7C0B066A1}"/>
-              </a:ext>
-            </a:extLst>
-          </p:cNvPr>
-          <p:cNvSpPr>
-            <a:spLocks noGrp="1"/>
-          </p:cNvSpPr>
-          <p:nvPr>
-            <p:ph type="sldNum" sz="quarter" idx="5"/>
-          </p:nvPr>
-        </p:nvSpPr>
-        <p:spPr/>
-        <p:txBody>
-          <a:bodyPr/>
-          <a:lstStyle/>
-          <a:p>
-            <a:fld id="{A1FD4C87-9CAF-0C4E-93E7-020DE1465132}" type="slidenum">
-              <a:rPr lang="en-IT" smtClean="0"/>
-              <a:t>4</a:t>
-            </a:fld>
-            <a:endParaRPr lang="en-IT"/>
-          </a:p>
-        </p:txBody>
-      </p:sp>
-    </p:spTree>
-    <p:extLst>
-      <p:ext uri="{BB962C8B-B14F-4D97-AF65-F5344CB8AC3E}">
-        <p14:creationId xmlns:p14="http://schemas.microsoft.com/office/powerpoint/2010/main" val="2520598896"/>
-      </p:ext>
-    </p:extLst>
-  </p:cSld>
-  <p:clrMapOvr>
-    <a:masterClrMapping/>
-  </p:clrMapOvr>
-</p:notes>
-</file>
-
-<file path=ppt/notesSlides/notesSlide4.xml><?xml version="1.0" encoding="utf-8"?>
-<p:notes xmlns:a="http://schemas.openxmlformats.org/drawingml/2006/main" xmlns:r="http://schemas.openxmlformats.org/officeDocument/2006/relationships" xmlns:p="http://schemas.openxmlformats.org/presentationml/2006/main">
-  <p:cSld>
-    <p:spTree>
-      <p:nvGrpSpPr>
-        <p:cNvPr id="1" name="">
-          <a:extLst>
-            <a:ext uri="{FF2B5EF4-FFF2-40B4-BE49-F238E27FC236}">
-              <a16:creationId xmlns:a16="http://schemas.microsoft.com/office/drawing/2014/main" id="{790FC870-CCC2-8042-5705-A35AE093F379}"/>
-            </a:ext>
-          </a:extLst>
-        </p:cNvPr>
-        <p:cNvGrpSpPr/>
-        <p:nvPr/>
-      </p:nvGrpSpPr>
-      <p:grpSpPr>
-        <a:xfrm>
-          <a:off x="0" y="0"/>
-          <a:ext cx="0" cy="0"/>
-          <a:chOff x="0" y="0"/>
-          <a:chExt cx="0" cy="0"/>
-        </a:xfrm>
-      </p:grpSpPr>
-      <p:sp>
-        <p:nvSpPr>
-          <p:cNvPr id="2" name="Slide Image Placeholder 1">
-            <a:extLst>
-              <a:ext uri="{FF2B5EF4-FFF2-40B4-BE49-F238E27FC236}">
-                <a16:creationId xmlns:a16="http://schemas.microsoft.com/office/drawing/2014/main" id="{E838542E-4482-3463-86CB-BECD934C6CD5}"/>
-              </a:ext>
-            </a:extLst>
-          </p:cNvPr>
-          <p:cNvSpPr>
-            <a:spLocks noGrp="1" noRot="1" noChangeAspect="1"/>
-          </p:cNvSpPr>
-          <p:nvPr>
-            <p:ph type="sldImg"/>
-          </p:nvPr>
-        </p:nvSpPr>
-        <p:spPr/>
-      </p:sp>
-      <p:sp>
-        <p:nvSpPr>
-          <p:cNvPr id="3" name="Notes Placeholder 2">
-            <a:extLst>
-              <a:ext uri="{FF2B5EF4-FFF2-40B4-BE49-F238E27FC236}">
-                <a16:creationId xmlns:a16="http://schemas.microsoft.com/office/drawing/2014/main" id="{9A9B00D2-5BCC-9A21-8C65-0A9C6423F43B}"/>
-              </a:ext>
-            </a:extLst>
-          </p:cNvPr>
-          <p:cNvSpPr>
-            <a:spLocks noGrp="1"/>
-          </p:cNvSpPr>
-          <p:nvPr>
-            <p:ph type="body" idx="1"/>
-          </p:nvPr>
-        </p:nvSpPr>
-        <p:spPr/>
-        <p:txBody>
-          <a:bodyPr/>
-          <a:lstStyle/>
-          <a:p>
-            <a:endParaRPr lang="en-IT" dirty="0"/>
-          </a:p>
-        </p:txBody>
-      </p:sp>
-      <p:sp>
-        <p:nvSpPr>
-          <p:cNvPr id="4" name="Slide Number Placeholder 3">
-            <a:extLst>
-              <a:ext uri="{FF2B5EF4-FFF2-40B4-BE49-F238E27FC236}">
-                <a16:creationId xmlns:a16="http://schemas.microsoft.com/office/drawing/2014/main" id="{D8227DD4-1996-A242-88AD-759176E23A35}"/>
-              </a:ext>
-            </a:extLst>
-          </p:cNvPr>
-          <p:cNvSpPr>
-            <a:spLocks noGrp="1"/>
-          </p:cNvSpPr>
-          <p:nvPr>
-            <p:ph type="sldNum" sz="quarter" idx="5"/>
-          </p:nvPr>
-        </p:nvSpPr>
-        <p:spPr/>
-        <p:txBody>
-          <a:bodyPr/>
-          <a:lstStyle/>
-          <a:p>
-            <a:fld id="{A1FD4C87-9CAF-0C4E-93E7-020DE1465132}" type="slidenum">
-              <a:rPr lang="en-IT" smtClean="0"/>
-              <a:t>5</a:t>
-            </a:fld>
-            <a:endParaRPr lang="en-IT"/>
-          </a:p>
-        </p:txBody>
-      </p:sp>
-    </p:spTree>
-    <p:extLst>
-      <p:ext uri="{BB962C8B-B14F-4D97-AF65-F5344CB8AC3E}">
-        <p14:creationId xmlns:p14="http://schemas.microsoft.com/office/powerpoint/2010/main" val="880904337"/>
-      </p:ext>
-    </p:extLst>
-  </p:cSld>
-  <p:clrMapOvr>
-    <a:masterClrMapping/>
-  </p:clrMapOvr>
-</p:notes>
-</file>
-
-<file path=ppt/notesSlides/notesSlide5.xml><?xml version="1.0" encoding="utf-8"?>
-<p:notes xmlns:a="http://schemas.openxmlformats.org/drawingml/2006/main" xmlns:r="http://schemas.openxmlformats.org/officeDocument/2006/relationships" xmlns:p="http://schemas.openxmlformats.org/presentationml/2006/main">
-  <p:cSld>
-    <p:spTree>
-      <p:nvGrpSpPr>
-        <p:cNvPr id="1" name="">
-          <a:extLst>
-            <a:ext uri="{FF2B5EF4-FFF2-40B4-BE49-F238E27FC236}">
-              <a16:creationId xmlns:a16="http://schemas.microsoft.com/office/drawing/2014/main" id="{1D9DB3DC-B4BF-EA17-6AD6-91D30E87214E}"/>
-            </a:ext>
-          </a:extLst>
-        </p:cNvPr>
-        <p:cNvGrpSpPr/>
-        <p:nvPr/>
-      </p:nvGrpSpPr>
-      <p:grpSpPr>
-        <a:xfrm>
-          <a:off x="0" y="0"/>
-          <a:ext cx="0" cy="0"/>
-          <a:chOff x="0" y="0"/>
-          <a:chExt cx="0" cy="0"/>
-        </a:xfrm>
-      </p:grpSpPr>
-      <p:sp>
-        <p:nvSpPr>
-          <p:cNvPr id="2" name="Slide Image Placeholder 1">
-            <a:extLst>
-              <a:ext uri="{FF2B5EF4-FFF2-40B4-BE49-F238E27FC236}">
-                <a16:creationId xmlns:a16="http://schemas.microsoft.com/office/drawing/2014/main" id="{9E70F7D5-E622-0859-7B59-EB6CEAD26772}"/>
-              </a:ext>
-            </a:extLst>
-          </p:cNvPr>
-          <p:cNvSpPr>
-            <a:spLocks noGrp="1" noRot="1" noChangeAspect="1"/>
-          </p:cNvSpPr>
-          <p:nvPr>
-            <p:ph type="sldImg"/>
-          </p:nvPr>
-        </p:nvSpPr>
-        <p:spPr/>
-      </p:sp>
-      <p:sp>
-        <p:nvSpPr>
-          <p:cNvPr id="3" name="Notes Placeholder 2">
-            <a:extLst>
-              <a:ext uri="{FF2B5EF4-FFF2-40B4-BE49-F238E27FC236}">
-                <a16:creationId xmlns:a16="http://schemas.microsoft.com/office/drawing/2014/main" id="{C3561704-D80D-BE1A-D2AB-55B82C031F06}"/>
-              </a:ext>
-            </a:extLst>
-          </p:cNvPr>
-          <p:cNvSpPr>
-            <a:spLocks noGrp="1"/>
-          </p:cNvSpPr>
-          <p:nvPr>
-            <p:ph type="body" idx="1"/>
-          </p:nvPr>
-        </p:nvSpPr>
-        <p:spPr/>
-        <p:txBody>
-          <a:bodyPr/>
-          <a:lstStyle/>
-          <a:p>
-            <a:endParaRPr lang="en-IT" dirty="0"/>
-          </a:p>
-        </p:txBody>
-      </p:sp>
-      <p:sp>
-        <p:nvSpPr>
-          <p:cNvPr id="4" name="Slide Number Placeholder 3">
-            <a:extLst>
-              <a:ext uri="{FF2B5EF4-FFF2-40B4-BE49-F238E27FC236}">
-                <a16:creationId xmlns:a16="http://schemas.microsoft.com/office/drawing/2014/main" id="{7D4860AA-AD9A-1246-A9A9-EB906ECFDD27}"/>
-              </a:ext>
-            </a:extLst>
-          </p:cNvPr>
-          <p:cNvSpPr>
-            <a:spLocks noGrp="1"/>
-          </p:cNvSpPr>
-          <p:nvPr>
-            <p:ph type="sldNum" sz="quarter" idx="5"/>
-          </p:nvPr>
-        </p:nvSpPr>
-        <p:spPr/>
-        <p:txBody>
-          <a:bodyPr/>
-          <a:lstStyle/>
-          <a:p>
-            <a:fld id="{A1FD4C87-9CAF-0C4E-93E7-020DE1465132}" type="slidenum">
-              <a:rPr lang="en-IT" smtClean="0"/>
-              <a:t>6</a:t>
-            </a:fld>
-            <a:endParaRPr lang="en-IT"/>
-          </a:p>
-        </p:txBody>
-      </p:sp>
-    </p:spTree>
-    <p:extLst>
-      <p:ext uri="{BB962C8B-B14F-4D97-AF65-F5344CB8AC3E}">
-        <p14:creationId xmlns:p14="http://schemas.microsoft.com/office/powerpoint/2010/main" val="1054108748"/>
+        <p14:creationId xmlns:p14="http://schemas.microsoft.com/office/powerpoint/2010/main" val="2659229866"/>
       </p:ext>
     </p:extLst>
   </p:cSld>
@@ -23465,12 +24749,18 @@
 </p:sld>
 </file>
 
-<file path=ppt/slides/slide2.xml><?xml version="1.0" encoding="utf-8"?>
+<file path=ppt/slides/slide10.xml><?xml version="1.0" encoding="utf-8"?>
 <p:sld xmlns:a="http://schemas.openxmlformats.org/drawingml/2006/main" xmlns:r="http://schemas.openxmlformats.org/officeDocument/2006/relationships" xmlns:p="http://schemas.openxmlformats.org/presentationml/2006/main">
   <p:cSld>
     <p:spTree>
       <p:nvGrpSpPr>
-        <p:cNvPr id="1" name=""/>
+        <p:cNvPr id="1" name="">
+          <a:extLst>
+            <a:ext uri="{FF2B5EF4-FFF2-40B4-BE49-F238E27FC236}">
+              <a16:creationId xmlns:a16="http://schemas.microsoft.com/office/drawing/2014/main" id="{85169A71-67E5-E851-03B4-73F7034EA989}"/>
+            </a:ext>
+          </a:extLst>
+        </p:cNvPr>
         <p:cNvGrpSpPr/>
         <p:nvPr/>
       </p:nvGrpSpPr>
@@ -23484,214 +24774,10 @@
       </p:grpSpPr>
       <p:sp>
         <p:nvSpPr>
-          <p:cNvPr id="3" name="Text Placeholder 2">
+          <p:cNvPr id="407" name="Rectangle 406">
             <a:extLst>
               <a:ext uri="{FF2B5EF4-FFF2-40B4-BE49-F238E27FC236}">
-                <a16:creationId xmlns:a16="http://schemas.microsoft.com/office/drawing/2014/main" id="{C5759D88-3F1A-77BE-BBE9-158BACD3B926}"/>
-              </a:ext>
-            </a:extLst>
-          </p:cNvPr>
-          <p:cNvSpPr>
-            <a:spLocks noGrp="1"/>
-          </p:cNvSpPr>
-          <p:nvPr>
-            <p:ph type="body"/>
-          </p:nvPr>
-        </p:nvSpPr>
-        <p:spPr>
-          <a:xfrm>
-            <a:off x="720000" y="3934045"/>
-            <a:ext cx="3811680" cy="1007467"/>
-          </a:xfrm>
-        </p:spPr>
-        <p:txBody>
-          <a:bodyPr/>
-          <a:lstStyle/>
-          <a:p>
-            <a:pPr marL="0" indent="0">
-              <a:buNone/>
-            </a:pPr>
-            <a:r>
-              <a:rPr lang="en-IT" sz="1400" dirty="0">
-                <a:solidFill>
-                  <a:schemeClr val="dk1"/>
-                </a:solidFill>
-                <a:latin typeface="Manrope"/>
-              </a:rPr>
-              <a:t>❌  </a:t>
-            </a:r>
-            <a:r>
-              <a:rPr lang="en-GB" sz="1400" dirty="0">
-                <a:solidFill>
-                  <a:schemeClr val="dk1"/>
-                </a:solidFill>
-                <a:latin typeface="Manrope"/>
-              </a:rPr>
-              <a:t>Single point of failure</a:t>
-            </a:r>
-          </a:p>
-          <a:p>
-            <a:pPr marL="0" indent="0">
-              <a:buNone/>
-            </a:pPr>
-            <a:r>
-              <a:rPr lang="en-IT" sz="1400" dirty="0">
-                <a:solidFill>
-                  <a:schemeClr val="dk1"/>
-                </a:solidFill>
-                <a:latin typeface="Manrope"/>
-              </a:rPr>
-              <a:t>❌  </a:t>
-            </a:r>
-            <a:r>
-              <a:rPr lang="en-GB" sz="1400" dirty="0">
-                <a:solidFill>
-                  <a:schemeClr val="dk1"/>
-                </a:solidFill>
-                <a:latin typeface="Manrope"/>
-              </a:rPr>
-              <a:t>Hard to scale under heavy traffic</a:t>
-            </a:r>
-          </a:p>
-          <a:p>
-            <a:pPr marL="0" indent="0">
-              <a:buNone/>
-            </a:pPr>
-            <a:r>
-              <a:rPr lang="en-IT" sz="1400" dirty="0">
-                <a:solidFill>
-                  <a:schemeClr val="dk1"/>
-                </a:solidFill>
-                <a:latin typeface="Manrope"/>
-              </a:rPr>
-              <a:t>❌  </a:t>
-            </a:r>
-            <a:r>
-              <a:rPr lang="en-GB" sz="1400" dirty="0">
-                <a:solidFill>
-                  <a:schemeClr val="dk1"/>
-                </a:solidFill>
-                <a:latin typeface="Manrope"/>
-              </a:rPr>
-              <a:t>Slow release cycles</a:t>
-            </a:r>
-            <a:endParaRPr lang="en-IT" sz="1400" dirty="0">
-              <a:solidFill>
-                <a:schemeClr val="dk1"/>
-              </a:solidFill>
-              <a:latin typeface="Manrope"/>
-            </a:endParaRPr>
-          </a:p>
-        </p:txBody>
-      </p:sp>
-      <p:sp>
-        <p:nvSpPr>
-          <p:cNvPr id="4" name="Text Placeholder 3">
-            <a:extLst>
-              <a:ext uri="{FF2B5EF4-FFF2-40B4-BE49-F238E27FC236}">
-                <a16:creationId xmlns:a16="http://schemas.microsoft.com/office/drawing/2014/main" id="{96FE6936-9310-46BD-C3DA-993E81857C90}"/>
-              </a:ext>
-            </a:extLst>
-          </p:cNvPr>
-          <p:cNvSpPr>
-            <a:spLocks noGrp="1"/>
-          </p:cNvSpPr>
-          <p:nvPr>
-            <p:ph type="body"/>
-          </p:nvPr>
-        </p:nvSpPr>
-        <p:spPr>
-          <a:xfrm>
-            <a:off x="4618800" y="3934045"/>
-            <a:ext cx="3811680" cy="1007468"/>
-          </a:xfrm>
-        </p:spPr>
-        <p:txBody>
-          <a:bodyPr/>
-          <a:lstStyle/>
-          <a:p>
-            <a:pPr marL="0" indent="0">
-              <a:buNone/>
-            </a:pPr>
-            <a:r>
-              <a:rPr lang="en-IT" sz="1400" dirty="0">
-                <a:solidFill>
-                  <a:schemeClr val="dk1"/>
-                </a:solidFill>
-                <a:latin typeface="Manrope"/>
-              </a:rPr>
-              <a:t>✅  </a:t>
-            </a:r>
-            <a:r>
-              <a:rPr lang="en-GB" sz="1400" dirty="0">
-                <a:solidFill>
-                  <a:schemeClr val="dk1"/>
-                </a:solidFill>
-                <a:latin typeface="Manrope"/>
-              </a:rPr>
-              <a:t>Fault isolation (If one fails, the rest survive)</a:t>
-            </a:r>
-          </a:p>
-          <a:p>
-            <a:pPr marL="0" indent="0">
-              <a:buNone/>
-            </a:pPr>
-            <a:r>
-              <a:rPr lang="en-IT" sz="1400" dirty="0">
-                <a:solidFill>
-                  <a:schemeClr val="dk1"/>
-                </a:solidFill>
-                <a:latin typeface="Manrope"/>
-              </a:rPr>
-              <a:t>✅  </a:t>
-            </a:r>
-            <a:r>
-              <a:rPr lang="en-GB" sz="1400" dirty="0">
-                <a:solidFill>
-                  <a:schemeClr val="dk1"/>
-                </a:solidFill>
-                <a:latin typeface="Manrope"/>
-              </a:rPr>
-              <a:t>Scale only what is needed</a:t>
-            </a:r>
-          </a:p>
-          <a:p>
-            <a:pPr marL="0" indent="0">
-              <a:buNone/>
-            </a:pPr>
-            <a:r>
-              <a:rPr lang="en-IT" sz="1400" dirty="0">
-                <a:solidFill>
-                  <a:schemeClr val="dk1"/>
-                </a:solidFill>
-                <a:latin typeface="Manrope"/>
-              </a:rPr>
-              <a:t>✅  </a:t>
-            </a:r>
-            <a:r>
-              <a:rPr lang="en-GB" sz="1400" dirty="0">
-                <a:solidFill>
-                  <a:schemeClr val="dk1"/>
-                </a:solidFill>
-                <a:latin typeface="Manrope"/>
-              </a:rPr>
-              <a:t>Independent deployments</a:t>
-            </a:r>
-            <a:endParaRPr lang="en-IT" sz="1400" dirty="0">
-              <a:solidFill>
-                <a:schemeClr val="dk1"/>
-              </a:solidFill>
-              <a:latin typeface="Manrope"/>
-            </a:endParaRPr>
-          </a:p>
-        </p:txBody>
-      </p:sp>
-      <p:sp>
-        <p:nvSpPr>
-          <p:cNvPr id="5" name="Rectangle 4">
-            <a:extLst>
-              <a:ext uri="{FF2B5EF4-FFF2-40B4-BE49-F238E27FC236}">
-                <a16:creationId xmlns:a16="http://schemas.microsoft.com/office/drawing/2014/main" id="{C8B424BD-B89C-B50E-2FA9-93CA6EB7CEA1}"/>
+                <a16:creationId xmlns:a16="http://schemas.microsoft.com/office/drawing/2014/main" id="{A2F94655-2632-EF21-9853-0138F9CFB411}"/>
               </a:ext>
             </a:extLst>
           </p:cNvPr>
@@ -23746,9 +24832,9 @@
                 <a:uFillTx/>
                 <a:latin typeface="Archivo Black"/>
               </a:rPr>
-              <a:t>Background: from Monoliths to Microservices</a:t>
+              <a:t>System Architecture</a:t>
             </a:r>
-            <a:endParaRPr lang="en-US" sz="2400" b="0" u="none" strike="noStrike" dirty="0">
+            <a:endParaRPr lang="en-US" sz="2400" b="1" u="none" strike="noStrike" dirty="0">
               <a:solidFill>
                 <a:srgbClr val="000000"/>
               </a:solidFill>
@@ -23759,306 +24845,12 @@
           </a:p>
         </p:txBody>
       </p:sp>
-      <p:grpSp>
-        <p:nvGrpSpPr>
-          <p:cNvPr id="14" name="Group 13">
+      <p:sp>
+        <p:nvSpPr>
+          <p:cNvPr id="3" name="Rectangle 2">
             <a:extLst>
               <a:ext uri="{FF2B5EF4-FFF2-40B4-BE49-F238E27FC236}">
-                <a16:creationId xmlns:a16="http://schemas.microsoft.com/office/drawing/2014/main" id="{15D8D138-958D-CC4A-95FA-6C4A6B6812A3}"/>
-              </a:ext>
-            </a:extLst>
-          </p:cNvPr>
-          <p:cNvGrpSpPr/>
-          <p:nvPr/>
-        </p:nvGrpSpPr>
-        <p:grpSpPr>
-          <a:xfrm>
-            <a:off x="720000" y="1042757"/>
-            <a:ext cx="2667177" cy="2791464"/>
-            <a:chOff x="720000" y="1092958"/>
-            <a:chExt cx="2667177" cy="2791464"/>
-          </a:xfrm>
-        </p:grpSpPr>
-        <p:sp>
-          <p:nvSpPr>
-            <p:cNvPr id="9" name="PlaceHolder 2">
-              <a:extLst>
-                <a:ext uri="{FF2B5EF4-FFF2-40B4-BE49-F238E27FC236}">
-                  <a16:creationId xmlns:a16="http://schemas.microsoft.com/office/drawing/2014/main" id="{7508F7F3-8CFB-BFAE-468C-747593DCDA0B}"/>
-                </a:ext>
-              </a:extLst>
-            </p:cNvPr>
-            <p:cNvSpPr txBox="1">
-              <a:spLocks/>
-            </p:cNvSpPr>
-            <p:nvPr/>
-          </p:nvSpPr>
-          <p:spPr>
-            <a:xfrm>
-              <a:off x="720000" y="1092958"/>
-              <a:ext cx="2667177" cy="466473"/>
-            </a:xfrm>
-            <a:prstGeom prst="rect">
-              <a:avLst/>
-            </a:prstGeom>
-            <a:noFill/>
-            <a:ln w="28575">
-              <a:noFill/>
-            </a:ln>
-          </p:spPr>
-          <p:txBody>
-            <a:bodyPr lIns="91440" tIns="91440" rIns="91440" bIns="91440" anchor="ctr">
-              <a:normAutofit/>
-            </a:bodyPr>
-            <a:lstStyle>
-              <a:lvl1pPr algn="l" defTabSz="914400" rtl="0" eaLnBrk="1" latinLnBrk="0" hangingPunct="1">
-                <a:lnSpc>
-                  <a:spcPct val="90000"/>
-                </a:lnSpc>
-                <a:spcBef>
-                  <a:spcPct val="0"/>
-                </a:spcBef>
-                <a:buNone/>
-                <a:defRPr sz="4400" kern="1200">
-                  <a:solidFill>
-                    <a:schemeClr val="tx1"/>
-                  </a:solidFill>
-                  <a:latin typeface="+mj-lt"/>
-                  <a:ea typeface="+mj-ea"/>
-                  <a:cs typeface="+mj-cs"/>
-                </a:defRPr>
-              </a:lvl1pPr>
-            </a:lstStyle>
-            <a:p>
-              <a:pPr algn="ctr">
-                <a:lnSpc>
-                  <a:spcPct val="100000"/>
-                </a:lnSpc>
-                <a:tabLst>
-                  <a:tab pos="0" algn="l"/>
-                </a:tabLst>
-              </a:pPr>
-              <a:r>
-                <a:rPr lang="en-US" sz="1600" b="1" dirty="0">
-                  <a:solidFill>
-                    <a:schemeClr val="dk1"/>
-                  </a:solidFill>
-                  <a:latin typeface="Manrope"/>
-                  <a:ea typeface="+mn-ea"/>
-                  <a:cs typeface="+mn-cs"/>
-                </a:rPr>
-                <a:t>MONOLITHIC</a:t>
-              </a:r>
-              <a:r>
-                <a:rPr lang="en-US" sz="1600" b="1" dirty="0">
-                  <a:solidFill>
-                    <a:schemeClr val="dk1"/>
-                  </a:solidFill>
-                  <a:latin typeface="Manrope"/>
-                  <a:ea typeface="Manrope"/>
-                </a:rPr>
-                <a:t> ARCHITECTURE</a:t>
-              </a:r>
-              <a:endParaRPr lang="en-US" sz="1600" b="1" dirty="0">
-                <a:solidFill>
-                  <a:srgbClr val="000000"/>
-                </a:solidFill>
-                <a:latin typeface="OpenSymbol"/>
-              </a:endParaRPr>
-            </a:p>
-          </p:txBody>
-        </p:sp>
-        <p:pic>
-          <p:nvPicPr>
-            <p:cNvPr id="11" name="Picture 10">
-              <a:extLst>
-                <a:ext uri="{FF2B5EF4-FFF2-40B4-BE49-F238E27FC236}">
-                  <a16:creationId xmlns:a16="http://schemas.microsoft.com/office/drawing/2014/main" id="{6DBD6A4C-989B-16B9-6BF9-07D10F3B1CA8}"/>
-                </a:ext>
-              </a:extLst>
-            </p:cNvPr>
-            <p:cNvPicPr>
-              <a:picLocks noChangeAspect="1"/>
-            </p:cNvPicPr>
-            <p:nvPr/>
-          </p:nvPicPr>
-          <p:blipFill>
-            <a:blip r:embed="rId3">
-              <a:extLst>
-                <a:ext uri="{28A0092B-C50C-407E-A947-70E740481C1C}">
-                  <a14:useLocalDpi xmlns:a14="http://schemas.microsoft.com/office/drawing/2010/main" val="0"/>
-                </a:ext>
-              </a:extLst>
-            </a:blip>
-            <a:srcRect l="9702" t="23697" r="67414" b="4637"/>
-            <a:stretch>
-              <a:fillRect/>
-            </a:stretch>
-          </p:blipFill>
-          <p:spPr>
-            <a:xfrm>
-              <a:off x="1327030" y="1609053"/>
-              <a:ext cx="1453116" cy="2275369"/>
-            </a:xfrm>
-            <a:prstGeom prst="rect">
-              <a:avLst/>
-            </a:prstGeom>
-          </p:spPr>
-        </p:pic>
-      </p:grpSp>
-      <p:grpSp>
-        <p:nvGrpSpPr>
-          <p:cNvPr id="13" name="Group 12">
-            <a:extLst>
-              <a:ext uri="{FF2B5EF4-FFF2-40B4-BE49-F238E27FC236}">
-                <a16:creationId xmlns:a16="http://schemas.microsoft.com/office/drawing/2014/main" id="{4097FA7A-1208-23A6-150C-4DB86AC98575}"/>
-              </a:ext>
-            </a:extLst>
-          </p:cNvPr>
-          <p:cNvGrpSpPr/>
-          <p:nvPr/>
-        </p:nvGrpSpPr>
-        <p:grpSpPr>
-          <a:xfrm>
-            <a:off x="4618800" y="1042757"/>
-            <a:ext cx="2955851" cy="2741842"/>
-            <a:chOff x="4861119" y="1092958"/>
-            <a:chExt cx="2955851" cy="2741842"/>
-          </a:xfrm>
-        </p:grpSpPr>
-        <p:sp>
-          <p:nvSpPr>
-            <p:cNvPr id="10" name="PlaceHolder 2">
-              <a:extLst>
-                <a:ext uri="{FF2B5EF4-FFF2-40B4-BE49-F238E27FC236}">
-                  <a16:creationId xmlns:a16="http://schemas.microsoft.com/office/drawing/2014/main" id="{125751BC-B802-7E0B-F3ED-FC0D479B1751}"/>
-                </a:ext>
-              </a:extLst>
-            </p:cNvPr>
-            <p:cNvSpPr txBox="1">
-              <a:spLocks/>
-            </p:cNvSpPr>
-            <p:nvPr/>
-          </p:nvSpPr>
-          <p:spPr>
-            <a:xfrm>
-              <a:off x="4861119" y="1092958"/>
-              <a:ext cx="2955321" cy="466473"/>
-            </a:xfrm>
-            <a:prstGeom prst="rect">
-              <a:avLst/>
-            </a:prstGeom>
-            <a:noFill/>
-            <a:ln w="28575">
-              <a:noFill/>
-            </a:ln>
-          </p:spPr>
-          <p:txBody>
-            <a:bodyPr lIns="91440" tIns="91440" rIns="91440" bIns="91440" anchor="ctr">
-              <a:normAutofit/>
-            </a:bodyPr>
-            <a:lstStyle>
-              <a:lvl1pPr algn="l" defTabSz="914400" rtl="0" eaLnBrk="1" latinLnBrk="0" hangingPunct="1">
-                <a:lnSpc>
-                  <a:spcPct val="90000"/>
-                </a:lnSpc>
-                <a:spcBef>
-                  <a:spcPct val="0"/>
-                </a:spcBef>
-                <a:buNone/>
-                <a:defRPr sz="4400" kern="1200">
-                  <a:solidFill>
-                    <a:schemeClr val="tx1"/>
-                  </a:solidFill>
-                  <a:latin typeface="+mj-lt"/>
-                  <a:ea typeface="+mj-ea"/>
-                  <a:cs typeface="+mj-cs"/>
-                </a:defRPr>
-              </a:lvl1pPr>
-            </a:lstStyle>
-            <a:p>
-              <a:pPr algn="ctr">
-                <a:lnSpc>
-                  <a:spcPct val="100000"/>
-                </a:lnSpc>
-                <a:tabLst>
-                  <a:tab pos="0" algn="l"/>
-                </a:tabLst>
-              </a:pPr>
-              <a:r>
-                <a:rPr lang="en-US" sz="1600" b="1" dirty="0">
-                  <a:solidFill>
-                    <a:schemeClr val="dk1"/>
-                  </a:solidFill>
-                  <a:latin typeface="Manrope"/>
-                  <a:ea typeface="+mn-ea"/>
-                  <a:cs typeface="+mn-cs"/>
-                </a:rPr>
-                <a:t>MICROSERVICE</a:t>
-              </a:r>
-              <a:r>
-                <a:rPr lang="en-US" sz="1600" b="1" dirty="0">
-                  <a:solidFill>
-                    <a:schemeClr val="dk1"/>
-                  </a:solidFill>
-                  <a:latin typeface="Manrope"/>
-                  <a:ea typeface="Manrope"/>
-                </a:rPr>
-                <a:t> ARCHITECTURE</a:t>
-              </a:r>
-              <a:endParaRPr lang="en-US" sz="1600" b="1" dirty="0">
-                <a:solidFill>
-                  <a:srgbClr val="000000"/>
-                </a:solidFill>
-                <a:latin typeface="OpenSymbol"/>
-              </a:endParaRPr>
-            </a:p>
-          </p:txBody>
-        </p:sp>
-        <p:pic>
-          <p:nvPicPr>
-            <p:cNvPr id="12" name="Picture 11">
-              <a:extLst>
-                <a:ext uri="{FF2B5EF4-FFF2-40B4-BE49-F238E27FC236}">
-                  <a16:creationId xmlns:a16="http://schemas.microsoft.com/office/drawing/2014/main" id="{8CBDFD72-5001-6FB6-3EC9-36392C66B818}"/>
-                </a:ext>
-              </a:extLst>
-            </p:cNvPr>
-            <p:cNvPicPr>
-              <a:picLocks noChangeAspect="1"/>
-            </p:cNvPicPr>
-            <p:nvPr/>
-          </p:nvPicPr>
-          <p:blipFill>
-            <a:blip r:embed="rId3">
-              <a:extLst>
-                <a:ext uri="{28A0092B-C50C-407E-A947-70E740481C1C}">
-                  <a14:useLocalDpi xmlns:a14="http://schemas.microsoft.com/office/drawing/2010/main" val="0"/>
-                </a:ext>
-              </a:extLst>
-            </a:blip>
-            <a:srcRect l="47656" t="23697" r="5796" b="4637"/>
-            <a:stretch>
-              <a:fillRect/>
-            </a:stretch>
-          </p:blipFill>
-          <p:spPr>
-            <a:xfrm>
-              <a:off x="4861119" y="1559431"/>
-              <a:ext cx="2955851" cy="2275369"/>
-            </a:xfrm>
-            <a:prstGeom prst="rect">
-              <a:avLst/>
-            </a:prstGeom>
-          </p:spPr>
-        </p:pic>
-      </p:grpSp>
-      <p:sp>
-        <p:nvSpPr>
-          <p:cNvPr id="15" name="Right Arrow 14">
-            <a:extLst>
-              <a:ext uri="{FF2B5EF4-FFF2-40B4-BE49-F238E27FC236}">
-                <a16:creationId xmlns:a16="http://schemas.microsoft.com/office/drawing/2014/main" id="{82276B68-5A8B-1029-AE1C-BB91A67BB452}"/>
+                <a16:creationId xmlns:a16="http://schemas.microsoft.com/office/drawing/2014/main" id="{9AB68784-745E-958E-0B94-DADBE55B24D9}"/>
               </a:ext>
             </a:extLst>
           </p:cNvPr>
@@ -24067,48 +24859,24 @@
         </p:nvSpPr>
         <p:spPr>
           <a:xfrm>
-            <a:off x="3203287" y="2250647"/>
-            <a:ext cx="992372" cy="375684"/>
+            <a:off x="118108" y="529696"/>
+            <a:ext cx="180000" cy="360000"/>
           </a:xfrm>
-          <a:prstGeom prst="rightArrow">
+          <a:prstGeom prst="rect">
             <a:avLst/>
           </a:prstGeom>
-          <a:gradFill flip="none" rotWithShape="1">
-            <a:gsLst>
-              <a:gs pos="0">
-                <a:schemeClr val="dk1">
-                  <a:lumMod val="67000"/>
-                </a:schemeClr>
-              </a:gs>
-              <a:gs pos="48000">
-                <a:schemeClr val="dk1">
-                  <a:lumMod val="97000"/>
-                  <a:lumOff val="3000"/>
-                </a:schemeClr>
-              </a:gs>
-              <a:gs pos="100000">
-                <a:schemeClr val="dk1">
-                  <a:lumMod val="60000"/>
-                  <a:lumOff val="40000"/>
-                </a:schemeClr>
-              </a:gs>
-            </a:gsLst>
-            <a:lin ang="16200000" scaled="1"/>
-            <a:tileRect/>
-          </a:gradFill>
-          <a:ln>
-            <a:noFill/>
-          </a:ln>
         </p:spPr>
         <p:style>
-          <a:lnRef idx="0">
-            <a:scrgbClr r="0" g="0" b="0"/>
+          <a:lnRef idx="2">
+            <a:schemeClr val="dk1">
+              <a:shade val="15000"/>
+            </a:schemeClr>
           </a:lnRef>
-          <a:fillRef idx="0">
-            <a:scrgbClr r="0" g="0" b="0"/>
+          <a:fillRef idx="1">
+            <a:schemeClr val="dk1"/>
           </a:fillRef>
           <a:effectRef idx="0">
-            <a:scrgbClr r="0" g="0" b="0"/>
+            <a:schemeClr val="dk1"/>
           </a:effectRef>
           <a:fontRef idx="minor">
             <a:schemeClr val="lt1"/>
@@ -24123,12 +24891,290 @@
           </a:p>
         </p:txBody>
       </p:sp>
+      <p:pic>
+        <p:nvPicPr>
+          <p:cNvPr id="2" name="Immagine 24" descr="Immagine che contiene testo, schermata, diagramma, software&#10;&#10;Il contenuto generato dall'IA potrebbe non essere corretto.">
+            <a:extLst>
+              <a:ext uri="{FF2B5EF4-FFF2-40B4-BE49-F238E27FC236}">
+                <a16:creationId xmlns:a16="http://schemas.microsoft.com/office/drawing/2014/main" id="{8CD48EAC-D661-86DC-F99E-A35C9C4F1D22}"/>
+              </a:ext>
+            </a:extLst>
+          </p:cNvPr>
+          <p:cNvPicPr>
+            <a:picLocks noChangeAspect="1"/>
+          </p:cNvPicPr>
+          <p:nvPr/>
+        </p:nvPicPr>
+        <p:blipFill>
+          <a:blip r:embed="rId3"/>
+          <a:stretch>
+            <a:fillRect/>
+          </a:stretch>
+        </p:blipFill>
+        <p:spPr>
+          <a:xfrm>
+            <a:off x="118108" y="970135"/>
+            <a:ext cx="7793580" cy="3872797"/>
+          </a:xfrm>
+          <a:prstGeom prst="rect">
+            <a:avLst/>
+          </a:prstGeom>
+        </p:spPr>
+      </p:pic>
+    </p:spTree>
+    <p:extLst>
+      <p:ext uri="{BB962C8B-B14F-4D97-AF65-F5344CB8AC3E}">
+        <p14:creationId xmlns:p14="http://schemas.microsoft.com/office/powerpoint/2010/main" val="3182272747"/>
+      </p:ext>
+    </p:extLst>
+  </p:cSld>
+  <p:clrMapOvr>
+    <a:masterClrMapping/>
+  </p:clrMapOvr>
+</p:sld>
+</file>
+
+<file path=ppt/slides/slide11.xml><?xml version="1.0" encoding="utf-8"?>
+<p:sld xmlns:a="http://schemas.openxmlformats.org/drawingml/2006/main" xmlns:r="http://schemas.openxmlformats.org/officeDocument/2006/relationships" xmlns:p="http://schemas.openxmlformats.org/presentationml/2006/main">
+  <p:cSld>
+    <p:spTree>
+      <p:nvGrpSpPr>
+        <p:cNvPr id="1" name="">
+          <a:extLst>
+            <a:ext uri="{FF2B5EF4-FFF2-40B4-BE49-F238E27FC236}">
+              <a16:creationId xmlns:a16="http://schemas.microsoft.com/office/drawing/2014/main" id="{07237208-BDAD-8FAF-8C81-71AF7C25DE8A}"/>
+            </a:ext>
+          </a:extLst>
+        </p:cNvPr>
+        <p:cNvGrpSpPr/>
+        <p:nvPr/>
+      </p:nvGrpSpPr>
+      <p:grpSpPr>
+        <a:xfrm>
+          <a:off x="0" y="0"/>
+          <a:ext cx="0" cy="0"/>
+          <a:chOff x="0" y="0"/>
+          <a:chExt cx="0" cy="0"/>
+        </a:xfrm>
+      </p:grpSpPr>
       <p:sp>
         <p:nvSpPr>
-          <p:cNvPr id="17" name="Rectangle 16">
+          <p:cNvPr id="407" name="Rectangle 406">
             <a:extLst>
               <a:ext uri="{FF2B5EF4-FFF2-40B4-BE49-F238E27FC236}">
-                <a16:creationId xmlns:a16="http://schemas.microsoft.com/office/drawing/2014/main" id="{2AFB7E8A-C12A-F2DA-37AC-4CC77D317BDD}"/>
+                <a16:creationId xmlns:a16="http://schemas.microsoft.com/office/drawing/2014/main" id="{30274573-F7B8-AC4F-9C46-45F963878E0C}"/>
+              </a:ext>
+            </a:extLst>
+          </p:cNvPr>
+          <p:cNvSpPr/>
+          <p:nvPr/>
+        </p:nvSpPr>
+        <p:spPr>
+          <a:xfrm>
+            <a:off x="476280" y="476460"/>
+            <a:ext cx="8191080" cy="466473"/>
+          </a:xfrm>
+          <a:prstGeom prst="rect">
+            <a:avLst/>
+          </a:prstGeom>
+          <a:noFill/>
+          <a:ln w="0">
+            <a:noFill/>
+          </a:ln>
+        </p:spPr>
+        <p:style>
+          <a:lnRef idx="0">
+            <a:scrgbClr r="0" g="0" b="0"/>
+          </a:lnRef>
+          <a:fillRef idx="0">
+            <a:scrgbClr r="0" g="0" b="0"/>
+          </a:fillRef>
+          <a:effectRef idx="0">
+            <a:scrgbClr r="0" g="0" b="0"/>
+          </a:effectRef>
+          <a:fontRef idx="minor"/>
+        </p:style>
+        <p:txBody>
+          <a:bodyPr anchor="t">
+            <a:normAutofit/>
+          </a:bodyPr>
+          <a:lstStyle/>
+          <a:p>
+            <a:pPr>
+              <a:tabLst>
+                <a:tab pos="0" algn="l"/>
+              </a:tabLst>
+            </a:pPr>
+            <a:r>
+              <a:rPr lang="en-US" sz="2400" b="1" u="none" strike="noStrike" dirty="0">
+                <a:solidFill>
+                  <a:schemeClr val="dk1"/>
+                </a:solidFill>
+                <a:effectLst/>
+                <a:uFillTx/>
+                <a:latin typeface="Archivo Black"/>
+              </a:rPr>
+              <a:t>Conclusions &amp; Next Steps</a:t>
+            </a:r>
+            <a:endParaRPr lang="en-US" sz="2400" b="0" u="none" strike="noStrike" dirty="0">
+              <a:solidFill>
+                <a:srgbClr val="000000"/>
+              </a:solidFill>
+              <a:effectLst/>
+              <a:uFillTx/>
+              <a:latin typeface="OpenSymbol"/>
+            </a:endParaRPr>
+          </a:p>
+        </p:txBody>
+      </p:sp>
+      <p:sp>
+        <p:nvSpPr>
+          <p:cNvPr id="408" name="Rectangle 407">
+            <a:extLst>
+              <a:ext uri="{FF2B5EF4-FFF2-40B4-BE49-F238E27FC236}">
+                <a16:creationId xmlns:a16="http://schemas.microsoft.com/office/drawing/2014/main" id="{6AF18F02-9EBB-D64E-A597-D0E5AE4900F5}"/>
+              </a:ext>
+            </a:extLst>
+          </p:cNvPr>
+          <p:cNvSpPr/>
+          <p:nvPr/>
+        </p:nvSpPr>
+        <p:spPr>
+          <a:xfrm>
+            <a:off x="476280" y="942933"/>
+            <a:ext cx="8191080" cy="3724107"/>
+          </a:xfrm>
+          <a:prstGeom prst="rect">
+            <a:avLst/>
+          </a:prstGeom>
+          <a:noFill/>
+          <a:ln w="0">
+            <a:noFill/>
+          </a:ln>
+        </p:spPr>
+        <p:style>
+          <a:lnRef idx="0">
+            <a:scrgbClr r="0" g="0" b="0"/>
+          </a:lnRef>
+          <a:fillRef idx="0">
+            <a:scrgbClr r="0" g="0" b="0"/>
+          </a:fillRef>
+          <a:effectRef idx="0">
+            <a:scrgbClr r="0" g="0" b="0"/>
+          </a:effectRef>
+          <a:fontRef idx="minor"/>
+        </p:style>
+        <p:txBody>
+          <a:bodyPr anchor="t">
+            <a:normAutofit/>
+          </a:bodyPr>
+          <a:lstStyle/>
+          <a:p>
+            <a:pPr defTabSz="914400">
+              <a:lnSpc>
+                <a:spcPct val="150000"/>
+              </a:lnSpc>
+              <a:tabLst>
+                <a:tab pos="0" algn="l"/>
+              </a:tabLst>
+            </a:pPr>
+            <a:r>
+              <a:rPr lang="en-US" sz="1400" b="0" u="none" strike="noStrike" dirty="0">
+                <a:solidFill>
+                  <a:schemeClr val="dk1"/>
+                </a:solidFill>
+                <a:effectLst/>
+                <a:uFillTx/>
+                <a:latin typeface="Manrope"/>
+              </a:rPr>
+              <a:t>Brief context: the problem space, key gaps, and why it matters now.</a:t>
+            </a:r>
+            <a:endParaRPr lang="en-US" sz="1400" b="0" u="none" strike="noStrike" dirty="0">
+              <a:solidFill>
+                <a:srgbClr val="000000"/>
+              </a:solidFill>
+              <a:effectLst/>
+              <a:uFillTx/>
+              <a:latin typeface="OpenSymbol"/>
+            </a:endParaRPr>
+          </a:p>
+          <a:p>
+            <a:pPr defTabSz="914400">
+              <a:lnSpc>
+                <a:spcPct val="150000"/>
+              </a:lnSpc>
+              <a:tabLst>
+                <a:tab pos="0" algn="l"/>
+              </a:tabLst>
+            </a:pPr>
+            <a:endParaRPr lang="en-US" sz="1400" b="0" u="none" strike="noStrike" dirty="0">
+              <a:solidFill>
+                <a:srgbClr val="000000"/>
+              </a:solidFill>
+              <a:effectLst/>
+              <a:uFillTx/>
+              <a:latin typeface="OpenSymbol"/>
+            </a:endParaRPr>
+          </a:p>
+          <a:p>
+            <a:pPr defTabSz="914400">
+              <a:lnSpc>
+                <a:spcPct val="150000"/>
+              </a:lnSpc>
+              <a:tabLst>
+                <a:tab pos="0" algn="l"/>
+              </a:tabLst>
+            </a:pPr>
+            <a:r>
+              <a:rPr lang="en-US" sz="1400" b="0" u="none" strike="noStrike" dirty="0">
+                <a:solidFill>
+                  <a:schemeClr val="dk1"/>
+                </a:solidFill>
+                <a:effectLst/>
+                <a:uFillTx/>
+                <a:latin typeface="Manrope"/>
+              </a:rPr>
+              <a:t>Methods were chosen for clarity and efficiency, balancing rigor with simplicity to produce </a:t>
+            </a:r>
+            <a:r>
+              <a:rPr lang="en-US" sz="1400" b="1" u="none" strike="noStrike" dirty="0">
+                <a:solidFill>
+                  <a:schemeClr val="dk1"/>
+                </a:solidFill>
+                <a:effectLst/>
+                <a:uFillTx/>
+                <a:latin typeface="Manrope"/>
+              </a:rPr>
+              <a:t>reproducible</a:t>
+            </a:r>
+            <a:r>
+              <a:rPr lang="en-US" sz="1400" b="0" u="none" strike="noStrike" dirty="0">
+                <a:solidFill>
+                  <a:schemeClr val="dk1"/>
+                </a:solidFill>
+                <a:effectLst/>
+                <a:uFillTx/>
+                <a:latin typeface="Manrope"/>
+              </a:rPr>
+              <a:t> results.</a:t>
+            </a:r>
+            <a:endParaRPr lang="en-US" sz="1400" b="0" u="none" strike="noStrike" dirty="0">
+              <a:solidFill>
+                <a:srgbClr val="000000"/>
+              </a:solidFill>
+              <a:effectLst/>
+              <a:uFillTx/>
+              <a:latin typeface="OpenSymbol"/>
+            </a:endParaRPr>
+          </a:p>
+        </p:txBody>
+      </p:sp>
+      <p:sp>
+        <p:nvSpPr>
+          <p:cNvPr id="3" name="Rectangle 2">
+            <a:extLst>
+              <a:ext uri="{FF2B5EF4-FFF2-40B4-BE49-F238E27FC236}">
+                <a16:creationId xmlns:a16="http://schemas.microsoft.com/office/drawing/2014/main" id="{B5AA8D13-79B5-05DD-0D10-531A85CB0583}"/>
               </a:ext>
             </a:extLst>
           </p:cNvPr>
@@ -24172,7 +25218,7 @@
     </p:spTree>
     <p:extLst>
       <p:ext uri="{BB962C8B-B14F-4D97-AF65-F5344CB8AC3E}">
-        <p14:creationId xmlns:p14="http://schemas.microsoft.com/office/powerpoint/2010/main" val="2474979524"/>
+        <p14:creationId xmlns:p14="http://schemas.microsoft.com/office/powerpoint/2010/main" val="1778265594"/>
       </p:ext>
     </p:extLst>
   </p:cSld>
@@ -24182,7 +25228,7 @@
 </p:sld>
 </file>
 
-<file path=ppt/slides/slide3.xml><?xml version="1.0" encoding="utf-8"?>
+<file path=ppt/slides/slide2.xml><?xml version="1.0" encoding="utf-8"?>
 <p:sld xmlns:a="http://schemas.openxmlformats.org/drawingml/2006/main" xmlns:r="http://schemas.openxmlformats.org/officeDocument/2006/relationships" xmlns:p="http://schemas.openxmlformats.org/presentationml/2006/main">
   <p:cSld>
     <p:spTree>
@@ -24474,7 +25520,7 @@
                 </a:solidFill>
                 <a:latin typeface="Manrope"/>
               </a:rPr>
-              <a:t>Integration with external services (online payment gateways).</a:t>
+              <a:t>Integration with external services (e.g., online payment gateways).</a:t>
             </a:r>
           </a:p>
           <a:p>
@@ -24645,7 +25691,8 @@
                 <a:alpha val="40000"/>
               </a:prstClr>
             </a:outerShdw>
-            <a:reflection blurRad="6350" stA="50000" endA="275" endPos="40000" dist="101600" dir="5400000" sy="-100000" algn="bl" rotWithShape="0"/>
+            <a:reflection blurRad="25400" stA="50000" endPos="35000" dir="5400000" sy="-100000" algn="bl" rotWithShape="0"/>
+            <a:softEdge rad="0"/>
           </a:effectLst>
         </p:spPr>
       </p:pic>
@@ -24708,7 +25755,7 @@
 </p:sld>
 </file>
 
-<file path=ppt/slides/slide4.xml><?xml version="1.0" encoding="utf-8"?>
+<file path=ppt/slides/slide3.xml><?xml version="1.0" encoding="utf-8"?>
 <p:sld xmlns:a="http://schemas.openxmlformats.org/drawingml/2006/main" xmlns:r="http://schemas.openxmlformats.org/officeDocument/2006/relationships" xmlns:p="http://schemas.openxmlformats.org/presentationml/2006/main">
   <p:cSld>
     <p:spTree>
@@ -24864,7 +25911,7 @@
         </p:nvGrpSpPr>
         <p:grpSpPr>
           <a:xfrm>
-            <a:off x="476280" y="1123359"/>
+            <a:off x="707671" y="1137536"/>
             <a:ext cx="1851582" cy="1884636"/>
             <a:chOff x="1422435" y="1324811"/>
             <a:chExt cx="1851582" cy="1884636"/>
@@ -25268,7 +26315,7 @@
         </p:nvGrpSpPr>
         <p:grpSpPr>
           <a:xfrm>
-            <a:off x="3170673" y="1123359"/>
+            <a:off x="3402064" y="1137536"/>
             <a:ext cx="1851582" cy="1884636"/>
             <a:chOff x="5171191" y="1315058"/>
             <a:chExt cx="1851582" cy="1884636"/>
@@ -25642,7 +26689,7 @@
         </p:nvGrpSpPr>
         <p:grpSpPr>
           <a:xfrm>
-            <a:off x="5865066" y="1123359"/>
+            <a:off x="6096457" y="1137536"/>
             <a:ext cx="1851582" cy="1884636"/>
             <a:chOff x="8758042" y="1382014"/>
             <a:chExt cx="1851582" cy="1884636"/>
@@ -26019,7 +27066,7 @@
         </p:nvSpPr>
         <p:spPr>
           <a:xfrm>
-            <a:off x="244889" y="3188421"/>
+            <a:off x="476280" y="3202598"/>
             <a:ext cx="2464444" cy="1820039"/>
           </a:xfrm>
           <a:prstGeom prst="rect">
@@ -26140,7 +27187,7 @@
         </p:nvSpPr>
         <p:spPr>
           <a:xfrm>
-            <a:off x="2902437" y="3188421"/>
+            <a:off x="3133828" y="3202598"/>
             <a:ext cx="2617829" cy="1820039"/>
           </a:xfrm>
           <a:prstGeom prst="rect">
@@ -26238,7 +27285,7 @@
         </p:nvSpPr>
         <p:spPr>
           <a:xfrm>
-            <a:off x="5596830" y="3188420"/>
+            <a:off x="5828221" y="3202597"/>
             <a:ext cx="2378769" cy="1326873"/>
           </a:xfrm>
           <a:prstGeom prst="rect">
@@ -26335,7 +27382,583 @@
 </p:sld>
 </file>
 
+<file path=ppt/slides/slide4.xml><?xml version="1.0" encoding="utf-8"?>
+<p:sld xmlns:a="http://schemas.openxmlformats.org/drawingml/2006/main" xmlns:r="http://schemas.openxmlformats.org/officeDocument/2006/relationships" xmlns:p="http://schemas.openxmlformats.org/presentationml/2006/main">
+  <p:cSld>
+    <p:spTree>
+      <p:nvGrpSpPr>
+        <p:cNvPr id="1" name="">
+          <a:extLst>
+            <a:ext uri="{FF2B5EF4-FFF2-40B4-BE49-F238E27FC236}">
+              <a16:creationId xmlns:a16="http://schemas.microsoft.com/office/drawing/2014/main" id="{9450C2F9-E3BC-C18F-DDA8-64C25CF972DE}"/>
+            </a:ext>
+          </a:extLst>
+        </p:cNvPr>
+        <p:cNvGrpSpPr/>
+        <p:nvPr/>
+      </p:nvGrpSpPr>
+      <p:grpSpPr>
+        <a:xfrm>
+          <a:off x="0" y="0"/>
+          <a:ext cx="0" cy="0"/>
+          <a:chOff x="0" y="0"/>
+          <a:chExt cx="0" cy="0"/>
+        </a:xfrm>
+      </p:grpSpPr>
+      <p:sp>
+        <p:nvSpPr>
+          <p:cNvPr id="407" name="Rectangle 406">
+            <a:extLst>
+              <a:ext uri="{FF2B5EF4-FFF2-40B4-BE49-F238E27FC236}">
+                <a16:creationId xmlns:a16="http://schemas.microsoft.com/office/drawing/2014/main" id="{99076059-73B0-F9A6-E610-5FD32253D975}"/>
+              </a:ext>
+            </a:extLst>
+          </p:cNvPr>
+          <p:cNvSpPr/>
+          <p:nvPr/>
+        </p:nvSpPr>
+        <p:spPr>
+          <a:xfrm>
+            <a:off x="476280" y="476460"/>
+            <a:ext cx="8191080" cy="466473"/>
+          </a:xfrm>
+          <a:prstGeom prst="rect">
+            <a:avLst/>
+          </a:prstGeom>
+          <a:noFill/>
+          <a:ln w="0">
+            <a:noFill/>
+          </a:ln>
+        </p:spPr>
+        <p:style>
+          <a:lnRef idx="0">
+            <a:scrgbClr r="0" g="0" b="0"/>
+          </a:lnRef>
+          <a:fillRef idx="0">
+            <a:scrgbClr r="0" g="0" b="0"/>
+          </a:fillRef>
+          <a:effectRef idx="0">
+            <a:scrgbClr r="0" g="0" b="0"/>
+          </a:effectRef>
+          <a:fontRef idx="minor"/>
+        </p:style>
+        <p:txBody>
+          <a:bodyPr anchor="t">
+            <a:normAutofit/>
+          </a:bodyPr>
+          <a:lstStyle/>
+          <a:p>
+            <a:pPr defTabSz="914400">
+              <a:lnSpc>
+                <a:spcPct val="100000"/>
+              </a:lnSpc>
+              <a:tabLst>
+                <a:tab pos="0" algn="l"/>
+              </a:tabLst>
+            </a:pPr>
+            <a:r>
+              <a:rPr lang="en-US" sz="2400" b="1" u="none" strike="noStrike" dirty="0">
+                <a:solidFill>
+                  <a:schemeClr val="dk1"/>
+                </a:solidFill>
+                <a:effectLst/>
+                <a:uFillTx/>
+                <a:latin typeface="Archivo Black"/>
+              </a:rPr>
+              <a:t>Smart Travel – Homepage</a:t>
+            </a:r>
+            <a:endParaRPr lang="en-US" sz="2400" b="1" u="none" strike="noStrike" dirty="0">
+              <a:solidFill>
+                <a:srgbClr val="000000"/>
+              </a:solidFill>
+              <a:effectLst/>
+              <a:uFillTx/>
+              <a:latin typeface="OpenSymbol"/>
+            </a:endParaRPr>
+          </a:p>
+        </p:txBody>
+      </p:sp>
+      <p:sp>
+        <p:nvSpPr>
+          <p:cNvPr id="3" name="Rectangle 2">
+            <a:extLst>
+              <a:ext uri="{FF2B5EF4-FFF2-40B4-BE49-F238E27FC236}">
+                <a16:creationId xmlns:a16="http://schemas.microsoft.com/office/drawing/2014/main" id="{076299EA-9275-2332-AAE5-E7CDD7A15555}"/>
+              </a:ext>
+            </a:extLst>
+          </p:cNvPr>
+          <p:cNvSpPr/>
+          <p:nvPr/>
+        </p:nvSpPr>
+        <p:spPr>
+          <a:xfrm>
+            <a:off x="118108" y="529696"/>
+            <a:ext cx="180000" cy="360000"/>
+          </a:xfrm>
+          <a:prstGeom prst="rect">
+            <a:avLst/>
+          </a:prstGeom>
+        </p:spPr>
+        <p:style>
+          <a:lnRef idx="2">
+            <a:schemeClr val="dk1">
+              <a:shade val="15000"/>
+            </a:schemeClr>
+          </a:lnRef>
+          <a:fillRef idx="1">
+            <a:schemeClr val="dk1"/>
+          </a:fillRef>
+          <a:effectRef idx="0">
+            <a:schemeClr val="dk1"/>
+          </a:effectRef>
+          <a:fontRef idx="minor">
+            <a:schemeClr val="lt1"/>
+          </a:fontRef>
+        </p:style>
+        <p:txBody>
+          <a:bodyPr rtlCol="0" anchor="ctr"/>
+          <a:lstStyle/>
+          <a:p>
+            <a:pPr algn="ctr"/>
+            <a:endParaRPr lang="en-IT"/>
+          </a:p>
+        </p:txBody>
+      </p:sp>
+      <p:pic>
+        <p:nvPicPr>
+          <p:cNvPr id="5" name="Picture 4">
+            <a:extLst>
+              <a:ext uri="{FF2B5EF4-FFF2-40B4-BE49-F238E27FC236}">
+                <a16:creationId xmlns:a16="http://schemas.microsoft.com/office/drawing/2014/main" id="{E2956843-4F72-D470-CA36-999494D2C834}"/>
+              </a:ext>
+            </a:extLst>
+          </p:cNvPr>
+          <p:cNvPicPr>
+            <a:picLocks noChangeAspect="1"/>
+          </p:cNvPicPr>
+          <p:nvPr/>
+        </p:nvPicPr>
+        <p:blipFill rotWithShape="1">
+          <a:blip r:embed="rId3">
+            <a:extLst>
+              <a:ext uri="{28A0092B-C50C-407E-A947-70E740481C1C}">
+                <a14:useLocalDpi xmlns:a14="http://schemas.microsoft.com/office/drawing/2010/main" val="0"/>
+              </a:ext>
+            </a:extLst>
+          </a:blip>
+          <a:srcRect l="-21" t="-1" r="-1" b="5938"/>
+          <a:stretch>
+            <a:fillRect/>
+          </a:stretch>
+        </p:blipFill>
+        <p:spPr>
+          <a:xfrm>
+            <a:off x="476280" y="942933"/>
+            <a:ext cx="6400800" cy="4118165"/>
+          </a:xfrm>
+          <a:prstGeom prst="rect">
+            <a:avLst/>
+          </a:prstGeom>
+        </p:spPr>
+      </p:pic>
+    </p:spTree>
+    <p:extLst>
+      <p:ext uri="{BB962C8B-B14F-4D97-AF65-F5344CB8AC3E}">
+        <p14:creationId xmlns:p14="http://schemas.microsoft.com/office/powerpoint/2010/main" val="1431631614"/>
+      </p:ext>
+    </p:extLst>
+  </p:cSld>
+  <p:clrMapOvr>
+    <a:masterClrMapping/>
+  </p:clrMapOvr>
+</p:sld>
+</file>
+
 <file path=ppt/slides/slide5.xml><?xml version="1.0" encoding="utf-8"?>
+<p:sld xmlns:a="http://schemas.openxmlformats.org/drawingml/2006/main" xmlns:r="http://schemas.openxmlformats.org/officeDocument/2006/relationships" xmlns:p="http://schemas.openxmlformats.org/presentationml/2006/main">
+  <p:cSld>
+    <p:spTree>
+      <p:nvGrpSpPr>
+        <p:cNvPr id="1" name="">
+          <a:extLst>
+            <a:ext uri="{FF2B5EF4-FFF2-40B4-BE49-F238E27FC236}">
+              <a16:creationId xmlns:a16="http://schemas.microsoft.com/office/drawing/2014/main" id="{24D6A400-FEA0-CFD1-F5AC-362E82CA7338}"/>
+            </a:ext>
+          </a:extLst>
+        </p:cNvPr>
+        <p:cNvGrpSpPr/>
+        <p:nvPr/>
+      </p:nvGrpSpPr>
+      <p:grpSpPr>
+        <a:xfrm>
+          <a:off x="0" y="0"/>
+          <a:ext cx="0" cy="0"/>
+          <a:chOff x="0" y="0"/>
+          <a:chExt cx="0" cy="0"/>
+        </a:xfrm>
+      </p:grpSpPr>
+      <p:sp>
+        <p:nvSpPr>
+          <p:cNvPr id="407" name="Rectangle 406">
+            <a:extLst>
+              <a:ext uri="{FF2B5EF4-FFF2-40B4-BE49-F238E27FC236}">
+                <a16:creationId xmlns:a16="http://schemas.microsoft.com/office/drawing/2014/main" id="{84389CCD-B2D9-EF17-302D-103EAF8057D0}"/>
+              </a:ext>
+            </a:extLst>
+          </p:cNvPr>
+          <p:cNvSpPr/>
+          <p:nvPr/>
+        </p:nvSpPr>
+        <p:spPr>
+          <a:xfrm>
+            <a:off x="476280" y="476460"/>
+            <a:ext cx="8191080" cy="466473"/>
+          </a:xfrm>
+          <a:prstGeom prst="rect">
+            <a:avLst/>
+          </a:prstGeom>
+          <a:noFill/>
+          <a:ln w="0">
+            <a:noFill/>
+          </a:ln>
+        </p:spPr>
+        <p:style>
+          <a:lnRef idx="0">
+            <a:scrgbClr r="0" g="0" b="0"/>
+          </a:lnRef>
+          <a:fillRef idx="0">
+            <a:scrgbClr r="0" g="0" b="0"/>
+          </a:fillRef>
+          <a:effectRef idx="0">
+            <a:scrgbClr r="0" g="0" b="0"/>
+          </a:effectRef>
+          <a:fontRef idx="minor"/>
+        </p:style>
+        <p:txBody>
+          <a:bodyPr anchor="t">
+            <a:normAutofit/>
+          </a:bodyPr>
+          <a:lstStyle/>
+          <a:p>
+            <a:pPr defTabSz="914400">
+              <a:lnSpc>
+                <a:spcPct val="100000"/>
+              </a:lnSpc>
+              <a:tabLst>
+                <a:tab pos="0" algn="l"/>
+              </a:tabLst>
+            </a:pPr>
+            <a:r>
+              <a:rPr lang="en-US" sz="2400" b="1" u="none" strike="noStrike" dirty="0">
+                <a:solidFill>
+                  <a:schemeClr val="dk1"/>
+                </a:solidFill>
+                <a:effectLst/>
+                <a:uFillTx/>
+                <a:latin typeface="Archivo Black"/>
+              </a:rPr>
+              <a:t>Smart Travel – Flight Search</a:t>
+            </a:r>
+            <a:endParaRPr lang="en-US" sz="2400" b="1" u="none" strike="noStrike" dirty="0">
+              <a:solidFill>
+                <a:srgbClr val="000000"/>
+              </a:solidFill>
+              <a:effectLst/>
+              <a:uFillTx/>
+              <a:latin typeface="OpenSymbol"/>
+            </a:endParaRPr>
+          </a:p>
+        </p:txBody>
+      </p:sp>
+      <p:sp>
+        <p:nvSpPr>
+          <p:cNvPr id="3" name="Rectangle 2">
+            <a:extLst>
+              <a:ext uri="{FF2B5EF4-FFF2-40B4-BE49-F238E27FC236}">
+                <a16:creationId xmlns:a16="http://schemas.microsoft.com/office/drawing/2014/main" id="{A6A3EAC4-1F17-0372-8ACC-7AB77D74B430}"/>
+              </a:ext>
+            </a:extLst>
+          </p:cNvPr>
+          <p:cNvSpPr/>
+          <p:nvPr/>
+        </p:nvSpPr>
+        <p:spPr>
+          <a:xfrm>
+            <a:off x="118108" y="529696"/>
+            <a:ext cx="180000" cy="360000"/>
+          </a:xfrm>
+          <a:prstGeom prst="rect">
+            <a:avLst/>
+          </a:prstGeom>
+        </p:spPr>
+        <p:style>
+          <a:lnRef idx="2">
+            <a:schemeClr val="dk1">
+              <a:shade val="15000"/>
+            </a:schemeClr>
+          </a:lnRef>
+          <a:fillRef idx="1">
+            <a:schemeClr val="dk1"/>
+          </a:fillRef>
+          <a:effectRef idx="0">
+            <a:schemeClr val="dk1"/>
+          </a:effectRef>
+          <a:fontRef idx="minor">
+            <a:schemeClr val="lt1"/>
+          </a:fontRef>
+        </p:style>
+        <p:txBody>
+          <a:bodyPr rtlCol="0" anchor="ctr"/>
+          <a:lstStyle/>
+          <a:p>
+            <a:pPr algn="ctr"/>
+            <a:endParaRPr lang="en-IT"/>
+          </a:p>
+        </p:txBody>
+      </p:sp>
+      <p:pic>
+        <p:nvPicPr>
+          <p:cNvPr id="4" name="Picture 3">
+            <a:extLst>
+              <a:ext uri="{FF2B5EF4-FFF2-40B4-BE49-F238E27FC236}">
+                <a16:creationId xmlns:a16="http://schemas.microsoft.com/office/drawing/2014/main" id="{DA8FB4D6-BE38-6D3A-77C4-35D54B0C30C5}"/>
+              </a:ext>
+            </a:extLst>
+          </p:cNvPr>
+          <p:cNvPicPr>
+            <a:picLocks noChangeAspect="1"/>
+          </p:cNvPicPr>
+          <p:nvPr/>
+        </p:nvPicPr>
+        <p:blipFill>
+          <a:blip r:embed="rId3">
+            <a:extLst>
+              <a:ext uri="{28A0092B-C50C-407E-A947-70E740481C1C}">
+                <a14:useLocalDpi xmlns:a14="http://schemas.microsoft.com/office/drawing/2010/main" val="0"/>
+              </a:ext>
+            </a:extLst>
+          </a:blip>
+          <a:srcRect b="32953"/>
+          <a:stretch>
+            <a:fillRect/>
+          </a:stretch>
+        </p:blipFill>
+        <p:spPr>
+          <a:xfrm>
+            <a:off x="476280" y="942933"/>
+            <a:ext cx="7772400" cy="3444949"/>
+          </a:xfrm>
+          <a:prstGeom prst="rect">
+            <a:avLst/>
+          </a:prstGeom>
+        </p:spPr>
+      </p:pic>
+    </p:spTree>
+    <p:extLst>
+      <p:ext uri="{BB962C8B-B14F-4D97-AF65-F5344CB8AC3E}">
+        <p14:creationId xmlns:p14="http://schemas.microsoft.com/office/powerpoint/2010/main" val="2342121853"/>
+      </p:ext>
+    </p:extLst>
+  </p:cSld>
+  <p:clrMapOvr>
+    <a:masterClrMapping/>
+  </p:clrMapOvr>
+</p:sld>
+</file>
+
+<file path=ppt/slides/slide6.xml><?xml version="1.0" encoding="utf-8"?>
+<p:sld xmlns:a="http://schemas.openxmlformats.org/drawingml/2006/main" xmlns:r="http://schemas.openxmlformats.org/officeDocument/2006/relationships" xmlns:p="http://schemas.openxmlformats.org/presentationml/2006/main">
+  <p:cSld>
+    <p:spTree>
+      <p:nvGrpSpPr>
+        <p:cNvPr id="1" name="">
+          <a:extLst>
+            <a:ext uri="{FF2B5EF4-FFF2-40B4-BE49-F238E27FC236}">
+              <a16:creationId xmlns:a16="http://schemas.microsoft.com/office/drawing/2014/main" id="{790F8E53-8F85-60CA-E757-7D6A4C8E540C}"/>
+            </a:ext>
+          </a:extLst>
+        </p:cNvPr>
+        <p:cNvGrpSpPr/>
+        <p:nvPr/>
+      </p:nvGrpSpPr>
+      <p:grpSpPr>
+        <a:xfrm>
+          <a:off x="0" y="0"/>
+          <a:ext cx="0" cy="0"/>
+          <a:chOff x="0" y="0"/>
+          <a:chExt cx="0" cy="0"/>
+        </a:xfrm>
+      </p:grpSpPr>
+      <p:sp>
+        <p:nvSpPr>
+          <p:cNvPr id="407" name="Rectangle 406">
+            <a:extLst>
+              <a:ext uri="{FF2B5EF4-FFF2-40B4-BE49-F238E27FC236}">
+                <a16:creationId xmlns:a16="http://schemas.microsoft.com/office/drawing/2014/main" id="{6B7A33C4-3865-5AAE-6906-702EC0427D60}"/>
+              </a:ext>
+            </a:extLst>
+          </p:cNvPr>
+          <p:cNvSpPr/>
+          <p:nvPr/>
+        </p:nvSpPr>
+        <p:spPr>
+          <a:xfrm>
+            <a:off x="476280" y="476460"/>
+            <a:ext cx="8191080" cy="466473"/>
+          </a:xfrm>
+          <a:prstGeom prst="rect">
+            <a:avLst/>
+          </a:prstGeom>
+          <a:noFill/>
+          <a:ln w="0">
+            <a:noFill/>
+          </a:ln>
+        </p:spPr>
+        <p:style>
+          <a:lnRef idx="0">
+            <a:scrgbClr r="0" g="0" b="0"/>
+          </a:lnRef>
+          <a:fillRef idx="0">
+            <a:scrgbClr r="0" g="0" b="0"/>
+          </a:fillRef>
+          <a:effectRef idx="0">
+            <a:scrgbClr r="0" g="0" b="0"/>
+          </a:effectRef>
+          <a:fontRef idx="minor"/>
+        </p:style>
+        <p:txBody>
+          <a:bodyPr anchor="t">
+            <a:normAutofit/>
+          </a:bodyPr>
+          <a:lstStyle/>
+          <a:p>
+            <a:pPr defTabSz="914400">
+              <a:lnSpc>
+                <a:spcPct val="100000"/>
+              </a:lnSpc>
+              <a:tabLst>
+                <a:tab pos="0" algn="l"/>
+              </a:tabLst>
+            </a:pPr>
+            <a:r>
+              <a:rPr lang="en-US" sz="2400" b="1" u="none" strike="noStrike" dirty="0">
+                <a:solidFill>
+                  <a:schemeClr val="dk1"/>
+                </a:solidFill>
+                <a:effectLst/>
+                <a:uFillTx/>
+                <a:latin typeface="Archivo Black"/>
+              </a:rPr>
+              <a:t>Smart Travel – Checkout</a:t>
+            </a:r>
+            <a:endParaRPr lang="en-US" sz="2400" b="1" u="none" strike="noStrike" dirty="0">
+              <a:solidFill>
+                <a:srgbClr val="000000"/>
+              </a:solidFill>
+              <a:effectLst/>
+              <a:uFillTx/>
+              <a:latin typeface="OpenSymbol"/>
+            </a:endParaRPr>
+          </a:p>
+        </p:txBody>
+      </p:sp>
+      <p:sp>
+        <p:nvSpPr>
+          <p:cNvPr id="3" name="Rectangle 2">
+            <a:extLst>
+              <a:ext uri="{FF2B5EF4-FFF2-40B4-BE49-F238E27FC236}">
+                <a16:creationId xmlns:a16="http://schemas.microsoft.com/office/drawing/2014/main" id="{3D026C72-8A2F-E9BB-382A-F1367C396C32}"/>
+              </a:ext>
+            </a:extLst>
+          </p:cNvPr>
+          <p:cNvSpPr/>
+          <p:nvPr/>
+        </p:nvSpPr>
+        <p:spPr>
+          <a:xfrm>
+            <a:off x="118108" y="529696"/>
+            <a:ext cx="180000" cy="360000"/>
+          </a:xfrm>
+          <a:prstGeom prst="rect">
+            <a:avLst/>
+          </a:prstGeom>
+        </p:spPr>
+        <p:style>
+          <a:lnRef idx="2">
+            <a:schemeClr val="dk1">
+              <a:shade val="15000"/>
+            </a:schemeClr>
+          </a:lnRef>
+          <a:fillRef idx="1">
+            <a:schemeClr val="dk1"/>
+          </a:fillRef>
+          <a:effectRef idx="0">
+            <a:schemeClr val="dk1"/>
+          </a:effectRef>
+          <a:fontRef idx="minor">
+            <a:schemeClr val="lt1"/>
+          </a:fontRef>
+        </p:style>
+        <p:txBody>
+          <a:bodyPr rtlCol="0" anchor="ctr"/>
+          <a:lstStyle/>
+          <a:p>
+            <a:pPr algn="ctr"/>
+            <a:endParaRPr lang="en-IT"/>
+          </a:p>
+        </p:txBody>
+      </p:sp>
+      <p:pic>
+        <p:nvPicPr>
+          <p:cNvPr id="5" name="Picture 4">
+            <a:extLst>
+              <a:ext uri="{FF2B5EF4-FFF2-40B4-BE49-F238E27FC236}">
+                <a16:creationId xmlns:a16="http://schemas.microsoft.com/office/drawing/2014/main" id="{1D18FDCA-E6FF-FF92-1B6E-BEC53FD9418E}"/>
+              </a:ext>
+            </a:extLst>
+          </p:cNvPr>
+          <p:cNvPicPr>
+            <a:picLocks noChangeAspect="1"/>
+          </p:cNvPicPr>
+          <p:nvPr/>
+        </p:nvPicPr>
+        <p:blipFill>
+          <a:blip r:embed="rId3">
+            <a:extLst>
+              <a:ext uri="{28A0092B-C50C-407E-A947-70E740481C1C}">
+                <a14:useLocalDpi xmlns:a14="http://schemas.microsoft.com/office/drawing/2010/main" val="0"/>
+              </a:ext>
+            </a:extLst>
+          </a:blip>
+          <a:srcRect b="13363"/>
+          <a:stretch>
+            <a:fillRect/>
+          </a:stretch>
+        </p:blipFill>
+        <p:spPr>
+          <a:xfrm>
+            <a:off x="476280" y="942933"/>
+            <a:ext cx="6810567" cy="3900626"/>
+          </a:xfrm>
+          <a:prstGeom prst="rect">
+            <a:avLst/>
+          </a:prstGeom>
+        </p:spPr>
+      </p:pic>
+    </p:spTree>
+    <p:extLst>
+      <p:ext uri="{BB962C8B-B14F-4D97-AF65-F5344CB8AC3E}">
+        <p14:creationId xmlns:p14="http://schemas.microsoft.com/office/powerpoint/2010/main" val="2110113554"/>
+      </p:ext>
+    </p:extLst>
+  </p:cSld>
+  <p:clrMapOvr>
+    <a:masterClrMapping/>
+  </p:clrMapOvr>
+</p:sld>
+</file>
+
+<file path=ppt/slides/slide7.xml><?xml version="1.0" encoding="utf-8"?>
 <p:sld xmlns:a="http://schemas.openxmlformats.org/drawingml/2006/main" xmlns:r="http://schemas.openxmlformats.org/officeDocument/2006/relationships" xmlns:p="http://schemas.openxmlformats.org/presentationml/2006/main">
   <p:cSld>
     <p:spTree>
@@ -26479,10 +28102,10 @@
       </p:sp>
       <p:grpSp>
         <p:nvGrpSpPr>
-          <p:cNvPr id="391" name="Group 390">
+          <p:cNvPr id="508" name="Group 507">
             <a:extLst>
               <a:ext uri="{FF2B5EF4-FFF2-40B4-BE49-F238E27FC236}">
-                <a16:creationId xmlns:a16="http://schemas.microsoft.com/office/drawing/2014/main" id="{BDD0A289-DF64-58C4-7659-EA02591855B8}"/>
+                <a16:creationId xmlns:a16="http://schemas.microsoft.com/office/drawing/2014/main" id="{A16327D1-CF20-2CC0-DC41-93BE01582950}"/>
               </a:ext>
             </a:extLst>
           </p:cNvPr>
@@ -26493,12 +28116,9 @@
           <a:xfrm>
             <a:off x="118108" y="1265759"/>
             <a:ext cx="2880000" cy="1800000"/>
-            <a:chOff x="583600" y="1304933"/>
-            <a:chExt cx="3639800" cy="2322000"/>
+            <a:chOff x="118108" y="1265759"/>
+            <a:chExt cx="2880000" cy="1800000"/>
           </a:xfrm>
-          <a:solidFill>
-            <a:schemeClr val="tx1"/>
-          </a:solidFill>
         </p:grpSpPr>
         <p:sp>
           <p:nvSpPr>
@@ -26514,13 +28134,15 @@
           </p:nvSpPr>
           <p:spPr>
             <a:xfrm>
-              <a:off x="583800" y="1304933"/>
-              <a:ext cx="3639600" cy="2322000"/>
+              <a:off x="118266" y="1265759"/>
+              <a:ext cx="2879842" cy="1800000"/>
             </a:xfrm>
             <a:prstGeom prst="rect">
               <a:avLst/>
             </a:prstGeom>
-            <a:grpFill/>
+            <a:solidFill>
+              <a:schemeClr val="tx1"/>
+            </a:solidFill>
             <a:ln>
               <a:noFill/>
             </a:ln>
@@ -26606,13 +28228,15 @@
           </p:blipFill>
           <p:spPr>
             <a:xfrm>
-              <a:off x="857801" y="1866885"/>
-              <a:ext cx="591967" cy="591967"/>
+              <a:off x="335070" y="1701381"/>
+              <a:ext cx="468395" cy="458889"/>
             </a:xfrm>
             <a:prstGeom prst="rect">
               <a:avLst/>
             </a:prstGeom>
-            <a:grpFill/>
+            <a:solidFill>
+              <a:schemeClr val="tx1"/>
+            </a:solidFill>
             <a:ln>
               <a:noFill/>
             </a:ln>
@@ -26634,13 +28258,15 @@
           </p:nvSpPr>
           <p:spPr>
             <a:xfrm>
-              <a:off x="583600" y="1418551"/>
-              <a:ext cx="3639600" cy="362400"/>
+              <a:off x="118108" y="1353835"/>
+              <a:ext cx="2879842" cy="280930"/>
             </a:xfrm>
             <a:prstGeom prst="rect">
               <a:avLst/>
             </a:prstGeom>
-            <a:grpFill/>
+            <a:solidFill>
+              <a:schemeClr val="tx1"/>
+            </a:solidFill>
             <a:ln>
               <a:noFill/>
             </a:ln>
@@ -26880,13 +28506,15 @@
           </p:nvSpPr>
           <p:spPr>
             <a:xfrm>
-              <a:off x="1733187" y="1866884"/>
-              <a:ext cx="2469379" cy="486000"/>
+              <a:off x="1027721" y="1701380"/>
+              <a:ext cx="1953902" cy="376744"/>
             </a:xfrm>
             <a:prstGeom prst="rect">
               <a:avLst/>
             </a:prstGeom>
-            <a:grpFill/>
+            <a:solidFill>
+              <a:schemeClr val="tx1"/>
+            </a:solidFill>
             <a:ln w="9525" cap="flat" cmpd="sng">
               <a:noFill/>
               <a:prstDash val="solid"/>
@@ -26933,13 +28561,15 @@
           </p:nvSpPr>
           <p:spPr>
             <a:xfrm>
-              <a:off x="1723736" y="2634033"/>
-              <a:ext cx="2478846" cy="486000"/>
+              <a:off x="1020243" y="2296069"/>
+              <a:ext cx="1961393" cy="376744"/>
             </a:xfrm>
             <a:prstGeom prst="rect">
               <a:avLst/>
             </a:prstGeom>
-            <a:grpFill/>
+            <a:solidFill>
+              <a:schemeClr val="tx1"/>
+            </a:solidFill>
             <a:ln w="9525" cap="flat" cmpd="sng">
               <a:noFill/>
               <a:prstDash val="solid"/>
@@ -26986,12 +28616,14 @@
           </p:nvGrpSpPr>
           <p:grpSpPr>
             <a:xfrm>
-              <a:off x="861753" y="2657666"/>
-              <a:ext cx="602201" cy="591967"/>
+              <a:off x="338197" y="2314389"/>
+              <a:ext cx="476493" cy="458889"/>
               <a:chOff x="861753" y="2657666"/>
               <a:chExt cx="602201" cy="591967"/>
             </a:xfrm>
-            <a:grpFill/>
+            <a:solidFill>
+              <a:schemeClr val="bg1"/>
+            </a:solidFill>
           </p:grpSpPr>
           <p:sp>
             <p:nvSpPr>
@@ -27066,7 +28698,7 @@
               <a:prstGeom prst="rect">
                 <a:avLst/>
               </a:prstGeom>
-              <a:grpFill/>
+              <a:noFill/>
             </p:spPr>
           </p:pic>
         </p:grpSp>
@@ -28074,23 +29706,8 @@
                   </a:solidFill>
                   <a:latin typeface="Manrope"/>
                 </a:rPr>
-                <a:t>Event </a:t>
+                <a:t>Event Handling</a:t>
               </a:r>
-              <a:r>
-                <a:rPr lang="it-IT" sz="1800" b="1" dirty="0" err="1">
-                  <a:solidFill>
-                    <a:schemeClr val="bg1"/>
-                  </a:solidFill>
-                  <a:latin typeface="Manrope"/>
-                </a:rPr>
-                <a:t>handling</a:t>
-              </a:r>
-              <a:endParaRPr lang="it-IT" sz="1800" b="1" dirty="0">
-                <a:solidFill>
-                  <a:schemeClr val="bg1"/>
-                </a:solidFill>
-                <a:latin typeface="Manrope"/>
-              </a:endParaRPr>
             </a:p>
             <a:p>
               <a:pPr>
@@ -29656,7 +31273,7 @@
                   </a:solidFill>
                   <a:latin typeface="Manrope"/>
                 </a:rPr>
-                <a:t>Design &amp; API Testing</a:t>
+                <a:t>API Design &amp; Testing</a:t>
               </a:r>
             </a:p>
             <a:p>
@@ -30685,18 +32302,12 @@
 </p:sld>
 </file>
 
-<file path=ppt/slides/slide6.xml><?xml version="1.0" encoding="utf-8"?>
+<file path=ppt/slides/slide8.xml><?xml version="1.0" encoding="utf-8"?>
 <p:sld xmlns:a="http://schemas.openxmlformats.org/drawingml/2006/main" xmlns:r="http://schemas.openxmlformats.org/officeDocument/2006/relationships" xmlns:p="http://schemas.openxmlformats.org/presentationml/2006/main">
   <p:cSld>
     <p:spTree>
       <p:nvGrpSpPr>
-        <p:cNvPr id="1" name="">
-          <a:extLst>
-            <a:ext uri="{FF2B5EF4-FFF2-40B4-BE49-F238E27FC236}">
-              <a16:creationId xmlns:a16="http://schemas.microsoft.com/office/drawing/2014/main" id="{85169A71-67E5-E851-03B4-73F7034EA989}"/>
-            </a:ext>
-          </a:extLst>
-        </p:cNvPr>
+        <p:cNvPr id="1" name=""/>
         <p:cNvGrpSpPr/>
         <p:nvPr/>
       </p:nvGrpSpPr>
@@ -30710,10 +32321,261 @@
       </p:grpSpPr>
       <p:sp>
         <p:nvSpPr>
-          <p:cNvPr id="407" name="Rectangle 406">
+          <p:cNvPr id="3" name="Text Placeholder 2">
             <a:extLst>
               <a:ext uri="{FF2B5EF4-FFF2-40B4-BE49-F238E27FC236}">
-                <a16:creationId xmlns:a16="http://schemas.microsoft.com/office/drawing/2014/main" id="{A2F94655-2632-EF21-9853-0138F9CFB411}"/>
+                <a16:creationId xmlns:a16="http://schemas.microsoft.com/office/drawing/2014/main" id="{C5759D88-3F1A-77BE-BBE9-158BACD3B926}"/>
+              </a:ext>
+            </a:extLst>
+          </p:cNvPr>
+          <p:cNvSpPr>
+            <a:spLocks noGrp="1"/>
+          </p:cNvSpPr>
+          <p:nvPr>
+            <p:ph type="body"/>
+          </p:nvPr>
+        </p:nvSpPr>
+        <p:spPr>
+          <a:xfrm>
+            <a:off x="720000" y="3743787"/>
+            <a:ext cx="3811680" cy="1260602"/>
+          </a:xfrm>
+        </p:spPr>
+        <p:txBody>
+          <a:bodyPr/>
+          <a:lstStyle/>
+          <a:p>
+            <a:pPr marL="0" indent="0">
+              <a:buNone/>
+            </a:pPr>
+            <a:r>
+              <a:rPr lang="en-IT" sz="1400" dirty="0">
+                <a:solidFill>
+                  <a:schemeClr val="dk1"/>
+                </a:solidFill>
+                <a:latin typeface="Manrope"/>
+              </a:rPr>
+              <a:t>❌  </a:t>
+            </a:r>
+            <a:r>
+              <a:rPr lang="en-GB" sz="1400" dirty="0">
+                <a:solidFill>
+                  <a:schemeClr val="dk1"/>
+                </a:solidFill>
+                <a:latin typeface="Manrope"/>
+              </a:rPr>
+              <a:t>Single point of failure</a:t>
+            </a:r>
+          </a:p>
+          <a:p>
+            <a:pPr marL="0" indent="0">
+              <a:buNone/>
+            </a:pPr>
+            <a:r>
+              <a:rPr lang="en-IT" sz="1400" dirty="0">
+                <a:solidFill>
+                  <a:schemeClr val="dk1"/>
+                </a:solidFill>
+                <a:latin typeface="Manrope"/>
+              </a:rPr>
+              <a:t>❌  </a:t>
+            </a:r>
+            <a:r>
+              <a:rPr lang="en-GB" sz="1400" dirty="0">
+                <a:solidFill>
+                  <a:schemeClr val="dk1"/>
+                </a:solidFill>
+                <a:latin typeface="Manrope"/>
+              </a:rPr>
+              <a:t>Hard to scale under heavy traffic</a:t>
+            </a:r>
+          </a:p>
+          <a:p>
+            <a:pPr marL="0" indent="0">
+              <a:buNone/>
+            </a:pPr>
+            <a:r>
+              <a:rPr lang="en-IT" sz="1400" dirty="0">
+                <a:solidFill>
+                  <a:schemeClr val="dk1"/>
+                </a:solidFill>
+                <a:latin typeface="Manrope"/>
+              </a:rPr>
+              <a:t>❌  </a:t>
+            </a:r>
+            <a:r>
+              <a:rPr lang="en-GB" sz="1400" dirty="0">
+                <a:solidFill>
+                  <a:schemeClr val="dk1"/>
+                </a:solidFill>
+                <a:latin typeface="Manrope"/>
+              </a:rPr>
+              <a:t>Slow release cycles</a:t>
+            </a:r>
+          </a:p>
+          <a:p>
+            <a:pPr marL="0" indent="0">
+              <a:buNone/>
+            </a:pPr>
+            <a:r>
+              <a:rPr lang="en-IT" sz="1400" dirty="0">
+                <a:solidFill>
+                  <a:schemeClr val="dk1"/>
+                </a:solidFill>
+                <a:latin typeface="Manrope"/>
+              </a:rPr>
+              <a:t>✅  Simpler model</a:t>
+            </a:r>
+          </a:p>
+          <a:p>
+            <a:pPr marL="0" indent="0">
+              <a:buNone/>
+            </a:pPr>
+            <a:endParaRPr lang="en-IT" sz="1400" dirty="0">
+              <a:solidFill>
+                <a:schemeClr val="dk1"/>
+              </a:solidFill>
+              <a:latin typeface="Manrope"/>
+            </a:endParaRPr>
+          </a:p>
+        </p:txBody>
+      </p:sp>
+      <p:sp>
+        <p:nvSpPr>
+          <p:cNvPr id="4" name="Text Placeholder 3">
+            <a:extLst>
+              <a:ext uri="{FF2B5EF4-FFF2-40B4-BE49-F238E27FC236}">
+                <a16:creationId xmlns:a16="http://schemas.microsoft.com/office/drawing/2014/main" id="{96FE6936-9310-46BD-C3DA-993E81857C90}"/>
+              </a:ext>
+            </a:extLst>
+          </p:cNvPr>
+          <p:cNvSpPr>
+            <a:spLocks noGrp="1"/>
+          </p:cNvSpPr>
+          <p:nvPr>
+            <p:ph type="body"/>
+          </p:nvPr>
+        </p:nvSpPr>
+        <p:spPr>
+          <a:xfrm>
+            <a:off x="4618800" y="3743787"/>
+            <a:ext cx="3811680" cy="1260602"/>
+          </a:xfrm>
+        </p:spPr>
+        <p:txBody>
+          <a:bodyPr/>
+          <a:lstStyle/>
+          <a:p>
+            <a:pPr marL="0" indent="0">
+              <a:buNone/>
+            </a:pPr>
+            <a:r>
+              <a:rPr lang="en-IT" sz="1400" dirty="0">
+                <a:solidFill>
+                  <a:schemeClr val="dk1"/>
+                </a:solidFill>
+                <a:latin typeface="Manrope"/>
+              </a:rPr>
+              <a:t>✅  </a:t>
+            </a:r>
+            <a:r>
+              <a:rPr lang="en-GB" sz="1400" dirty="0">
+                <a:solidFill>
+                  <a:schemeClr val="dk1"/>
+                </a:solidFill>
+                <a:latin typeface="Manrope"/>
+              </a:rPr>
+              <a:t>Fault isolation (If one fails, the rest survive)</a:t>
+            </a:r>
+          </a:p>
+          <a:p>
+            <a:pPr marL="0" indent="0">
+              <a:buNone/>
+            </a:pPr>
+            <a:r>
+              <a:rPr lang="en-IT" sz="1400" dirty="0">
+                <a:solidFill>
+                  <a:schemeClr val="dk1"/>
+                </a:solidFill>
+                <a:latin typeface="Manrope"/>
+              </a:rPr>
+              <a:t>✅  </a:t>
+            </a:r>
+            <a:r>
+              <a:rPr lang="en-GB" sz="1400" dirty="0">
+                <a:solidFill>
+                  <a:schemeClr val="dk1"/>
+                </a:solidFill>
+                <a:latin typeface="Manrope"/>
+              </a:rPr>
+              <a:t>Scale only what is needed</a:t>
+            </a:r>
+          </a:p>
+          <a:p>
+            <a:pPr marL="0" indent="0">
+              <a:buNone/>
+            </a:pPr>
+            <a:r>
+              <a:rPr lang="en-IT" sz="1400" dirty="0">
+                <a:solidFill>
+                  <a:schemeClr val="dk1"/>
+                </a:solidFill>
+                <a:latin typeface="Manrope"/>
+              </a:rPr>
+              <a:t>✅  </a:t>
+            </a:r>
+            <a:r>
+              <a:rPr lang="en-GB" sz="1400" dirty="0">
+                <a:solidFill>
+                  <a:schemeClr val="dk1"/>
+                </a:solidFill>
+                <a:latin typeface="Manrope"/>
+              </a:rPr>
+              <a:t>Independent deployments</a:t>
+            </a:r>
+          </a:p>
+          <a:p>
+            <a:pPr marL="0" indent="0">
+              <a:buNone/>
+            </a:pPr>
+            <a:r>
+              <a:rPr lang="en-IT" sz="1400" dirty="0">
+                <a:solidFill>
+                  <a:schemeClr val="dk1"/>
+                </a:solidFill>
+                <a:latin typeface="Manrope"/>
+              </a:rPr>
+              <a:t>❌  </a:t>
+            </a:r>
+            <a:r>
+              <a:rPr lang="en-GB" sz="1400" dirty="0">
+                <a:solidFill>
+                  <a:schemeClr val="dk1"/>
+                </a:solidFill>
+                <a:latin typeface="Manrope"/>
+              </a:rPr>
+              <a:t>Slow release cycles</a:t>
+            </a:r>
+          </a:p>
+          <a:p>
+            <a:pPr marL="0" indent="0">
+              <a:buNone/>
+            </a:pPr>
+            <a:endParaRPr lang="en-IT" sz="1400" dirty="0">
+              <a:solidFill>
+                <a:schemeClr val="dk1"/>
+              </a:solidFill>
+              <a:latin typeface="Manrope"/>
+            </a:endParaRPr>
+          </a:p>
+        </p:txBody>
+      </p:sp>
+      <p:sp>
+        <p:nvSpPr>
+          <p:cNvPr id="5" name="Rectangle 4">
+            <a:extLst>
+              <a:ext uri="{FF2B5EF4-FFF2-40B4-BE49-F238E27FC236}">
+                <a16:creationId xmlns:a16="http://schemas.microsoft.com/office/drawing/2014/main" id="{C8B424BD-B89C-B50E-2FA9-93CA6EB7CEA1}"/>
               </a:ext>
             </a:extLst>
           </p:cNvPr>
@@ -30768,9 +32630,9 @@
                 <a:uFillTx/>
                 <a:latin typeface="Archivo Black"/>
               </a:rPr>
-              <a:t>System Architecture</a:t>
+              <a:t>Why Cloud-Native? From Monoliths to Microservices</a:t>
             </a:r>
-            <a:endParaRPr lang="en-US" sz="2400" b="1" u="none" strike="noStrike" dirty="0">
+            <a:endParaRPr lang="en-US" sz="2400" u="none" strike="noStrike" dirty="0">
               <a:solidFill>
                 <a:srgbClr val="000000"/>
               </a:solidFill>
@@ -30781,12 +32643,306 @@
           </a:p>
         </p:txBody>
       </p:sp>
+      <p:grpSp>
+        <p:nvGrpSpPr>
+          <p:cNvPr id="14" name="Group 13">
+            <a:extLst>
+              <a:ext uri="{FF2B5EF4-FFF2-40B4-BE49-F238E27FC236}">
+                <a16:creationId xmlns:a16="http://schemas.microsoft.com/office/drawing/2014/main" id="{15D8D138-958D-CC4A-95FA-6C4A6B6812A3}"/>
+              </a:ext>
+            </a:extLst>
+          </p:cNvPr>
+          <p:cNvGrpSpPr/>
+          <p:nvPr/>
+        </p:nvGrpSpPr>
+        <p:grpSpPr>
+          <a:xfrm>
+            <a:off x="720000" y="1046390"/>
+            <a:ext cx="2633970" cy="2650285"/>
+            <a:chOff x="720000" y="1092958"/>
+            <a:chExt cx="2667177" cy="2791464"/>
+          </a:xfrm>
+        </p:grpSpPr>
+        <p:sp>
+          <p:nvSpPr>
+            <p:cNvPr id="9" name="PlaceHolder 2">
+              <a:extLst>
+                <a:ext uri="{FF2B5EF4-FFF2-40B4-BE49-F238E27FC236}">
+                  <a16:creationId xmlns:a16="http://schemas.microsoft.com/office/drawing/2014/main" id="{7508F7F3-8CFB-BFAE-468C-747593DCDA0B}"/>
+                </a:ext>
+              </a:extLst>
+            </p:cNvPr>
+            <p:cNvSpPr txBox="1">
+              <a:spLocks/>
+            </p:cNvSpPr>
+            <p:nvPr/>
+          </p:nvSpPr>
+          <p:spPr>
+            <a:xfrm>
+              <a:off x="720000" y="1092958"/>
+              <a:ext cx="2667177" cy="466473"/>
+            </a:xfrm>
+            <a:prstGeom prst="rect">
+              <a:avLst/>
+            </a:prstGeom>
+            <a:noFill/>
+            <a:ln w="28575">
+              <a:noFill/>
+            </a:ln>
+          </p:spPr>
+          <p:txBody>
+            <a:bodyPr lIns="91440" tIns="91440" rIns="91440" bIns="91440" anchor="ctr">
+              <a:normAutofit/>
+            </a:bodyPr>
+            <a:lstStyle>
+              <a:lvl1pPr algn="l" defTabSz="914400" rtl="0" eaLnBrk="1" latinLnBrk="0" hangingPunct="1">
+                <a:lnSpc>
+                  <a:spcPct val="90000"/>
+                </a:lnSpc>
+                <a:spcBef>
+                  <a:spcPct val="0"/>
+                </a:spcBef>
+                <a:buNone/>
+                <a:defRPr sz="4400" kern="1200">
+                  <a:solidFill>
+                    <a:schemeClr val="tx1"/>
+                  </a:solidFill>
+                  <a:latin typeface="+mj-lt"/>
+                  <a:ea typeface="+mj-ea"/>
+                  <a:cs typeface="+mj-cs"/>
+                </a:defRPr>
+              </a:lvl1pPr>
+            </a:lstStyle>
+            <a:p>
+              <a:pPr algn="ctr">
+                <a:lnSpc>
+                  <a:spcPct val="100000"/>
+                </a:lnSpc>
+                <a:tabLst>
+                  <a:tab pos="0" algn="l"/>
+                </a:tabLst>
+              </a:pPr>
+              <a:r>
+                <a:rPr lang="en-US" sz="1600" b="1" dirty="0">
+                  <a:solidFill>
+                    <a:schemeClr val="dk1"/>
+                  </a:solidFill>
+                  <a:latin typeface="Manrope"/>
+                  <a:ea typeface="+mn-ea"/>
+                  <a:cs typeface="+mn-cs"/>
+                </a:rPr>
+                <a:t>MONOLITHIC</a:t>
+              </a:r>
+              <a:r>
+                <a:rPr lang="en-US" sz="1600" b="1" dirty="0">
+                  <a:solidFill>
+                    <a:schemeClr val="dk1"/>
+                  </a:solidFill>
+                  <a:latin typeface="Manrope"/>
+                  <a:ea typeface="Manrope"/>
+                </a:rPr>
+                <a:t> ARCHITECTURE</a:t>
+              </a:r>
+              <a:endParaRPr lang="en-US" sz="1600" b="1" dirty="0">
+                <a:solidFill>
+                  <a:srgbClr val="000000"/>
+                </a:solidFill>
+                <a:latin typeface="OpenSymbol"/>
+              </a:endParaRPr>
+            </a:p>
+          </p:txBody>
+        </p:sp>
+        <p:pic>
+          <p:nvPicPr>
+            <p:cNvPr id="11" name="Picture 10">
+              <a:extLst>
+                <a:ext uri="{FF2B5EF4-FFF2-40B4-BE49-F238E27FC236}">
+                  <a16:creationId xmlns:a16="http://schemas.microsoft.com/office/drawing/2014/main" id="{6DBD6A4C-989B-16B9-6BF9-07D10F3B1CA8}"/>
+                </a:ext>
+              </a:extLst>
+            </p:cNvPr>
+            <p:cNvPicPr>
+              <a:picLocks noChangeAspect="1"/>
+            </p:cNvPicPr>
+            <p:nvPr/>
+          </p:nvPicPr>
+          <p:blipFill>
+            <a:blip r:embed="rId3">
+              <a:extLst>
+                <a:ext uri="{28A0092B-C50C-407E-A947-70E740481C1C}">
+                  <a14:useLocalDpi xmlns:a14="http://schemas.microsoft.com/office/drawing/2010/main" val="0"/>
+                </a:ext>
+              </a:extLst>
+            </a:blip>
+            <a:srcRect l="9702" t="23697" r="67414" b="4637"/>
+            <a:stretch>
+              <a:fillRect/>
+            </a:stretch>
+          </p:blipFill>
+          <p:spPr>
+            <a:xfrm>
+              <a:off x="1327030" y="1609053"/>
+              <a:ext cx="1453116" cy="2275369"/>
+            </a:xfrm>
+            <a:prstGeom prst="rect">
+              <a:avLst/>
+            </a:prstGeom>
+          </p:spPr>
+        </p:pic>
+      </p:grpSp>
+      <p:grpSp>
+        <p:nvGrpSpPr>
+          <p:cNvPr id="13" name="Group 12">
+            <a:extLst>
+              <a:ext uri="{FF2B5EF4-FFF2-40B4-BE49-F238E27FC236}">
+                <a16:creationId xmlns:a16="http://schemas.microsoft.com/office/drawing/2014/main" id="{4097FA7A-1208-23A6-150C-4DB86AC98575}"/>
+              </a:ext>
+            </a:extLst>
+          </p:cNvPr>
+          <p:cNvGrpSpPr/>
+          <p:nvPr/>
+        </p:nvGrpSpPr>
+        <p:grpSpPr>
+          <a:xfrm>
+            <a:off x="4683679" y="1042757"/>
+            <a:ext cx="2859433" cy="2650285"/>
+            <a:chOff x="4861119" y="1092958"/>
+            <a:chExt cx="2955851" cy="2741842"/>
+          </a:xfrm>
+        </p:grpSpPr>
+        <p:sp>
+          <p:nvSpPr>
+            <p:cNvPr id="10" name="PlaceHolder 2">
+              <a:extLst>
+                <a:ext uri="{FF2B5EF4-FFF2-40B4-BE49-F238E27FC236}">
+                  <a16:creationId xmlns:a16="http://schemas.microsoft.com/office/drawing/2014/main" id="{125751BC-B802-7E0B-F3ED-FC0D479B1751}"/>
+                </a:ext>
+              </a:extLst>
+            </p:cNvPr>
+            <p:cNvSpPr txBox="1">
+              <a:spLocks/>
+            </p:cNvSpPr>
+            <p:nvPr/>
+          </p:nvSpPr>
+          <p:spPr>
+            <a:xfrm>
+              <a:off x="4861119" y="1092958"/>
+              <a:ext cx="2955321" cy="466473"/>
+            </a:xfrm>
+            <a:prstGeom prst="rect">
+              <a:avLst/>
+            </a:prstGeom>
+            <a:noFill/>
+            <a:ln w="28575">
+              <a:noFill/>
+            </a:ln>
+          </p:spPr>
+          <p:txBody>
+            <a:bodyPr lIns="91440" tIns="91440" rIns="91440" bIns="91440" anchor="ctr">
+              <a:normAutofit/>
+            </a:bodyPr>
+            <a:lstStyle>
+              <a:lvl1pPr algn="l" defTabSz="914400" rtl="0" eaLnBrk="1" latinLnBrk="0" hangingPunct="1">
+                <a:lnSpc>
+                  <a:spcPct val="90000"/>
+                </a:lnSpc>
+                <a:spcBef>
+                  <a:spcPct val="0"/>
+                </a:spcBef>
+                <a:buNone/>
+                <a:defRPr sz="4400" kern="1200">
+                  <a:solidFill>
+                    <a:schemeClr val="tx1"/>
+                  </a:solidFill>
+                  <a:latin typeface="+mj-lt"/>
+                  <a:ea typeface="+mj-ea"/>
+                  <a:cs typeface="+mj-cs"/>
+                </a:defRPr>
+              </a:lvl1pPr>
+            </a:lstStyle>
+            <a:p>
+              <a:pPr algn="ctr">
+                <a:lnSpc>
+                  <a:spcPct val="100000"/>
+                </a:lnSpc>
+                <a:tabLst>
+                  <a:tab pos="0" algn="l"/>
+                </a:tabLst>
+              </a:pPr>
+              <a:r>
+                <a:rPr lang="en-US" sz="1600" b="1" dirty="0">
+                  <a:solidFill>
+                    <a:schemeClr val="dk1"/>
+                  </a:solidFill>
+                  <a:latin typeface="Manrope"/>
+                  <a:ea typeface="+mn-ea"/>
+                  <a:cs typeface="+mn-cs"/>
+                </a:rPr>
+                <a:t>MICROSERVICE</a:t>
+              </a:r>
+              <a:r>
+                <a:rPr lang="en-US" sz="1600" b="1" dirty="0">
+                  <a:solidFill>
+                    <a:schemeClr val="dk1"/>
+                  </a:solidFill>
+                  <a:latin typeface="Manrope"/>
+                  <a:ea typeface="Manrope"/>
+                </a:rPr>
+                <a:t> ARCHITECTURE</a:t>
+              </a:r>
+              <a:endParaRPr lang="en-US" sz="1600" b="1" dirty="0">
+                <a:solidFill>
+                  <a:srgbClr val="000000"/>
+                </a:solidFill>
+                <a:latin typeface="OpenSymbol"/>
+              </a:endParaRPr>
+            </a:p>
+          </p:txBody>
+        </p:sp>
+        <p:pic>
+          <p:nvPicPr>
+            <p:cNvPr id="12" name="Picture 11">
+              <a:extLst>
+                <a:ext uri="{FF2B5EF4-FFF2-40B4-BE49-F238E27FC236}">
+                  <a16:creationId xmlns:a16="http://schemas.microsoft.com/office/drawing/2014/main" id="{8CBDFD72-5001-6FB6-3EC9-36392C66B818}"/>
+                </a:ext>
+              </a:extLst>
+            </p:cNvPr>
+            <p:cNvPicPr>
+              <a:picLocks noChangeAspect="1"/>
+            </p:cNvPicPr>
+            <p:nvPr/>
+          </p:nvPicPr>
+          <p:blipFill>
+            <a:blip r:embed="rId3">
+              <a:extLst>
+                <a:ext uri="{28A0092B-C50C-407E-A947-70E740481C1C}">
+                  <a14:useLocalDpi xmlns:a14="http://schemas.microsoft.com/office/drawing/2010/main" val="0"/>
+                </a:ext>
+              </a:extLst>
+            </a:blip>
+            <a:srcRect l="47656" t="23697" r="5796" b="4637"/>
+            <a:stretch>
+              <a:fillRect/>
+            </a:stretch>
+          </p:blipFill>
+          <p:spPr>
+            <a:xfrm>
+              <a:off x="4861119" y="1559431"/>
+              <a:ext cx="2955851" cy="2275369"/>
+            </a:xfrm>
+            <a:prstGeom prst="rect">
+              <a:avLst/>
+            </a:prstGeom>
+          </p:spPr>
+        </p:pic>
+      </p:grpSp>
       <p:sp>
         <p:nvSpPr>
-          <p:cNvPr id="3" name="Rectangle 2">
+          <p:cNvPr id="15" name="Right Arrow 14">
             <a:extLst>
               <a:ext uri="{FF2B5EF4-FFF2-40B4-BE49-F238E27FC236}">
-                <a16:creationId xmlns:a16="http://schemas.microsoft.com/office/drawing/2014/main" id="{9AB68784-745E-958E-0B94-DADBE55B24D9}"/>
+                <a16:creationId xmlns:a16="http://schemas.microsoft.com/office/drawing/2014/main" id="{82276B68-5A8B-1029-AE1C-BB91A67BB452}"/>
               </a:ext>
             </a:extLst>
           </p:cNvPr>
@@ -30795,24 +32951,48 @@
         </p:nvSpPr>
         <p:spPr>
           <a:xfrm>
-            <a:off x="118108" y="529696"/>
-            <a:ext cx="180000" cy="360000"/>
+            <a:off x="3203287" y="2250647"/>
+            <a:ext cx="992372" cy="375684"/>
           </a:xfrm>
-          <a:prstGeom prst="rect">
+          <a:prstGeom prst="rightArrow">
             <a:avLst/>
           </a:prstGeom>
+          <a:gradFill flip="none" rotWithShape="1">
+            <a:gsLst>
+              <a:gs pos="0">
+                <a:schemeClr val="dk1">
+                  <a:lumMod val="67000"/>
+                </a:schemeClr>
+              </a:gs>
+              <a:gs pos="48000">
+                <a:schemeClr val="dk1">
+                  <a:lumMod val="97000"/>
+                  <a:lumOff val="3000"/>
+                </a:schemeClr>
+              </a:gs>
+              <a:gs pos="100000">
+                <a:schemeClr val="dk1">
+                  <a:lumMod val="60000"/>
+                  <a:lumOff val="40000"/>
+                </a:schemeClr>
+              </a:gs>
+            </a:gsLst>
+            <a:lin ang="16200000" scaled="1"/>
+            <a:tileRect/>
+          </a:gradFill>
+          <a:ln>
+            <a:noFill/>
+          </a:ln>
         </p:spPr>
         <p:style>
-          <a:lnRef idx="2">
-            <a:schemeClr val="dk1">
-              <a:shade val="15000"/>
-            </a:schemeClr>
+          <a:lnRef idx="0">
+            <a:scrgbClr r="0" g="0" b="0"/>
           </a:lnRef>
-          <a:fillRef idx="1">
-            <a:schemeClr val="dk1"/>
+          <a:fillRef idx="0">
+            <a:scrgbClr r="0" g="0" b="0"/>
           </a:fillRef>
           <a:effectRef idx="0">
-            <a:schemeClr val="dk1"/>
+            <a:scrgbClr r="0" g="0" b="0"/>
           </a:effectRef>
           <a:fontRef idx="minor">
             <a:schemeClr val="lt1"/>
@@ -30827,290 +33007,12 @@
           </a:p>
         </p:txBody>
       </p:sp>
-      <p:pic>
-        <p:nvPicPr>
-          <p:cNvPr id="2" name="Immagine 24" descr="Immagine che contiene testo, schermata, diagramma, software&#10;&#10;Il contenuto generato dall'IA potrebbe non essere corretto.">
+      <p:sp>
+        <p:nvSpPr>
+          <p:cNvPr id="17" name="Rectangle 16">
             <a:extLst>
               <a:ext uri="{FF2B5EF4-FFF2-40B4-BE49-F238E27FC236}">
-                <a16:creationId xmlns:a16="http://schemas.microsoft.com/office/drawing/2014/main" id="{8CD48EAC-D661-86DC-F99E-A35C9C4F1D22}"/>
-              </a:ext>
-            </a:extLst>
-          </p:cNvPr>
-          <p:cNvPicPr>
-            <a:picLocks noChangeAspect="1"/>
-          </p:cNvPicPr>
-          <p:nvPr/>
-        </p:nvPicPr>
-        <p:blipFill>
-          <a:blip r:embed="rId3"/>
-          <a:stretch>
-            <a:fillRect/>
-          </a:stretch>
-        </p:blipFill>
-        <p:spPr>
-          <a:xfrm>
-            <a:off x="118108" y="970135"/>
-            <a:ext cx="7793580" cy="3872797"/>
-          </a:xfrm>
-          <a:prstGeom prst="rect">
-            <a:avLst/>
-          </a:prstGeom>
-        </p:spPr>
-      </p:pic>
-    </p:spTree>
-    <p:extLst>
-      <p:ext uri="{BB962C8B-B14F-4D97-AF65-F5344CB8AC3E}">
-        <p14:creationId xmlns:p14="http://schemas.microsoft.com/office/powerpoint/2010/main" val="3182272747"/>
-      </p:ext>
-    </p:extLst>
-  </p:cSld>
-  <p:clrMapOvr>
-    <a:masterClrMapping/>
-  </p:clrMapOvr>
-</p:sld>
-</file>
-
-<file path=ppt/slides/slide7.xml><?xml version="1.0" encoding="utf-8"?>
-<p:sld xmlns:a="http://schemas.openxmlformats.org/drawingml/2006/main" xmlns:r="http://schemas.openxmlformats.org/officeDocument/2006/relationships" xmlns:p="http://schemas.openxmlformats.org/presentationml/2006/main">
-  <p:cSld>
-    <p:spTree>
-      <p:nvGrpSpPr>
-        <p:cNvPr id="1" name="">
-          <a:extLst>
-            <a:ext uri="{FF2B5EF4-FFF2-40B4-BE49-F238E27FC236}">
-              <a16:creationId xmlns:a16="http://schemas.microsoft.com/office/drawing/2014/main" id="{07237208-BDAD-8FAF-8C81-71AF7C25DE8A}"/>
-            </a:ext>
-          </a:extLst>
-        </p:cNvPr>
-        <p:cNvGrpSpPr/>
-        <p:nvPr/>
-      </p:nvGrpSpPr>
-      <p:grpSpPr>
-        <a:xfrm>
-          <a:off x="0" y="0"/>
-          <a:ext cx="0" cy="0"/>
-          <a:chOff x="0" y="0"/>
-          <a:chExt cx="0" cy="0"/>
-        </a:xfrm>
-      </p:grpSpPr>
-      <p:sp>
-        <p:nvSpPr>
-          <p:cNvPr id="407" name="Rectangle 406">
-            <a:extLst>
-              <a:ext uri="{FF2B5EF4-FFF2-40B4-BE49-F238E27FC236}">
-                <a16:creationId xmlns:a16="http://schemas.microsoft.com/office/drawing/2014/main" id="{30274573-F7B8-AC4F-9C46-45F963878E0C}"/>
-              </a:ext>
-            </a:extLst>
-          </p:cNvPr>
-          <p:cNvSpPr/>
-          <p:nvPr/>
-        </p:nvSpPr>
-        <p:spPr>
-          <a:xfrm>
-            <a:off x="476280" y="476460"/>
-            <a:ext cx="8191080" cy="466473"/>
-          </a:xfrm>
-          <a:prstGeom prst="rect">
-            <a:avLst/>
-          </a:prstGeom>
-          <a:noFill/>
-          <a:ln w="0">
-            <a:noFill/>
-          </a:ln>
-        </p:spPr>
-        <p:style>
-          <a:lnRef idx="0">
-            <a:scrgbClr r="0" g="0" b="0"/>
-          </a:lnRef>
-          <a:fillRef idx="0">
-            <a:scrgbClr r="0" g="0" b="0"/>
-          </a:fillRef>
-          <a:effectRef idx="0">
-            <a:scrgbClr r="0" g="0" b="0"/>
-          </a:effectRef>
-          <a:fontRef idx="minor"/>
-        </p:style>
-        <p:txBody>
-          <a:bodyPr anchor="t">
-            <a:normAutofit/>
-          </a:bodyPr>
-          <a:lstStyle/>
-          <a:p>
-            <a:pPr>
-              <a:tabLst>
-                <a:tab pos="0" algn="l"/>
-              </a:tabLst>
-            </a:pPr>
-            <a:r>
-              <a:rPr lang="en-US" sz="2400" b="1" u="none" strike="noStrike" dirty="0">
-                <a:solidFill>
-                  <a:schemeClr val="dk1"/>
-                </a:solidFill>
-                <a:effectLst/>
-                <a:uFillTx/>
-                <a:latin typeface="Archivo Black"/>
-              </a:rPr>
-              <a:t>Conclusions &amp; Next Steps</a:t>
-            </a:r>
-            <a:endParaRPr lang="en-US" sz="2400" b="0" u="none" strike="noStrike" dirty="0">
-              <a:solidFill>
-                <a:srgbClr val="000000"/>
-              </a:solidFill>
-              <a:effectLst/>
-              <a:uFillTx/>
-              <a:latin typeface="OpenSymbol"/>
-            </a:endParaRPr>
-          </a:p>
-        </p:txBody>
-      </p:sp>
-      <p:sp>
-        <p:nvSpPr>
-          <p:cNvPr id="408" name="Rectangle 407">
-            <a:extLst>
-              <a:ext uri="{FF2B5EF4-FFF2-40B4-BE49-F238E27FC236}">
-                <a16:creationId xmlns:a16="http://schemas.microsoft.com/office/drawing/2014/main" id="{6AF18F02-9EBB-D64E-A597-D0E5AE4900F5}"/>
-              </a:ext>
-            </a:extLst>
-          </p:cNvPr>
-          <p:cNvSpPr/>
-          <p:nvPr/>
-        </p:nvSpPr>
-        <p:spPr>
-          <a:xfrm>
-            <a:off x="476280" y="942933"/>
-            <a:ext cx="8191080" cy="3724107"/>
-          </a:xfrm>
-          <a:prstGeom prst="rect">
-            <a:avLst/>
-          </a:prstGeom>
-          <a:noFill/>
-          <a:ln w="0">
-            <a:noFill/>
-          </a:ln>
-        </p:spPr>
-        <p:style>
-          <a:lnRef idx="0">
-            <a:scrgbClr r="0" g="0" b="0"/>
-          </a:lnRef>
-          <a:fillRef idx="0">
-            <a:scrgbClr r="0" g="0" b="0"/>
-          </a:fillRef>
-          <a:effectRef idx="0">
-            <a:scrgbClr r="0" g="0" b="0"/>
-          </a:effectRef>
-          <a:fontRef idx="minor"/>
-        </p:style>
-        <p:txBody>
-          <a:bodyPr anchor="t">
-            <a:normAutofit/>
-          </a:bodyPr>
-          <a:lstStyle/>
-          <a:p>
-            <a:pPr defTabSz="914400">
-              <a:lnSpc>
-                <a:spcPct val="150000"/>
-              </a:lnSpc>
-              <a:tabLst>
-                <a:tab pos="0" algn="l"/>
-              </a:tabLst>
-            </a:pPr>
-            <a:r>
-              <a:rPr lang="en-US" sz="1400" b="0" u="none" strike="noStrike" dirty="0">
-                <a:solidFill>
-                  <a:schemeClr val="dk1"/>
-                </a:solidFill>
-                <a:effectLst/>
-                <a:uFillTx/>
-                <a:latin typeface="Manrope"/>
-              </a:rPr>
-              <a:t>Brief context: the problem space, key gaps, and why it matters now.</a:t>
-            </a:r>
-            <a:endParaRPr lang="en-US" sz="1400" b="0" u="none" strike="noStrike" dirty="0">
-              <a:solidFill>
-                <a:srgbClr val="000000"/>
-              </a:solidFill>
-              <a:effectLst/>
-              <a:uFillTx/>
-              <a:latin typeface="OpenSymbol"/>
-            </a:endParaRPr>
-          </a:p>
-          <a:p>
-            <a:pPr defTabSz="914400">
-              <a:lnSpc>
-                <a:spcPct val="150000"/>
-              </a:lnSpc>
-              <a:tabLst>
-                <a:tab pos="0" algn="l"/>
-              </a:tabLst>
-            </a:pPr>
-            <a:endParaRPr lang="en-US" sz="1400" b="0" u="none" strike="noStrike" dirty="0">
-              <a:solidFill>
-                <a:srgbClr val="000000"/>
-              </a:solidFill>
-              <a:effectLst/>
-              <a:uFillTx/>
-              <a:latin typeface="OpenSymbol"/>
-            </a:endParaRPr>
-          </a:p>
-          <a:p>
-            <a:pPr defTabSz="914400">
-              <a:lnSpc>
-                <a:spcPct val="150000"/>
-              </a:lnSpc>
-              <a:tabLst>
-                <a:tab pos="0" algn="l"/>
-              </a:tabLst>
-            </a:pPr>
-            <a:r>
-              <a:rPr lang="en-US" sz="1400" b="0" u="none" strike="noStrike" dirty="0">
-                <a:solidFill>
-                  <a:schemeClr val="dk1"/>
-                </a:solidFill>
-                <a:effectLst/>
-                <a:uFillTx/>
-                <a:latin typeface="Manrope"/>
-              </a:rPr>
-              <a:t>Methods were chosen for clarity and efficiency, balancing rigor with simplicity to produce </a:t>
-            </a:r>
-            <a:r>
-              <a:rPr lang="en-US" sz="1400" b="1" u="none" strike="noStrike" dirty="0">
-                <a:solidFill>
-                  <a:schemeClr val="dk1"/>
-                </a:solidFill>
-                <a:effectLst/>
-                <a:uFillTx/>
-                <a:latin typeface="Manrope"/>
-              </a:rPr>
-              <a:t>reproducible</a:t>
-            </a:r>
-            <a:r>
-              <a:rPr lang="en-US" sz="1400" b="0" u="none" strike="noStrike" dirty="0">
-                <a:solidFill>
-                  <a:schemeClr val="dk1"/>
-                </a:solidFill>
-                <a:effectLst/>
-                <a:uFillTx/>
-                <a:latin typeface="Manrope"/>
-              </a:rPr>
-              <a:t> results.</a:t>
-            </a:r>
-            <a:endParaRPr lang="en-US" sz="1400" b="0" u="none" strike="noStrike" dirty="0">
-              <a:solidFill>
-                <a:srgbClr val="000000"/>
-              </a:solidFill>
-              <a:effectLst/>
-              <a:uFillTx/>
-              <a:latin typeface="OpenSymbol"/>
-            </a:endParaRPr>
-          </a:p>
-        </p:txBody>
-      </p:sp>
-      <p:sp>
-        <p:nvSpPr>
-          <p:cNvPr id="3" name="Rectangle 2">
-            <a:extLst>
-              <a:ext uri="{FF2B5EF4-FFF2-40B4-BE49-F238E27FC236}">
-                <a16:creationId xmlns:a16="http://schemas.microsoft.com/office/drawing/2014/main" id="{B5AA8D13-79B5-05DD-0D10-531A85CB0583}"/>
+                <a16:creationId xmlns:a16="http://schemas.microsoft.com/office/drawing/2014/main" id="{2AFB7E8A-C12A-F2DA-37AC-4CC77D317BDD}"/>
               </a:ext>
             </a:extLst>
           </p:cNvPr>
@@ -31154,13 +33056,1147 @@
     </p:spTree>
     <p:extLst>
       <p:ext uri="{BB962C8B-B14F-4D97-AF65-F5344CB8AC3E}">
-        <p14:creationId xmlns:p14="http://schemas.microsoft.com/office/powerpoint/2010/main" val="1778265594"/>
+        <p14:creationId xmlns:p14="http://schemas.microsoft.com/office/powerpoint/2010/main" val="2474979524"/>
       </p:ext>
     </p:extLst>
   </p:cSld>
   <p:clrMapOvr>
     <a:masterClrMapping/>
   </p:clrMapOvr>
+</p:sld>
+</file>
+
+<file path=ppt/slides/slide9.xml><?xml version="1.0" encoding="utf-8"?>
+<p:sld xmlns:a="http://schemas.openxmlformats.org/drawingml/2006/main" xmlns:r="http://schemas.openxmlformats.org/officeDocument/2006/relationships" xmlns:p="http://schemas.openxmlformats.org/presentationml/2006/main">
+  <p:cSld>
+    <p:spTree>
+      <p:nvGrpSpPr>
+        <p:cNvPr id="1" name="">
+          <a:extLst>
+            <a:ext uri="{FF2B5EF4-FFF2-40B4-BE49-F238E27FC236}">
+              <a16:creationId xmlns:a16="http://schemas.microsoft.com/office/drawing/2014/main" id="{9605B2BE-3695-8807-760A-1668FF170AB0}"/>
+            </a:ext>
+          </a:extLst>
+        </p:cNvPr>
+        <p:cNvGrpSpPr/>
+        <p:nvPr/>
+      </p:nvGrpSpPr>
+      <p:grpSpPr>
+        <a:xfrm>
+          <a:off x="0" y="0"/>
+          <a:ext cx="0" cy="0"/>
+          <a:chOff x="0" y="0"/>
+          <a:chExt cx="0" cy="0"/>
+        </a:xfrm>
+      </p:grpSpPr>
+      <p:sp>
+        <p:nvSpPr>
+          <p:cNvPr id="4" name="Text Placeholder 3">
+            <a:extLst>
+              <a:ext uri="{FF2B5EF4-FFF2-40B4-BE49-F238E27FC236}">
+                <a16:creationId xmlns:a16="http://schemas.microsoft.com/office/drawing/2014/main" id="{1D847BA0-EB96-FC61-ED13-D87995241739}"/>
+              </a:ext>
+            </a:extLst>
+          </p:cNvPr>
+          <p:cNvSpPr>
+            <a:spLocks noGrp="1"/>
+          </p:cNvSpPr>
+          <p:nvPr>
+            <p:ph type="body" idx="4294967295"/>
+          </p:nvPr>
+        </p:nvSpPr>
+        <p:spPr>
+          <a:xfrm>
+            <a:off x="4954710" y="3281856"/>
+            <a:ext cx="4114800" cy="1570038"/>
+          </a:xfrm>
+          <a:prstGeom prst="rect">
+            <a:avLst/>
+          </a:prstGeom>
+        </p:spPr>
+        <p:txBody>
+          <a:bodyPr/>
+          <a:lstStyle/>
+          <a:p>
+            <a:pPr marL="0" marR="0" lvl="0" indent="0" algn="l" defTabSz="914400" rtl="0" eaLnBrk="1" fontAlgn="auto" latinLnBrk="0" hangingPunct="1">
+              <a:lnSpc>
+                <a:spcPct val="90000"/>
+              </a:lnSpc>
+              <a:spcBef>
+                <a:spcPts val="1000"/>
+              </a:spcBef>
+              <a:spcAft>
+                <a:spcPts val="0"/>
+              </a:spcAft>
+              <a:buClrTx/>
+              <a:buSzTx/>
+              <a:buFont typeface="Arial" panose="020B0604020202020204" pitchFamily="34" charset="0"/>
+              <a:buNone/>
+              <a:tabLst/>
+              <a:defRPr/>
+            </a:pPr>
+            <a:r>
+              <a:rPr kumimoji="0" lang="en-IT" sz="1300" b="0" i="0" u="none" strike="noStrike" kern="1200" cap="none" spc="0" normalizeH="0" baseline="0" noProof="0" dirty="0">
+                <a:ln>
+                  <a:noFill/>
+                </a:ln>
+                <a:solidFill>
+                  <a:srgbClr val="092241"/>
+                </a:solidFill>
+                <a:effectLst/>
+                <a:uLnTx/>
+                <a:uFillTx/>
+                <a:latin typeface="Manrope"/>
+                <a:ea typeface="+mn-ea"/>
+                <a:cs typeface="+mn-cs"/>
+              </a:rPr>
+              <a:t>✅  </a:t>
+            </a:r>
+            <a:r>
+              <a:rPr kumimoji="0" lang="en-GB" sz="1300" b="0" i="0" u="none" strike="noStrike" kern="1200" cap="none" spc="0" normalizeH="0" baseline="0" noProof="0" dirty="0">
+                <a:ln>
+                  <a:noFill/>
+                </a:ln>
+                <a:solidFill>
+                  <a:srgbClr val="092241"/>
+                </a:solidFill>
+                <a:effectLst/>
+                <a:uLnTx/>
+                <a:uFillTx/>
+                <a:latin typeface="Manrope"/>
+                <a:ea typeface="+mn-ea"/>
+                <a:cs typeface="+mn-cs"/>
+              </a:rPr>
+              <a:t>One thread can handle multiple requests (</a:t>
+            </a:r>
+            <a:r>
+              <a:rPr kumimoji="0" lang="en-GB" sz="1300" b="1" i="0" u="none" strike="noStrike" kern="1200" cap="none" spc="0" normalizeH="0" baseline="0" noProof="0" dirty="0">
+                <a:ln>
+                  <a:noFill/>
+                </a:ln>
+                <a:solidFill>
+                  <a:srgbClr val="092241"/>
+                </a:solidFill>
+                <a:effectLst/>
+                <a:uLnTx/>
+                <a:uFillTx/>
+                <a:latin typeface="Manrope"/>
+                <a:ea typeface="+mn-ea"/>
+                <a:cs typeface="+mn-cs"/>
+              </a:rPr>
+              <a:t>I/O thread</a:t>
+            </a:r>
+            <a:r>
+              <a:rPr kumimoji="0" lang="en-GB" sz="1300" b="0" i="0" u="none" strike="noStrike" kern="1200" cap="none" spc="0" normalizeH="0" baseline="0" noProof="0" dirty="0">
+                <a:ln>
+                  <a:noFill/>
+                </a:ln>
+                <a:solidFill>
+                  <a:srgbClr val="092241"/>
+                </a:solidFill>
+                <a:effectLst/>
+                <a:uLnTx/>
+                <a:uFillTx/>
+                <a:latin typeface="Manrope"/>
+                <a:ea typeface="+mn-ea"/>
+                <a:cs typeface="+mn-cs"/>
+              </a:rPr>
+              <a:t>)</a:t>
+            </a:r>
+          </a:p>
+          <a:p>
+            <a:pPr marL="0" marR="0" lvl="0" indent="0" algn="l" defTabSz="914400" rtl="0" eaLnBrk="1" fontAlgn="auto" latinLnBrk="0" hangingPunct="1">
+              <a:lnSpc>
+                <a:spcPct val="90000"/>
+              </a:lnSpc>
+              <a:spcBef>
+                <a:spcPts val="1000"/>
+              </a:spcBef>
+              <a:spcAft>
+                <a:spcPts val="0"/>
+              </a:spcAft>
+              <a:buClrTx/>
+              <a:buSzTx/>
+              <a:buFont typeface="Arial" panose="020B0604020202020204" pitchFamily="34" charset="0"/>
+              <a:buNone/>
+              <a:tabLst/>
+              <a:defRPr/>
+            </a:pPr>
+            <a:r>
+              <a:rPr kumimoji="0" lang="en-IT" sz="1300" b="0" i="0" u="none" strike="noStrike" kern="1200" cap="none" spc="0" normalizeH="0" baseline="0" noProof="0" dirty="0">
+                <a:ln>
+                  <a:noFill/>
+                </a:ln>
+                <a:solidFill>
+                  <a:srgbClr val="092241"/>
+                </a:solidFill>
+                <a:effectLst/>
+                <a:uLnTx/>
+                <a:uFillTx/>
+                <a:latin typeface="Manrope"/>
+                <a:ea typeface="+mn-ea"/>
+                <a:cs typeface="+mn-cs"/>
+              </a:rPr>
+              <a:t>✅  </a:t>
+            </a:r>
+            <a:r>
+              <a:rPr kumimoji="0" lang="en-GB" sz="1300" b="0" i="0" u="none" strike="noStrike" kern="1200" cap="none" spc="0" normalizeH="0" baseline="0" noProof="0" dirty="0">
+                <a:ln>
+                  <a:noFill/>
+                </a:ln>
+                <a:solidFill>
+                  <a:srgbClr val="092241"/>
+                </a:solidFill>
+                <a:effectLst/>
+                <a:uLnTx/>
+                <a:uFillTx/>
+                <a:latin typeface="Manrope"/>
+                <a:ea typeface="+mn-ea"/>
+                <a:cs typeface="+mn-cs"/>
+              </a:rPr>
+              <a:t>Non-blocking I/O operations (thread is released)</a:t>
+            </a:r>
+          </a:p>
+          <a:p>
+            <a:pPr marL="0" marR="0" lvl="0" indent="0" algn="l" defTabSz="914400" rtl="0" eaLnBrk="1" fontAlgn="auto" latinLnBrk="0" hangingPunct="1">
+              <a:lnSpc>
+                <a:spcPct val="90000"/>
+              </a:lnSpc>
+              <a:spcBef>
+                <a:spcPts val="1000"/>
+              </a:spcBef>
+              <a:spcAft>
+                <a:spcPts val="0"/>
+              </a:spcAft>
+              <a:buClrTx/>
+              <a:buSzTx/>
+              <a:buFont typeface="Arial" panose="020B0604020202020204" pitchFamily="34" charset="0"/>
+              <a:buNone/>
+              <a:tabLst/>
+              <a:defRPr/>
+            </a:pPr>
+            <a:r>
+              <a:rPr kumimoji="0" lang="en-IT" sz="1300" b="0" i="0" u="none" strike="noStrike" kern="1200" cap="none" spc="0" normalizeH="0" baseline="0" noProof="0" dirty="0">
+                <a:ln>
+                  <a:noFill/>
+                </a:ln>
+                <a:solidFill>
+                  <a:srgbClr val="092241"/>
+                </a:solidFill>
+                <a:effectLst/>
+                <a:uLnTx/>
+                <a:uFillTx/>
+                <a:latin typeface="Manrope"/>
+                <a:ea typeface="+mn-ea"/>
+                <a:cs typeface="+mn-cs"/>
+              </a:rPr>
+              <a:t>✅  </a:t>
+            </a:r>
+            <a:r>
+              <a:rPr kumimoji="0" lang="en-GB" sz="1300" b="0" i="0" u="none" strike="noStrike" kern="1200" cap="none" spc="0" normalizeH="0" baseline="0" noProof="0" dirty="0">
+                <a:ln>
+                  <a:noFill/>
+                </a:ln>
+                <a:solidFill>
+                  <a:srgbClr val="092241"/>
+                </a:solidFill>
+                <a:effectLst/>
+                <a:uLnTx/>
+                <a:uFillTx/>
+                <a:latin typeface="Manrope"/>
+                <a:ea typeface="+mn-ea"/>
+                <a:cs typeface="+mn-cs"/>
+              </a:rPr>
+              <a:t>High concurrency (reduced resources usage)</a:t>
+            </a:r>
+          </a:p>
+          <a:p>
+            <a:pPr marL="0" indent="0">
+              <a:spcBef>
+                <a:spcPts val="1000"/>
+              </a:spcBef>
+              <a:buNone/>
+              <a:defRPr/>
+            </a:pPr>
+            <a:r>
+              <a:rPr lang="en-IT" sz="1300" dirty="0">
+                <a:solidFill>
+                  <a:srgbClr val="092241"/>
+                </a:solidFill>
+                <a:latin typeface="Manrope"/>
+              </a:rPr>
+              <a:t>❌  </a:t>
+            </a:r>
+            <a:r>
+              <a:rPr lang="en-GB" sz="1300" dirty="0">
+                <a:solidFill>
+                  <a:srgbClr val="092241"/>
+                </a:solidFill>
+                <a:latin typeface="Manrope"/>
+              </a:rPr>
+              <a:t>Programming based on continuations (callbacks)</a:t>
+            </a:r>
+            <a:endParaRPr kumimoji="0" lang="en-IT" sz="1300" b="0" i="0" u="none" strike="noStrike" kern="1200" cap="none" spc="0" normalizeH="0" baseline="0" noProof="0" dirty="0">
+              <a:ln>
+                <a:noFill/>
+              </a:ln>
+              <a:solidFill>
+                <a:srgbClr val="092241"/>
+              </a:solidFill>
+              <a:effectLst/>
+              <a:uLnTx/>
+              <a:uFillTx/>
+              <a:latin typeface="Manrope"/>
+              <a:ea typeface="+mn-ea"/>
+              <a:cs typeface="+mn-cs"/>
+            </a:endParaRPr>
+          </a:p>
+        </p:txBody>
+      </p:sp>
+      <p:sp>
+        <p:nvSpPr>
+          <p:cNvPr id="8" name="Text Placeholder 2">
+            <a:extLst>
+              <a:ext uri="{FF2B5EF4-FFF2-40B4-BE49-F238E27FC236}">
+                <a16:creationId xmlns:a16="http://schemas.microsoft.com/office/drawing/2014/main" id="{85DEE465-EAE7-5B0C-7222-E6F788864849}"/>
+              </a:ext>
+            </a:extLst>
+          </p:cNvPr>
+          <p:cNvSpPr>
+            <a:spLocks noGrp="1"/>
+          </p:cNvSpPr>
+          <p:nvPr>
+            <p:ph type="body" idx="4294967295"/>
+          </p:nvPr>
+        </p:nvSpPr>
+        <p:spPr>
+          <a:xfrm>
+            <a:off x="373279" y="3281856"/>
+            <a:ext cx="3878263" cy="1570038"/>
+          </a:xfrm>
+          <a:prstGeom prst="rect">
+            <a:avLst/>
+          </a:prstGeom>
+        </p:spPr>
+        <p:txBody>
+          <a:bodyPr/>
+          <a:lstStyle/>
+          <a:p>
+            <a:pPr marL="0" marR="0" lvl="0" indent="0" algn="l" defTabSz="914400" rtl="0" eaLnBrk="1" fontAlgn="auto" latinLnBrk="0" hangingPunct="1">
+              <a:lnSpc>
+                <a:spcPct val="90000"/>
+              </a:lnSpc>
+              <a:spcBef>
+                <a:spcPts val="1000"/>
+              </a:spcBef>
+              <a:spcAft>
+                <a:spcPts val="0"/>
+              </a:spcAft>
+              <a:buClrTx/>
+              <a:buSzTx/>
+              <a:buFont typeface="Arial" panose="020B0604020202020204" pitchFamily="34" charset="0"/>
+              <a:buNone/>
+              <a:tabLst/>
+              <a:defRPr/>
+            </a:pPr>
+            <a:r>
+              <a:rPr kumimoji="0" lang="en-IT" sz="1300" b="0" i="0" u="none" strike="noStrike" kern="1200" cap="none" spc="0" normalizeH="0" baseline="0" noProof="0" dirty="0">
+                <a:ln>
+                  <a:noFill/>
+                </a:ln>
+                <a:solidFill>
+                  <a:srgbClr val="092241"/>
+                </a:solidFill>
+                <a:effectLst/>
+                <a:uLnTx/>
+                <a:uFillTx/>
+                <a:latin typeface="Manrope"/>
+                <a:ea typeface="+mn-ea"/>
+                <a:cs typeface="+mn-cs"/>
+              </a:rPr>
+              <a:t>❌  </a:t>
+            </a:r>
+            <a:r>
+              <a:rPr kumimoji="0" lang="en-GB" sz="1300" b="0" i="0" u="none" strike="noStrike" kern="1200" cap="none" spc="0" normalizeH="0" baseline="0" noProof="0" dirty="0">
+                <a:ln>
+                  <a:noFill/>
+                </a:ln>
+                <a:solidFill>
+                  <a:srgbClr val="092241"/>
+                </a:solidFill>
+                <a:effectLst/>
+                <a:uLnTx/>
+                <a:uFillTx/>
+                <a:latin typeface="Manrope"/>
+                <a:ea typeface="+mn-ea"/>
+                <a:cs typeface="+mn-cs"/>
+              </a:rPr>
+              <a:t>One dedicated thread per request (</a:t>
+            </a:r>
+            <a:r>
+              <a:rPr kumimoji="0" lang="en-GB" sz="1300" b="1" i="0" u="none" strike="noStrike" kern="1200" cap="none" spc="0" normalizeH="0" baseline="0" noProof="0" dirty="0">
+                <a:ln>
+                  <a:noFill/>
+                </a:ln>
+                <a:solidFill>
+                  <a:srgbClr val="092241"/>
+                </a:solidFill>
+                <a:effectLst/>
+                <a:uLnTx/>
+                <a:uFillTx/>
+                <a:latin typeface="Manrope"/>
+                <a:ea typeface="+mn-ea"/>
+                <a:cs typeface="+mn-cs"/>
+              </a:rPr>
+              <a:t>worker thread</a:t>
+            </a:r>
+            <a:r>
+              <a:rPr kumimoji="0" lang="en-GB" sz="1300" b="0" i="0" u="none" strike="noStrike" kern="1200" cap="none" spc="0" normalizeH="0" baseline="0" noProof="0" dirty="0">
+                <a:ln>
+                  <a:noFill/>
+                </a:ln>
+                <a:solidFill>
+                  <a:srgbClr val="092241"/>
+                </a:solidFill>
+                <a:effectLst/>
+                <a:uLnTx/>
+                <a:uFillTx/>
+                <a:latin typeface="Manrope"/>
+                <a:ea typeface="+mn-ea"/>
+                <a:cs typeface="+mn-cs"/>
+              </a:rPr>
+              <a:t>)</a:t>
+            </a:r>
+          </a:p>
+          <a:p>
+            <a:pPr marL="0" marR="0" lvl="0" indent="0" algn="l" defTabSz="914400" rtl="0" eaLnBrk="1" fontAlgn="auto" latinLnBrk="0" hangingPunct="1">
+              <a:lnSpc>
+                <a:spcPct val="90000"/>
+              </a:lnSpc>
+              <a:spcBef>
+                <a:spcPts val="1000"/>
+              </a:spcBef>
+              <a:spcAft>
+                <a:spcPts val="0"/>
+              </a:spcAft>
+              <a:buClrTx/>
+              <a:buSzTx/>
+              <a:buFont typeface="Arial" panose="020B0604020202020204" pitchFamily="34" charset="0"/>
+              <a:buNone/>
+              <a:tabLst/>
+              <a:defRPr/>
+            </a:pPr>
+            <a:r>
+              <a:rPr kumimoji="0" lang="en-IT" sz="1300" b="0" i="0" u="none" strike="noStrike" kern="1200" cap="none" spc="0" normalizeH="0" baseline="0" noProof="0" dirty="0">
+                <a:ln>
+                  <a:noFill/>
+                </a:ln>
+                <a:solidFill>
+                  <a:srgbClr val="092241"/>
+                </a:solidFill>
+                <a:effectLst/>
+                <a:uLnTx/>
+                <a:uFillTx/>
+                <a:latin typeface="Manrope"/>
+                <a:ea typeface="+mn-ea"/>
+                <a:cs typeface="+mn-cs"/>
+              </a:rPr>
+              <a:t>❌  </a:t>
+            </a:r>
+            <a:r>
+              <a:rPr kumimoji="0" lang="en-GB" sz="1300" b="0" u="none" strike="noStrike" kern="1200" cap="none" spc="0" normalizeH="0" baseline="0" noProof="0" dirty="0">
+                <a:ln>
+                  <a:noFill/>
+                </a:ln>
+                <a:solidFill>
+                  <a:srgbClr val="092241"/>
+                </a:solidFill>
+                <a:effectLst/>
+                <a:uLnTx/>
+                <a:uFillTx/>
+                <a:latin typeface="Manrope"/>
+                <a:ea typeface="+mn-ea"/>
+                <a:cs typeface="+mn-cs"/>
+              </a:rPr>
+              <a:t>Blocking</a:t>
+            </a:r>
+            <a:r>
+              <a:rPr kumimoji="0" lang="en-GB" sz="1300" b="0" i="0" u="none" strike="noStrike" kern="1200" cap="none" spc="0" normalizeH="0" baseline="0" noProof="0" dirty="0">
+                <a:ln>
+                  <a:noFill/>
+                </a:ln>
+                <a:solidFill>
+                  <a:srgbClr val="092241"/>
+                </a:solidFill>
+                <a:effectLst/>
+                <a:uLnTx/>
+                <a:uFillTx/>
+                <a:latin typeface="Manrope"/>
+                <a:ea typeface="+mn-ea"/>
+                <a:cs typeface="+mn-cs"/>
+              </a:rPr>
+              <a:t> I/O operations (thread waits for response)</a:t>
+            </a:r>
+          </a:p>
+          <a:p>
+            <a:pPr marL="0" marR="0" lvl="0" indent="0" algn="l" defTabSz="914400" rtl="0" eaLnBrk="1" fontAlgn="auto" latinLnBrk="0" hangingPunct="1">
+              <a:lnSpc>
+                <a:spcPct val="90000"/>
+              </a:lnSpc>
+              <a:spcBef>
+                <a:spcPts val="1000"/>
+              </a:spcBef>
+              <a:spcAft>
+                <a:spcPts val="0"/>
+              </a:spcAft>
+              <a:buClrTx/>
+              <a:buSzTx/>
+              <a:buFont typeface="Arial" panose="020B0604020202020204" pitchFamily="34" charset="0"/>
+              <a:buNone/>
+              <a:tabLst/>
+              <a:defRPr/>
+            </a:pPr>
+            <a:r>
+              <a:rPr kumimoji="0" lang="en-IT" sz="1300" b="0" i="0" u="none" strike="noStrike" kern="1200" cap="none" spc="0" normalizeH="0" baseline="0" noProof="0" dirty="0">
+                <a:ln>
+                  <a:noFill/>
+                </a:ln>
+                <a:solidFill>
+                  <a:srgbClr val="092241"/>
+                </a:solidFill>
+                <a:effectLst/>
+                <a:uLnTx/>
+                <a:uFillTx/>
+                <a:latin typeface="Manrope"/>
+                <a:ea typeface="+mn-ea"/>
+                <a:cs typeface="+mn-cs"/>
+              </a:rPr>
+              <a:t>❌  </a:t>
+            </a:r>
+            <a:r>
+              <a:rPr kumimoji="0" lang="en-GB" sz="1300" b="0" i="0" u="none" strike="noStrike" kern="1200" cap="none" spc="0" normalizeH="0" baseline="0" noProof="0" dirty="0">
+                <a:ln>
+                  <a:noFill/>
+                </a:ln>
+                <a:solidFill>
+                  <a:srgbClr val="092241"/>
+                </a:solidFill>
+                <a:effectLst/>
+                <a:uLnTx/>
+                <a:uFillTx/>
+                <a:latin typeface="Manrope"/>
+                <a:ea typeface="+mn-ea"/>
+                <a:cs typeface="+mn-cs"/>
+              </a:rPr>
+              <a:t>Limited scalability </a:t>
+            </a:r>
+            <a:r>
+              <a:rPr kumimoji="0" lang="en-GB" sz="1300" b="0" u="none" strike="noStrike" kern="1200" cap="none" spc="0" normalizeH="0" baseline="0" noProof="0" dirty="0">
+                <a:ln>
+                  <a:noFill/>
+                </a:ln>
+                <a:solidFill>
+                  <a:srgbClr val="092241"/>
+                </a:solidFill>
+                <a:effectLst/>
+                <a:uLnTx/>
+                <a:uFillTx/>
+                <a:latin typeface="Manrope"/>
+                <a:ea typeface="+mn-ea"/>
+                <a:cs typeface="+mn-cs"/>
+              </a:rPr>
+              <a:t>(higher resources usage)</a:t>
+            </a:r>
+          </a:p>
+          <a:p>
+            <a:pPr marL="0" indent="0">
+              <a:spcBef>
+                <a:spcPts val="1000"/>
+              </a:spcBef>
+              <a:buNone/>
+              <a:defRPr/>
+            </a:pPr>
+            <a:r>
+              <a:rPr lang="en-IT" sz="1300" dirty="0">
+                <a:solidFill>
+                  <a:srgbClr val="092241"/>
+                </a:solidFill>
+                <a:latin typeface="Manrope"/>
+              </a:rPr>
+              <a:t>✅  </a:t>
+            </a:r>
+            <a:r>
+              <a:rPr lang="en-GB" sz="1300" dirty="0">
+                <a:solidFill>
+                  <a:srgbClr val="092241"/>
+                </a:solidFill>
+                <a:latin typeface="Manrope"/>
+              </a:rPr>
+              <a:t>Simpler programming model (sequential code)</a:t>
+            </a:r>
+          </a:p>
+        </p:txBody>
+      </p:sp>
+      <p:sp>
+        <p:nvSpPr>
+          <p:cNvPr id="5" name="Rectangle 4">
+            <a:extLst>
+              <a:ext uri="{FF2B5EF4-FFF2-40B4-BE49-F238E27FC236}">
+                <a16:creationId xmlns:a16="http://schemas.microsoft.com/office/drawing/2014/main" id="{ED6AB4BA-36A0-596B-81CC-B62FA0246BD9}"/>
+              </a:ext>
+            </a:extLst>
+          </p:cNvPr>
+          <p:cNvSpPr/>
+          <p:nvPr/>
+        </p:nvSpPr>
+        <p:spPr>
+          <a:xfrm>
+            <a:off x="476280" y="476460"/>
+            <a:ext cx="8191080" cy="466473"/>
+          </a:xfrm>
+          <a:prstGeom prst="rect">
+            <a:avLst/>
+          </a:prstGeom>
+          <a:noFill/>
+          <a:ln w="0">
+            <a:noFill/>
+          </a:ln>
+        </p:spPr>
+        <p:style>
+          <a:lnRef idx="0">
+            <a:scrgbClr r="0" g="0" b="0"/>
+          </a:lnRef>
+          <a:fillRef idx="0">
+            <a:scrgbClr r="0" g="0" b="0"/>
+          </a:fillRef>
+          <a:effectRef idx="0">
+            <a:scrgbClr r="0" g="0" b="0"/>
+          </a:effectRef>
+          <a:fontRef idx="minor"/>
+        </p:style>
+        <p:txBody>
+          <a:bodyPr anchor="t">
+            <a:normAutofit/>
+          </a:bodyPr>
+          <a:lstStyle/>
+          <a:p>
+            <a:pPr defTabSz="914400">
+              <a:lnSpc>
+                <a:spcPct val="100000"/>
+              </a:lnSpc>
+              <a:tabLst>
+                <a:tab pos="0" algn="l"/>
+              </a:tabLst>
+            </a:pPr>
+            <a:r>
+              <a:rPr lang="en-US" sz="2400" b="1" u="none" strike="noStrike" dirty="0">
+                <a:solidFill>
+                  <a:schemeClr val="dk1"/>
+                </a:solidFill>
+                <a:effectLst/>
+                <a:uFillTx/>
+                <a:latin typeface="Archivo Black"/>
+              </a:rPr>
+              <a:t>Why Reactive? From Imperative to Reactive Model </a:t>
+            </a:r>
+          </a:p>
+          <a:p>
+            <a:pPr defTabSz="914400">
+              <a:lnSpc>
+                <a:spcPct val="100000"/>
+              </a:lnSpc>
+              <a:tabLst>
+                <a:tab pos="0" algn="l"/>
+              </a:tabLst>
+            </a:pPr>
+            <a:endParaRPr lang="en-US" sz="2400" b="1" u="none" strike="noStrike" dirty="0">
+              <a:solidFill>
+                <a:schemeClr val="dk1"/>
+              </a:solidFill>
+              <a:effectLst/>
+              <a:uFillTx/>
+              <a:latin typeface="Archivo Black"/>
+            </a:endParaRPr>
+          </a:p>
+        </p:txBody>
+      </p:sp>
+      <p:sp>
+        <p:nvSpPr>
+          <p:cNvPr id="9" name="PlaceHolder 2">
+            <a:extLst>
+              <a:ext uri="{FF2B5EF4-FFF2-40B4-BE49-F238E27FC236}">
+                <a16:creationId xmlns:a16="http://schemas.microsoft.com/office/drawing/2014/main" id="{80F5422C-C9C4-73EE-8944-DC16B3D52F7B}"/>
+              </a:ext>
+            </a:extLst>
+          </p:cNvPr>
+          <p:cNvSpPr txBox="1">
+            <a:spLocks/>
+          </p:cNvSpPr>
+          <p:nvPr/>
+        </p:nvSpPr>
+        <p:spPr>
+          <a:xfrm>
+            <a:off x="978821" y="1076625"/>
+            <a:ext cx="2667177" cy="466473"/>
+          </a:xfrm>
+          <a:prstGeom prst="rect">
+            <a:avLst/>
+          </a:prstGeom>
+          <a:noFill/>
+          <a:ln w="28575">
+            <a:noFill/>
+          </a:ln>
+        </p:spPr>
+        <p:txBody>
+          <a:bodyPr lIns="91440" tIns="91440" rIns="91440" bIns="91440" anchor="ctr">
+            <a:normAutofit/>
+          </a:bodyPr>
+          <a:lstStyle>
+            <a:lvl1pPr algn="l" defTabSz="914400" rtl="0" eaLnBrk="1" latinLnBrk="0" hangingPunct="1">
+              <a:lnSpc>
+                <a:spcPct val="90000"/>
+              </a:lnSpc>
+              <a:spcBef>
+                <a:spcPct val="0"/>
+              </a:spcBef>
+              <a:buNone/>
+              <a:defRPr sz="4400" kern="1200">
+                <a:solidFill>
+                  <a:schemeClr val="tx1"/>
+                </a:solidFill>
+                <a:latin typeface="+mj-lt"/>
+                <a:ea typeface="+mj-ea"/>
+                <a:cs typeface="+mj-cs"/>
+              </a:defRPr>
+            </a:lvl1pPr>
+          </a:lstStyle>
+          <a:p>
+            <a:pPr algn="ctr">
+              <a:lnSpc>
+                <a:spcPct val="100000"/>
+              </a:lnSpc>
+              <a:tabLst>
+                <a:tab pos="0" algn="l"/>
+              </a:tabLst>
+            </a:pPr>
+            <a:r>
+              <a:rPr lang="en-US" sz="1600" b="1" dirty="0">
+                <a:solidFill>
+                  <a:schemeClr val="dk1"/>
+                </a:solidFill>
+                <a:latin typeface="Manrope"/>
+                <a:ea typeface="+mn-ea"/>
+                <a:cs typeface="+mn-cs"/>
+              </a:rPr>
+              <a:t>IMPERATIVE MODEL</a:t>
+            </a:r>
+            <a:endParaRPr lang="en-US" sz="1600" b="1" dirty="0">
+              <a:solidFill>
+                <a:srgbClr val="000000"/>
+              </a:solidFill>
+              <a:latin typeface="OpenSymbol"/>
+            </a:endParaRPr>
+          </a:p>
+        </p:txBody>
+      </p:sp>
+      <p:sp>
+        <p:nvSpPr>
+          <p:cNvPr id="10" name="PlaceHolder 2">
+            <a:extLst>
+              <a:ext uri="{FF2B5EF4-FFF2-40B4-BE49-F238E27FC236}">
+                <a16:creationId xmlns:a16="http://schemas.microsoft.com/office/drawing/2014/main" id="{93AB68D4-5C43-00A2-4C3F-E35196ED850D}"/>
+              </a:ext>
+            </a:extLst>
+          </p:cNvPr>
+          <p:cNvSpPr txBox="1">
+            <a:spLocks/>
+          </p:cNvSpPr>
+          <p:nvPr/>
+        </p:nvSpPr>
+        <p:spPr>
+          <a:xfrm>
+            <a:off x="5150957" y="1082906"/>
+            <a:ext cx="2955321" cy="466473"/>
+          </a:xfrm>
+          <a:prstGeom prst="rect">
+            <a:avLst/>
+          </a:prstGeom>
+          <a:noFill/>
+          <a:ln w="28575">
+            <a:noFill/>
+          </a:ln>
+        </p:spPr>
+        <p:txBody>
+          <a:bodyPr lIns="91440" tIns="91440" rIns="91440" bIns="91440" anchor="ctr">
+            <a:normAutofit/>
+          </a:bodyPr>
+          <a:lstStyle>
+            <a:lvl1pPr algn="l" defTabSz="914400" rtl="0" eaLnBrk="1" latinLnBrk="0" hangingPunct="1">
+              <a:lnSpc>
+                <a:spcPct val="90000"/>
+              </a:lnSpc>
+              <a:spcBef>
+                <a:spcPct val="0"/>
+              </a:spcBef>
+              <a:buNone/>
+              <a:defRPr sz="4400" kern="1200">
+                <a:solidFill>
+                  <a:schemeClr val="tx1"/>
+                </a:solidFill>
+                <a:latin typeface="+mj-lt"/>
+                <a:ea typeface="+mj-ea"/>
+                <a:cs typeface="+mj-cs"/>
+              </a:defRPr>
+            </a:lvl1pPr>
+          </a:lstStyle>
+          <a:p>
+            <a:pPr algn="ctr">
+              <a:lnSpc>
+                <a:spcPct val="100000"/>
+              </a:lnSpc>
+              <a:tabLst>
+                <a:tab pos="0" algn="l"/>
+              </a:tabLst>
+            </a:pPr>
+            <a:r>
+              <a:rPr lang="en-US" sz="1600" b="1" dirty="0">
+                <a:solidFill>
+                  <a:schemeClr val="dk1"/>
+                </a:solidFill>
+                <a:latin typeface="Manrope"/>
+                <a:ea typeface="+mn-ea"/>
+                <a:cs typeface="+mn-cs"/>
+              </a:rPr>
+              <a:t>REACTIVE MODEL</a:t>
+            </a:r>
+          </a:p>
+        </p:txBody>
+      </p:sp>
+      <p:sp>
+        <p:nvSpPr>
+          <p:cNvPr id="15" name="Right Arrow 14">
+            <a:extLst>
+              <a:ext uri="{FF2B5EF4-FFF2-40B4-BE49-F238E27FC236}">
+                <a16:creationId xmlns:a16="http://schemas.microsoft.com/office/drawing/2014/main" id="{ADB08ACB-C58E-05B4-4169-40D9BEEC6ECC}"/>
+              </a:ext>
+            </a:extLst>
+          </p:cNvPr>
+          <p:cNvSpPr/>
+          <p:nvPr/>
+        </p:nvSpPr>
+        <p:spPr>
+          <a:xfrm>
+            <a:off x="3749826" y="2269447"/>
+            <a:ext cx="992372" cy="375684"/>
+          </a:xfrm>
+          <a:prstGeom prst="rightArrow">
+            <a:avLst/>
+          </a:prstGeom>
+          <a:gradFill flip="none" rotWithShape="1">
+            <a:gsLst>
+              <a:gs pos="0">
+                <a:schemeClr val="dk1">
+                  <a:lumMod val="67000"/>
+                </a:schemeClr>
+              </a:gs>
+              <a:gs pos="48000">
+                <a:schemeClr val="dk1">
+                  <a:lumMod val="97000"/>
+                  <a:lumOff val="3000"/>
+                </a:schemeClr>
+              </a:gs>
+              <a:gs pos="100000">
+                <a:schemeClr val="dk1">
+                  <a:lumMod val="60000"/>
+                  <a:lumOff val="40000"/>
+                </a:schemeClr>
+              </a:gs>
+            </a:gsLst>
+            <a:lin ang="16200000" scaled="1"/>
+            <a:tileRect/>
+          </a:gradFill>
+          <a:ln>
+            <a:noFill/>
+          </a:ln>
+        </p:spPr>
+        <p:style>
+          <a:lnRef idx="0">
+            <a:scrgbClr r="0" g="0" b="0"/>
+          </a:lnRef>
+          <a:fillRef idx="0">
+            <a:scrgbClr r="0" g="0" b="0"/>
+          </a:fillRef>
+          <a:effectRef idx="0">
+            <a:scrgbClr r="0" g="0" b="0"/>
+          </a:effectRef>
+          <a:fontRef idx="minor">
+            <a:schemeClr val="lt1"/>
+          </a:fontRef>
+        </p:style>
+        <p:txBody>
+          <a:bodyPr rtlCol="0" anchor="ctr"/>
+          <a:lstStyle/>
+          <a:p>
+            <a:pPr algn="ctr"/>
+            <a:endParaRPr lang="en-IT"/>
+          </a:p>
+        </p:txBody>
+      </p:sp>
+      <p:sp>
+        <p:nvSpPr>
+          <p:cNvPr id="17" name="Rectangle 16">
+            <a:extLst>
+              <a:ext uri="{FF2B5EF4-FFF2-40B4-BE49-F238E27FC236}">
+                <a16:creationId xmlns:a16="http://schemas.microsoft.com/office/drawing/2014/main" id="{CCA1742B-3E39-E08A-E572-5971885174E3}"/>
+              </a:ext>
+            </a:extLst>
+          </p:cNvPr>
+          <p:cNvSpPr/>
+          <p:nvPr/>
+        </p:nvSpPr>
+        <p:spPr>
+          <a:xfrm>
+            <a:off x="118108" y="529696"/>
+            <a:ext cx="180000" cy="360000"/>
+          </a:xfrm>
+          <a:prstGeom prst="rect">
+            <a:avLst/>
+          </a:prstGeom>
+        </p:spPr>
+        <p:style>
+          <a:lnRef idx="2">
+            <a:schemeClr val="dk1">
+              <a:shade val="15000"/>
+            </a:schemeClr>
+          </a:lnRef>
+          <a:fillRef idx="1">
+            <a:schemeClr val="dk1"/>
+          </a:fillRef>
+          <a:effectRef idx="0">
+            <a:schemeClr val="dk1"/>
+          </a:effectRef>
+          <a:fontRef idx="minor">
+            <a:schemeClr val="lt1"/>
+          </a:fontRef>
+        </p:style>
+        <p:txBody>
+          <a:bodyPr rtlCol="0" anchor="ctr"/>
+          <a:lstStyle/>
+          <a:p>
+            <a:pPr algn="ctr"/>
+            <a:endParaRPr lang="en-IT"/>
+          </a:p>
+        </p:txBody>
+      </p:sp>
+      <p:pic>
+        <p:nvPicPr>
+          <p:cNvPr id="16" name="Picture 2" descr="Imperative Execution Model and Worker Threads">
+            <a:extLst>
+              <a:ext uri="{FF2B5EF4-FFF2-40B4-BE49-F238E27FC236}">
+                <a16:creationId xmlns:a16="http://schemas.microsoft.com/office/drawing/2014/main" id="{3A53D42A-C3E2-1354-997F-47F91EE3EBC1}"/>
+              </a:ext>
+            </a:extLst>
+          </p:cNvPr>
+          <p:cNvPicPr>
+            <a:picLocks noChangeArrowheads="1"/>
+          </p:cNvPicPr>
+          <p:nvPr/>
+        </p:nvPicPr>
+        <p:blipFill>
+          <a:blip r:embed="rId3">
+            <a:extLst>
+              <a:ext uri="{28A0092B-C50C-407E-A947-70E740481C1C}">
+                <a14:useLocalDpi xmlns:a14="http://schemas.microsoft.com/office/drawing/2010/main" val="0"/>
+              </a:ext>
+            </a:extLst>
+          </a:blip>
+          <a:srcRect/>
+          <a:stretch>
+            <a:fillRect/>
+          </a:stretch>
+        </p:blipFill>
+        <p:spPr bwMode="auto">
+          <a:xfrm>
+            <a:off x="373279" y="1779161"/>
+            <a:ext cx="2880000" cy="1146374"/>
+          </a:xfrm>
+          <a:prstGeom prst="rect">
+            <a:avLst/>
+          </a:prstGeom>
+          <a:noFill/>
+          <a:extLst>
+            <a:ext uri="{909E8E84-426E-40DD-AFC4-6F175D3DCCD1}">
+              <a14:hiddenFill xmlns:a14="http://schemas.microsoft.com/office/drawing/2010/main">
+                <a:solidFill>
+                  <a:srgbClr val="FFFFFF"/>
+                </a:solidFill>
+              </a14:hiddenFill>
+            </a:ext>
+          </a:extLst>
+        </p:spPr>
+      </p:pic>
+      <p:pic>
+        <p:nvPicPr>
+          <p:cNvPr id="18" name="Picture 17" descr="Reactive Execution Model and I/O Threads">
+            <a:extLst>
+              <a:ext uri="{FF2B5EF4-FFF2-40B4-BE49-F238E27FC236}">
+                <a16:creationId xmlns:a16="http://schemas.microsoft.com/office/drawing/2014/main" id="{C7D2D52F-4A3E-1114-A165-B2DFC671A168}"/>
+              </a:ext>
+            </a:extLst>
+          </p:cNvPr>
+          <p:cNvPicPr>
+            <a:picLocks noChangeAspect="1" noChangeArrowheads="1"/>
+          </p:cNvPicPr>
+          <p:nvPr/>
+        </p:nvPicPr>
+        <p:blipFill>
+          <a:blip r:embed="rId4">
+            <a:extLst>
+              <a:ext uri="{28A0092B-C50C-407E-A947-70E740481C1C}">
+                <a14:useLocalDpi xmlns:a14="http://schemas.microsoft.com/office/drawing/2010/main" val="0"/>
+              </a:ext>
+            </a:extLst>
+          </a:blip>
+          <a:srcRect/>
+          <a:stretch>
+            <a:fillRect/>
+          </a:stretch>
+        </p:blipFill>
+        <p:spPr bwMode="auto">
+          <a:xfrm>
+            <a:off x="5238745" y="1543098"/>
+            <a:ext cx="2880000" cy="1618500"/>
+          </a:xfrm>
+          <a:prstGeom prst="rect">
+            <a:avLst/>
+          </a:prstGeom>
+          <a:noFill/>
+          <a:extLst>
+            <a:ext uri="{909E8E84-426E-40DD-AFC4-6F175D3DCCD1}">
+              <a14:hiddenFill xmlns:a14="http://schemas.microsoft.com/office/drawing/2010/main">
+                <a:solidFill>
+                  <a:srgbClr val="FFFFFF"/>
+                </a:solidFill>
+              </a14:hiddenFill>
+            </a:ext>
+          </a:extLst>
+        </p:spPr>
+      </p:pic>
+    </p:spTree>
+    <p:extLst>
+      <p:ext uri="{BB962C8B-B14F-4D97-AF65-F5344CB8AC3E}">
+        <p14:creationId xmlns:p14="http://schemas.microsoft.com/office/powerpoint/2010/main" val="3048881965"/>
+      </p:ext>
+    </p:extLst>
+  </p:cSld>
+  <p:clrMapOvr>
+    <a:masterClrMapping/>
+  </p:clrMapOvr>
+  <p:timing>
+    <p:tnLst>
+      <p:par>
+        <p:cTn id="1" dur="indefinite" restart="never" nodeType="tmRoot">
+          <p:childTnLst>
+            <p:seq concurrent="1" nextAc="seek">
+              <p:cTn id="2" dur="indefinite" nodeType="mainSeq">
+                <p:childTnLst>
+                  <p:par>
+                    <p:cTn id="3" fill="hold">
+                      <p:stCondLst>
+                        <p:cond delay="indefinite"/>
+                        <p:cond evt="onBegin" delay="0">
+                          <p:tn val="2"/>
+                        </p:cond>
+                      </p:stCondLst>
+                      <p:childTnLst>
+                        <p:par>
+                          <p:cTn id="4" fill="hold">
+                            <p:stCondLst>
+                              <p:cond delay="0"/>
+                            </p:stCondLst>
+                            <p:childTnLst>
+                              <p:par>
+                                <p:cTn id="5" presetID="1" presetClass="entr" presetSubtype="0" fill="hold" nodeType="withEffect">
+                                  <p:stCondLst>
+                                    <p:cond delay="0"/>
+                                  </p:stCondLst>
+                                  <p:childTnLst>
+                                    <p:set>
+                                      <p:cBhvr>
+                                        <p:cTn id="6" dur="1" fill="hold">
+                                          <p:stCondLst>
+                                            <p:cond delay="0"/>
+                                          </p:stCondLst>
+                                        </p:cTn>
+                                        <p:tgtEl>
+                                          <p:spTgt spid="16"/>
+                                        </p:tgtEl>
+                                        <p:attrNameLst>
+                                          <p:attrName>style.visibility</p:attrName>
+                                        </p:attrNameLst>
+                                      </p:cBhvr>
+                                      <p:to>
+                                        <p:strVal val="visible"/>
+                                      </p:to>
+                                    </p:set>
+                                  </p:childTnLst>
+                                </p:cTn>
+                              </p:par>
+                              <p:par>
+                                <p:cTn id="7" presetID="1" presetClass="entr" presetSubtype="0" fill="hold" nodeType="withEffect">
+                                  <p:stCondLst>
+                                    <p:cond delay="0"/>
+                                  </p:stCondLst>
+                                  <p:childTnLst>
+                                    <p:set>
+                                      <p:cBhvr>
+                                        <p:cTn id="8" dur="1" fill="hold">
+                                          <p:stCondLst>
+                                            <p:cond delay="0"/>
+                                          </p:stCondLst>
+                                        </p:cTn>
+                                        <p:tgtEl>
+                                          <p:spTgt spid="18"/>
+                                        </p:tgtEl>
+                                        <p:attrNameLst>
+                                          <p:attrName>style.visibility</p:attrName>
+                                        </p:attrNameLst>
+                                      </p:cBhvr>
+                                      <p:to>
+                                        <p:strVal val="visible"/>
+                                      </p:to>
+                                    </p:set>
+                                  </p:childTnLst>
+                                </p:cTn>
+                              </p:par>
+                            </p:childTnLst>
+                          </p:cTn>
+                        </p:par>
+                      </p:childTnLst>
+                    </p:cTn>
+                  </p:par>
+                </p:childTnLst>
+              </p:cTn>
+              <p:prevCondLst>
+                <p:cond evt="onPrev" delay="0">
+                  <p:tgtEl>
+                    <p:sldTgt/>
+                  </p:tgtEl>
+                </p:cond>
+              </p:prevCondLst>
+              <p:nextCondLst>
+                <p:cond evt="onNext" delay="0">
+                  <p:tgtEl>
+                    <p:sldTgt/>
+                  </p:tgtEl>
+                </p:cond>
+              </p:nextCondLst>
+            </p:seq>
+          </p:childTnLst>
+        </p:cTn>
+      </p:par>
+    </p:tnLst>
+  </p:timing>
 </p:sld>
 </file>
 

--- a/thesis/presentation.pptx
+++ b/thesis/presentation.pptx
@@ -5,7 +5,7 @@
     <p:sldMasterId id="2147483648" r:id="rId1"/>
   </p:sldMasterIdLst>
   <p:notesMasterIdLst>
-    <p:notesMasterId r:id="rId17"/>
+    <p:notesMasterId r:id="rId16"/>
   </p:notesMasterIdLst>
   <p:sldIdLst>
     <p:sldId id="256" r:id="rId2"/>
@@ -22,7 +22,6 @@
     <p:sldId id="466" r:id="rId13"/>
     <p:sldId id="470" r:id="rId14"/>
     <p:sldId id="269" r:id="rId15"/>
-    <p:sldId id="274" r:id="rId16"/>
   </p:sldIdLst>
   <p:sldSz cx="9144000" cy="5143500" type="screen16x9"/>
   <p:notesSz cx="6858000" cy="9144000"/>
@@ -140,11 +139,6 @@
             <p14:sldId id="466"/>
             <p14:sldId id="470"/>
             <p14:sldId id="269"/>
-          </p14:sldIdLst>
-        </p14:section>
-        <p14:section name="Appendix" id="{8AA2919E-61E2-384B-9FA4-B269ECD67B5F}">
-          <p14:sldIdLst>
-            <p14:sldId id="274"/>
           </p14:sldIdLst>
         </p14:section>
       </p14:sectionLst>
@@ -1829,175 +1823,6 @@
     <p:extLst>
       <p:ext uri="{BB962C8B-B14F-4D97-AF65-F5344CB8AC3E}">
         <p14:creationId xmlns:p14="http://schemas.microsoft.com/office/powerpoint/2010/main" val="1947301536"/>
-      </p:ext>
-    </p:extLst>
-  </p:cSld>
-  <p:clrMapOvr>
-    <a:masterClrMapping/>
-  </p:clrMapOvr>
-</p:notes>
-</file>
-
-<file path=ppt/notesSlides/notesSlide15.xml><?xml version="1.0" encoding="utf-8"?>
-<p:notes xmlns:a="http://schemas.openxmlformats.org/drawingml/2006/main" xmlns:r="http://schemas.openxmlformats.org/officeDocument/2006/relationships" xmlns:p="http://schemas.openxmlformats.org/presentationml/2006/main">
-  <p:cSld>
-    <p:spTree>
-      <p:nvGrpSpPr>
-        <p:cNvPr id="1" name="">
-          <a:extLst>
-            <a:ext uri="{FF2B5EF4-FFF2-40B4-BE49-F238E27FC236}">
-              <a16:creationId xmlns:a16="http://schemas.microsoft.com/office/drawing/2014/main" id="{790FC870-CCC2-8042-5705-A35AE093F379}"/>
-            </a:ext>
-          </a:extLst>
-        </p:cNvPr>
-        <p:cNvGrpSpPr/>
-        <p:nvPr/>
-      </p:nvGrpSpPr>
-      <p:grpSpPr>
-        <a:xfrm>
-          <a:off x="0" y="0"/>
-          <a:ext cx="0" cy="0"/>
-          <a:chOff x="0" y="0"/>
-          <a:chExt cx="0" cy="0"/>
-        </a:xfrm>
-      </p:grpSpPr>
-      <p:sp>
-        <p:nvSpPr>
-          <p:cNvPr id="2" name="Slide Image Placeholder 1">
-            <a:extLst>
-              <a:ext uri="{FF2B5EF4-FFF2-40B4-BE49-F238E27FC236}">
-                <a16:creationId xmlns:a16="http://schemas.microsoft.com/office/drawing/2014/main" id="{E838542E-4482-3463-86CB-BECD934C6CD5}"/>
-              </a:ext>
-            </a:extLst>
-          </p:cNvPr>
-          <p:cNvSpPr>
-            <a:spLocks noGrp="1" noRot="1" noChangeAspect="1"/>
-          </p:cNvSpPr>
-          <p:nvPr>
-            <p:ph type="sldImg"/>
-          </p:nvPr>
-        </p:nvSpPr>
-        <p:spPr/>
-      </p:sp>
-      <p:sp>
-        <p:nvSpPr>
-          <p:cNvPr id="3" name="Notes Placeholder 2">
-            <a:extLst>
-              <a:ext uri="{FF2B5EF4-FFF2-40B4-BE49-F238E27FC236}">
-                <a16:creationId xmlns:a16="http://schemas.microsoft.com/office/drawing/2014/main" id="{9A9B00D2-5BCC-9A21-8C65-0A9C6423F43B}"/>
-              </a:ext>
-            </a:extLst>
-          </p:cNvPr>
-          <p:cNvSpPr>
-            <a:spLocks noGrp="1"/>
-          </p:cNvSpPr>
-          <p:nvPr>
-            <p:ph type="body" idx="1"/>
-          </p:nvPr>
-        </p:nvSpPr>
-        <p:spPr/>
-        <p:txBody>
-          <a:bodyPr/>
-          <a:lstStyle/>
-          <a:p>
-            <a:r>
-              <a:rPr lang="en-IT" dirty="0"/>
-              <a:t>Here a quick overview about the technologies used to create Smart Travel.</a:t>
-            </a:r>
-            <a:br>
-              <a:rPr lang="en-IT" dirty="0"/>
-            </a:br>
-            <a:r>
-              <a:rPr lang="en-IT" dirty="0"/>
-              <a:t>The frontend is made with the Angular frameowork and PrimeNG as UI components library.</a:t>
-            </a:r>
-          </a:p>
-          <a:p>
-            <a:r>
-              <a:rPr lang="en-GB" dirty="0"/>
-              <a:t>For the backend, I used a combination of Spring Boot and </a:t>
-            </a:r>
-            <a:r>
-              <a:rPr lang="en-GB" dirty="0" err="1"/>
-              <a:t>Quarkus</a:t>
-            </a:r>
-            <a:r>
-              <a:rPr lang="en-GB" dirty="0"/>
-              <a:t> Java frameworks to build the microservices, with each service relying on its own isolated MongoDB instance for data persistence.</a:t>
-            </a:r>
-          </a:p>
-          <a:p>
-            <a:r>
-              <a:rPr lang="en-GB" dirty="0"/>
-              <a:t>A key part of the system is the </a:t>
-            </a:r>
-            <a:r>
-              <a:rPr lang="en-GB" b="1" dirty="0"/>
-              <a:t>Event Handling</a:t>
-            </a:r>
-            <a:r>
-              <a:rPr lang="en-GB" dirty="0"/>
-              <a:t> layer, where I leveraged </a:t>
-            </a:r>
-            <a:r>
-              <a:rPr lang="en-GB" dirty="0" err="1"/>
-              <a:t>Debezium</a:t>
-            </a:r>
-            <a:r>
-              <a:rPr lang="en-GB" dirty="0"/>
-              <a:t> and RabbitMQ to manage asynchronous communication and guarantee data consistency across the distributed services.</a:t>
-            </a:r>
-          </a:p>
-          <a:p>
-            <a:r>
-              <a:rPr lang="en-GB" dirty="0"/>
-              <a:t>Finally, the entire application lifecycle – from code to production - was fully automated using </a:t>
-            </a:r>
-            <a:r>
-              <a:rPr lang="en-GB" b="1" dirty="0"/>
-              <a:t>DevOps</a:t>
-            </a:r>
-            <a:r>
-              <a:rPr lang="en-GB" dirty="0"/>
-              <a:t> tools like Jenkins to create CI/CD pipelines and OKD as cluster to orchestrate running containers.</a:t>
-            </a:r>
-            <a:endParaRPr lang="en-IT" dirty="0"/>
-          </a:p>
-        </p:txBody>
-      </p:sp>
-      <p:sp>
-        <p:nvSpPr>
-          <p:cNvPr id="4" name="Slide Number Placeholder 3">
-            <a:extLst>
-              <a:ext uri="{FF2B5EF4-FFF2-40B4-BE49-F238E27FC236}">
-                <a16:creationId xmlns:a16="http://schemas.microsoft.com/office/drawing/2014/main" id="{D8227DD4-1996-A242-88AD-759176E23A35}"/>
-              </a:ext>
-            </a:extLst>
-          </p:cNvPr>
-          <p:cNvSpPr>
-            <a:spLocks noGrp="1"/>
-          </p:cNvSpPr>
-          <p:nvPr>
-            <p:ph type="sldNum" sz="quarter" idx="5"/>
-          </p:nvPr>
-        </p:nvSpPr>
-        <p:spPr/>
-        <p:txBody>
-          <a:bodyPr/>
-          <a:lstStyle/>
-          <a:p>
-            <a:fld id="{A1FD4C87-9CAF-0C4E-93E7-020DE1465132}" type="slidenum">
-              <a:rPr lang="en-IT" smtClean="0"/>
-              <a:t>15</a:t>
-            </a:fld>
-            <a:endParaRPr lang="en-IT"/>
-          </a:p>
-        </p:txBody>
-      </p:sp>
-    </p:spTree>
-    <p:extLst>
-      <p:ext uri="{BB962C8B-B14F-4D97-AF65-F5344CB8AC3E}">
-        <p14:creationId xmlns:p14="http://schemas.microsoft.com/office/powerpoint/2010/main" val="880904337"/>
       </p:ext>
     </p:extLst>
   </p:cSld>
@@ -29889,4350 +29714,6 @@
 </p:sld>
 </file>
 
-<file path=ppt/slides/slide15.xml><?xml version="1.0" encoding="utf-8"?>
-<p:sld xmlns:a="http://schemas.openxmlformats.org/drawingml/2006/main" xmlns:r="http://schemas.openxmlformats.org/officeDocument/2006/relationships" xmlns:p="http://schemas.openxmlformats.org/presentationml/2006/main">
-  <p:cSld>
-    <p:spTree>
-      <p:nvGrpSpPr>
-        <p:cNvPr id="1" name="">
-          <a:extLst>
-            <a:ext uri="{FF2B5EF4-FFF2-40B4-BE49-F238E27FC236}">
-              <a16:creationId xmlns:a16="http://schemas.microsoft.com/office/drawing/2014/main" id="{42B4ED25-4D9F-A445-F8B8-CF76D02F07ED}"/>
-            </a:ext>
-          </a:extLst>
-        </p:cNvPr>
-        <p:cNvGrpSpPr/>
-        <p:nvPr/>
-      </p:nvGrpSpPr>
-      <p:grpSpPr>
-        <a:xfrm>
-          <a:off x="0" y="0"/>
-          <a:ext cx="0" cy="0"/>
-          <a:chOff x="0" y="0"/>
-          <a:chExt cx="0" cy="0"/>
-        </a:xfrm>
-      </p:grpSpPr>
-      <p:sp>
-        <p:nvSpPr>
-          <p:cNvPr id="407" name="Rectangle 406">
-            <a:extLst>
-              <a:ext uri="{FF2B5EF4-FFF2-40B4-BE49-F238E27FC236}">
-                <a16:creationId xmlns:a16="http://schemas.microsoft.com/office/drawing/2014/main" id="{2B8CF7D6-5359-0DF5-7C33-41CF7E4EC353}"/>
-              </a:ext>
-            </a:extLst>
-          </p:cNvPr>
-          <p:cNvSpPr/>
-          <p:nvPr/>
-        </p:nvSpPr>
-        <p:spPr>
-          <a:xfrm>
-            <a:off x="476280" y="476460"/>
-            <a:ext cx="8191080" cy="466473"/>
-          </a:xfrm>
-          <a:prstGeom prst="rect">
-            <a:avLst/>
-          </a:prstGeom>
-          <a:noFill/>
-          <a:ln w="0">
-            <a:noFill/>
-          </a:ln>
-        </p:spPr>
-        <p:style>
-          <a:lnRef idx="0">
-            <a:scrgbClr r="0" g="0" b="0"/>
-          </a:lnRef>
-          <a:fillRef idx="0">
-            <a:scrgbClr r="0" g="0" b="0"/>
-          </a:fillRef>
-          <a:effectRef idx="0">
-            <a:scrgbClr r="0" g="0" b="0"/>
-          </a:effectRef>
-          <a:fontRef idx="minor"/>
-        </p:style>
-        <p:txBody>
-          <a:bodyPr anchor="t">
-            <a:normAutofit/>
-          </a:bodyPr>
-          <a:lstStyle/>
-          <a:p>
-            <a:pPr defTabSz="914400">
-              <a:lnSpc>
-                <a:spcPct val="100000"/>
-              </a:lnSpc>
-              <a:tabLst>
-                <a:tab pos="0" algn="l"/>
-              </a:tabLst>
-            </a:pPr>
-            <a:r>
-              <a:rPr lang="en-US" sz="2400" b="1" u="none" strike="noStrike" dirty="0">
-                <a:solidFill>
-                  <a:schemeClr val="dk1"/>
-                </a:solidFill>
-                <a:effectLst/>
-                <a:uFillTx/>
-                <a:latin typeface="Archivo Black"/>
-              </a:rPr>
-              <a:t>Technologies and Tools</a:t>
-            </a:r>
-            <a:endParaRPr lang="en-US" sz="2400" b="1" u="none" strike="noStrike" dirty="0">
-              <a:solidFill>
-                <a:srgbClr val="000000"/>
-              </a:solidFill>
-              <a:effectLst/>
-              <a:uFillTx/>
-              <a:latin typeface="OpenSymbol"/>
-            </a:endParaRPr>
-          </a:p>
-        </p:txBody>
-      </p:sp>
-      <p:sp>
-        <p:nvSpPr>
-          <p:cNvPr id="3" name="Rectangle 2">
-            <a:extLst>
-              <a:ext uri="{FF2B5EF4-FFF2-40B4-BE49-F238E27FC236}">
-                <a16:creationId xmlns:a16="http://schemas.microsoft.com/office/drawing/2014/main" id="{0A6F511C-CF4A-C233-4588-B3F82EFB8754}"/>
-              </a:ext>
-            </a:extLst>
-          </p:cNvPr>
-          <p:cNvSpPr/>
-          <p:nvPr/>
-        </p:nvSpPr>
-        <p:spPr>
-          <a:xfrm>
-            <a:off x="118108" y="529696"/>
-            <a:ext cx="180000" cy="360000"/>
-          </a:xfrm>
-          <a:prstGeom prst="rect">
-            <a:avLst/>
-          </a:prstGeom>
-        </p:spPr>
-        <p:style>
-          <a:lnRef idx="2">
-            <a:schemeClr val="dk1">
-              <a:shade val="15000"/>
-            </a:schemeClr>
-          </a:lnRef>
-          <a:fillRef idx="1">
-            <a:schemeClr val="dk1"/>
-          </a:fillRef>
-          <a:effectRef idx="0">
-            <a:schemeClr val="dk1"/>
-          </a:effectRef>
-          <a:fontRef idx="minor">
-            <a:schemeClr val="lt1"/>
-          </a:fontRef>
-        </p:style>
-        <p:txBody>
-          <a:bodyPr rtlCol="0" anchor="ctr"/>
-          <a:lstStyle/>
-          <a:p>
-            <a:pPr algn="ctr"/>
-            <a:endParaRPr lang="en-IT"/>
-          </a:p>
-        </p:txBody>
-      </p:sp>
-      <p:grpSp>
-        <p:nvGrpSpPr>
-          <p:cNvPr id="508" name="Group 507">
-            <a:extLst>
-              <a:ext uri="{FF2B5EF4-FFF2-40B4-BE49-F238E27FC236}">
-                <a16:creationId xmlns:a16="http://schemas.microsoft.com/office/drawing/2014/main" id="{A16327D1-CF20-2CC0-DC41-93BE01582950}"/>
-              </a:ext>
-            </a:extLst>
-          </p:cNvPr>
-          <p:cNvGrpSpPr/>
-          <p:nvPr/>
-        </p:nvGrpSpPr>
-        <p:grpSpPr>
-          <a:xfrm>
-            <a:off x="118108" y="1265759"/>
-            <a:ext cx="2880000" cy="1800000"/>
-            <a:chOff x="118108" y="1265759"/>
-            <a:chExt cx="2880000" cy="1800000"/>
-          </a:xfrm>
-        </p:grpSpPr>
-        <p:sp>
-          <p:nvSpPr>
-            <p:cNvPr id="392" name="Google Shape;254;p37">
-              <a:extLst>
-                <a:ext uri="{FF2B5EF4-FFF2-40B4-BE49-F238E27FC236}">
-                  <a16:creationId xmlns:a16="http://schemas.microsoft.com/office/drawing/2014/main" id="{DF3D2C33-AE2D-EB13-6506-48A933707023}"/>
-                </a:ext>
-              </a:extLst>
-            </p:cNvPr>
-            <p:cNvSpPr/>
-            <p:nvPr/>
-          </p:nvSpPr>
-          <p:spPr>
-            <a:xfrm>
-              <a:off x="118266" y="1265759"/>
-              <a:ext cx="2879842" cy="1800000"/>
-            </a:xfrm>
-            <a:prstGeom prst="rect">
-              <a:avLst/>
-            </a:prstGeom>
-            <a:solidFill>
-              <a:schemeClr val="tx1"/>
-            </a:solidFill>
-            <a:ln>
-              <a:noFill/>
-            </a:ln>
-          </p:spPr>
-          <p:style>
-            <a:lnRef idx="0">
-              <a:scrgbClr r="0" g="0" b="0"/>
-            </a:lnRef>
-            <a:fillRef idx="0">
-              <a:scrgbClr r="0" g="0" b="0"/>
-            </a:fillRef>
-            <a:effectRef idx="0">
-              <a:scrgbClr r="0" g="0" b="0"/>
-            </a:effectRef>
-            <a:fontRef idx="minor">
-              <a:schemeClr val="lt1"/>
-            </a:fontRef>
-          </p:style>
-          <p:txBody>
-            <a:bodyPr spcFirstLastPara="1" wrap="square" lIns="121900" tIns="121900" rIns="121900" bIns="121900" anchor="t" anchorCtr="0">
-              <a:noAutofit/>
-            </a:bodyPr>
-            <a:lstStyle/>
-            <a:p>
-              <a:pPr algn="ctr"/>
-              <a:endParaRPr sz="2400" dirty="0">
-                <a:solidFill>
-                  <a:srgbClr val="FFFFFF"/>
-                </a:solidFill>
-              </a:endParaRPr>
-            </a:p>
-            <a:p>
-              <a:pPr algn="ctr"/>
-              <a:endParaRPr sz="2400" dirty="0">
-                <a:solidFill>
-                  <a:srgbClr val="FFFFFF"/>
-                </a:solidFill>
-              </a:endParaRPr>
-            </a:p>
-            <a:p>
-              <a:pPr algn="ctr"/>
-              <a:endParaRPr sz="2400" dirty="0">
-                <a:solidFill>
-                  <a:srgbClr val="FFFFFF"/>
-                </a:solidFill>
-              </a:endParaRPr>
-            </a:p>
-            <a:p>
-              <a:pPr algn="ctr"/>
-              <a:endParaRPr sz="2400" dirty="0">
-                <a:solidFill>
-                  <a:srgbClr val="FFFFFF"/>
-                </a:solidFill>
-              </a:endParaRPr>
-            </a:p>
-            <a:p>
-              <a:endParaRPr sz="2400" dirty="0">
-                <a:solidFill>
-                  <a:srgbClr val="FFFFFF"/>
-                </a:solidFill>
-              </a:endParaRPr>
-            </a:p>
-          </p:txBody>
-        </p:sp>
-        <p:pic>
-          <p:nvPicPr>
-            <p:cNvPr id="393" name="Google Shape;255;p37">
-              <a:extLst>
-                <a:ext uri="{FF2B5EF4-FFF2-40B4-BE49-F238E27FC236}">
-                  <a16:creationId xmlns:a16="http://schemas.microsoft.com/office/drawing/2014/main" id="{7EFBA7D5-C6F1-9071-EDCA-9AF835132FB8}"/>
-                </a:ext>
-              </a:extLst>
-            </p:cNvPr>
-            <p:cNvPicPr preferRelativeResize="0"/>
-            <p:nvPr/>
-          </p:nvPicPr>
-          <p:blipFill rotWithShape="1">
-            <a:blip r:embed="rId3">
-              <a:alphaModFix/>
-            </a:blip>
-            <a:srcRect/>
-            <a:stretch/>
-          </p:blipFill>
-          <p:spPr>
-            <a:xfrm>
-              <a:off x="335070" y="1701381"/>
-              <a:ext cx="468395" cy="458889"/>
-            </a:xfrm>
-            <a:prstGeom prst="rect">
-              <a:avLst/>
-            </a:prstGeom>
-            <a:solidFill>
-              <a:schemeClr val="tx1"/>
-            </a:solidFill>
-            <a:ln>
-              <a:noFill/>
-            </a:ln>
-          </p:spPr>
-        </p:pic>
-        <p:sp>
-          <p:nvSpPr>
-            <p:cNvPr id="394" name="Google Shape;278;p37">
-              <a:extLst>
-                <a:ext uri="{FF2B5EF4-FFF2-40B4-BE49-F238E27FC236}">
-                  <a16:creationId xmlns:a16="http://schemas.microsoft.com/office/drawing/2014/main" id="{3CE7BEB9-D00F-361D-B8CD-0E5C1388462F}"/>
-                </a:ext>
-              </a:extLst>
-            </p:cNvPr>
-            <p:cNvSpPr txBox="1">
-              <a:spLocks/>
-            </p:cNvSpPr>
-            <p:nvPr/>
-          </p:nvSpPr>
-          <p:spPr>
-            <a:xfrm>
-              <a:off x="118108" y="1353835"/>
-              <a:ext cx="2879842" cy="280930"/>
-            </a:xfrm>
-            <a:prstGeom prst="rect">
-              <a:avLst/>
-            </a:prstGeom>
-            <a:solidFill>
-              <a:schemeClr val="tx1"/>
-            </a:solidFill>
-            <a:ln>
-              <a:noFill/>
-            </a:ln>
-          </p:spPr>
-          <p:txBody>
-            <a:bodyPr spcFirstLastPara="1" vert="horz" wrap="square" lIns="0" tIns="0" rIns="0" bIns="0" spcCol="360000" rtlCol="0" anchor="t" anchorCtr="0">
-              <a:noAutofit/>
-            </a:bodyPr>
-            <a:lstStyle>
-              <a:lvl1pPr marL="0" indent="0" algn="l" defTabSz="360000" rtl="0" eaLnBrk="1" latinLnBrk="0" hangingPunct="1">
-                <a:lnSpc>
-                  <a:spcPct val="150000"/>
-                </a:lnSpc>
-                <a:spcBef>
-                  <a:spcPts val="0"/>
-                </a:spcBef>
-                <a:buClr>
-                  <a:schemeClr val="tx2"/>
-                </a:buClr>
-                <a:buFont typeface="Arial" panose="020B0604020202020204" pitchFamily="34" charset="0"/>
-                <a:buNone/>
-                <a:tabLst>
-                  <a:tab pos="360000" algn="l"/>
-                  <a:tab pos="720000" algn="l"/>
-                  <a:tab pos="1080000" algn="l"/>
-                  <a:tab pos="1440000" algn="l"/>
-                  <a:tab pos="1800000" algn="l"/>
-                  <a:tab pos="2160000" algn="l"/>
-                  <a:tab pos="2520000" algn="l"/>
-                </a:tabLst>
-                <a:defRPr sz="1400" kern="1200" baseline="0">
-                  <a:solidFill>
-                    <a:schemeClr val="tx1"/>
-                  </a:solidFill>
-                  <a:latin typeface="Montserrat" panose="02000505000000020004" pitchFamily="2" charset="77"/>
-                  <a:ea typeface="+mn-ea"/>
-                  <a:cs typeface="+mn-cs"/>
-                </a:defRPr>
-              </a:lvl1pPr>
-              <a:lvl2pPr marL="14288" indent="0" algn="l" defTabSz="914400" rtl="0" eaLnBrk="1" latinLnBrk="0" hangingPunct="1">
-                <a:lnSpc>
-                  <a:spcPct val="90000"/>
-                </a:lnSpc>
-                <a:spcBef>
-                  <a:spcPts val="500"/>
-                </a:spcBef>
-                <a:buFontTx/>
-                <a:buNone/>
-                <a:tabLst/>
-                <a:defRPr sz="1600" b="0" i="0" kern="1200" cap="all" baseline="0">
-                  <a:solidFill>
-                    <a:schemeClr val="tx2"/>
-                  </a:solidFill>
-                  <a:latin typeface="Montserrat" panose="02000505000000020004" pitchFamily="2" charset="77"/>
-                  <a:ea typeface="+mn-ea"/>
-                  <a:cs typeface="+mn-cs"/>
-                </a:defRPr>
-              </a:lvl2pPr>
-              <a:lvl3pPr marL="14288" indent="0" algn="l" defTabSz="914400" rtl="0" eaLnBrk="1" latinLnBrk="0" hangingPunct="1">
-                <a:lnSpc>
-                  <a:spcPct val="90000"/>
-                </a:lnSpc>
-                <a:spcBef>
-                  <a:spcPts val="500"/>
-                </a:spcBef>
-                <a:buFont typeface="Arial" panose="020B0604020202020204" pitchFamily="34" charset="0"/>
-                <a:buNone/>
-                <a:tabLst/>
-                <a:defRPr sz="1400" b="1" kern="1200" cap="all" baseline="0">
-                  <a:solidFill>
-                    <a:schemeClr val="tx1"/>
-                  </a:solidFill>
-                  <a:latin typeface="Montserrat" panose="02000505000000020004" pitchFamily="2" charset="77"/>
-                  <a:ea typeface="+mn-ea"/>
-                  <a:cs typeface="+mn-cs"/>
-                </a:defRPr>
-              </a:lvl3pPr>
-              <a:lvl4pPr marL="312738" indent="-219075" algn="l" defTabSz="914400" rtl="0" eaLnBrk="1" latinLnBrk="0" hangingPunct="1">
-                <a:lnSpc>
-                  <a:spcPct val="90000"/>
-                </a:lnSpc>
-                <a:spcBef>
-                  <a:spcPts val="500"/>
-                </a:spcBef>
-                <a:buClr>
-                  <a:schemeClr val="tx2"/>
-                </a:buClr>
-                <a:buFont typeface="Arial" panose="020B0604020202020204" pitchFamily="34" charset="0"/>
-                <a:buChar char="•"/>
-                <a:tabLst/>
-                <a:defRPr sz="1400" b="0" i="0" kern="1200">
-                  <a:solidFill>
-                    <a:schemeClr val="tx1"/>
-                  </a:solidFill>
-                  <a:latin typeface="Montserrat" panose="02000505000000020004" pitchFamily="2" charset="77"/>
-                  <a:ea typeface="+mn-ea"/>
-                  <a:cs typeface="+mn-cs"/>
-                </a:defRPr>
-              </a:lvl4pPr>
-              <a:lvl5pPr marL="627063" indent="-236538" algn="l" defTabSz="914400" rtl="0" eaLnBrk="1" latinLnBrk="0" hangingPunct="1">
-                <a:lnSpc>
-                  <a:spcPct val="90000"/>
-                </a:lnSpc>
-                <a:spcBef>
-                  <a:spcPts val="500"/>
-                </a:spcBef>
-                <a:buFont typeface="Arial" panose="020B0604020202020204" pitchFamily="34" charset="0"/>
-                <a:buChar char="•"/>
-                <a:tabLst/>
-                <a:defRPr sz="1200" b="0" i="0" kern="1200">
-                  <a:solidFill>
-                    <a:schemeClr val="tx1"/>
-                  </a:solidFill>
-                  <a:latin typeface="Montserrat" panose="02000505000000020004" pitchFamily="2" charset="77"/>
-                  <a:ea typeface="+mn-ea"/>
-                  <a:cs typeface="+mn-cs"/>
-                </a:defRPr>
-              </a:lvl5pPr>
-              <a:lvl6pPr marL="2514600" indent="-228600" algn="l" defTabSz="914400" rtl="0" eaLnBrk="1" latinLnBrk="0" hangingPunct="1">
-                <a:lnSpc>
-                  <a:spcPct val="90000"/>
-                </a:lnSpc>
-                <a:spcBef>
-                  <a:spcPts val="500"/>
-                </a:spcBef>
-                <a:buFont typeface="Arial" panose="020B0604020202020204" pitchFamily="34" charset="0"/>
-                <a:buChar char="•"/>
-                <a:defRPr sz="1800" kern="1200">
-                  <a:solidFill>
-                    <a:schemeClr val="tx1"/>
-                  </a:solidFill>
-                  <a:latin typeface="+mn-lt"/>
-                  <a:ea typeface="+mn-ea"/>
-                  <a:cs typeface="+mn-cs"/>
-                </a:defRPr>
-              </a:lvl6pPr>
-              <a:lvl7pPr marL="2971800" indent="-228600" algn="l" defTabSz="914400" rtl="0" eaLnBrk="1" latinLnBrk="0" hangingPunct="1">
-                <a:lnSpc>
-                  <a:spcPct val="90000"/>
-                </a:lnSpc>
-                <a:spcBef>
-                  <a:spcPts val="500"/>
-                </a:spcBef>
-                <a:buFont typeface="Arial" panose="020B0604020202020204" pitchFamily="34" charset="0"/>
-                <a:buChar char="•"/>
-                <a:defRPr sz="1800" kern="1200">
-                  <a:solidFill>
-                    <a:schemeClr val="tx1"/>
-                  </a:solidFill>
-                  <a:latin typeface="+mn-lt"/>
-                  <a:ea typeface="+mn-ea"/>
-                  <a:cs typeface="+mn-cs"/>
-                </a:defRPr>
-              </a:lvl7pPr>
-              <a:lvl8pPr marL="3429000" indent="-228600" algn="l" defTabSz="914400" rtl="0" eaLnBrk="1" latinLnBrk="0" hangingPunct="1">
-                <a:lnSpc>
-                  <a:spcPct val="90000"/>
-                </a:lnSpc>
-                <a:spcBef>
-                  <a:spcPts val="500"/>
-                </a:spcBef>
-                <a:buFont typeface="Arial" panose="020B0604020202020204" pitchFamily="34" charset="0"/>
-                <a:buChar char="•"/>
-                <a:defRPr sz="1800" kern="1200">
-                  <a:solidFill>
-                    <a:schemeClr val="tx1"/>
-                  </a:solidFill>
-                  <a:latin typeface="+mn-lt"/>
-                  <a:ea typeface="+mn-ea"/>
-                  <a:cs typeface="+mn-cs"/>
-                </a:defRPr>
-              </a:lvl8pPr>
-              <a:lvl9pPr marL="3886200" indent="-228600" algn="l" defTabSz="914400" rtl="0" eaLnBrk="1" latinLnBrk="0" hangingPunct="1">
-                <a:lnSpc>
-                  <a:spcPct val="90000"/>
-                </a:lnSpc>
-                <a:spcBef>
-                  <a:spcPts val="500"/>
-                </a:spcBef>
-                <a:buFont typeface="Arial" panose="020B0604020202020204" pitchFamily="34" charset="0"/>
-                <a:buChar char="•"/>
-                <a:defRPr sz="1800" kern="1200">
-                  <a:solidFill>
-                    <a:schemeClr val="tx1"/>
-                  </a:solidFill>
-                  <a:latin typeface="+mn-lt"/>
-                  <a:ea typeface="+mn-ea"/>
-                  <a:cs typeface="+mn-cs"/>
-                </a:defRPr>
-              </a:lvl9pPr>
-            </a:lstStyle>
-            <a:p>
-              <a:pPr algn="ctr">
-                <a:lnSpc>
-                  <a:spcPct val="105000"/>
-                </a:lnSpc>
-                <a:buSzPts val="852"/>
-              </a:pPr>
-              <a:r>
-                <a:rPr lang="it-IT" sz="1800" b="1" dirty="0" err="1">
-                  <a:solidFill>
-                    <a:schemeClr val="bg1"/>
-                  </a:solidFill>
-                  <a:latin typeface="Manrope"/>
-                </a:rPr>
-                <a:t>Frontend</a:t>
-              </a:r>
-              <a:endParaRPr lang="it-IT" sz="1800" b="1" dirty="0">
-                <a:solidFill>
-                  <a:schemeClr val="bg1"/>
-                </a:solidFill>
-                <a:latin typeface="Manrope"/>
-              </a:endParaRPr>
-            </a:p>
-            <a:p>
-              <a:pPr>
-                <a:lnSpc>
-                  <a:spcPct val="140000"/>
-                </a:lnSpc>
-                <a:buSzPts val="852"/>
-              </a:pPr>
-              <a:endParaRPr lang="it-IT" sz="1100" dirty="0"/>
-            </a:p>
-          </p:txBody>
-        </p:sp>
-        <p:sp>
-          <p:nvSpPr>
-            <p:cNvPr id="395" name="Google Shape;286;p37">
-              <a:extLst>
-                <a:ext uri="{FF2B5EF4-FFF2-40B4-BE49-F238E27FC236}">
-                  <a16:creationId xmlns:a16="http://schemas.microsoft.com/office/drawing/2014/main" id="{7C0600CF-03F4-D24B-2B36-ABBFD89F8762}"/>
-                </a:ext>
-              </a:extLst>
-            </p:cNvPr>
-            <p:cNvSpPr/>
-            <p:nvPr/>
-          </p:nvSpPr>
-          <p:spPr>
-            <a:xfrm>
-              <a:off x="1027721" y="1701380"/>
-              <a:ext cx="1953902" cy="376744"/>
-            </a:xfrm>
-            <a:prstGeom prst="rect">
-              <a:avLst/>
-            </a:prstGeom>
-            <a:solidFill>
-              <a:schemeClr val="tx1"/>
-            </a:solidFill>
-            <a:ln w="9525" cap="flat" cmpd="sng">
-              <a:noFill/>
-              <a:prstDash val="solid"/>
-              <a:round/>
-              <a:headEnd type="none" w="sm" len="sm"/>
-              <a:tailEnd type="none" w="sm" len="sm"/>
-            </a:ln>
-          </p:spPr>
-          <p:txBody>
-            <a:bodyPr spcFirstLastPara="1" wrap="square" lIns="121900" tIns="121900" rIns="121900" bIns="121900" anchor="t" anchorCtr="0">
-              <a:noAutofit/>
-            </a:bodyPr>
-            <a:lstStyle/>
-            <a:p>
-              <a:r>
-                <a:rPr lang="it" sz="1600" dirty="0">
-                  <a:solidFill>
-                    <a:schemeClr val="bg1"/>
-                  </a:solidFill>
-                  <a:latin typeface="Manrope"/>
-                </a:rPr>
-                <a:t>Angular</a:t>
-              </a:r>
-              <a:endParaRPr dirty="0">
-                <a:solidFill>
-                  <a:schemeClr val="bg1"/>
-                </a:solidFill>
-                <a:latin typeface="Manrope"/>
-              </a:endParaRPr>
-            </a:p>
-          </p:txBody>
-        </p:sp>
-        <p:sp>
-          <p:nvSpPr>
-            <p:cNvPr id="396" name="Google Shape;287;p37">
-              <a:extLst>
-                <a:ext uri="{FF2B5EF4-FFF2-40B4-BE49-F238E27FC236}">
-                  <a16:creationId xmlns:a16="http://schemas.microsoft.com/office/drawing/2014/main" id="{2F08F1C3-C841-CB26-438C-5C200E3D88B3}"/>
-                </a:ext>
-              </a:extLst>
-            </p:cNvPr>
-            <p:cNvSpPr/>
-            <p:nvPr/>
-          </p:nvSpPr>
-          <p:spPr>
-            <a:xfrm>
-              <a:off x="1020243" y="2296069"/>
-              <a:ext cx="1961393" cy="376744"/>
-            </a:xfrm>
-            <a:prstGeom prst="rect">
-              <a:avLst/>
-            </a:prstGeom>
-            <a:solidFill>
-              <a:schemeClr val="tx1"/>
-            </a:solidFill>
-            <a:ln w="9525" cap="flat" cmpd="sng">
-              <a:noFill/>
-              <a:prstDash val="solid"/>
-              <a:round/>
-              <a:headEnd type="none" w="sm" len="sm"/>
-              <a:tailEnd type="none" w="sm" len="sm"/>
-            </a:ln>
-          </p:spPr>
-          <p:txBody>
-            <a:bodyPr spcFirstLastPara="1" wrap="square" lIns="121900" tIns="121900" rIns="121900" bIns="121900" anchor="t" anchorCtr="0">
-              <a:noAutofit/>
-            </a:bodyPr>
-            <a:lstStyle/>
-            <a:p>
-              <a:r>
-                <a:rPr lang="it" sz="1600" dirty="0">
-                  <a:solidFill>
-                    <a:schemeClr val="bg1"/>
-                  </a:solidFill>
-                  <a:latin typeface="Manrope"/>
-                </a:rPr>
-                <a:t>PrimeNG</a:t>
-              </a:r>
-              <a:endParaRPr sz="1600" dirty="0">
-                <a:solidFill>
-                  <a:schemeClr val="bg1"/>
-                </a:solidFill>
-                <a:latin typeface="Manrope"/>
-              </a:endParaRPr>
-            </a:p>
-          </p:txBody>
-        </p:sp>
-        <p:grpSp>
-          <p:nvGrpSpPr>
-            <p:cNvPr id="397" name="Gruppo 59">
-              <a:extLst>
-                <a:ext uri="{FF2B5EF4-FFF2-40B4-BE49-F238E27FC236}">
-                  <a16:creationId xmlns:a16="http://schemas.microsoft.com/office/drawing/2014/main" id="{AA65CF05-B9FE-A8F2-54AE-C5BFE27E4622}"/>
-                </a:ext>
-              </a:extLst>
-            </p:cNvPr>
-            <p:cNvGrpSpPr/>
-            <p:nvPr/>
-          </p:nvGrpSpPr>
-          <p:grpSpPr>
-            <a:xfrm>
-              <a:off x="338197" y="2314389"/>
-              <a:ext cx="476493" cy="458889"/>
-              <a:chOff x="861753" y="2657666"/>
-              <a:chExt cx="602201" cy="591967"/>
-            </a:xfrm>
-            <a:solidFill>
-              <a:schemeClr val="bg1"/>
-            </a:solidFill>
-          </p:grpSpPr>
-          <p:sp>
-            <p:nvSpPr>
-              <p:cNvPr id="398" name="Ovale 60">
-                <a:extLst>
-                  <a:ext uri="{FF2B5EF4-FFF2-40B4-BE49-F238E27FC236}">
-                    <a16:creationId xmlns:a16="http://schemas.microsoft.com/office/drawing/2014/main" id="{F4E48B1F-88FF-6D92-90FE-9511D4F544A4}"/>
-                  </a:ext>
-                </a:extLst>
-              </p:cNvPr>
-              <p:cNvSpPr/>
-              <p:nvPr/>
-            </p:nvSpPr>
-            <p:spPr>
-              <a:xfrm>
-                <a:off x="861753" y="2657666"/>
-                <a:ext cx="602201" cy="591967"/>
-              </a:xfrm>
-              <a:prstGeom prst="ellipse">
-                <a:avLst/>
-              </a:prstGeom>
-              <a:grpFill/>
-            </p:spPr>
-            <p:style>
-              <a:lnRef idx="2">
-                <a:schemeClr val="accent1"/>
-              </a:lnRef>
-              <a:fillRef idx="1">
-                <a:schemeClr val="lt1"/>
-              </a:fillRef>
-              <a:effectRef idx="0">
-                <a:schemeClr val="accent1"/>
-              </a:effectRef>
-              <a:fontRef idx="minor">
-                <a:schemeClr val="dk1"/>
-              </a:fontRef>
-            </p:style>
-            <p:txBody>
-              <a:bodyPr rtlCol="0" anchor="ctr"/>
-              <a:lstStyle/>
-              <a:p>
-                <a:pPr algn="ctr"/>
-                <a:endParaRPr lang="it-IT"/>
-              </a:p>
-            </p:txBody>
-          </p:sp>
-          <p:pic>
-            <p:nvPicPr>
-              <p:cNvPr id="399" name="Immagine 61">
-                <a:extLst>
-                  <a:ext uri="{FF2B5EF4-FFF2-40B4-BE49-F238E27FC236}">
-                    <a16:creationId xmlns:a16="http://schemas.microsoft.com/office/drawing/2014/main" id="{A443299B-DB54-9BEF-B26E-3A1A181A992F}"/>
-                  </a:ext>
-                </a:extLst>
-              </p:cNvPr>
-              <p:cNvPicPr>
-                <a:picLocks noChangeAspect="1"/>
-              </p:cNvPicPr>
-              <p:nvPr/>
-            </p:nvPicPr>
-            <p:blipFill>
-              <a:blip r:embed="rId4"/>
-              <a:stretch>
-                <a:fillRect/>
-              </a:stretch>
-            </p:blipFill>
-            <p:spPr>
-              <a:xfrm>
-                <a:off x="903328" y="2715427"/>
-                <a:ext cx="526235" cy="526235"/>
-              </a:xfrm>
-              <a:prstGeom prst="rect">
-                <a:avLst/>
-              </a:prstGeom>
-              <a:noFill/>
-            </p:spPr>
-          </p:pic>
-        </p:grpSp>
-      </p:grpSp>
-      <p:grpSp>
-        <p:nvGrpSpPr>
-          <p:cNvPr id="453" name="Group 452">
-            <a:extLst>
-              <a:ext uri="{FF2B5EF4-FFF2-40B4-BE49-F238E27FC236}">
-                <a16:creationId xmlns:a16="http://schemas.microsoft.com/office/drawing/2014/main" id="{A4C2DE2D-95FF-1A6B-A1A5-947170BB39AD}"/>
-              </a:ext>
-            </a:extLst>
-          </p:cNvPr>
-          <p:cNvGrpSpPr/>
-          <p:nvPr/>
-        </p:nvGrpSpPr>
-        <p:grpSpPr>
-          <a:xfrm>
-            <a:off x="3101382" y="1260270"/>
-            <a:ext cx="2870851" cy="1800000"/>
-            <a:chOff x="4287331" y="1313133"/>
-            <a:chExt cx="3640069" cy="2305600"/>
-          </a:xfrm>
-          <a:solidFill>
-            <a:schemeClr val="tx2"/>
-          </a:solidFill>
-        </p:grpSpPr>
-        <p:sp>
-          <p:nvSpPr>
-            <p:cNvPr id="454" name="Google Shape;257;p37">
-              <a:extLst>
-                <a:ext uri="{FF2B5EF4-FFF2-40B4-BE49-F238E27FC236}">
-                  <a16:creationId xmlns:a16="http://schemas.microsoft.com/office/drawing/2014/main" id="{6434E601-C112-927D-662D-601671F0B901}"/>
-                </a:ext>
-              </a:extLst>
-            </p:cNvPr>
-            <p:cNvSpPr/>
-            <p:nvPr/>
-          </p:nvSpPr>
-          <p:spPr>
-            <a:xfrm>
-              <a:off x="4287800" y="1313133"/>
-              <a:ext cx="3639600" cy="2305600"/>
-            </a:xfrm>
-            <a:prstGeom prst="rect">
-              <a:avLst/>
-            </a:prstGeom>
-            <a:grpFill/>
-            <a:ln>
-              <a:noFill/>
-            </a:ln>
-            <a:effectLst/>
-          </p:spPr>
-          <p:style>
-            <a:lnRef idx="0">
-              <a:scrgbClr r="0" g="0" b="0"/>
-            </a:lnRef>
-            <a:fillRef idx="0">
-              <a:scrgbClr r="0" g="0" b="0"/>
-            </a:fillRef>
-            <a:effectRef idx="0">
-              <a:scrgbClr r="0" g="0" b="0"/>
-            </a:effectRef>
-            <a:fontRef idx="minor">
-              <a:schemeClr val="lt1"/>
-            </a:fontRef>
-          </p:style>
-          <p:txBody>
-            <a:bodyPr spcFirstLastPara="1" wrap="square" lIns="121900" tIns="121900" rIns="121900" bIns="121900" anchor="t" anchorCtr="0">
-              <a:noAutofit/>
-            </a:bodyPr>
-            <a:lstStyle/>
-            <a:p>
-              <a:pPr algn="ctr"/>
-              <a:endParaRPr sz="2400" dirty="0">
-                <a:solidFill>
-                  <a:schemeClr val="lt1"/>
-                </a:solidFill>
-              </a:endParaRPr>
-            </a:p>
-            <a:p>
-              <a:endParaRPr sz="2400" dirty="0">
-                <a:solidFill>
-                  <a:schemeClr val="lt1"/>
-                </a:solidFill>
-              </a:endParaRPr>
-            </a:p>
-            <a:p>
-              <a:pPr algn="ctr"/>
-              <a:endParaRPr sz="2400" dirty="0">
-                <a:solidFill>
-                  <a:schemeClr val="lt1"/>
-                </a:solidFill>
-              </a:endParaRPr>
-            </a:p>
-          </p:txBody>
-        </p:sp>
-        <p:pic>
-          <p:nvPicPr>
-            <p:cNvPr id="455" name="Google Shape;259;p37">
-              <a:extLst>
-                <a:ext uri="{FF2B5EF4-FFF2-40B4-BE49-F238E27FC236}">
-                  <a16:creationId xmlns:a16="http://schemas.microsoft.com/office/drawing/2014/main" id="{B26F58BC-1C3C-49AA-79E9-1BBAD5EAF35F}"/>
-                </a:ext>
-              </a:extLst>
-            </p:cNvPr>
-            <p:cNvPicPr preferRelativeResize="0"/>
-            <p:nvPr/>
-          </p:nvPicPr>
-          <p:blipFill rotWithShape="1">
-            <a:blip r:embed="rId5">
-              <a:alphaModFix/>
-            </a:blip>
-            <a:srcRect/>
-            <a:stretch/>
-          </p:blipFill>
-          <p:spPr>
-            <a:xfrm>
-              <a:off x="4543483" y="2652343"/>
-              <a:ext cx="591967" cy="591967"/>
-            </a:xfrm>
-            <a:prstGeom prst="rect">
-              <a:avLst/>
-            </a:prstGeom>
-            <a:grpFill/>
-            <a:ln>
-              <a:noFill/>
-            </a:ln>
-          </p:spPr>
-        </p:pic>
-        <p:sp>
-          <p:nvSpPr>
-            <p:cNvPr id="456" name="Google Shape;261;p37">
-              <a:extLst>
-                <a:ext uri="{FF2B5EF4-FFF2-40B4-BE49-F238E27FC236}">
-                  <a16:creationId xmlns:a16="http://schemas.microsoft.com/office/drawing/2014/main" id="{D07DFA33-6BF7-5C6B-1005-6D59BC5D7DC3}"/>
-                </a:ext>
-              </a:extLst>
-            </p:cNvPr>
-            <p:cNvSpPr/>
-            <p:nvPr/>
-          </p:nvSpPr>
-          <p:spPr>
-            <a:xfrm>
-              <a:off x="5408607" y="1919867"/>
-              <a:ext cx="2479926" cy="486000"/>
-            </a:xfrm>
-            <a:prstGeom prst="rect">
-              <a:avLst/>
-            </a:prstGeom>
-            <a:grpFill/>
-            <a:ln w="9525" cap="flat" cmpd="sng">
-              <a:noFill/>
-              <a:prstDash val="solid"/>
-              <a:round/>
-              <a:headEnd type="none" w="sm" len="sm"/>
-              <a:tailEnd type="none" w="sm" len="sm"/>
-            </a:ln>
-          </p:spPr>
-          <p:txBody>
-            <a:bodyPr spcFirstLastPara="1" wrap="square" lIns="121900" tIns="121900" rIns="121900" bIns="121900" anchor="ctr" anchorCtr="0">
-              <a:noAutofit/>
-            </a:bodyPr>
-            <a:lstStyle/>
-            <a:p>
-              <a:r>
-                <a:rPr lang="it" sz="1600" dirty="0">
-                  <a:solidFill>
-                    <a:schemeClr val="bg1"/>
-                  </a:solidFill>
-                  <a:latin typeface="Manrope"/>
-                </a:rPr>
-                <a:t>Quarkus</a:t>
-              </a:r>
-              <a:endParaRPr sz="1600" dirty="0">
-                <a:solidFill>
-                  <a:schemeClr val="bg1"/>
-                </a:solidFill>
-                <a:latin typeface="Manrope"/>
-              </a:endParaRPr>
-            </a:p>
-          </p:txBody>
-        </p:sp>
-        <p:sp>
-          <p:nvSpPr>
-            <p:cNvPr id="457" name="Google Shape;262;p37">
-              <a:extLst>
-                <a:ext uri="{FF2B5EF4-FFF2-40B4-BE49-F238E27FC236}">
-                  <a16:creationId xmlns:a16="http://schemas.microsoft.com/office/drawing/2014/main" id="{55CEE57C-0DB6-DD8F-3095-51A60FA06696}"/>
-                </a:ext>
-              </a:extLst>
-            </p:cNvPr>
-            <p:cNvSpPr/>
-            <p:nvPr/>
-          </p:nvSpPr>
-          <p:spPr>
-            <a:xfrm>
-              <a:off x="5447372" y="2705317"/>
-              <a:ext cx="2479927" cy="486000"/>
-            </a:xfrm>
-            <a:prstGeom prst="rect">
-              <a:avLst/>
-            </a:prstGeom>
-            <a:grpFill/>
-            <a:ln>
-              <a:noFill/>
-            </a:ln>
-          </p:spPr>
-          <p:txBody>
-            <a:bodyPr spcFirstLastPara="1" wrap="square" lIns="121900" tIns="121900" rIns="121900" bIns="121900" anchor="ctr" anchorCtr="0">
-              <a:noAutofit/>
-            </a:bodyPr>
-            <a:lstStyle/>
-            <a:p>
-              <a:r>
-                <a:rPr lang="it" sz="1600" dirty="0">
-                  <a:solidFill>
-                    <a:schemeClr val="bg1"/>
-                  </a:solidFill>
-                  <a:latin typeface="Manrope"/>
-                </a:rPr>
-                <a:t>Spring</a:t>
-              </a:r>
-              <a:r>
-                <a:rPr lang="it" sz="2400" dirty="0">
-                  <a:solidFill>
-                    <a:schemeClr val="lt1"/>
-                  </a:solidFill>
-                </a:rPr>
-                <a:t> </a:t>
-              </a:r>
-              <a:r>
-                <a:rPr lang="it" sz="1600" dirty="0">
-                  <a:solidFill>
-                    <a:schemeClr val="bg1"/>
-                  </a:solidFill>
-                  <a:latin typeface="Manrope"/>
-                </a:rPr>
-                <a:t>Boot</a:t>
-              </a:r>
-              <a:endParaRPr sz="1600" dirty="0">
-                <a:solidFill>
-                  <a:schemeClr val="bg1"/>
-                </a:solidFill>
-                <a:latin typeface="Manrope"/>
-              </a:endParaRPr>
-            </a:p>
-          </p:txBody>
-        </p:sp>
-        <p:sp>
-          <p:nvSpPr>
-            <p:cNvPr id="458" name="Google Shape;279;p37">
-              <a:extLst>
-                <a:ext uri="{FF2B5EF4-FFF2-40B4-BE49-F238E27FC236}">
-                  <a16:creationId xmlns:a16="http://schemas.microsoft.com/office/drawing/2014/main" id="{CF542082-FA65-25CE-997C-BF906BBDEECF}"/>
-                </a:ext>
-              </a:extLst>
-            </p:cNvPr>
-            <p:cNvSpPr txBox="1">
-              <a:spLocks/>
-            </p:cNvSpPr>
-            <p:nvPr/>
-          </p:nvSpPr>
-          <p:spPr>
-            <a:xfrm>
-              <a:off x="4287331" y="1436011"/>
-              <a:ext cx="3628737" cy="361950"/>
-            </a:xfrm>
-            <a:prstGeom prst="rect">
-              <a:avLst/>
-            </a:prstGeom>
-            <a:grpFill/>
-            <a:ln>
-              <a:noFill/>
-            </a:ln>
-          </p:spPr>
-          <p:txBody>
-            <a:bodyPr spcFirstLastPara="1" vert="horz" wrap="square" lIns="0" tIns="0" rIns="0" bIns="0" spcCol="360000" rtlCol="0" anchor="t" anchorCtr="0">
-              <a:noAutofit/>
-            </a:bodyPr>
-            <a:lstStyle>
-              <a:lvl1pPr marL="0" indent="0" algn="l" defTabSz="360000" rtl="0" eaLnBrk="1" latinLnBrk="0" hangingPunct="1">
-                <a:lnSpc>
-                  <a:spcPct val="150000"/>
-                </a:lnSpc>
-                <a:spcBef>
-                  <a:spcPts val="0"/>
-                </a:spcBef>
-                <a:buClr>
-                  <a:schemeClr val="tx2"/>
-                </a:buClr>
-                <a:buFont typeface="Arial" panose="020B0604020202020204" pitchFamily="34" charset="0"/>
-                <a:buNone/>
-                <a:tabLst>
-                  <a:tab pos="360000" algn="l"/>
-                  <a:tab pos="720000" algn="l"/>
-                  <a:tab pos="1080000" algn="l"/>
-                  <a:tab pos="1440000" algn="l"/>
-                  <a:tab pos="1800000" algn="l"/>
-                  <a:tab pos="2160000" algn="l"/>
-                  <a:tab pos="2520000" algn="l"/>
-                </a:tabLst>
-                <a:defRPr sz="1400" kern="1200" baseline="0">
-                  <a:solidFill>
-                    <a:schemeClr val="tx1"/>
-                  </a:solidFill>
-                  <a:latin typeface="Montserrat" panose="02000505000000020004" pitchFamily="2" charset="77"/>
-                  <a:ea typeface="+mn-ea"/>
-                  <a:cs typeface="+mn-cs"/>
-                </a:defRPr>
-              </a:lvl1pPr>
-              <a:lvl2pPr marL="14288" indent="0" algn="l" defTabSz="914400" rtl="0" eaLnBrk="1" latinLnBrk="0" hangingPunct="1">
-                <a:lnSpc>
-                  <a:spcPct val="90000"/>
-                </a:lnSpc>
-                <a:spcBef>
-                  <a:spcPts val="500"/>
-                </a:spcBef>
-                <a:buFontTx/>
-                <a:buNone/>
-                <a:tabLst/>
-                <a:defRPr sz="1600" b="0" i="0" kern="1200" cap="all" baseline="0">
-                  <a:solidFill>
-                    <a:schemeClr val="tx2"/>
-                  </a:solidFill>
-                  <a:latin typeface="Montserrat" panose="02000505000000020004" pitchFamily="2" charset="77"/>
-                  <a:ea typeface="+mn-ea"/>
-                  <a:cs typeface="+mn-cs"/>
-                </a:defRPr>
-              </a:lvl2pPr>
-              <a:lvl3pPr marL="14288" indent="0" algn="l" defTabSz="914400" rtl="0" eaLnBrk="1" latinLnBrk="0" hangingPunct="1">
-                <a:lnSpc>
-                  <a:spcPct val="90000"/>
-                </a:lnSpc>
-                <a:spcBef>
-                  <a:spcPts val="500"/>
-                </a:spcBef>
-                <a:buFont typeface="Arial" panose="020B0604020202020204" pitchFamily="34" charset="0"/>
-                <a:buNone/>
-                <a:tabLst/>
-                <a:defRPr sz="1400" b="1" kern="1200" cap="all" baseline="0">
-                  <a:solidFill>
-                    <a:schemeClr val="tx1"/>
-                  </a:solidFill>
-                  <a:latin typeface="Montserrat" panose="02000505000000020004" pitchFamily="2" charset="77"/>
-                  <a:ea typeface="+mn-ea"/>
-                  <a:cs typeface="+mn-cs"/>
-                </a:defRPr>
-              </a:lvl3pPr>
-              <a:lvl4pPr marL="312738" indent="-219075" algn="l" defTabSz="914400" rtl="0" eaLnBrk="1" latinLnBrk="0" hangingPunct="1">
-                <a:lnSpc>
-                  <a:spcPct val="90000"/>
-                </a:lnSpc>
-                <a:spcBef>
-                  <a:spcPts val="500"/>
-                </a:spcBef>
-                <a:buClr>
-                  <a:schemeClr val="tx2"/>
-                </a:buClr>
-                <a:buFont typeface="Arial" panose="020B0604020202020204" pitchFamily="34" charset="0"/>
-                <a:buChar char="•"/>
-                <a:tabLst/>
-                <a:defRPr sz="1400" b="0" i="0" kern="1200">
-                  <a:solidFill>
-                    <a:schemeClr val="tx1"/>
-                  </a:solidFill>
-                  <a:latin typeface="Montserrat" panose="02000505000000020004" pitchFamily="2" charset="77"/>
-                  <a:ea typeface="+mn-ea"/>
-                  <a:cs typeface="+mn-cs"/>
-                </a:defRPr>
-              </a:lvl4pPr>
-              <a:lvl5pPr marL="627063" indent="-236538" algn="l" defTabSz="914400" rtl="0" eaLnBrk="1" latinLnBrk="0" hangingPunct="1">
-                <a:lnSpc>
-                  <a:spcPct val="90000"/>
-                </a:lnSpc>
-                <a:spcBef>
-                  <a:spcPts val="500"/>
-                </a:spcBef>
-                <a:buFont typeface="Arial" panose="020B0604020202020204" pitchFamily="34" charset="0"/>
-                <a:buChar char="•"/>
-                <a:tabLst/>
-                <a:defRPr sz="1200" b="0" i="0" kern="1200">
-                  <a:solidFill>
-                    <a:schemeClr val="tx1"/>
-                  </a:solidFill>
-                  <a:latin typeface="Montserrat" panose="02000505000000020004" pitchFamily="2" charset="77"/>
-                  <a:ea typeface="+mn-ea"/>
-                  <a:cs typeface="+mn-cs"/>
-                </a:defRPr>
-              </a:lvl5pPr>
-              <a:lvl6pPr marL="2514600" indent="-228600" algn="l" defTabSz="914400" rtl="0" eaLnBrk="1" latinLnBrk="0" hangingPunct="1">
-                <a:lnSpc>
-                  <a:spcPct val="90000"/>
-                </a:lnSpc>
-                <a:spcBef>
-                  <a:spcPts val="500"/>
-                </a:spcBef>
-                <a:buFont typeface="Arial" panose="020B0604020202020204" pitchFamily="34" charset="0"/>
-                <a:buChar char="•"/>
-                <a:defRPr sz="1800" kern="1200">
-                  <a:solidFill>
-                    <a:schemeClr val="tx1"/>
-                  </a:solidFill>
-                  <a:latin typeface="+mn-lt"/>
-                  <a:ea typeface="+mn-ea"/>
-                  <a:cs typeface="+mn-cs"/>
-                </a:defRPr>
-              </a:lvl6pPr>
-              <a:lvl7pPr marL="2971800" indent="-228600" algn="l" defTabSz="914400" rtl="0" eaLnBrk="1" latinLnBrk="0" hangingPunct="1">
-                <a:lnSpc>
-                  <a:spcPct val="90000"/>
-                </a:lnSpc>
-                <a:spcBef>
-                  <a:spcPts val="500"/>
-                </a:spcBef>
-                <a:buFont typeface="Arial" panose="020B0604020202020204" pitchFamily="34" charset="0"/>
-                <a:buChar char="•"/>
-                <a:defRPr sz="1800" kern="1200">
-                  <a:solidFill>
-                    <a:schemeClr val="tx1"/>
-                  </a:solidFill>
-                  <a:latin typeface="+mn-lt"/>
-                  <a:ea typeface="+mn-ea"/>
-                  <a:cs typeface="+mn-cs"/>
-                </a:defRPr>
-              </a:lvl7pPr>
-              <a:lvl8pPr marL="3429000" indent="-228600" algn="l" defTabSz="914400" rtl="0" eaLnBrk="1" latinLnBrk="0" hangingPunct="1">
-                <a:lnSpc>
-                  <a:spcPct val="90000"/>
-                </a:lnSpc>
-                <a:spcBef>
-                  <a:spcPts val="500"/>
-                </a:spcBef>
-                <a:buFont typeface="Arial" panose="020B0604020202020204" pitchFamily="34" charset="0"/>
-                <a:buChar char="•"/>
-                <a:defRPr sz="1800" kern="1200">
-                  <a:solidFill>
-                    <a:schemeClr val="tx1"/>
-                  </a:solidFill>
-                  <a:latin typeface="+mn-lt"/>
-                  <a:ea typeface="+mn-ea"/>
-                  <a:cs typeface="+mn-cs"/>
-                </a:defRPr>
-              </a:lvl8pPr>
-              <a:lvl9pPr marL="3886200" indent="-228600" algn="l" defTabSz="914400" rtl="0" eaLnBrk="1" latinLnBrk="0" hangingPunct="1">
-                <a:lnSpc>
-                  <a:spcPct val="90000"/>
-                </a:lnSpc>
-                <a:spcBef>
-                  <a:spcPts val="500"/>
-                </a:spcBef>
-                <a:buFont typeface="Arial" panose="020B0604020202020204" pitchFamily="34" charset="0"/>
-                <a:buChar char="•"/>
-                <a:defRPr sz="1800" kern="1200">
-                  <a:solidFill>
-                    <a:schemeClr val="tx1"/>
-                  </a:solidFill>
-                  <a:latin typeface="+mn-lt"/>
-                  <a:ea typeface="+mn-ea"/>
-                  <a:cs typeface="+mn-cs"/>
-                </a:defRPr>
-              </a:lvl9pPr>
-            </a:lstStyle>
-            <a:p>
-              <a:pPr algn="ctr">
-                <a:lnSpc>
-                  <a:spcPct val="105000"/>
-                </a:lnSpc>
-                <a:buSzPts val="852"/>
-              </a:pPr>
-              <a:r>
-                <a:rPr lang="it-IT" sz="1800" b="1" dirty="0" err="1">
-                  <a:solidFill>
-                    <a:schemeClr val="bg1"/>
-                  </a:solidFill>
-                  <a:latin typeface="Manrope"/>
-                </a:rPr>
-                <a:t>Backend</a:t>
-              </a:r>
-              <a:endParaRPr lang="it-IT" sz="1800" b="1" dirty="0">
-                <a:solidFill>
-                  <a:schemeClr val="bg1"/>
-                </a:solidFill>
-                <a:latin typeface="Manrope"/>
-              </a:endParaRPr>
-            </a:p>
-            <a:p>
-              <a:pPr algn="ctr">
-                <a:lnSpc>
-                  <a:spcPct val="140000"/>
-                </a:lnSpc>
-                <a:buSzPts val="852"/>
-              </a:pPr>
-              <a:endParaRPr lang="it-IT" sz="1136" dirty="0"/>
-            </a:p>
-          </p:txBody>
-        </p:sp>
-        <p:grpSp>
-          <p:nvGrpSpPr>
-            <p:cNvPr id="459" name="Gruppo 37">
-              <a:extLst>
-                <a:ext uri="{FF2B5EF4-FFF2-40B4-BE49-F238E27FC236}">
-                  <a16:creationId xmlns:a16="http://schemas.microsoft.com/office/drawing/2014/main" id="{7E97B472-0A2C-0C13-8C28-0A1AF567E99F}"/>
-                </a:ext>
-              </a:extLst>
-            </p:cNvPr>
-            <p:cNvGrpSpPr/>
-            <p:nvPr/>
-          </p:nvGrpSpPr>
-          <p:grpSpPr>
-            <a:xfrm>
-              <a:off x="4543483" y="1872160"/>
-              <a:ext cx="602201" cy="591967"/>
-              <a:chOff x="4543483" y="1872160"/>
-              <a:chExt cx="602201" cy="591967"/>
-            </a:xfrm>
-            <a:grpFill/>
-          </p:grpSpPr>
-          <p:sp>
-            <p:nvSpPr>
-              <p:cNvPr id="460" name="Ovale 38">
-                <a:extLst>
-                  <a:ext uri="{FF2B5EF4-FFF2-40B4-BE49-F238E27FC236}">
-                    <a16:creationId xmlns:a16="http://schemas.microsoft.com/office/drawing/2014/main" id="{992907B6-6A58-AAC9-70E5-8A9C3B6FE2CE}"/>
-                  </a:ext>
-                </a:extLst>
-              </p:cNvPr>
-              <p:cNvSpPr/>
-              <p:nvPr/>
-            </p:nvSpPr>
-            <p:spPr>
-              <a:xfrm>
-                <a:off x="4543483" y="1872160"/>
-                <a:ext cx="602201" cy="591967"/>
-              </a:xfrm>
-              <a:prstGeom prst="ellipse">
-                <a:avLst/>
-              </a:prstGeom>
-              <a:solidFill>
-                <a:schemeClr val="bg1"/>
-              </a:solidFill>
-            </p:spPr>
-            <p:style>
-              <a:lnRef idx="2">
-                <a:schemeClr val="dk1"/>
-              </a:lnRef>
-              <a:fillRef idx="1">
-                <a:schemeClr val="lt1"/>
-              </a:fillRef>
-              <a:effectRef idx="0">
-                <a:schemeClr val="dk1"/>
-              </a:effectRef>
-              <a:fontRef idx="minor">
-                <a:schemeClr val="dk1"/>
-              </a:fontRef>
-            </p:style>
-            <p:txBody>
-              <a:bodyPr rtlCol="0" anchor="ctr"/>
-              <a:lstStyle/>
-              <a:p>
-                <a:pPr algn="ctr"/>
-                <a:endParaRPr lang="it-IT"/>
-              </a:p>
-            </p:txBody>
-          </p:sp>
-          <p:pic>
-            <p:nvPicPr>
-              <p:cNvPr id="461" name="Immagine 39">
-                <a:extLst>
-                  <a:ext uri="{FF2B5EF4-FFF2-40B4-BE49-F238E27FC236}">
-                    <a16:creationId xmlns:a16="http://schemas.microsoft.com/office/drawing/2014/main" id="{11D4F829-2D47-B64B-B6DB-5DC813ABD5F4}"/>
-                  </a:ext>
-                </a:extLst>
-              </p:cNvPr>
-              <p:cNvPicPr>
-                <a:picLocks noChangeAspect="1"/>
-              </p:cNvPicPr>
-              <p:nvPr/>
-            </p:nvPicPr>
-            <p:blipFill>
-              <a:blip r:embed="rId6"/>
-              <a:stretch>
-                <a:fillRect/>
-              </a:stretch>
-            </p:blipFill>
-            <p:spPr>
-              <a:xfrm>
-                <a:off x="4621349" y="1939495"/>
-                <a:ext cx="463370" cy="463370"/>
-              </a:xfrm>
-              <a:prstGeom prst="rect">
-                <a:avLst/>
-              </a:prstGeom>
-              <a:noFill/>
-            </p:spPr>
-          </p:pic>
-        </p:grpSp>
-      </p:grpSp>
-      <p:grpSp>
-        <p:nvGrpSpPr>
-          <p:cNvPr id="462" name="Group 461">
-            <a:extLst>
-              <a:ext uri="{FF2B5EF4-FFF2-40B4-BE49-F238E27FC236}">
-                <a16:creationId xmlns:a16="http://schemas.microsoft.com/office/drawing/2014/main" id="{553F9CF3-E2FB-0E10-168C-F108628046D0}"/>
-              </a:ext>
-            </a:extLst>
-          </p:cNvPr>
-          <p:cNvGrpSpPr/>
-          <p:nvPr/>
-        </p:nvGrpSpPr>
-        <p:grpSpPr>
-          <a:xfrm>
-            <a:off x="6075877" y="1258860"/>
-            <a:ext cx="2861603" cy="1800000"/>
-            <a:chOff x="7991799" y="1313133"/>
-            <a:chExt cx="3639601" cy="2305600"/>
-          </a:xfrm>
-          <a:solidFill>
-            <a:schemeClr val="tx1"/>
-          </a:solidFill>
-        </p:grpSpPr>
-        <p:sp>
-          <p:nvSpPr>
-            <p:cNvPr id="463" name="Google Shape;258;p37">
-              <a:extLst>
-                <a:ext uri="{FF2B5EF4-FFF2-40B4-BE49-F238E27FC236}">
-                  <a16:creationId xmlns:a16="http://schemas.microsoft.com/office/drawing/2014/main" id="{F0EE30B6-0BE0-5DBD-AF14-B076FFB802D0}"/>
-                </a:ext>
-              </a:extLst>
-            </p:cNvPr>
-            <p:cNvSpPr/>
-            <p:nvPr/>
-          </p:nvSpPr>
-          <p:spPr>
-            <a:xfrm>
-              <a:off x="7991799" y="1313133"/>
-              <a:ext cx="3639600" cy="2305600"/>
-            </a:xfrm>
-            <a:prstGeom prst="rect">
-              <a:avLst/>
-            </a:prstGeom>
-            <a:solidFill>
-              <a:schemeClr val="tx1"/>
-            </a:solidFill>
-            <a:ln>
-              <a:noFill/>
-            </a:ln>
-          </p:spPr>
-          <p:style>
-            <a:lnRef idx="0">
-              <a:scrgbClr r="0" g="0" b="0"/>
-            </a:lnRef>
-            <a:fillRef idx="0">
-              <a:scrgbClr r="0" g="0" b="0"/>
-            </a:fillRef>
-            <a:effectRef idx="0">
-              <a:scrgbClr r="0" g="0" b="0"/>
-            </a:effectRef>
-            <a:fontRef idx="minor">
-              <a:schemeClr val="lt1"/>
-            </a:fontRef>
-          </p:style>
-          <p:txBody>
-            <a:bodyPr spcFirstLastPara="1" wrap="square" lIns="121900" tIns="121900" rIns="121900" bIns="121900" anchor="t" anchorCtr="0">
-              <a:noAutofit/>
-            </a:bodyPr>
-            <a:lstStyle/>
-            <a:p>
-              <a:pPr algn="ctr"/>
-              <a:endParaRPr sz="2400">
-                <a:solidFill>
-                  <a:schemeClr val="lt1"/>
-                </a:solidFill>
-              </a:endParaRPr>
-            </a:p>
-          </p:txBody>
-        </p:sp>
-        <p:sp>
-          <p:nvSpPr>
-            <p:cNvPr id="464" name="Google Shape;263;p37">
-              <a:extLst>
-                <a:ext uri="{FF2B5EF4-FFF2-40B4-BE49-F238E27FC236}">
-                  <a16:creationId xmlns:a16="http://schemas.microsoft.com/office/drawing/2014/main" id="{5C4457AF-1001-3C8A-6646-E497FC7F36B7}"/>
-                </a:ext>
-              </a:extLst>
-            </p:cNvPr>
-            <p:cNvSpPr/>
-            <p:nvPr/>
-          </p:nvSpPr>
-          <p:spPr>
-            <a:xfrm>
-              <a:off x="9103665" y="1966533"/>
-              <a:ext cx="2412768" cy="486000"/>
-            </a:xfrm>
-            <a:prstGeom prst="rect">
-              <a:avLst/>
-            </a:prstGeom>
-            <a:grpFill/>
-            <a:ln>
-              <a:noFill/>
-            </a:ln>
-          </p:spPr>
-          <p:txBody>
-            <a:bodyPr spcFirstLastPara="1" wrap="square" lIns="121900" tIns="121900" rIns="121900" bIns="121900" anchor="ctr" anchorCtr="0">
-              <a:noAutofit/>
-            </a:bodyPr>
-            <a:lstStyle/>
-            <a:p>
-              <a:r>
-                <a:rPr lang="it" sz="1600" dirty="0">
-                  <a:solidFill>
-                    <a:schemeClr val="bg1"/>
-                  </a:solidFill>
-                  <a:latin typeface="Manrope"/>
-                </a:rPr>
-                <a:t>Debezium</a:t>
-              </a:r>
-              <a:endParaRPr sz="1600" dirty="0">
-                <a:solidFill>
-                  <a:schemeClr val="bg1"/>
-                </a:solidFill>
-                <a:latin typeface="Manrope"/>
-              </a:endParaRPr>
-            </a:p>
-          </p:txBody>
-        </p:sp>
-        <p:sp>
-          <p:nvSpPr>
-            <p:cNvPr id="465" name="Google Shape;264;p37">
-              <a:extLst>
-                <a:ext uri="{FF2B5EF4-FFF2-40B4-BE49-F238E27FC236}">
-                  <a16:creationId xmlns:a16="http://schemas.microsoft.com/office/drawing/2014/main" id="{8369A80A-2552-799A-4A04-5A830F341279}"/>
-                </a:ext>
-              </a:extLst>
-            </p:cNvPr>
-            <p:cNvSpPr/>
-            <p:nvPr/>
-          </p:nvSpPr>
-          <p:spPr>
-            <a:xfrm>
-              <a:off x="9103665" y="2763633"/>
-              <a:ext cx="2412768" cy="486000"/>
-            </a:xfrm>
-            <a:prstGeom prst="rect">
-              <a:avLst/>
-            </a:prstGeom>
-            <a:grpFill/>
-            <a:ln w="9525" cap="flat" cmpd="sng">
-              <a:noFill/>
-              <a:prstDash val="solid"/>
-              <a:round/>
-              <a:headEnd type="none" w="sm" len="sm"/>
-              <a:tailEnd type="none" w="sm" len="sm"/>
-            </a:ln>
-          </p:spPr>
-          <p:txBody>
-            <a:bodyPr spcFirstLastPara="1" wrap="square" lIns="121900" tIns="121900" rIns="121900" bIns="121900" anchor="t" anchorCtr="0">
-              <a:noAutofit/>
-            </a:bodyPr>
-            <a:lstStyle/>
-            <a:p>
-              <a:r>
-                <a:rPr lang="it" sz="1600" dirty="0">
-                  <a:solidFill>
-                    <a:schemeClr val="bg1"/>
-                  </a:solidFill>
-                  <a:latin typeface="Manrope"/>
-                </a:rPr>
-                <a:t>RabbitMQ</a:t>
-              </a:r>
-              <a:endParaRPr sz="1600" dirty="0">
-                <a:solidFill>
-                  <a:schemeClr val="bg1"/>
-                </a:solidFill>
-                <a:latin typeface="Manrope"/>
-              </a:endParaRPr>
-            </a:p>
-          </p:txBody>
-        </p:sp>
-        <p:sp>
-          <p:nvSpPr>
-            <p:cNvPr id="466" name="Google Shape;280;p37">
-              <a:extLst>
-                <a:ext uri="{FF2B5EF4-FFF2-40B4-BE49-F238E27FC236}">
-                  <a16:creationId xmlns:a16="http://schemas.microsoft.com/office/drawing/2014/main" id="{08ED4146-1A7D-C3A3-6D00-50542500C202}"/>
-                </a:ext>
-              </a:extLst>
-            </p:cNvPr>
-            <p:cNvSpPr txBox="1">
-              <a:spLocks/>
-            </p:cNvSpPr>
-            <p:nvPr/>
-          </p:nvSpPr>
-          <p:spPr>
-            <a:xfrm>
-              <a:off x="8015200" y="1433236"/>
-              <a:ext cx="3616200" cy="362401"/>
-            </a:xfrm>
-            <a:prstGeom prst="rect">
-              <a:avLst/>
-            </a:prstGeom>
-            <a:grpFill/>
-            <a:ln>
-              <a:noFill/>
-            </a:ln>
-          </p:spPr>
-          <p:txBody>
-            <a:bodyPr spcFirstLastPara="1" vert="horz" wrap="square" lIns="0" tIns="0" rIns="0" bIns="0" spcCol="360000" rtlCol="0" anchor="t" anchorCtr="0">
-              <a:noAutofit/>
-            </a:bodyPr>
-            <a:lstStyle>
-              <a:lvl1pPr marL="0" indent="0" algn="l" defTabSz="360000" rtl="0" eaLnBrk="1" latinLnBrk="0" hangingPunct="1">
-                <a:lnSpc>
-                  <a:spcPct val="150000"/>
-                </a:lnSpc>
-                <a:spcBef>
-                  <a:spcPts val="0"/>
-                </a:spcBef>
-                <a:buClr>
-                  <a:schemeClr val="tx2"/>
-                </a:buClr>
-                <a:buFont typeface="Arial" panose="020B0604020202020204" pitchFamily="34" charset="0"/>
-                <a:buNone/>
-                <a:tabLst>
-                  <a:tab pos="360000" algn="l"/>
-                  <a:tab pos="720000" algn="l"/>
-                  <a:tab pos="1080000" algn="l"/>
-                  <a:tab pos="1440000" algn="l"/>
-                  <a:tab pos="1800000" algn="l"/>
-                  <a:tab pos="2160000" algn="l"/>
-                  <a:tab pos="2520000" algn="l"/>
-                </a:tabLst>
-                <a:defRPr sz="1400" kern="1200" baseline="0">
-                  <a:solidFill>
-                    <a:schemeClr val="tx1"/>
-                  </a:solidFill>
-                  <a:latin typeface="Montserrat" panose="02000505000000020004" pitchFamily="2" charset="77"/>
-                  <a:ea typeface="+mn-ea"/>
-                  <a:cs typeface="+mn-cs"/>
-                </a:defRPr>
-              </a:lvl1pPr>
-              <a:lvl2pPr marL="14288" indent="0" algn="l" defTabSz="914400" rtl="0" eaLnBrk="1" latinLnBrk="0" hangingPunct="1">
-                <a:lnSpc>
-                  <a:spcPct val="90000"/>
-                </a:lnSpc>
-                <a:spcBef>
-                  <a:spcPts val="500"/>
-                </a:spcBef>
-                <a:buFontTx/>
-                <a:buNone/>
-                <a:tabLst/>
-                <a:defRPr sz="1600" b="0" i="0" kern="1200" cap="all" baseline="0">
-                  <a:solidFill>
-                    <a:schemeClr val="tx2"/>
-                  </a:solidFill>
-                  <a:latin typeface="Montserrat" panose="02000505000000020004" pitchFamily="2" charset="77"/>
-                  <a:ea typeface="+mn-ea"/>
-                  <a:cs typeface="+mn-cs"/>
-                </a:defRPr>
-              </a:lvl2pPr>
-              <a:lvl3pPr marL="14288" indent="0" algn="l" defTabSz="914400" rtl="0" eaLnBrk="1" latinLnBrk="0" hangingPunct="1">
-                <a:lnSpc>
-                  <a:spcPct val="90000"/>
-                </a:lnSpc>
-                <a:spcBef>
-                  <a:spcPts val="500"/>
-                </a:spcBef>
-                <a:buFont typeface="Arial" panose="020B0604020202020204" pitchFamily="34" charset="0"/>
-                <a:buNone/>
-                <a:tabLst/>
-                <a:defRPr sz="1400" b="1" kern="1200" cap="all" baseline="0">
-                  <a:solidFill>
-                    <a:schemeClr val="tx1"/>
-                  </a:solidFill>
-                  <a:latin typeface="Montserrat" panose="02000505000000020004" pitchFamily="2" charset="77"/>
-                  <a:ea typeface="+mn-ea"/>
-                  <a:cs typeface="+mn-cs"/>
-                </a:defRPr>
-              </a:lvl3pPr>
-              <a:lvl4pPr marL="312738" indent="-219075" algn="l" defTabSz="914400" rtl="0" eaLnBrk="1" latinLnBrk="0" hangingPunct="1">
-                <a:lnSpc>
-                  <a:spcPct val="90000"/>
-                </a:lnSpc>
-                <a:spcBef>
-                  <a:spcPts val="500"/>
-                </a:spcBef>
-                <a:buClr>
-                  <a:schemeClr val="tx2"/>
-                </a:buClr>
-                <a:buFont typeface="Arial" panose="020B0604020202020204" pitchFamily="34" charset="0"/>
-                <a:buChar char="•"/>
-                <a:tabLst/>
-                <a:defRPr sz="1400" b="0" i="0" kern="1200">
-                  <a:solidFill>
-                    <a:schemeClr val="tx1"/>
-                  </a:solidFill>
-                  <a:latin typeface="Montserrat" panose="02000505000000020004" pitchFamily="2" charset="77"/>
-                  <a:ea typeface="+mn-ea"/>
-                  <a:cs typeface="+mn-cs"/>
-                </a:defRPr>
-              </a:lvl4pPr>
-              <a:lvl5pPr marL="627063" indent="-236538" algn="l" defTabSz="914400" rtl="0" eaLnBrk="1" latinLnBrk="0" hangingPunct="1">
-                <a:lnSpc>
-                  <a:spcPct val="90000"/>
-                </a:lnSpc>
-                <a:spcBef>
-                  <a:spcPts val="500"/>
-                </a:spcBef>
-                <a:buFont typeface="Arial" panose="020B0604020202020204" pitchFamily="34" charset="0"/>
-                <a:buChar char="•"/>
-                <a:tabLst/>
-                <a:defRPr sz="1200" b="0" i="0" kern="1200">
-                  <a:solidFill>
-                    <a:schemeClr val="tx1"/>
-                  </a:solidFill>
-                  <a:latin typeface="Montserrat" panose="02000505000000020004" pitchFamily="2" charset="77"/>
-                  <a:ea typeface="+mn-ea"/>
-                  <a:cs typeface="+mn-cs"/>
-                </a:defRPr>
-              </a:lvl5pPr>
-              <a:lvl6pPr marL="2514600" indent="-228600" algn="l" defTabSz="914400" rtl="0" eaLnBrk="1" latinLnBrk="0" hangingPunct="1">
-                <a:lnSpc>
-                  <a:spcPct val="90000"/>
-                </a:lnSpc>
-                <a:spcBef>
-                  <a:spcPts val="500"/>
-                </a:spcBef>
-                <a:buFont typeface="Arial" panose="020B0604020202020204" pitchFamily="34" charset="0"/>
-                <a:buChar char="•"/>
-                <a:defRPr sz="1800" kern="1200">
-                  <a:solidFill>
-                    <a:schemeClr val="tx1"/>
-                  </a:solidFill>
-                  <a:latin typeface="+mn-lt"/>
-                  <a:ea typeface="+mn-ea"/>
-                  <a:cs typeface="+mn-cs"/>
-                </a:defRPr>
-              </a:lvl6pPr>
-              <a:lvl7pPr marL="2971800" indent="-228600" algn="l" defTabSz="914400" rtl="0" eaLnBrk="1" latinLnBrk="0" hangingPunct="1">
-                <a:lnSpc>
-                  <a:spcPct val="90000"/>
-                </a:lnSpc>
-                <a:spcBef>
-                  <a:spcPts val="500"/>
-                </a:spcBef>
-                <a:buFont typeface="Arial" panose="020B0604020202020204" pitchFamily="34" charset="0"/>
-                <a:buChar char="•"/>
-                <a:defRPr sz="1800" kern="1200">
-                  <a:solidFill>
-                    <a:schemeClr val="tx1"/>
-                  </a:solidFill>
-                  <a:latin typeface="+mn-lt"/>
-                  <a:ea typeface="+mn-ea"/>
-                  <a:cs typeface="+mn-cs"/>
-                </a:defRPr>
-              </a:lvl7pPr>
-              <a:lvl8pPr marL="3429000" indent="-228600" algn="l" defTabSz="914400" rtl="0" eaLnBrk="1" latinLnBrk="0" hangingPunct="1">
-                <a:lnSpc>
-                  <a:spcPct val="90000"/>
-                </a:lnSpc>
-                <a:spcBef>
-                  <a:spcPts val="500"/>
-                </a:spcBef>
-                <a:buFont typeface="Arial" panose="020B0604020202020204" pitchFamily="34" charset="0"/>
-                <a:buChar char="•"/>
-                <a:defRPr sz="1800" kern="1200">
-                  <a:solidFill>
-                    <a:schemeClr val="tx1"/>
-                  </a:solidFill>
-                  <a:latin typeface="+mn-lt"/>
-                  <a:ea typeface="+mn-ea"/>
-                  <a:cs typeface="+mn-cs"/>
-                </a:defRPr>
-              </a:lvl8pPr>
-              <a:lvl9pPr marL="3886200" indent="-228600" algn="l" defTabSz="914400" rtl="0" eaLnBrk="1" latinLnBrk="0" hangingPunct="1">
-                <a:lnSpc>
-                  <a:spcPct val="90000"/>
-                </a:lnSpc>
-                <a:spcBef>
-                  <a:spcPts val="500"/>
-                </a:spcBef>
-                <a:buFont typeface="Arial" panose="020B0604020202020204" pitchFamily="34" charset="0"/>
-                <a:buChar char="•"/>
-                <a:defRPr sz="1800" kern="1200">
-                  <a:solidFill>
-                    <a:schemeClr val="tx1"/>
-                  </a:solidFill>
-                  <a:latin typeface="+mn-lt"/>
-                  <a:ea typeface="+mn-ea"/>
-                  <a:cs typeface="+mn-cs"/>
-                </a:defRPr>
-              </a:lvl9pPr>
-            </a:lstStyle>
-            <a:p>
-              <a:pPr algn="ctr">
-                <a:lnSpc>
-                  <a:spcPct val="105000"/>
-                </a:lnSpc>
-                <a:buSzPts val="852"/>
-              </a:pPr>
-              <a:r>
-                <a:rPr lang="it-IT" sz="1800" b="1" dirty="0">
-                  <a:solidFill>
-                    <a:schemeClr val="bg1"/>
-                  </a:solidFill>
-                  <a:latin typeface="Manrope"/>
-                </a:rPr>
-                <a:t>Event Handling</a:t>
-              </a:r>
-            </a:p>
-            <a:p>
-              <a:pPr>
-                <a:lnSpc>
-                  <a:spcPct val="140000"/>
-                </a:lnSpc>
-                <a:buSzPts val="852"/>
-              </a:pPr>
-              <a:endParaRPr lang="it-IT" sz="1136" dirty="0">
-                <a:solidFill>
-                  <a:schemeClr val="bg1"/>
-                </a:solidFill>
-              </a:endParaRPr>
-            </a:p>
-          </p:txBody>
-        </p:sp>
-        <p:grpSp>
-          <p:nvGrpSpPr>
-            <p:cNvPr id="467" name="Gruppo 46">
-              <a:extLst>
-                <a:ext uri="{FF2B5EF4-FFF2-40B4-BE49-F238E27FC236}">
-                  <a16:creationId xmlns:a16="http://schemas.microsoft.com/office/drawing/2014/main" id="{E270A9F3-B124-B76E-E0C4-829D65B14778}"/>
-                </a:ext>
-              </a:extLst>
-            </p:cNvPr>
-            <p:cNvGrpSpPr/>
-            <p:nvPr/>
-          </p:nvGrpSpPr>
-          <p:grpSpPr>
-            <a:xfrm>
-              <a:off x="8246632" y="2707166"/>
-              <a:ext cx="602201" cy="591967"/>
-              <a:chOff x="8246632" y="2707166"/>
-              <a:chExt cx="602201" cy="591967"/>
-            </a:xfrm>
-            <a:grpFill/>
-          </p:grpSpPr>
-          <p:sp>
-            <p:nvSpPr>
-              <p:cNvPr id="471" name="Ovale 47">
-                <a:extLst>
-                  <a:ext uri="{FF2B5EF4-FFF2-40B4-BE49-F238E27FC236}">
-                    <a16:creationId xmlns:a16="http://schemas.microsoft.com/office/drawing/2014/main" id="{3A827DF1-F809-1E0F-8BFD-D0377EA883F0}"/>
-                  </a:ext>
-                </a:extLst>
-              </p:cNvPr>
-              <p:cNvSpPr/>
-              <p:nvPr/>
-            </p:nvSpPr>
-            <p:spPr>
-              <a:xfrm>
-                <a:off x="8246632" y="2707166"/>
-                <a:ext cx="602201" cy="591967"/>
-              </a:xfrm>
-              <a:prstGeom prst="ellipse">
-                <a:avLst/>
-              </a:prstGeom>
-              <a:solidFill>
-                <a:schemeClr val="bg1"/>
-              </a:solidFill>
-            </p:spPr>
-            <p:style>
-              <a:lnRef idx="2">
-                <a:schemeClr val="dk1">
-                  <a:shade val="15000"/>
-                </a:schemeClr>
-              </a:lnRef>
-              <a:fillRef idx="1">
-                <a:schemeClr val="dk1"/>
-              </a:fillRef>
-              <a:effectRef idx="0">
-                <a:schemeClr val="dk1"/>
-              </a:effectRef>
-              <a:fontRef idx="minor">
-                <a:schemeClr val="lt1"/>
-              </a:fontRef>
-            </p:style>
-            <p:txBody>
-              <a:bodyPr rtlCol="0" anchor="ctr"/>
-              <a:lstStyle/>
-              <a:p>
-                <a:pPr algn="ctr"/>
-                <a:endParaRPr lang="it-IT"/>
-              </a:p>
-            </p:txBody>
-          </p:sp>
-          <p:pic>
-            <p:nvPicPr>
-              <p:cNvPr id="472" name="Immagine 48">
-                <a:extLst>
-                  <a:ext uri="{FF2B5EF4-FFF2-40B4-BE49-F238E27FC236}">
-                    <a16:creationId xmlns:a16="http://schemas.microsoft.com/office/drawing/2014/main" id="{1602A809-F903-3846-4C2F-ED83D8B9AF22}"/>
-                  </a:ext>
-                </a:extLst>
-              </p:cNvPr>
-              <p:cNvPicPr>
-                <a:picLocks noChangeAspect="1"/>
-              </p:cNvPicPr>
-              <p:nvPr/>
-            </p:nvPicPr>
-            <p:blipFill>
-              <a:blip r:embed="rId7"/>
-              <a:stretch>
-                <a:fillRect/>
-              </a:stretch>
-            </p:blipFill>
-            <p:spPr>
-              <a:xfrm>
-                <a:off x="8379571" y="2793960"/>
-                <a:ext cx="383307" cy="383307"/>
-              </a:xfrm>
-              <a:prstGeom prst="rect">
-                <a:avLst/>
-              </a:prstGeom>
-              <a:solidFill>
-                <a:schemeClr val="bg1"/>
-              </a:solidFill>
-            </p:spPr>
-          </p:pic>
-        </p:grpSp>
-        <p:grpSp>
-          <p:nvGrpSpPr>
-            <p:cNvPr id="468" name="Gruppo 55">
-              <a:extLst>
-                <a:ext uri="{FF2B5EF4-FFF2-40B4-BE49-F238E27FC236}">
-                  <a16:creationId xmlns:a16="http://schemas.microsoft.com/office/drawing/2014/main" id="{BA815D77-695C-522C-1264-62319DFBE218}"/>
-                </a:ext>
-              </a:extLst>
-            </p:cNvPr>
-            <p:cNvGrpSpPr/>
-            <p:nvPr/>
-          </p:nvGrpSpPr>
-          <p:grpSpPr>
-            <a:xfrm>
-              <a:off x="8218903" y="1857933"/>
-              <a:ext cx="602201" cy="591967"/>
-              <a:chOff x="8218903" y="1857933"/>
-              <a:chExt cx="602201" cy="591967"/>
-            </a:xfrm>
-            <a:grpFill/>
-          </p:grpSpPr>
-          <p:sp>
-            <p:nvSpPr>
-              <p:cNvPr id="469" name="Ovale 56">
-                <a:extLst>
-                  <a:ext uri="{FF2B5EF4-FFF2-40B4-BE49-F238E27FC236}">
-                    <a16:creationId xmlns:a16="http://schemas.microsoft.com/office/drawing/2014/main" id="{C98CDB28-2976-CB86-239D-899DDA520E05}"/>
-                  </a:ext>
-                </a:extLst>
-              </p:cNvPr>
-              <p:cNvSpPr/>
-              <p:nvPr/>
-            </p:nvSpPr>
-            <p:spPr>
-              <a:xfrm>
-                <a:off x="8218903" y="1857933"/>
-                <a:ext cx="602201" cy="591967"/>
-              </a:xfrm>
-              <a:prstGeom prst="ellipse">
-                <a:avLst/>
-              </a:prstGeom>
-              <a:solidFill>
-                <a:schemeClr val="bg1"/>
-              </a:solidFill>
-            </p:spPr>
-            <p:style>
-              <a:lnRef idx="2">
-                <a:schemeClr val="accent1"/>
-              </a:lnRef>
-              <a:fillRef idx="1">
-                <a:schemeClr val="lt1"/>
-              </a:fillRef>
-              <a:effectRef idx="0">
-                <a:schemeClr val="accent1"/>
-              </a:effectRef>
-              <a:fontRef idx="minor">
-                <a:schemeClr val="dk1"/>
-              </a:fontRef>
-            </p:style>
-            <p:txBody>
-              <a:bodyPr rtlCol="0" anchor="ctr"/>
-              <a:lstStyle/>
-              <a:p>
-                <a:pPr algn="ctr"/>
-                <a:endParaRPr lang="it-IT" dirty="0"/>
-              </a:p>
-            </p:txBody>
-          </p:sp>
-          <p:pic>
-            <p:nvPicPr>
-              <p:cNvPr id="470" name="Picture 14" descr="@debezium">
-                <a:extLst>
-                  <a:ext uri="{FF2B5EF4-FFF2-40B4-BE49-F238E27FC236}">
-                    <a16:creationId xmlns:a16="http://schemas.microsoft.com/office/drawing/2014/main" id="{F6DA29C1-6613-A0D1-F949-E31DF2C070CF}"/>
-                  </a:ext>
-                </a:extLst>
-              </p:cNvPr>
-              <p:cNvPicPr>
-                <a:picLocks noChangeAspect="1" noChangeArrowheads="1"/>
-              </p:cNvPicPr>
-              <p:nvPr/>
-            </p:nvPicPr>
-            <p:blipFill>
-              <a:blip r:embed="rId8">
-                <a:extLst>
-                  <a:ext uri="{28A0092B-C50C-407E-A947-70E740481C1C}">
-                    <a14:useLocalDpi xmlns:a14="http://schemas.microsoft.com/office/drawing/2010/main" val="0"/>
-                  </a:ext>
-                </a:extLst>
-              </a:blip>
-              <a:srcRect/>
-              <a:stretch>
-                <a:fillRect/>
-              </a:stretch>
-            </p:blipFill>
-            <p:spPr bwMode="auto">
-              <a:xfrm>
-                <a:off x="8316083" y="1948586"/>
-                <a:ext cx="406838" cy="406838"/>
-              </a:xfrm>
-              <a:prstGeom prst="rect">
-                <a:avLst/>
-              </a:prstGeom>
-              <a:solidFill>
-                <a:schemeClr val="bg1"/>
-              </a:solidFill>
-            </p:spPr>
-          </p:pic>
-        </p:grpSp>
-      </p:grpSp>
-      <p:grpSp>
-        <p:nvGrpSpPr>
-          <p:cNvPr id="483" name="Group 482">
-            <a:extLst>
-              <a:ext uri="{FF2B5EF4-FFF2-40B4-BE49-F238E27FC236}">
-                <a16:creationId xmlns:a16="http://schemas.microsoft.com/office/drawing/2014/main" id="{8FCB2540-1C8A-C4D7-6DFA-F2FB158E1CD6}"/>
-              </a:ext>
-            </a:extLst>
-          </p:cNvPr>
-          <p:cNvGrpSpPr/>
-          <p:nvPr/>
-        </p:nvGrpSpPr>
-        <p:grpSpPr>
-          <a:xfrm>
-            <a:off x="136232" y="3214817"/>
-            <a:ext cx="2880000" cy="1800000"/>
-            <a:chOff x="136232" y="3096279"/>
-            <a:chExt cx="2880000" cy="1800000"/>
-          </a:xfrm>
-        </p:grpSpPr>
-        <p:sp>
-          <p:nvSpPr>
-            <p:cNvPr id="474" name="Google Shape;251;p37">
-              <a:extLst>
-                <a:ext uri="{FF2B5EF4-FFF2-40B4-BE49-F238E27FC236}">
-                  <a16:creationId xmlns:a16="http://schemas.microsoft.com/office/drawing/2014/main" id="{099B78EF-BA1D-72CD-A7F8-F1FE42BF231B}"/>
-                </a:ext>
-              </a:extLst>
-            </p:cNvPr>
-            <p:cNvSpPr txBox="1">
-              <a:spLocks/>
-            </p:cNvSpPr>
-            <p:nvPr/>
-          </p:nvSpPr>
-          <p:spPr>
-            <a:xfrm>
-              <a:off x="136232" y="3096279"/>
-              <a:ext cx="2880000" cy="1800000"/>
-            </a:xfrm>
-            <a:prstGeom prst="rect">
-              <a:avLst/>
-            </a:prstGeom>
-            <a:solidFill>
-              <a:schemeClr val="tx2"/>
-            </a:solidFill>
-            <a:ln>
-              <a:noFill/>
-            </a:ln>
-          </p:spPr>
-          <p:style>
-            <a:lnRef idx="0">
-              <a:scrgbClr r="0" g="0" b="0"/>
-            </a:lnRef>
-            <a:fillRef idx="0">
-              <a:scrgbClr r="0" g="0" b="0"/>
-            </a:fillRef>
-            <a:effectRef idx="0">
-              <a:scrgbClr r="0" g="0" b="0"/>
-            </a:effectRef>
-            <a:fontRef idx="minor">
-              <a:schemeClr val="lt1"/>
-            </a:fontRef>
-          </p:style>
-          <p:txBody>
-            <a:bodyPr spcFirstLastPara="1" vert="horz" wrap="square" lIns="180000" tIns="180000" rIns="180000" bIns="180000" spcCol="360000" rtlCol="0" anchor="t" anchorCtr="0">
-              <a:noAutofit/>
-            </a:bodyPr>
-            <a:lstStyle>
-              <a:lvl1pPr marL="0" indent="0" algn="l" defTabSz="360000" rtl="0" eaLnBrk="1" latinLnBrk="0" hangingPunct="1">
-                <a:lnSpc>
-                  <a:spcPct val="150000"/>
-                </a:lnSpc>
-                <a:spcBef>
-                  <a:spcPts val="0"/>
-                </a:spcBef>
-                <a:buClr>
-                  <a:schemeClr val="tx2"/>
-                </a:buClr>
-                <a:buFont typeface="Arial" panose="020B0604020202020204" pitchFamily="34" charset="0"/>
-                <a:buNone/>
-                <a:tabLst>
-                  <a:tab pos="360000" algn="l"/>
-                  <a:tab pos="720000" algn="l"/>
-                  <a:tab pos="1080000" algn="l"/>
-                  <a:tab pos="1440000" algn="l"/>
-                  <a:tab pos="1800000" algn="l"/>
-                  <a:tab pos="2160000" algn="l"/>
-                  <a:tab pos="2520000" algn="l"/>
-                </a:tabLst>
-                <a:defRPr sz="1400" kern="1200" baseline="0">
-                  <a:solidFill>
-                    <a:schemeClr val="lt1"/>
-                  </a:solidFill>
-                  <a:latin typeface="+mn-lt"/>
-                  <a:ea typeface="+mn-ea"/>
-                  <a:cs typeface="+mn-cs"/>
-                </a:defRPr>
-              </a:lvl1pPr>
-              <a:lvl2pPr marL="14288" indent="0" algn="l" defTabSz="914400" rtl="0" eaLnBrk="1" latinLnBrk="0" hangingPunct="1">
-                <a:lnSpc>
-                  <a:spcPct val="90000"/>
-                </a:lnSpc>
-                <a:spcBef>
-                  <a:spcPts val="500"/>
-                </a:spcBef>
-                <a:buFontTx/>
-                <a:buNone/>
-                <a:tabLst/>
-                <a:defRPr sz="1600" b="0" i="0" kern="1200" cap="all" baseline="0">
-                  <a:solidFill>
-                    <a:schemeClr val="lt1"/>
-                  </a:solidFill>
-                  <a:latin typeface="+mn-lt"/>
-                  <a:ea typeface="+mn-ea"/>
-                  <a:cs typeface="+mn-cs"/>
-                </a:defRPr>
-              </a:lvl2pPr>
-              <a:lvl3pPr marL="14288" indent="0" algn="l" defTabSz="914400" rtl="0" eaLnBrk="1" latinLnBrk="0" hangingPunct="1">
-                <a:lnSpc>
-                  <a:spcPct val="90000"/>
-                </a:lnSpc>
-                <a:spcBef>
-                  <a:spcPts val="500"/>
-                </a:spcBef>
-                <a:buFont typeface="Arial" panose="020B0604020202020204" pitchFamily="34" charset="0"/>
-                <a:buNone/>
-                <a:tabLst/>
-                <a:defRPr sz="1400" b="1" kern="1200" cap="all" baseline="0">
-                  <a:solidFill>
-                    <a:schemeClr val="lt1"/>
-                  </a:solidFill>
-                  <a:latin typeface="+mn-lt"/>
-                  <a:ea typeface="+mn-ea"/>
-                  <a:cs typeface="+mn-cs"/>
-                </a:defRPr>
-              </a:lvl3pPr>
-              <a:lvl4pPr marL="312738" indent="-219075" algn="l" defTabSz="914400" rtl="0" eaLnBrk="1" latinLnBrk="0" hangingPunct="1">
-                <a:lnSpc>
-                  <a:spcPct val="90000"/>
-                </a:lnSpc>
-                <a:spcBef>
-                  <a:spcPts val="500"/>
-                </a:spcBef>
-                <a:buClr>
-                  <a:schemeClr val="tx2"/>
-                </a:buClr>
-                <a:buFont typeface="Arial" panose="020B0604020202020204" pitchFamily="34" charset="0"/>
-                <a:buChar char="•"/>
-                <a:tabLst/>
-                <a:defRPr sz="1400" b="0" i="0" kern="1200">
-                  <a:solidFill>
-                    <a:schemeClr val="lt1"/>
-                  </a:solidFill>
-                  <a:latin typeface="+mn-lt"/>
-                  <a:ea typeface="+mn-ea"/>
-                  <a:cs typeface="+mn-cs"/>
-                </a:defRPr>
-              </a:lvl4pPr>
-              <a:lvl5pPr marL="627063" indent="-236538" algn="l" defTabSz="914400" rtl="0" eaLnBrk="1" latinLnBrk="0" hangingPunct="1">
-                <a:lnSpc>
-                  <a:spcPct val="90000"/>
-                </a:lnSpc>
-                <a:spcBef>
-                  <a:spcPts val="500"/>
-                </a:spcBef>
-                <a:buFont typeface="Arial" panose="020B0604020202020204" pitchFamily="34" charset="0"/>
-                <a:buChar char="•"/>
-                <a:tabLst/>
-                <a:defRPr sz="1200" b="0" i="0" kern="1200">
-                  <a:solidFill>
-                    <a:schemeClr val="lt1"/>
-                  </a:solidFill>
-                  <a:latin typeface="+mn-lt"/>
-                  <a:ea typeface="+mn-ea"/>
-                  <a:cs typeface="+mn-cs"/>
-                </a:defRPr>
-              </a:lvl5pPr>
-              <a:lvl6pPr marL="2514600" indent="-228600" algn="l" defTabSz="914400" rtl="0" eaLnBrk="1" latinLnBrk="0" hangingPunct="1">
-                <a:lnSpc>
-                  <a:spcPct val="90000"/>
-                </a:lnSpc>
-                <a:spcBef>
-                  <a:spcPts val="500"/>
-                </a:spcBef>
-                <a:buFont typeface="Arial" panose="020B0604020202020204" pitchFamily="34" charset="0"/>
-                <a:buChar char="•"/>
-                <a:defRPr sz="1800" kern="1200">
-                  <a:solidFill>
-                    <a:schemeClr val="lt1"/>
-                  </a:solidFill>
-                  <a:latin typeface="+mn-lt"/>
-                  <a:ea typeface="+mn-ea"/>
-                  <a:cs typeface="+mn-cs"/>
-                </a:defRPr>
-              </a:lvl6pPr>
-              <a:lvl7pPr marL="2971800" indent="-228600" algn="l" defTabSz="914400" rtl="0" eaLnBrk="1" latinLnBrk="0" hangingPunct="1">
-                <a:lnSpc>
-                  <a:spcPct val="90000"/>
-                </a:lnSpc>
-                <a:spcBef>
-                  <a:spcPts val="500"/>
-                </a:spcBef>
-                <a:buFont typeface="Arial" panose="020B0604020202020204" pitchFamily="34" charset="0"/>
-                <a:buChar char="•"/>
-                <a:defRPr sz="1800" kern="1200">
-                  <a:solidFill>
-                    <a:schemeClr val="lt1"/>
-                  </a:solidFill>
-                  <a:latin typeface="+mn-lt"/>
-                  <a:ea typeface="+mn-ea"/>
-                  <a:cs typeface="+mn-cs"/>
-                </a:defRPr>
-              </a:lvl7pPr>
-              <a:lvl8pPr marL="3429000" indent="-228600" algn="l" defTabSz="914400" rtl="0" eaLnBrk="1" latinLnBrk="0" hangingPunct="1">
-                <a:lnSpc>
-                  <a:spcPct val="90000"/>
-                </a:lnSpc>
-                <a:spcBef>
-                  <a:spcPts val="500"/>
-                </a:spcBef>
-                <a:buFont typeface="Arial" panose="020B0604020202020204" pitchFamily="34" charset="0"/>
-                <a:buChar char="•"/>
-                <a:defRPr sz="1800" kern="1200">
-                  <a:solidFill>
-                    <a:schemeClr val="lt1"/>
-                  </a:solidFill>
-                  <a:latin typeface="+mn-lt"/>
-                  <a:ea typeface="+mn-ea"/>
-                  <a:cs typeface="+mn-cs"/>
-                </a:defRPr>
-              </a:lvl8pPr>
-              <a:lvl9pPr marL="3886200" indent="-228600" algn="l" defTabSz="914400" rtl="0" eaLnBrk="1" latinLnBrk="0" hangingPunct="1">
-                <a:lnSpc>
-                  <a:spcPct val="90000"/>
-                </a:lnSpc>
-                <a:spcBef>
-                  <a:spcPts val="500"/>
-                </a:spcBef>
-                <a:buFont typeface="Arial" panose="020B0604020202020204" pitchFamily="34" charset="0"/>
-                <a:buChar char="•"/>
-                <a:defRPr sz="1800" kern="1200">
-                  <a:solidFill>
-                    <a:schemeClr val="lt1"/>
-                  </a:solidFill>
-                  <a:latin typeface="+mn-lt"/>
-                  <a:ea typeface="+mn-ea"/>
-                  <a:cs typeface="+mn-cs"/>
-                </a:defRPr>
-              </a:lvl9pPr>
-            </a:lstStyle>
-            <a:p>
-              <a:endParaRPr lang="it-IT" sz="1867" dirty="0">
-                <a:latin typeface="Arial"/>
-                <a:ea typeface="Arial"/>
-                <a:cs typeface="Arial"/>
-                <a:sym typeface="Arial"/>
-              </a:endParaRPr>
-            </a:p>
-            <a:p>
-              <a:endParaRPr lang="it-IT" sz="1867" dirty="0">
-                <a:latin typeface="Arial"/>
-                <a:ea typeface="Arial"/>
-                <a:cs typeface="Arial"/>
-                <a:sym typeface="Arial"/>
-              </a:endParaRPr>
-            </a:p>
-          </p:txBody>
-        </p:sp>
-        <p:sp>
-          <p:nvSpPr>
-            <p:cNvPr id="475" name="Google Shape;267;p37">
-              <a:extLst>
-                <a:ext uri="{FF2B5EF4-FFF2-40B4-BE49-F238E27FC236}">
-                  <a16:creationId xmlns:a16="http://schemas.microsoft.com/office/drawing/2014/main" id="{406A30F7-278C-5519-0463-661452D3C0A2}"/>
-                </a:ext>
-              </a:extLst>
-            </p:cNvPr>
-            <p:cNvSpPr/>
-            <p:nvPr/>
-          </p:nvSpPr>
-          <p:spPr>
-            <a:xfrm>
-              <a:off x="1013167" y="3554835"/>
-              <a:ext cx="1930147" cy="376744"/>
-            </a:xfrm>
-            <a:prstGeom prst="rect">
-              <a:avLst/>
-            </a:prstGeom>
-            <a:solidFill>
-              <a:schemeClr val="tx2"/>
-            </a:solidFill>
-            <a:ln>
-              <a:noFill/>
-            </a:ln>
-          </p:spPr>
-          <p:txBody>
-            <a:bodyPr spcFirstLastPara="1" wrap="square" lIns="121900" tIns="121900" rIns="121900" bIns="121900" anchor="ctr" anchorCtr="0">
-              <a:noAutofit/>
-            </a:bodyPr>
-            <a:lstStyle/>
-            <a:p>
-              <a:r>
-                <a:rPr lang="it" sz="1600" dirty="0">
-                  <a:solidFill>
-                    <a:schemeClr val="bg1"/>
-                  </a:solidFill>
-                  <a:latin typeface="Manrope"/>
-                </a:rPr>
-                <a:t>MongoDB</a:t>
-              </a:r>
-              <a:endParaRPr sz="1600" dirty="0">
-                <a:solidFill>
-                  <a:schemeClr val="bg1"/>
-                </a:solidFill>
-                <a:latin typeface="Manrope"/>
-              </a:endParaRPr>
-            </a:p>
-          </p:txBody>
-        </p:sp>
-        <p:sp>
-          <p:nvSpPr>
-            <p:cNvPr id="476" name="Google Shape;273;p37">
-              <a:extLst>
-                <a:ext uri="{FF2B5EF4-FFF2-40B4-BE49-F238E27FC236}">
-                  <a16:creationId xmlns:a16="http://schemas.microsoft.com/office/drawing/2014/main" id="{13D64338-1E90-DDA5-FC75-073448CF3AA5}"/>
-                </a:ext>
-              </a:extLst>
-            </p:cNvPr>
-            <p:cNvSpPr/>
-            <p:nvPr/>
-          </p:nvSpPr>
-          <p:spPr>
-            <a:xfrm>
-              <a:off x="1013167" y="4181622"/>
-              <a:ext cx="1896710" cy="494709"/>
-            </a:xfrm>
-            <a:prstGeom prst="rect">
-              <a:avLst/>
-            </a:prstGeom>
-            <a:solidFill>
-              <a:schemeClr val="tx2"/>
-            </a:solidFill>
-            <a:ln>
-              <a:noFill/>
-            </a:ln>
-          </p:spPr>
-          <p:txBody>
-            <a:bodyPr spcFirstLastPara="1" wrap="square" lIns="121900" tIns="121900" rIns="121900" bIns="121900" anchor="t" anchorCtr="0">
-              <a:noAutofit/>
-            </a:bodyPr>
-            <a:lstStyle/>
-            <a:p>
-              <a:r>
-                <a:rPr lang="it-IT" sz="1600" dirty="0" err="1">
-                  <a:solidFill>
-                    <a:schemeClr val="bg1"/>
-                  </a:solidFill>
-                  <a:latin typeface="Manrope"/>
-                </a:rPr>
-                <a:t>MongoDB</a:t>
-              </a:r>
-              <a:r>
-                <a:rPr lang="it-IT" sz="1600" dirty="0">
-                  <a:solidFill>
-                    <a:schemeClr val="bg1"/>
-                  </a:solidFill>
-                  <a:latin typeface="Manrope"/>
-                </a:rPr>
-                <a:t> </a:t>
-              </a:r>
-              <a:r>
-                <a:rPr lang="it-IT" sz="1600" dirty="0" err="1">
-                  <a:solidFill>
-                    <a:schemeClr val="bg1"/>
-                  </a:solidFill>
-                  <a:latin typeface="Manrope"/>
-                </a:rPr>
-                <a:t>Compass</a:t>
-              </a:r>
-              <a:endParaRPr sz="1600" dirty="0">
-                <a:solidFill>
-                  <a:schemeClr val="bg1"/>
-                </a:solidFill>
-                <a:latin typeface="Manrope"/>
-              </a:endParaRPr>
-            </a:p>
-          </p:txBody>
-        </p:sp>
-        <p:sp>
-          <p:nvSpPr>
-            <p:cNvPr id="477" name="Google Shape;281;p37">
-              <a:extLst>
-                <a:ext uri="{FF2B5EF4-FFF2-40B4-BE49-F238E27FC236}">
-                  <a16:creationId xmlns:a16="http://schemas.microsoft.com/office/drawing/2014/main" id="{2D046CF3-D5F8-45D4-0661-833D6991F00C}"/>
-                </a:ext>
-              </a:extLst>
-            </p:cNvPr>
-            <p:cNvSpPr txBox="1">
-              <a:spLocks/>
-            </p:cNvSpPr>
-            <p:nvPr/>
-          </p:nvSpPr>
-          <p:spPr>
-            <a:xfrm>
-              <a:off x="172796" y="3178764"/>
-              <a:ext cx="2825154" cy="280930"/>
-            </a:xfrm>
-            <a:prstGeom prst="rect">
-              <a:avLst/>
-            </a:prstGeom>
-            <a:solidFill>
-              <a:schemeClr val="tx2"/>
-            </a:solidFill>
-            <a:ln>
-              <a:noFill/>
-            </a:ln>
-          </p:spPr>
-          <p:txBody>
-            <a:bodyPr spcFirstLastPara="1" vert="horz" wrap="square" lIns="0" tIns="0" rIns="0" bIns="0" spcCol="360000" rtlCol="0" anchor="t" anchorCtr="0">
-              <a:noAutofit/>
-            </a:bodyPr>
-            <a:lstStyle>
-              <a:lvl1pPr marL="0" indent="0" algn="l" defTabSz="360000" rtl="0" eaLnBrk="1" latinLnBrk="0" hangingPunct="1">
-                <a:lnSpc>
-                  <a:spcPct val="150000"/>
-                </a:lnSpc>
-                <a:spcBef>
-                  <a:spcPts val="0"/>
-                </a:spcBef>
-                <a:buClr>
-                  <a:schemeClr val="tx2"/>
-                </a:buClr>
-                <a:buFont typeface="Arial" panose="020B0604020202020204" pitchFamily="34" charset="0"/>
-                <a:buNone/>
-                <a:tabLst>
-                  <a:tab pos="360000" algn="l"/>
-                  <a:tab pos="720000" algn="l"/>
-                  <a:tab pos="1080000" algn="l"/>
-                  <a:tab pos="1440000" algn="l"/>
-                  <a:tab pos="1800000" algn="l"/>
-                  <a:tab pos="2160000" algn="l"/>
-                  <a:tab pos="2520000" algn="l"/>
-                </a:tabLst>
-                <a:defRPr sz="1400" kern="1200" baseline="0">
-                  <a:solidFill>
-                    <a:schemeClr val="tx1"/>
-                  </a:solidFill>
-                  <a:latin typeface="Montserrat" panose="02000505000000020004" pitchFamily="2" charset="77"/>
-                  <a:ea typeface="+mn-ea"/>
-                  <a:cs typeface="+mn-cs"/>
-                </a:defRPr>
-              </a:lvl1pPr>
-              <a:lvl2pPr marL="14288" indent="0" algn="l" defTabSz="914400" rtl="0" eaLnBrk="1" latinLnBrk="0" hangingPunct="1">
-                <a:lnSpc>
-                  <a:spcPct val="90000"/>
-                </a:lnSpc>
-                <a:spcBef>
-                  <a:spcPts val="500"/>
-                </a:spcBef>
-                <a:buFontTx/>
-                <a:buNone/>
-                <a:tabLst/>
-                <a:defRPr sz="1600" b="0" i="0" kern="1200" cap="all" baseline="0">
-                  <a:solidFill>
-                    <a:schemeClr val="tx2"/>
-                  </a:solidFill>
-                  <a:latin typeface="Montserrat" panose="02000505000000020004" pitchFamily="2" charset="77"/>
-                  <a:ea typeface="+mn-ea"/>
-                  <a:cs typeface="+mn-cs"/>
-                </a:defRPr>
-              </a:lvl2pPr>
-              <a:lvl3pPr marL="14288" indent="0" algn="l" defTabSz="914400" rtl="0" eaLnBrk="1" latinLnBrk="0" hangingPunct="1">
-                <a:lnSpc>
-                  <a:spcPct val="90000"/>
-                </a:lnSpc>
-                <a:spcBef>
-                  <a:spcPts val="500"/>
-                </a:spcBef>
-                <a:buFont typeface="Arial" panose="020B0604020202020204" pitchFamily="34" charset="0"/>
-                <a:buNone/>
-                <a:tabLst/>
-                <a:defRPr sz="1400" b="1" kern="1200" cap="all" baseline="0">
-                  <a:solidFill>
-                    <a:schemeClr val="tx1"/>
-                  </a:solidFill>
-                  <a:latin typeface="Montserrat" panose="02000505000000020004" pitchFamily="2" charset="77"/>
-                  <a:ea typeface="+mn-ea"/>
-                  <a:cs typeface="+mn-cs"/>
-                </a:defRPr>
-              </a:lvl3pPr>
-              <a:lvl4pPr marL="312738" indent="-219075" algn="l" defTabSz="914400" rtl="0" eaLnBrk="1" latinLnBrk="0" hangingPunct="1">
-                <a:lnSpc>
-                  <a:spcPct val="90000"/>
-                </a:lnSpc>
-                <a:spcBef>
-                  <a:spcPts val="500"/>
-                </a:spcBef>
-                <a:buClr>
-                  <a:schemeClr val="tx2"/>
-                </a:buClr>
-                <a:buFont typeface="Arial" panose="020B0604020202020204" pitchFamily="34" charset="0"/>
-                <a:buChar char="•"/>
-                <a:tabLst/>
-                <a:defRPr sz="1400" b="0" i="0" kern="1200">
-                  <a:solidFill>
-                    <a:schemeClr val="tx1"/>
-                  </a:solidFill>
-                  <a:latin typeface="Montserrat" panose="02000505000000020004" pitchFamily="2" charset="77"/>
-                  <a:ea typeface="+mn-ea"/>
-                  <a:cs typeface="+mn-cs"/>
-                </a:defRPr>
-              </a:lvl4pPr>
-              <a:lvl5pPr marL="627063" indent="-236538" algn="l" defTabSz="914400" rtl="0" eaLnBrk="1" latinLnBrk="0" hangingPunct="1">
-                <a:lnSpc>
-                  <a:spcPct val="90000"/>
-                </a:lnSpc>
-                <a:spcBef>
-                  <a:spcPts val="500"/>
-                </a:spcBef>
-                <a:buFont typeface="Arial" panose="020B0604020202020204" pitchFamily="34" charset="0"/>
-                <a:buChar char="•"/>
-                <a:tabLst/>
-                <a:defRPr sz="1200" b="0" i="0" kern="1200">
-                  <a:solidFill>
-                    <a:schemeClr val="tx1"/>
-                  </a:solidFill>
-                  <a:latin typeface="Montserrat" panose="02000505000000020004" pitchFamily="2" charset="77"/>
-                  <a:ea typeface="+mn-ea"/>
-                  <a:cs typeface="+mn-cs"/>
-                </a:defRPr>
-              </a:lvl5pPr>
-              <a:lvl6pPr marL="2514600" indent="-228600" algn="l" defTabSz="914400" rtl="0" eaLnBrk="1" latinLnBrk="0" hangingPunct="1">
-                <a:lnSpc>
-                  <a:spcPct val="90000"/>
-                </a:lnSpc>
-                <a:spcBef>
-                  <a:spcPts val="500"/>
-                </a:spcBef>
-                <a:buFont typeface="Arial" panose="020B0604020202020204" pitchFamily="34" charset="0"/>
-                <a:buChar char="•"/>
-                <a:defRPr sz="1800" kern="1200">
-                  <a:solidFill>
-                    <a:schemeClr val="tx1"/>
-                  </a:solidFill>
-                  <a:latin typeface="+mn-lt"/>
-                  <a:ea typeface="+mn-ea"/>
-                  <a:cs typeface="+mn-cs"/>
-                </a:defRPr>
-              </a:lvl6pPr>
-              <a:lvl7pPr marL="2971800" indent="-228600" algn="l" defTabSz="914400" rtl="0" eaLnBrk="1" latinLnBrk="0" hangingPunct="1">
-                <a:lnSpc>
-                  <a:spcPct val="90000"/>
-                </a:lnSpc>
-                <a:spcBef>
-                  <a:spcPts val="500"/>
-                </a:spcBef>
-                <a:buFont typeface="Arial" panose="020B0604020202020204" pitchFamily="34" charset="0"/>
-                <a:buChar char="•"/>
-                <a:defRPr sz="1800" kern="1200">
-                  <a:solidFill>
-                    <a:schemeClr val="tx1"/>
-                  </a:solidFill>
-                  <a:latin typeface="+mn-lt"/>
-                  <a:ea typeface="+mn-ea"/>
-                  <a:cs typeface="+mn-cs"/>
-                </a:defRPr>
-              </a:lvl7pPr>
-              <a:lvl8pPr marL="3429000" indent="-228600" algn="l" defTabSz="914400" rtl="0" eaLnBrk="1" latinLnBrk="0" hangingPunct="1">
-                <a:lnSpc>
-                  <a:spcPct val="90000"/>
-                </a:lnSpc>
-                <a:spcBef>
-                  <a:spcPts val="500"/>
-                </a:spcBef>
-                <a:buFont typeface="Arial" panose="020B0604020202020204" pitchFamily="34" charset="0"/>
-                <a:buChar char="•"/>
-                <a:defRPr sz="1800" kern="1200">
-                  <a:solidFill>
-                    <a:schemeClr val="tx1"/>
-                  </a:solidFill>
-                  <a:latin typeface="+mn-lt"/>
-                  <a:ea typeface="+mn-ea"/>
-                  <a:cs typeface="+mn-cs"/>
-                </a:defRPr>
-              </a:lvl8pPr>
-              <a:lvl9pPr marL="3886200" indent="-228600" algn="l" defTabSz="914400" rtl="0" eaLnBrk="1" latinLnBrk="0" hangingPunct="1">
-                <a:lnSpc>
-                  <a:spcPct val="90000"/>
-                </a:lnSpc>
-                <a:spcBef>
-                  <a:spcPts val="500"/>
-                </a:spcBef>
-                <a:buFont typeface="Arial" panose="020B0604020202020204" pitchFamily="34" charset="0"/>
-                <a:buChar char="•"/>
-                <a:defRPr sz="1800" kern="1200">
-                  <a:solidFill>
-                    <a:schemeClr val="tx1"/>
-                  </a:solidFill>
-                  <a:latin typeface="+mn-lt"/>
-                  <a:ea typeface="+mn-ea"/>
-                  <a:cs typeface="+mn-cs"/>
-                </a:defRPr>
-              </a:lvl9pPr>
-            </a:lstStyle>
-            <a:p>
-              <a:pPr algn="ctr">
-                <a:lnSpc>
-                  <a:spcPct val="105000"/>
-                </a:lnSpc>
-                <a:buSzPts val="852"/>
-              </a:pPr>
-              <a:r>
-                <a:rPr lang="it-IT" sz="1800" b="1" dirty="0">
-                  <a:solidFill>
-                    <a:schemeClr val="bg1"/>
-                  </a:solidFill>
-                  <a:latin typeface="Manrope"/>
-                </a:rPr>
-                <a:t>Database</a:t>
-              </a:r>
-            </a:p>
-            <a:p>
-              <a:pPr algn="ctr">
-                <a:lnSpc>
-                  <a:spcPct val="140000"/>
-                </a:lnSpc>
-                <a:buSzPts val="852"/>
-              </a:pPr>
-              <a:endParaRPr lang="it-IT" sz="1136" dirty="0">
-                <a:solidFill>
-                  <a:schemeClr val="bg1"/>
-                </a:solidFill>
-              </a:endParaRPr>
-            </a:p>
-          </p:txBody>
-        </p:sp>
-        <p:grpSp>
-          <p:nvGrpSpPr>
-            <p:cNvPr id="478" name="Gruppo 49">
-              <a:extLst>
-                <a:ext uri="{FF2B5EF4-FFF2-40B4-BE49-F238E27FC236}">
-                  <a16:creationId xmlns:a16="http://schemas.microsoft.com/office/drawing/2014/main" id="{0DC9DC10-1816-E145-9A1C-EC28916C6BDC}"/>
-                </a:ext>
-              </a:extLst>
-            </p:cNvPr>
-            <p:cNvGrpSpPr/>
-            <p:nvPr/>
-          </p:nvGrpSpPr>
-          <p:grpSpPr>
-            <a:xfrm>
-              <a:off x="329305" y="4181622"/>
-              <a:ext cx="470469" cy="458889"/>
-              <a:chOff x="830933" y="5160392"/>
-              <a:chExt cx="602201" cy="591967"/>
-            </a:xfrm>
-            <a:solidFill>
-              <a:schemeClr val="bg1"/>
-            </a:solidFill>
-          </p:grpSpPr>
-          <p:sp>
-            <p:nvSpPr>
-              <p:cNvPr id="480" name="Ovale 50">
-                <a:extLst>
-                  <a:ext uri="{FF2B5EF4-FFF2-40B4-BE49-F238E27FC236}">
-                    <a16:creationId xmlns:a16="http://schemas.microsoft.com/office/drawing/2014/main" id="{BFE2EDA1-334C-3519-2F9B-58154B664765}"/>
-                  </a:ext>
-                </a:extLst>
-              </p:cNvPr>
-              <p:cNvSpPr/>
-              <p:nvPr/>
-            </p:nvSpPr>
-            <p:spPr>
-              <a:xfrm>
-                <a:off x="830933" y="5160392"/>
-                <a:ext cx="602201" cy="591967"/>
-              </a:xfrm>
-              <a:prstGeom prst="ellipse">
-                <a:avLst/>
-              </a:prstGeom>
-              <a:grpFill/>
-            </p:spPr>
-            <p:style>
-              <a:lnRef idx="2">
-                <a:schemeClr val="dk1"/>
-              </a:lnRef>
-              <a:fillRef idx="1">
-                <a:schemeClr val="lt1"/>
-              </a:fillRef>
-              <a:effectRef idx="0">
-                <a:schemeClr val="dk1"/>
-              </a:effectRef>
-              <a:fontRef idx="minor">
-                <a:schemeClr val="dk1"/>
-              </a:fontRef>
-            </p:style>
-            <p:txBody>
-              <a:bodyPr rtlCol="0" anchor="ctr"/>
-              <a:lstStyle/>
-              <a:p>
-                <a:pPr algn="ctr"/>
-                <a:endParaRPr lang="it-IT"/>
-              </a:p>
-            </p:txBody>
-          </p:sp>
-          <p:pic>
-            <p:nvPicPr>
-              <p:cNvPr id="481" name="Immagine 51">
-                <a:extLst>
-                  <a:ext uri="{FF2B5EF4-FFF2-40B4-BE49-F238E27FC236}">
-                    <a16:creationId xmlns:a16="http://schemas.microsoft.com/office/drawing/2014/main" id="{A6065513-9606-5463-EF21-91FA97D9F4D9}"/>
-                  </a:ext>
-                </a:extLst>
-              </p:cNvPr>
-              <p:cNvPicPr>
-                <a:picLocks noChangeAspect="1"/>
-              </p:cNvPicPr>
-              <p:nvPr/>
-            </p:nvPicPr>
-            <p:blipFill>
-              <a:blip r:embed="rId9"/>
-              <a:stretch>
-                <a:fillRect/>
-              </a:stretch>
-            </p:blipFill>
-            <p:spPr>
-              <a:xfrm>
-                <a:off x="891341" y="5212660"/>
-                <a:ext cx="495851" cy="495851"/>
-              </a:xfrm>
-              <a:prstGeom prst="rect">
-                <a:avLst/>
-              </a:prstGeom>
-              <a:noFill/>
-            </p:spPr>
-          </p:pic>
-        </p:grpSp>
-        <p:pic>
-          <p:nvPicPr>
-            <p:cNvPr id="479" name="Picture 16" descr="Icons">
-              <a:extLst>
-                <a:ext uri="{FF2B5EF4-FFF2-40B4-BE49-F238E27FC236}">
-                  <a16:creationId xmlns:a16="http://schemas.microsoft.com/office/drawing/2014/main" id="{F33A06A1-254A-66C7-261D-92A3CD7689B9}"/>
-                </a:ext>
-              </a:extLst>
-            </p:cNvPr>
-            <p:cNvPicPr>
-              <a:picLocks noChangeAspect="1" noChangeArrowheads="1"/>
-            </p:cNvPicPr>
-            <p:nvPr/>
-          </p:nvPicPr>
-          <p:blipFill>
-            <a:blip r:embed="rId10">
-              <a:extLst>
-                <a:ext uri="{28A0092B-C50C-407E-A947-70E740481C1C}">
-                  <a14:useLocalDpi xmlns:a14="http://schemas.microsoft.com/office/drawing/2010/main" val="0"/>
-                </a:ext>
-              </a:extLst>
-            </a:blip>
-            <a:srcRect/>
-            <a:stretch>
-              <a:fillRect/>
-            </a:stretch>
-          </p:blipFill>
-          <p:spPr bwMode="auto">
-            <a:xfrm>
-              <a:off x="329305" y="3500626"/>
-              <a:ext cx="494547" cy="490714"/>
-            </a:xfrm>
-            <a:prstGeom prst="rect">
-              <a:avLst/>
-            </a:prstGeom>
-            <a:solidFill>
-              <a:schemeClr val="tx2"/>
-            </a:solidFill>
-            <a:extLst>
-              <a:ext uri="{909E8E84-426E-40DD-AFC4-6F175D3DCCD1}">
-                <a14:hiddenFill xmlns:a14="http://schemas.microsoft.com/office/drawing/2010/main">
-                  <a:solidFill>
-                    <a:srgbClr val="FFFFFF"/>
-                  </a:solidFill>
-                </a14:hiddenFill>
-              </a:ext>
-            </a:extLst>
-          </p:spPr>
-        </p:pic>
-      </p:grpSp>
-      <p:grpSp>
-        <p:nvGrpSpPr>
-          <p:cNvPr id="507" name="Group 506">
-            <a:extLst>
-              <a:ext uri="{FF2B5EF4-FFF2-40B4-BE49-F238E27FC236}">
-                <a16:creationId xmlns:a16="http://schemas.microsoft.com/office/drawing/2014/main" id="{48518F36-1994-8366-2E3C-414C3381EFB4}"/>
-              </a:ext>
-            </a:extLst>
-          </p:cNvPr>
-          <p:cNvGrpSpPr/>
-          <p:nvPr/>
-        </p:nvGrpSpPr>
-        <p:grpSpPr>
-          <a:xfrm>
-            <a:off x="3101382" y="3197921"/>
-            <a:ext cx="2880001" cy="1800000"/>
-            <a:chOff x="3101382" y="3197921"/>
-            <a:chExt cx="2880001" cy="1800000"/>
-          </a:xfrm>
-        </p:grpSpPr>
-        <p:sp>
-          <p:nvSpPr>
-            <p:cNvPr id="485" name="Google Shape;276;p37">
-              <a:extLst>
-                <a:ext uri="{FF2B5EF4-FFF2-40B4-BE49-F238E27FC236}">
-                  <a16:creationId xmlns:a16="http://schemas.microsoft.com/office/drawing/2014/main" id="{90485ABA-5206-A597-47EF-FA19383E449F}"/>
-                </a:ext>
-              </a:extLst>
-            </p:cNvPr>
-            <p:cNvSpPr txBox="1">
-              <a:spLocks/>
-            </p:cNvSpPr>
-            <p:nvPr/>
-          </p:nvSpPr>
-          <p:spPr>
-            <a:xfrm>
-              <a:off x="3101382" y="3197921"/>
-              <a:ext cx="2880001" cy="1800000"/>
-            </a:xfrm>
-            <a:prstGeom prst="rect">
-              <a:avLst/>
-            </a:prstGeom>
-            <a:solidFill>
-              <a:schemeClr val="tx1"/>
-            </a:solidFill>
-            <a:ln>
-              <a:noFill/>
-            </a:ln>
-          </p:spPr>
-          <p:style>
-            <a:lnRef idx="0">
-              <a:scrgbClr r="0" g="0" b="0"/>
-            </a:lnRef>
-            <a:fillRef idx="0">
-              <a:scrgbClr r="0" g="0" b="0"/>
-            </a:fillRef>
-            <a:effectRef idx="0">
-              <a:scrgbClr r="0" g="0" b="0"/>
-            </a:effectRef>
-            <a:fontRef idx="minor">
-              <a:schemeClr val="lt1"/>
-            </a:fontRef>
-          </p:style>
-          <p:txBody>
-            <a:bodyPr spcFirstLastPara="1" vert="horz" wrap="square" lIns="180000" tIns="180000" rIns="180000" bIns="180000" spcCol="360000" rtlCol="0" anchor="t" anchorCtr="0">
-              <a:noAutofit/>
-            </a:bodyPr>
-            <a:lstStyle>
-              <a:lvl1pPr marL="0" indent="0" algn="l" defTabSz="360000" rtl="0" eaLnBrk="1" latinLnBrk="0" hangingPunct="1">
-                <a:lnSpc>
-                  <a:spcPct val="150000"/>
-                </a:lnSpc>
-                <a:spcBef>
-                  <a:spcPts val="0"/>
-                </a:spcBef>
-                <a:buClr>
-                  <a:schemeClr val="tx2"/>
-                </a:buClr>
-                <a:buFont typeface="Arial" panose="020B0604020202020204" pitchFamily="34" charset="0"/>
-                <a:buNone/>
-                <a:tabLst>
-                  <a:tab pos="360000" algn="l"/>
-                  <a:tab pos="720000" algn="l"/>
-                  <a:tab pos="1080000" algn="l"/>
-                  <a:tab pos="1440000" algn="l"/>
-                  <a:tab pos="1800000" algn="l"/>
-                  <a:tab pos="2160000" algn="l"/>
-                  <a:tab pos="2520000" algn="l"/>
-                </a:tabLst>
-                <a:defRPr sz="1400" kern="1200" baseline="0">
-                  <a:solidFill>
-                    <a:schemeClr val="lt1"/>
-                  </a:solidFill>
-                  <a:latin typeface="+mn-lt"/>
-                  <a:ea typeface="+mn-ea"/>
-                  <a:cs typeface="+mn-cs"/>
-                </a:defRPr>
-              </a:lvl1pPr>
-              <a:lvl2pPr marL="14288" indent="0" algn="l" defTabSz="914400" rtl="0" eaLnBrk="1" latinLnBrk="0" hangingPunct="1">
-                <a:lnSpc>
-                  <a:spcPct val="90000"/>
-                </a:lnSpc>
-                <a:spcBef>
-                  <a:spcPts val="500"/>
-                </a:spcBef>
-                <a:buFontTx/>
-                <a:buNone/>
-                <a:tabLst/>
-                <a:defRPr sz="1600" b="0" i="0" kern="1200" cap="all" baseline="0">
-                  <a:solidFill>
-                    <a:schemeClr val="lt1"/>
-                  </a:solidFill>
-                  <a:latin typeface="+mn-lt"/>
-                  <a:ea typeface="+mn-ea"/>
-                  <a:cs typeface="+mn-cs"/>
-                </a:defRPr>
-              </a:lvl2pPr>
-              <a:lvl3pPr marL="14288" indent="0" algn="l" defTabSz="914400" rtl="0" eaLnBrk="1" latinLnBrk="0" hangingPunct="1">
-                <a:lnSpc>
-                  <a:spcPct val="90000"/>
-                </a:lnSpc>
-                <a:spcBef>
-                  <a:spcPts val="500"/>
-                </a:spcBef>
-                <a:buFont typeface="Arial" panose="020B0604020202020204" pitchFamily="34" charset="0"/>
-                <a:buNone/>
-                <a:tabLst/>
-                <a:defRPr sz="1400" b="1" kern="1200" cap="all" baseline="0">
-                  <a:solidFill>
-                    <a:schemeClr val="lt1"/>
-                  </a:solidFill>
-                  <a:latin typeface="+mn-lt"/>
-                  <a:ea typeface="+mn-ea"/>
-                  <a:cs typeface="+mn-cs"/>
-                </a:defRPr>
-              </a:lvl3pPr>
-              <a:lvl4pPr marL="312738" indent="-219075" algn="l" defTabSz="914400" rtl="0" eaLnBrk="1" latinLnBrk="0" hangingPunct="1">
-                <a:lnSpc>
-                  <a:spcPct val="90000"/>
-                </a:lnSpc>
-                <a:spcBef>
-                  <a:spcPts val="500"/>
-                </a:spcBef>
-                <a:buClr>
-                  <a:schemeClr val="tx2"/>
-                </a:buClr>
-                <a:buFont typeface="Arial" panose="020B0604020202020204" pitchFamily="34" charset="0"/>
-                <a:buChar char="•"/>
-                <a:tabLst/>
-                <a:defRPr sz="1400" b="0" i="0" kern="1200">
-                  <a:solidFill>
-                    <a:schemeClr val="lt1"/>
-                  </a:solidFill>
-                  <a:latin typeface="+mn-lt"/>
-                  <a:ea typeface="+mn-ea"/>
-                  <a:cs typeface="+mn-cs"/>
-                </a:defRPr>
-              </a:lvl4pPr>
-              <a:lvl5pPr marL="627063" indent="-236538" algn="l" defTabSz="914400" rtl="0" eaLnBrk="1" latinLnBrk="0" hangingPunct="1">
-                <a:lnSpc>
-                  <a:spcPct val="90000"/>
-                </a:lnSpc>
-                <a:spcBef>
-                  <a:spcPts val="500"/>
-                </a:spcBef>
-                <a:buFont typeface="Arial" panose="020B0604020202020204" pitchFamily="34" charset="0"/>
-                <a:buChar char="•"/>
-                <a:tabLst/>
-                <a:defRPr sz="1200" b="0" i="0" kern="1200">
-                  <a:solidFill>
-                    <a:schemeClr val="lt1"/>
-                  </a:solidFill>
-                  <a:latin typeface="+mn-lt"/>
-                  <a:ea typeface="+mn-ea"/>
-                  <a:cs typeface="+mn-cs"/>
-                </a:defRPr>
-              </a:lvl5pPr>
-              <a:lvl6pPr marL="2514600" indent="-228600" algn="l" defTabSz="914400" rtl="0" eaLnBrk="1" latinLnBrk="0" hangingPunct="1">
-                <a:lnSpc>
-                  <a:spcPct val="90000"/>
-                </a:lnSpc>
-                <a:spcBef>
-                  <a:spcPts val="500"/>
-                </a:spcBef>
-                <a:buFont typeface="Arial" panose="020B0604020202020204" pitchFamily="34" charset="0"/>
-                <a:buChar char="•"/>
-                <a:defRPr sz="1800" kern="1200">
-                  <a:solidFill>
-                    <a:schemeClr val="lt1"/>
-                  </a:solidFill>
-                  <a:latin typeface="+mn-lt"/>
-                  <a:ea typeface="+mn-ea"/>
-                  <a:cs typeface="+mn-cs"/>
-                </a:defRPr>
-              </a:lvl6pPr>
-              <a:lvl7pPr marL="2971800" indent="-228600" algn="l" defTabSz="914400" rtl="0" eaLnBrk="1" latinLnBrk="0" hangingPunct="1">
-                <a:lnSpc>
-                  <a:spcPct val="90000"/>
-                </a:lnSpc>
-                <a:spcBef>
-                  <a:spcPts val="500"/>
-                </a:spcBef>
-                <a:buFont typeface="Arial" panose="020B0604020202020204" pitchFamily="34" charset="0"/>
-                <a:buChar char="•"/>
-                <a:defRPr sz="1800" kern="1200">
-                  <a:solidFill>
-                    <a:schemeClr val="lt1"/>
-                  </a:solidFill>
-                  <a:latin typeface="+mn-lt"/>
-                  <a:ea typeface="+mn-ea"/>
-                  <a:cs typeface="+mn-cs"/>
-                </a:defRPr>
-              </a:lvl7pPr>
-              <a:lvl8pPr marL="3429000" indent="-228600" algn="l" defTabSz="914400" rtl="0" eaLnBrk="1" latinLnBrk="0" hangingPunct="1">
-                <a:lnSpc>
-                  <a:spcPct val="90000"/>
-                </a:lnSpc>
-                <a:spcBef>
-                  <a:spcPts val="500"/>
-                </a:spcBef>
-                <a:buFont typeface="Arial" panose="020B0604020202020204" pitchFamily="34" charset="0"/>
-                <a:buChar char="•"/>
-                <a:defRPr sz="1800" kern="1200">
-                  <a:solidFill>
-                    <a:schemeClr val="lt1"/>
-                  </a:solidFill>
-                  <a:latin typeface="+mn-lt"/>
-                  <a:ea typeface="+mn-ea"/>
-                  <a:cs typeface="+mn-cs"/>
-                </a:defRPr>
-              </a:lvl8pPr>
-              <a:lvl9pPr marL="3886200" indent="-228600" algn="l" defTabSz="914400" rtl="0" eaLnBrk="1" latinLnBrk="0" hangingPunct="1">
-                <a:lnSpc>
-                  <a:spcPct val="90000"/>
-                </a:lnSpc>
-                <a:spcBef>
-                  <a:spcPts val="500"/>
-                </a:spcBef>
-                <a:buFont typeface="Arial" panose="020B0604020202020204" pitchFamily="34" charset="0"/>
-                <a:buChar char="•"/>
-                <a:defRPr sz="1800" kern="1200">
-                  <a:solidFill>
-                    <a:schemeClr val="lt1"/>
-                  </a:solidFill>
-                  <a:latin typeface="+mn-lt"/>
-                  <a:ea typeface="+mn-ea"/>
-                  <a:cs typeface="+mn-cs"/>
-                </a:defRPr>
-              </a:lvl9pPr>
-            </a:lstStyle>
-            <a:p>
-              <a:endParaRPr lang="it-IT" sz="1867" dirty="0">
-                <a:latin typeface="Arial"/>
-                <a:ea typeface="Arial"/>
-                <a:cs typeface="Arial"/>
-                <a:sym typeface="Arial"/>
-              </a:endParaRPr>
-            </a:p>
-            <a:p>
-              <a:endParaRPr lang="it-IT" sz="1867" dirty="0">
-                <a:latin typeface="Arial"/>
-                <a:ea typeface="Arial"/>
-                <a:cs typeface="Arial"/>
-                <a:sym typeface="Arial"/>
-              </a:endParaRPr>
-            </a:p>
-          </p:txBody>
-        </p:sp>
-        <p:sp>
-          <p:nvSpPr>
-            <p:cNvPr id="486" name="Google Shape;277;p37">
-              <a:extLst>
-                <a:ext uri="{FF2B5EF4-FFF2-40B4-BE49-F238E27FC236}">
-                  <a16:creationId xmlns:a16="http://schemas.microsoft.com/office/drawing/2014/main" id="{EA631D62-9BDF-1C4A-50AC-E0E101D4DA59}"/>
-                </a:ext>
-              </a:extLst>
-            </p:cNvPr>
-            <p:cNvSpPr/>
-            <p:nvPr/>
-          </p:nvSpPr>
-          <p:spPr>
-            <a:xfrm>
-              <a:off x="3979013" y="3744390"/>
-              <a:ext cx="1928150" cy="384570"/>
-            </a:xfrm>
-            <a:prstGeom prst="rect">
-              <a:avLst/>
-            </a:prstGeom>
-            <a:solidFill>
-              <a:schemeClr val="tx1"/>
-            </a:solidFill>
-            <a:ln>
-              <a:noFill/>
-            </a:ln>
-          </p:spPr>
-          <p:txBody>
-            <a:bodyPr spcFirstLastPara="1" wrap="square" lIns="121900" tIns="121900" rIns="121900" bIns="121900" anchor="ctr" anchorCtr="0">
-              <a:noAutofit/>
-            </a:bodyPr>
-            <a:lstStyle/>
-            <a:p>
-              <a:r>
-                <a:rPr lang="it" sz="1600" dirty="0">
-                  <a:solidFill>
-                    <a:schemeClr val="bg1"/>
-                  </a:solidFill>
-                  <a:latin typeface="Manrope"/>
-                </a:rPr>
-                <a:t>GraphQL</a:t>
-              </a:r>
-              <a:endParaRPr sz="1600" dirty="0">
-                <a:solidFill>
-                  <a:schemeClr val="bg1"/>
-                </a:solidFill>
-                <a:latin typeface="Manrope"/>
-              </a:endParaRPr>
-            </a:p>
-          </p:txBody>
-        </p:sp>
-        <p:sp>
-          <p:nvSpPr>
-            <p:cNvPr id="487" name="Google Shape;282;p37">
-              <a:extLst>
-                <a:ext uri="{FF2B5EF4-FFF2-40B4-BE49-F238E27FC236}">
-                  <a16:creationId xmlns:a16="http://schemas.microsoft.com/office/drawing/2014/main" id="{244508B6-D441-0E39-E778-6974AD2C80F0}"/>
-                </a:ext>
-              </a:extLst>
-            </p:cNvPr>
-            <p:cNvSpPr txBox="1">
-              <a:spLocks/>
-            </p:cNvSpPr>
-            <p:nvPr/>
-          </p:nvSpPr>
-          <p:spPr>
-            <a:xfrm>
-              <a:off x="3101382" y="3271762"/>
-              <a:ext cx="2880001" cy="286766"/>
-            </a:xfrm>
-            <a:prstGeom prst="rect">
-              <a:avLst/>
-            </a:prstGeom>
-            <a:solidFill>
-              <a:schemeClr val="tx1"/>
-            </a:solidFill>
-            <a:ln>
-              <a:noFill/>
-            </a:ln>
-          </p:spPr>
-          <p:txBody>
-            <a:bodyPr spcFirstLastPara="1" vert="horz" wrap="square" lIns="0" tIns="0" rIns="0" bIns="0" spcCol="360000" rtlCol="0" anchor="t" anchorCtr="0">
-              <a:noAutofit/>
-            </a:bodyPr>
-            <a:lstStyle>
-              <a:lvl1pPr marL="0" indent="0" algn="l" defTabSz="360000" rtl="0" eaLnBrk="1" latinLnBrk="0" hangingPunct="1">
-                <a:lnSpc>
-                  <a:spcPct val="150000"/>
-                </a:lnSpc>
-                <a:spcBef>
-                  <a:spcPts val="0"/>
-                </a:spcBef>
-                <a:buClr>
-                  <a:schemeClr val="tx2"/>
-                </a:buClr>
-                <a:buFont typeface="Arial" panose="020B0604020202020204" pitchFamily="34" charset="0"/>
-                <a:buNone/>
-                <a:tabLst>
-                  <a:tab pos="360000" algn="l"/>
-                  <a:tab pos="720000" algn="l"/>
-                  <a:tab pos="1080000" algn="l"/>
-                  <a:tab pos="1440000" algn="l"/>
-                  <a:tab pos="1800000" algn="l"/>
-                  <a:tab pos="2160000" algn="l"/>
-                  <a:tab pos="2520000" algn="l"/>
-                </a:tabLst>
-                <a:defRPr sz="1400" kern="1200" baseline="0">
-                  <a:solidFill>
-                    <a:schemeClr val="tx1"/>
-                  </a:solidFill>
-                  <a:latin typeface="Montserrat" panose="02000505000000020004" pitchFamily="2" charset="77"/>
-                  <a:ea typeface="+mn-ea"/>
-                  <a:cs typeface="+mn-cs"/>
-                </a:defRPr>
-              </a:lvl1pPr>
-              <a:lvl2pPr marL="14288" indent="0" algn="l" defTabSz="914400" rtl="0" eaLnBrk="1" latinLnBrk="0" hangingPunct="1">
-                <a:lnSpc>
-                  <a:spcPct val="90000"/>
-                </a:lnSpc>
-                <a:spcBef>
-                  <a:spcPts val="500"/>
-                </a:spcBef>
-                <a:buFontTx/>
-                <a:buNone/>
-                <a:tabLst/>
-                <a:defRPr sz="1600" b="0" i="0" kern="1200" cap="all" baseline="0">
-                  <a:solidFill>
-                    <a:schemeClr val="tx2"/>
-                  </a:solidFill>
-                  <a:latin typeface="Montserrat" panose="02000505000000020004" pitchFamily="2" charset="77"/>
-                  <a:ea typeface="+mn-ea"/>
-                  <a:cs typeface="+mn-cs"/>
-                </a:defRPr>
-              </a:lvl2pPr>
-              <a:lvl3pPr marL="14288" indent="0" algn="l" defTabSz="914400" rtl="0" eaLnBrk="1" latinLnBrk="0" hangingPunct="1">
-                <a:lnSpc>
-                  <a:spcPct val="90000"/>
-                </a:lnSpc>
-                <a:spcBef>
-                  <a:spcPts val="500"/>
-                </a:spcBef>
-                <a:buFont typeface="Arial" panose="020B0604020202020204" pitchFamily="34" charset="0"/>
-                <a:buNone/>
-                <a:tabLst/>
-                <a:defRPr sz="1400" b="1" kern="1200" cap="all" baseline="0">
-                  <a:solidFill>
-                    <a:schemeClr val="tx1"/>
-                  </a:solidFill>
-                  <a:latin typeface="Montserrat" panose="02000505000000020004" pitchFamily="2" charset="77"/>
-                  <a:ea typeface="+mn-ea"/>
-                  <a:cs typeface="+mn-cs"/>
-                </a:defRPr>
-              </a:lvl3pPr>
-              <a:lvl4pPr marL="312738" indent="-219075" algn="l" defTabSz="914400" rtl="0" eaLnBrk="1" latinLnBrk="0" hangingPunct="1">
-                <a:lnSpc>
-                  <a:spcPct val="90000"/>
-                </a:lnSpc>
-                <a:spcBef>
-                  <a:spcPts val="500"/>
-                </a:spcBef>
-                <a:buClr>
-                  <a:schemeClr val="tx2"/>
-                </a:buClr>
-                <a:buFont typeface="Arial" panose="020B0604020202020204" pitchFamily="34" charset="0"/>
-                <a:buChar char="•"/>
-                <a:tabLst/>
-                <a:defRPr sz="1400" b="0" i="0" kern="1200">
-                  <a:solidFill>
-                    <a:schemeClr val="tx1"/>
-                  </a:solidFill>
-                  <a:latin typeface="Montserrat" panose="02000505000000020004" pitchFamily="2" charset="77"/>
-                  <a:ea typeface="+mn-ea"/>
-                  <a:cs typeface="+mn-cs"/>
-                </a:defRPr>
-              </a:lvl4pPr>
-              <a:lvl5pPr marL="627063" indent="-236538" algn="l" defTabSz="914400" rtl="0" eaLnBrk="1" latinLnBrk="0" hangingPunct="1">
-                <a:lnSpc>
-                  <a:spcPct val="90000"/>
-                </a:lnSpc>
-                <a:spcBef>
-                  <a:spcPts val="500"/>
-                </a:spcBef>
-                <a:buFont typeface="Arial" panose="020B0604020202020204" pitchFamily="34" charset="0"/>
-                <a:buChar char="•"/>
-                <a:tabLst/>
-                <a:defRPr sz="1200" b="0" i="0" kern="1200">
-                  <a:solidFill>
-                    <a:schemeClr val="tx1"/>
-                  </a:solidFill>
-                  <a:latin typeface="Montserrat" panose="02000505000000020004" pitchFamily="2" charset="77"/>
-                  <a:ea typeface="+mn-ea"/>
-                  <a:cs typeface="+mn-cs"/>
-                </a:defRPr>
-              </a:lvl5pPr>
-              <a:lvl6pPr marL="2514600" indent="-228600" algn="l" defTabSz="914400" rtl="0" eaLnBrk="1" latinLnBrk="0" hangingPunct="1">
-                <a:lnSpc>
-                  <a:spcPct val="90000"/>
-                </a:lnSpc>
-                <a:spcBef>
-                  <a:spcPts val="500"/>
-                </a:spcBef>
-                <a:buFont typeface="Arial" panose="020B0604020202020204" pitchFamily="34" charset="0"/>
-                <a:buChar char="•"/>
-                <a:defRPr sz="1800" kern="1200">
-                  <a:solidFill>
-                    <a:schemeClr val="tx1"/>
-                  </a:solidFill>
-                  <a:latin typeface="+mn-lt"/>
-                  <a:ea typeface="+mn-ea"/>
-                  <a:cs typeface="+mn-cs"/>
-                </a:defRPr>
-              </a:lvl6pPr>
-              <a:lvl7pPr marL="2971800" indent="-228600" algn="l" defTabSz="914400" rtl="0" eaLnBrk="1" latinLnBrk="0" hangingPunct="1">
-                <a:lnSpc>
-                  <a:spcPct val="90000"/>
-                </a:lnSpc>
-                <a:spcBef>
-                  <a:spcPts val="500"/>
-                </a:spcBef>
-                <a:buFont typeface="Arial" panose="020B0604020202020204" pitchFamily="34" charset="0"/>
-                <a:buChar char="•"/>
-                <a:defRPr sz="1800" kern="1200">
-                  <a:solidFill>
-                    <a:schemeClr val="tx1"/>
-                  </a:solidFill>
-                  <a:latin typeface="+mn-lt"/>
-                  <a:ea typeface="+mn-ea"/>
-                  <a:cs typeface="+mn-cs"/>
-                </a:defRPr>
-              </a:lvl7pPr>
-              <a:lvl8pPr marL="3429000" indent="-228600" algn="l" defTabSz="914400" rtl="0" eaLnBrk="1" latinLnBrk="0" hangingPunct="1">
-                <a:lnSpc>
-                  <a:spcPct val="90000"/>
-                </a:lnSpc>
-                <a:spcBef>
-                  <a:spcPts val="500"/>
-                </a:spcBef>
-                <a:buFont typeface="Arial" panose="020B0604020202020204" pitchFamily="34" charset="0"/>
-                <a:buChar char="•"/>
-                <a:defRPr sz="1800" kern="1200">
-                  <a:solidFill>
-                    <a:schemeClr val="tx1"/>
-                  </a:solidFill>
-                  <a:latin typeface="+mn-lt"/>
-                  <a:ea typeface="+mn-ea"/>
-                  <a:cs typeface="+mn-cs"/>
-                </a:defRPr>
-              </a:lvl8pPr>
-              <a:lvl9pPr marL="3886200" indent="-228600" algn="l" defTabSz="914400" rtl="0" eaLnBrk="1" latinLnBrk="0" hangingPunct="1">
-                <a:lnSpc>
-                  <a:spcPct val="90000"/>
-                </a:lnSpc>
-                <a:spcBef>
-                  <a:spcPts val="500"/>
-                </a:spcBef>
-                <a:buFont typeface="Arial" panose="020B0604020202020204" pitchFamily="34" charset="0"/>
-                <a:buChar char="•"/>
-                <a:defRPr sz="1800" kern="1200">
-                  <a:solidFill>
-                    <a:schemeClr val="tx1"/>
-                  </a:solidFill>
-                  <a:latin typeface="+mn-lt"/>
-                  <a:ea typeface="+mn-ea"/>
-                  <a:cs typeface="+mn-cs"/>
-                </a:defRPr>
-              </a:lvl9pPr>
-            </a:lstStyle>
-            <a:p>
-              <a:pPr algn="ctr">
-                <a:lnSpc>
-                  <a:spcPct val="105000"/>
-                </a:lnSpc>
-                <a:buSzPts val="852"/>
-              </a:pPr>
-              <a:r>
-                <a:rPr lang="it-IT" sz="1800" b="1" dirty="0">
-                  <a:solidFill>
-                    <a:schemeClr val="bg1"/>
-                  </a:solidFill>
-                  <a:latin typeface="Manrope"/>
-                </a:rPr>
-                <a:t>API Design &amp; Testing</a:t>
-              </a:r>
-            </a:p>
-            <a:p>
-              <a:pPr algn="ctr">
-                <a:lnSpc>
-                  <a:spcPct val="140000"/>
-                </a:lnSpc>
-                <a:buSzPts val="852"/>
-              </a:pPr>
-              <a:endParaRPr lang="it-IT" sz="1136" dirty="0">
-                <a:solidFill>
-                  <a:schemeClr val="bg1"/>
-                </a:solidFill>
-              </a:endParaRPr>
-            </a:p>
-          </p:txBody>
-        </p:sp>
-        <p:sp>
-          <p:nvSpPr>
-            <p:cNvPr id="488" name="Google Shape;284;p37">
-              <a:extLst>
-                <a:ext uri="{FF2B5EF4-FFF2-40B4-BE49-F238E27FC236}">
-                  <a16:creationId xmlns:a16="http://schemas.microsoft.com/office/drawing/2014/main" id="{6D4AC437-BE84-CD11-B7C3-5EDFAD861B15}"/>
-                </a:ext>
-              </a:extLst>
-            </p:cNvPr>
-            <p:cNvSpPr/>
-            <p:nvPr/>
-          </p:nvSpPr>
-          <p:spPr>
-            <a:xfrm>
-              <a:off x="4009689" y="4285847"/>
-              <a:ext cx="1918665" cy="384570"/>
-            </a:xfrm>
-            <a:prstGeom prst="rect">
-              <a:avLst/>
-            </a:prstGeom>
-            <a:solidFill>
-              <a:schemeClr val="tx1"/>
-            </a:solidFill>
-            <a:ln>
-              <a:noFill/>
-            </a:ln>
-          </p:spPr>
-          <p:txBody>
-            <a:bodyPr spcFirstLastPara="1" wrap="square" lIns="121900" tIns="121900" rIns="121900" bIns="121900" anchor="t" anchorCtr="0">
-              <a:noAutofit/>
-            </a:bodyPr>
-            <a:lstStyle/>
-            <a:p>
-              <a:r>
-                <a:rPr lang="it" sz="1600" dirty="0">
-                  <a:solidFill>
-                    <a:schemeClr val="bg1"/>
-                  </a:solidFill>
-                  <a:latin typeface="Manrope"/>
-                </a:rPr>
-                <a:t>Postman</a:t>
-              </a:r>
-              <a:endParaRPr sz="1600" dirty="0">
-                <a:solidFill>
-                  <a:schemeClr val="bg1"/>
-                </a:solidFill>
-                <a:latin typeface="Manrope"/>
-              </a:endParaRPr>
-            </a:p>
-          </p:txBody>
-        </p:sp>
-        <p:pic>
-          <p:nvPicPr>
-            <p:cNvPr id="489" name="Google Shape;285;p37">
-              <a:extLst>
-                <a:ext uri="{FF2B5EF4-FFF2-40B4-BE49-F238E27FC236}">
-                  <a16:creationId xmlns:a16="http://schemas.microsoft.com/office/drawing/2014/main" id="{3F7E5313-37EB-BB76-A444-15DB6A1B3B7C}"/>
-                </a:ext>
-              </a:extLst>
-            </p:cNvPr>
-            <p:cNvPicPr preferRelativeResize="0"/>
-            <p:nvPr/>
-          </p:nvPicPr>
-          <p:blipFill rotWithShape="1">
-            <a:blip r:embed="rId11">
-              <a:alphaModFix/>
-            </a:blip>
-            <a:srcRect/>
-            <a:stretch/>
-          </p:blipFill>
-          <p:spPr>
-            <a:xfrm>
-              <a:off x="3317519" y="4246873"/>
-              <a:ext cx="462486" cy="462522"/>
-            </a:xfrm>
-            <a:prstGeom prst="rect">
-              <a:avLst/>
-            </a:prstGeom>
-            <a:solidFill>
-              <a:schemeClr val="tx1"/>
-            </a:solidFill>
-            <a:ln>
-              <a:noFill/>
-            </a:ln>
-          </p:spPr>
-        </p:pic>
-        <p:sp>
-          <p:nvSpPr>
-            <p:cNvPr id="491" name="Ovale 53">
-              <a:extLst>
-                <a:ext uri="{FF2B5EF4-FFF2-40B4-BE49-F238E27FC236}">
-                  <a16:creationId xmlns:a16="http://schemas.microsoft.com/office/drawing/2014/main" id="{9D118C47-7DCB-B9FB-23FB-E066B3168BCF}"/>
-                </a:ext>
-              </a:extLst>
-            </p:cNvPr>
-            <p:cNvSpPr/>
-            <p:nvPr/>
-          </p:nvSpPr>
-          <p:spPr>
-            <a:xfrm>
-              <a:off x="3304323" y="3667934"/>
-              <a:ext cx="476519" cy="468421"/>
-            </a:xfrm>
-            <a:prstGeom prst="ellipse">
-              <a:avLst/>
-            </a:prstGeom>
-            <a:solidFill>
-              <a:schemeClr val="bg1"/>
-            </a:solidFill>
-          </p:spPr>
-          <p:style>
-            <a:lnRef idx="2">
-              <a:schemeClr val="dk1"/>
-            </a:lnRef>
-            <a:fillRef idx="1">
-              <a:schemeClr val="lt1"/>
-            </a:fillRef>
-            <a:effectRef idx="0">
-              <a:schemeClr val="dk1"/>
-            </a:effectRef>
-            <a:fontRef idx="minor">
-              <a:schemeClr val="dk1"/>
-            </a:fontRef>
-          </p:style>
-          <p:txBody>
-            <a:bodyPr rtlCol="0" anchor="ctr"/>
-            <a:lstStyle/>
-            <a:p>
-              <a:pPr algn="ctr"/>
-              <a:endParaRPr lang="it-IT"/>
-            </a:p>
-          </p:txBody>
-        </p:sp>
-        <p:pic>
-          <p:nvPicPr>
-            <p:cNvPr id="492" name="Picture 10" descr="Free Graphql Logo Icon - Free Download Logos Logo Icons | IconScout">
-              <a:extLst>
-                <a:ext uri="{FF2B5EF4-FFF2-40B4-BE49-F238E27FC236}">
-                  <a16:creationId xmlns:a16="http://schemas.microsoft.com/office/drawing/2014/main" id="{877009ED-1EB4-619F-25B6-0CF4CC32A473}"/>
-                </a:ext>
-              </a:extLst>
-            </p:cNvPr>
-            <p:cNvPicPr>
-              <a:picLocks noChangeAspect="1" noChangeArrowheads="1"/>
-            </p:cNvPicPr>
-            <p:nvPr/>
-          </p:nvPicPr>
-          <p:blipFill>
-            <a:blip r:embed="rId12">
-              <a:extLst>
-                <a:ext uri="{28A0092B-C50C-407E-A947-70E740481C1C}">
-                  <a14:useLocalDpi xmlns:a14="http://schemas.microsoft.com/office/drawing/2010/main" val="0"/>
-                </a:ext>
-              </a:extLst>
-            </a:blip>
-            <a:srcRect/>
-            <a:stretch>
-              <a:fillRect/>
-            </a:stretch>
-          </p:blipFill>
-          <p:spPr bwMode="auto">
-            <a:xfrm>
-              <a:off x="3334533" y="3687977"/>
-              <a:ext cx="428332" cy="428332"/>
-            </a:xfrm>
-            <a:prstGeom prst="rect">
-              <a:avLst/>
-            </a:prstGeom>
-            <a:noFill/>
-          </p:spPr>
-        </p:pic>
-      </p:grpSp>
-      <p:grpSp>
-        <p:nvGrpSpPr>
-          <p:cNvPr id="493" name="Group 492">
-            <a:extLst>
-              <a:ext uri="{FF2B5EF4-FFF2-40B4-BE49-F238E27FC236}">
-                <a16:creationId xmlns:a16="http://schemas.microsoft.com/office/drawing/2014/main" id="{58D0836B-D6E6-6505-E3AF-1722EF7A13C5}"/>
-              </a:ext>
-            </a:extLst>
-          </p:cNvPr>
-          <p:cNvGrpSpPr/>
-          <p:nvPr/>
-        </p:nvGrpSpPr>
-        <p:grpSpPr>
-          <a:xfrm>
-            <a:off x="6066678" y="3191183"/>
-            <a:ext cx="2880000" cy="1800000"/>
-            <a:chOff x="8015200" y="3760267"/>
-            <a:chExt cx="3639600" cy="2274750"/>
-          </a:xfrm>
-        </p:grpSpPr>
-        <p:sp>
-          <p:nvSpPr>
-            <p:cNvPr id="494" name="Google Shape;252;p37">
-              <a:extLst>
-                <a:ext uri="{FF2B5EF4-FFF2-40B4-BE49-F238E27FC236}">
-                  <a16:creationId xmlns:a16="http://schemas.microsoft.com/office/drawing/2014/main" id="{E5289A18-5059-F36F-B30E-00FA25954743}"/>
-                </a:ext>
-              </a:extLst>
-            </p:cNvPr>
-            <p:cNvSpPr txBox="1">
-              <a:spLocks/>
-            </p:cNvSpPr>
-            <p:nvPr/>
-          </p:nvSpPr>
-          <p:spPr>
-            <a:xfrm>
-              <a:off x="8015200" y="3760267"/>
-              <a:ext cx="3639600" cy="2274750"/>
-            </a:xfrm>
-            <a:prstGeom prst="rect">
-              <a:avLst/>
-            </a:prstGeom>
-            <a:solidFill>
-              <a:schemeClr val="tx2"/>
-            </a:solidFill>
-            <a:ln>
-              <a:noFill/>
-            </a:ln>
-          </p:spPr>
-          <p:style>
-            <a:lnRef idx="0">
-              <a:scrgbClr r="0" g="0" b="0"/>
-            </a:lnRef>
-            <a:fillRef idx="0">
-              <a:scrgbClr r="0" g="0" b="0"/>
-            </a:fillRef>
-            <a:effectRef idx="0">
-              <a:scrgbClr r="0" g="0" b="0"/>
-            </a:effectRef>
-            <a:fontRef idx="minor">
-              <a:schemeClr val="lt1"/>
-            </a:fontRef>
-          </p:style>
-          <p:txBody>
-            <a:bodyPr spcFirstLastPara="1" vert="horz" wrap="square" lIns="180000" tIns="180000" rIns="180000" bIns="180000" spcCol="360000" rtlCol="0" anchor="t" anchorCtr="0">
-              <a:noAutofit/>
-            </a:bodyPr>
-            <a:lstStyle>
-              <a:lvl1pPr marL="0" indent="0" algn="l" defTabSz="360000" rtl="0" eaLnBrk="1" latinLnBrk="0" hangingPunct="1">
-                <a:lnSpc>
-                  <a:spcPct val="150000"/>
-                </a:lnSpc>
-                <a:spcBef>
-                  <a:spcPts val="0"/>
-                </a:spcBef>
-                <a:buClr>
-                  <a:schemeClr val="tx2"/>
-                </a:buClr>
-                <a:buFont typeface="Arial" panose="020B0604020202020204" pitchFamily="34" charset="0"/>
-                <a:buNone/>
-                <a:tabLst>
-                  <a:tab pos="360000" algn="l"/>
-                  <a:tab pos="720000" algn="l"/>
-                  <a:tab pos="1080000" algn="l"/>
-                  <a:tab pos="1440000" algn="l"/>
-                  <a:tab pos="1800000" algn="l"/>
-                  <a:tab pos="2160000" algn="l"/>
-                  <a:tab pos="2520000" algn="l"/>
-                </a:tabLst>
-                <a:defRPr sz="1400" kern="1200" baseline="0">
-                  <a:solidFill>
-                    <a:schemeClr val="lt1"/>
-                  </a:solidFill>
-                  <a:latin typeface="+mn-lt"/>
-                  <a:ea typeface="+mn-ea"/>
-                  <a:cs typeface="+mn-cs"/>
-                </a:defRPr>
-              </a:lvl1pPr>
-              <a:lvl2pPr marL="14288" indent="0" algn="l" defTabSz="914400" rtl="0" eaLnBrk="1" latinLnBrk="0" hangingPunct="1">
-                <a:lnSpc>
-                  <a:spcPct val="90000"/>
-                </a:lnSpc>
-                <a:spcBef>
-                  <a:spcPts val="500"/>
-                </a:spcBef>
-                <a:buFontTx/>
-                <a:buNone/>
-                <a:tabLst/>
-                <a:defRPr sz="1600" b="0" i="0" kern="1200" cap="all" baseline="0">
-                  <a:solidFill>
-                    <a:schemeClr val="lt1"/>
-                  </a:solidFill>
-                  <a:latin typeface="+mn-lt"/>
-                  <a:ea typeface="+mn-ea"/>
-                  <a:cs typeface="+mn-cs"/>
-                </a:defRPr>
-              </a:lvl2pPr>
-              <a:lvl3pPr marL="14288" indent="0" algn="l" defTabSz="914400" rtl="0" eaLnBrk="1" latinLnBrk="0" hangingPunct="1">
-                <a:lnSpc>
-                  <a:spcPct val="90000"/>
-                </a:lnSpc>
-                <a:spcBef>
-                  <a:spcPts val="500"/>
-                </a:spcBef>
-                <a:buFont typeface="Arial" panose="020B0604020202020204" pitchFamily="34" charset="0"/>
-                <a:buNone/>
-                <a:tabLst/>
-                <a:defRPr sz="1400" b="1" kern="1200" cap="all" baseline="0">
-                  <a:solidFill>
-                    <a:schemeClr val="lt1"/>
-                  </a:solidFill>
-                  <a:latin typeface="+mn-lt"/>
-                  <a:ea typeface="+mn-ea"/>
-                  <a:cs typeface="+mn-cs"/>
-                </a:defRPr>
-              </a:lvl3pPr>
-              <a:lvl4pPr marL="312738" indent="-219075" algn="l" defTabSz="914400" rtl="0" eaLnBrk="1" latinLnBrk="0" hangingPunct="1">
-                <a:lnSpc>
-                  <a:spcPct val="90000"/>
-                </a:lnSpc>
-                <a:spcBef>
-                  <a:spcPts val="500"/>
-                </a:spcBef>
-                <a:buClr>
-                  <a:schemeClr val="tx2"/>
-                </a:buClr>
-                <a:buFont typeface="Arial" panose="020B0604020202020204" pitchFamily="34" charset="0"/>
-                <a:buChar char="•"/>
-                <a:tabLst/>
-                <a:defRPr sz="1400" b="0" i="0" kern="1200">
-                  <a:solidFill>
-                    <a:schemeClr val="lt1"/>
-                  </a:solidFill>
-                  <a:latin typeface="+mn-lt"/>
-                  <a:ea typeface="+mn-ea"/>
-                  <a:cs typeface="+mn-cs"/>
-                </a:defRPr>
-              </a:lvl4pPr>
-              <a:lvl5pPr marL="627063" indent="-236538" algn="l" defTabSz="914400" rtl="0" eaLnBrk="1" latinLnBrk="0" hangingPunct="1">
-                <a:lnSpc>
-                  <a:spcPct val="90000"/>
-                </a:lnSpc>
-                <a:spcBef>
-                  <a:spcPts val="500"/>
-                </a:spcBef>
-                <a:buFont typeface="Arial" panose="020B0604020202020204" pitchFamily="34" charset="0"/>
-                <a:buChar char="•"/>
-                <a:tabLst/>
-                <a:defRPr sz="1200" b="0" i="0" kern="1200">
-                  <a:solidFill>
-                    <a:schemeClr val="lt1"/>
-                  </a:solidFill>
-                  <a:latin typeface="+mn-lt"/>
-                  <a:ea typeface="+mn-ea"/>
-                  <a:cs typeface="+mn-cs"/>
-                </a:defRPr>
-              </a:lvl5pPr>
-              <a:lvl6pPr marL="2514600" indent="-228600" algn="l" defTabSz="914400" rtl="0" eaLnBrk="1" latinLnBrk="0" hangingPunct="1">
-                <a:lnSpc>
-                  <a:spcPct val="90000"/>
-                </a:lnSpc>
-                <a:spcBef>
-                  <a:spcPts val="500"/>
-                </a:spcBef>
-                <a:buFont typeface="Arial" panose="020B0604020202020204" pitchFamily="34" charset="0"/>
-                <a:buChar char="•"/>
-                <a:defRPr sz="1800" kern="1200">
-                  <a:solidFill>
-                    <a:schemeClr val="lt1"/>
-                  </a:solidFill>
-                  <a:latin typeface="+mn-lt"/>
-                  <a:ea typeface="+mn-ea"/>
-                  <a:cs typeface="+mn-cs"/>
-                </a:defRPr>
-              </a:lvl6pPr>
-              <a:lvl7pPr marL="2971800" indent="-228600" algn="l" defTabSz="914400" rtl="0" eaLnBrk="1" latinLnBrk="0" hangingPunct="1">
-                <a:lnSpc>
-                  <a:spcPct val="90000"/>
-                </a:lnSpc>
-                <a:spcBef>
-                  <a:spcPts val="500"/>
-                </a:spcBef>
-                <a:buFont typeface="Arial" panose="020B0604020202020204" pitchFamily="34" charset="0"/>
-                <a:buChar char="•"/>
-                <a:defRPr sz="1800" kern="1200">
-                  <a:solidFill>
-                    <a:schemeClr val="lt1"/>
-                  </a:solidFill>
-                  <a:latin typeface="+mn-lt"/>
-                  <a:ea typeface="+mn-ea"/>
-                  <a:cs typeface="+mn-cs"/>
-                </a:defRPr>
-              </a:lvl7pPr>
-              <a:lvl8pPr marL="3429000" indent="-228600" algn="l" defTabSz="914400" rtl="0" eaLnBrk="1" latinLnBrk="0" hangingPunct="1">
-                <a:lnSpc>
-                  <a:spcPct val="90000"/>
-                </a:lnSpc>
-                <a:spcBef>
-                  <a:spcPts val="500"/>
-                </a:spcBef>
-                <a:buFont typeface="Arial" panose="020B0604020202020204" pitchFamily="34" charset="0"/>
-                <a:buChar char="•"/>
-                <a:defRPr sz="1800" kern="1200">
-                  <a:solidFill>
-                    <a:schemeClr val="lt1"/>
-                  </a:solidFill>
-                  <a:latin typeface="+mn-lt"/>
-                  <a:ea typeface="+mn-ea"/>
-                  <a:cs typeface="+mn-cs"/>
-                </a:defRPr>
-              </a:lvl8pPr>
-              <a:lvl9pPr marL="3886200" indent="-228600" algn="l" defTabSz="914400" rtl="0" eaLnBrk="1" latinLnBrk="0" hangingPunct="1">
-                <a:lnSpc>
-                  <a:spcPct val="90000"/>
-                </a:lnSpc>
-                <a:spcBef>
-                  <a:spcPts val="500"/>
-                </a:spcBef>
-                <a:buFont typeface="Arial" panose="020B0604020202020204" pitchFamily="34" charset="0"/>
-                <a:buChar char="•"/>
-                <a:defRPr sz="1800" kern="1200">
-                  <a:solidFill>
-                    <a:schemeClr val="lt1"/>
-                  </a:solidFill>
-                  <a:latin typeface="+mn-lt"/>
-                  <a:ea typeface="+mn-ea"/>
-                  <a:cs typeface="+mn-cs"/>
-                </a:defRPr>
-              </a:lvl9pPr>
-            </a:lstStyle>
-            <a:p>
-              <a:endParaRPr lang="it-IT" sz="1867">
-                <a:latin typeface="Arial"/>
-                <a:ea typeface="Arial"/>
-                <a:cs typeface="Arial"/>
-                <a:sym typeface="Arial"/>
-              </a:endParaRPr>
-            </a:p>
-            <a:p>
-              <a:endParaRPr lang="it-IT" sz="1867" dirty="0">
-                <a:latin typeface="Arial"/>
-                <a:ea typeface="Arial"/>
-                <a:cs typeface="Arial"/>
-                <a:sym typeface="Arial"/>
-              </a:endParaRPr>
-            </a:p>
-          </p:txBody>
-        </p:sp>
-        <p:sp>
-          <p:nvSpPr>
-            <p:cNvPr id="495" name="Google Shape;265;p37">
-              <a:extLst>
-                <a:ext uri="{FF2B5EF4-FFF2-40B4-BE49-F238E27FC236}">
-                  <a16:creationId xmlns:a16="http://schemas.microsoft.com/office/drawing/2014/main" id="{ACA6D513-BCA6-E4A3-0AA9-F1DE9D68E320}"/>
-                </a:ext>
-              </a:extLst>
-            </p:cNvPr>
-            <p:cNvSpPr/>
-            <p:nvPr/>
-          </p:nvSpPr>
-          <p:spPr>
-            <a:xfrm>
-              <a:off x="9103665" y="4450867"/>
-              <a:ext cx="2463902" cy="486000"/>
-            </a:xfrm>
-            <a:prstGeom prst="rect">
-              <a:avLst/>
-            </a:prstGeom>
-            <a:noFill/>
-            <a:ln>
-              <a:noFill/>
-            </a:ln>
-          </p:spPr>
-          <p:txBody>
-            <a:bodyPr spcFirstLastPara="1" wrap="square" lIns="121900" tIns="121900" rIns="121900" bIns="121900" anchor="ctr" anchorCtr="0">
-              <a:noAutofit/>
-            </a:bodyPr>
-            <a:lstStyle/>
-            <a:p>
-              <a:r>
-                <a:rPr lang="it" sz="1600" dirty="0">
-                  <a:solidFill>
-                    <a:schemeClr val="bg1"/>
-                  </a:solidFill>
-                  <a:latin typeface="Manrope"/>
-                </a:rPr>
-                <a:t>Jenkins</a:t>
-              </a:r>
-              <a:endParaRPr sz="1600" dirty="0">
-                <a:solidFill>
-                  <a:schemeClr val="bg1"/>
-                </a:solidFill>
-                <a:latin typeface="Manrope"/>
-              </a:endParaRPr>
-            </a:p>
-          </p:txBody>
-        </p:sp>
-        <p:sp>
-          <p:nvSpPr>
-            <p:cNvPr id="496" name="Google Shape;266;p37">
-              <a:extLst>
-                <a:ext uri="{FF2B5EF4-FFF2-40B4-BE49-F238E27FC236}">
-                  <a16:creationId xmlns:a16="http://schemas.microsoft.com/office/drawing/2014/main" id="{64871A84-59BF-9197-7E42-701F94B4D000}"/>
-                </a:ext>
-              </a:extLst>
-            </p:cNvPr>
-            <p:cNvSpPr/>
-            <p:nvPr/>
-          </p:nvSpPr>
-          <p:spPr>
-            <a:xfrm>
-              <a:off x="9103665" y="5135133"/>
-              <a:ext cx="2463702" cy="486000"/>
-            </a:xfrm>
-            <a:prstGeom prst="rect">
-              <a:avLst/>
-            </a:prstGeom>
-            <a:noFill/>
-            <a:ln>
-              <a:noFill/>
-            </a:ln>
-          </p:spPr>
-          <p:txBody>
-            <a:bodyPr spcFirstLastPara="1" wrap="square" lIns="121900" tIns="121900" rIns="121900" bIns="121900" anchor="ctr" anchorCtr="0">
-              <a:noAutofit/>
-            </a:bodyPr>
-            <a:lstStyle/>
-            <a:p>
-              <a:r>
-                <a:rPr lang="it" sz="1600" dirty="0">
-                  <a:solidFill>
-                    <a:schemeClr val="bg1"/>
-                  </a:solidFill>
-                  <a:latin typeface="Manrope"/>
-                </a:rPr>
-                <a:t>OKD</a:t>
-              </a:r>
-              <a:endParaRPr sz="1600" dirty="0">
-                <a:solidFill>
-                  <a:schemeClr val="bg1"/>
-                </a:solidFill>
-                <a:latin typeface="Manrope"/>
-              </a:endParaRPr>
-            </a:p>
-          </p:txBody>
-        </p:sp>
-        <p:sp>
-          <p:nvSpPr>
-            <p:cNvPr id="497" name="Google Shape;283;p37">
-              <a:extLst>
-                <a:ext uri="{FF2B5EF4-FFF2-40B4-BE49-F238E27FC236}">
-                  <a16:creationId xmlns:a16="http://schemas.microsoft.com/office/drawing/2014/main" id="{C9E3F661-A868-BE1A-1F7F-8767312067C5}"/>
-                </a:ext>
-              </a:extLst>
-            </p:cNvPr>
-            <p:cNvSpPr txBox="1">
-              <a:spLocks/>
-            </p:cNvSpPr>
-            <p:nvPr/>
-          </p:nvSpPr>
-          <p:spPr>
-            <a:xfrm>
-              <a:off x="8015200" y="3853584"/>
-              <a:ext cx="3639600" cy="362400"/>
-            </a:xfrm>
-            <a:prstGeom prst="rect">
-              <a:avLst/>
-            </a:prstGeom>
-            <a:noFill/>
-            <a:ln>
-              <a:noFill/>
-            </a:ln>
-          </p:spPr>
-          <p:txBody>
-            <a:bodyPr spcFirstLastPara="1" vert="horz" wrap="square" lIns="0" tIns="0" rIns="0" bIns="0" spcCol="360000" rtlCol="0" anchor="t" anchorCtr="0">
-              <a:noAutofit/>
-            </a:bodyPr>
-            <a:lstStyle>
-              <a:lvl1pPr marL="0" indent="0" algn="l" defTabSz="360000" rtl="0" eaLnBrk="1" latinLnBrk="0" hangingPunct="1">
-                <a:lnSpc>
-                  <a:spcPct val="150000"/>
-                </a:lnSpc>
-                <a:spcBef>
-                  <a:spcPts val="0"/>
-                </a:spcBef>
-                <a:buClr>
-                  <a:schemeClr val="tx2"/>
-                </a:buClr>
-                <a:buFont typeface="Arial" panose="020B0604020202020204" pitchFamily="34" charset="0"/>
-                <a:buNone/>
-                <a:tabLst>
-                  <a:tab pos="360000" algn="l"/>
-                  <a:tab pos="720000" algn="l"/>
-                  <a:tab pos="1080000" algn="l"/>
-                  <a:tab pos="1440000" algn="l"/>
-                  <a:tab pos="1800000" algn="l"/>
-                  <a:tab pos="2160000" algn="l"/>
-                  <a:tab pos="2520000" algn="l"/>
-                </a:tabLst>
-                <a:defRPr sz="1400" kern="1200" baseline="0">
-                  <a:solidFill>
-                    <a:schemeClr val="tx1"/>
-                  </a:solidFill>
-                  <a:latin typeface="Montserrat" panose="02000505000000020004" pitchFamily="2" charset="77"/>
-                  <a:ea typeface="+mn-ea"/>
-                  <a:cs typeface="+mn-cs"/>
-                </a:defRPr>
-              </a:lvl1pPr>
-              <a:lvl2pPr marL="14288" indent="0" algn="l" defTabSz="914400" rtl="0" eaLnBrk="1" latinLnBrk="0" hangingPunct="1">
-                <a:lnSpc>
-                  <a:spcPct val="90000"/>
-                </a:lnSpc>
-                <a:spcBef>
-                  <a:spcPts val="500"/>
-                </a:spcBef>
-                <a:buFontTx/>
-                <a:buNone/>
-                <a:tabLst/>
-                <a:defRPr sz="1600" b="0" i="0" kern="1200" cap="all" baseline="0">
-                  <a:solidFill>
-                    <a:schemeClr val="tx2"/>
-                  </a:solidFill>
-                  <a:latin typeface="Montserrat" panose="02000505000000020004" pitchFamily="2" charset="77"/>
-                  <a:ea typeface="+mn-ea"/>
-                  <a:cs typeface="+mn-cs"/>
-                </a:defRPr>
-              </a:lvl2pPr>
-              <a:lvl3pPr marL="14288" indent="0" algn="l" defTabSz="914400" rtl="0" eaLnBrk="1" latinLnBrk="0" hangingPunct="1">
-                <a:lnSpc>
-                  <a:spcPct val="90000"/>
-                </a:lnSpc>
-                <a:spcBef>
-                  <a:spcPts val="500"/>
-                </a:spcBef>
-                <a:buFont typeface="Arial" panose="020B0604020202020204" pitchFamily="34" charset="0"/>
-                <a:buNone/>
-                <a:tabLst/>
-                <a:defRPr sz="1400" b="1" kern="1200" cap="all" baseline="0">
-                  <a:solidFill>
-                    <a:schemeClr val="tx1"/>
-                  </a:solidFill>
-                  <a:latin typeface="Montserrat" panose="02000505000000020004" pitchFamily="2" charset="77"/>
-                  <a:ea typeface="+mn-ea"/>
-                  <a:cs typeface="+mn-cs"/>
-                </a:defRPr>
-              </a:lvl3pPr>
-              <a:lvl4pPr marL="312738" indent="-219075" algn="l" defTabSz="914400" rtl="0" eaLnBrk="1" latinLnBrk="0" hangingPunct="1">
-                <a:lnSpc>
-                  <a:spcPct val="90000"/>
-                </a:lnSpc>
-                <a:spcBef>
-                  <a:spcPts val="500"/>
-                </a:spcBef>
-                <a:buClr>
-                  <a:schemeClr val="tx2"/>
-                </a:buClr>
-                <a:buFont typeface="Arial" panose="020B0604020202020204" pitchFamily="34" charset="0"/>
-                <a:buChar char="•"/>
-                <a:tabLst/>
-                <a:defRPr sz="1400" b="0" i="0" kern="1200">
-                  <a:solidFill>
-                    <a:schemeClr val="tx1"/>
-                  </a:solidFill>
-                  <a:latin typeface="Montserrat" panose="02000505000000020004" pitchFamily="2" charset="77"/>
-                  <a:ea typeface="+mn-ea"/>
-                  <a:cs typeface="+mn-cs"/>
-                </a:defRPr>
-              </a:lvl4pPr>
-              <a:lvl5pPr marL="627063" indent="-236538" algn="l" defTabSz="914400" rtl="0" eaLnBrk="1" latinLnBrk="0" hangingPunct="1">
-                <a:lnSpc>
-                  <a:spcPct val="90000"/>
-                </a:lnSpc>
-                <a:spcBef>
-                  <a:spcPts val="500"/>
-                </a:spcBef>
-                <a:buFont typeface="Arial" panose="020B0604020202020204" pitchFamily="34" charset="0"/>
-                <a:buChar char="•"/>
-                <a:tabLst/>
-                <a:defRPr sz="1200" b="0" i="0" kern="1200">
-                  <a:solidFill>
-                    <a:schemeClr val="tx1"/>
-                  </a:solidFill>
-                  <a:latin typeface="Montserrat" panose="02000505000000020004" pitchFamily="2" charset="77"/>
-                  <a:ea typeface="+mn-ea"/>
-                  <a:cs typeface="+mn-cs"/>
-                </a:defRPr>
-              </a:lvl5pPr>
-              <a:lvl6pPr marL="2514600" indent="-228600" algn="l" defTabSz="914400" rtl="0" eaLnBrk="1" latinLnBrk="0" hangingPunct="1">
-                <a:lnSpc>
-                  <a:spcPct val="90000"/>
-                </a:lnSpc>
-                <a:spcBef>
-                  <a:spcPts val="500"/>
-                </a:spcBef>
-                <a:buFont typeface="Arial" panose="020B0604020202020204" pitchFamily="34" charset="0"/>
-                <a:buChar char="•"/>
-                <a:defRPr sz="1800" kern="1200">
-                  <a:solidFill>
-                    <a:schemeClr val="tx1"/>
-                  </a:solidFill>
-                  <a:latin typeface="+mn-lt"/>
-                  <a:ea typeface="+mn-ea"/>
-                  <a:cs typeface="+mn-cs"/>
-                </a:defRPr>
-              </a:lvl6pPr>
-              <a:lvl7pPr marL="2971800" indent="-228600" algn="l" defTabSz="914400" rtl="0" eaLnBrk="1" latinLnBrk="0" hangingPunct="1">
-                <a:lnSpc>
-                  <a:spcPct val="90000"/>
-                </a:lnSpc>
-                <a:spcBef>
-                  <a:spcPts val="500"/>
-                </a:spcBef>
-                <a:buFont typeface="Arial" panose="020B0604020202020204" pitchFamily="34" charset="0"/>
-                <a:buChar char="•"/>
-                <a:defRPr sz="1800" kern="1200">
-                  <a:solidFill>
-                    <a:schemeClr val="tx1"/>
-                  </a:solidFill>
-                  <a:latin typeface="+mn-lt"/>
-                  <a:ea typeface="+mn-ea"/>
-                  <a:cs typeface="+mn-cs"/>
-                </a:defRPr>
-              </a:lvl7pPr>
-              <a:lvl8pPr marL="3429000" indent="-228600" algn="l" defTabSz="914400" rtl="0" eaLnBrk="1" latinLnBrk="0" hangingPunct="1">
-                <a:lnSpc>
-                  <a:spcPct val="90000"/>
-                </a:lnSpc>
-                <a:spcBef>
-                  <a:spcPts val="500"/>
-                </a:spcBef>
-                <a:buFont typeface="Arial" panose="020B0604020202020204" pitchFamily="34" charset="0"/>
-                <a:buChar char="•"/>
-                <a:defRPr sz="1800" kern="1200">
-                  <a:solidFill>
-                    <a:schemeClr val="tx1"/>
-                  </a:solidFill>
-                  <a:latin typeface="+mn-lt"/>
-                  <a:ea typeface="+mn-ea"/>
-                  <a:cs typeface="+mn-cs"/>
-                </a:defRPr>
-              </a:lvl8pPr>
-              <a:lvl9pPr marL="3886200" indent="-228600" algn="l" defTabSz="914400" rtl="0" eaLnBrk="1" latinLnBrk="0" hangingPunct="1">
-                <a:lnSpc>
-                  <a:spcPct val="90000"/>
-                </a:lnSpc>
-                <a:spcBef>
-                  <a:spcPts val="500"/>
-                </a:spcBef>
-                <a:buFont typeface="Arial" panose="020B0604020202020204" pitchFamily="34" charset="0"/>
-                <a:buChar char="•"/>
-                <a:defRPr sz="1800" kern="1200">
-                  <a:solidFill>
-                    <a:schemeClr val="tx1"/>
-                  </a:solidFill>
-                  <a:latin typeface="+mn-lt"/>
-                  <a:ea typeface="+mn-ea"/>
-                  <a:cs typeface="+mn-cs"/>
-                </a:defRPr>
-              </a:lvl9pPr>
-            </a:lstStyle>
-            <a:p>
-              <a:pPr algn="ctr">
-                <a:lnSpc>
-                  <a:spcPct val="105000"/>
-                </a:lnSpc>
-                <a:buSzPts val="852"/>
-              </a:pPr>
-              <a:r>
-                <a:rPr lang="it-IT" sz="1800" b="1" dirty="0" err="1">
-                  <a:solidFill>
-                    <a:schemeClr val="bg1"/>
-                  </a:solidFill>
-                  <a:latin typeface="Manrope"/>
-                </a:rPr>
-                <a:t>DevOps</a:t>
-              </a:r>
-              <a:endParaRPr lang="it-IT" sz="1800" b="1" dirty="0">
-                <a:solidFill>
-                  <a:schemeClr val="bg1"/>
-                </a:solidFill>
-                <a:latin typeface="Manrope"/>
-              </a:endParaRPr>
-            </a:p>
-            <a:p>
-              <a:pPr algn="ctr">
-                <a:lnSpc>
-                  <a:spcPct val="140000"/>
-                </a:lnSpc>
-                <a:buSzPts val="852"/>
-              </a:pPr>
-              <a:endParaRPr lang="it-IT" sz="1136" dirty="0">
-                <a:solidFill>
-                  <a:schemeClr val="bg1"/>
-                </a:solidFill>
-              </a:endParaRPr>
-            </a:p>
-          </p:txBody>
-        </p:sp>
-        <p:grpSp>
-          <p:nvGrpSpPr>
-            <p:cNvPr id="498" name="Gruppo 40">
-              <a:extLst>
-                <a:ext uri="{FF2B5EF4-FFF2-40B4-BE49-F238E27FC236}">
-                  <a16:creationId xmlns:a16="http://schemas.microsoft.com/office/drawing/2014/main" id="{099D0FD0-2161-4618-5FE6-A0F8E76E33ED}"/>
-                </a:ext>
-              </a:extLst>
-            </p:cNvPr>
-            <p:cNvGrpSpPr/>
-            <p:nvPr/>
-          </p:nvGrpSpPr>
-          <p:grpSpPr>
-            <a:xfrm>
-              <a:off x="8215105" y="4317078"/>
-              <a:ext cx="602201" cy="592425"/>
-              <a:chOff x="8215105" y="4317078"/>
-              <a:chExt cx="602201" cy="592425"/>
-            </a:xfrm>
-          </p:grpSpPr>
-          <p:sp>
-            <p:nvSpPr>
-              <p:cNvPr id="502" name="Ovale 41">
-                <a:extLst>
-                  <a:ext uri="{FF2B5EF4-FFF2-40B4-BE49-F238E27FC236}">
-                    <a16:creationId xmlns:a16="http://schemas.microsoft.com/office/drawing/2014/main" id="{B0E6E920-04F3-4A1C-F965-67A063FDD88C}"/>
-                  </a:ext>
-                </a:extLst>
-              </p:cNvPr>
-              <p:cNvSpPr/>
-              <p:nvPr/>
-            </p:nvSpPr>
-            <p:spPr>
-              <a:xfrm>
-                <a:off x="8215105" y="4317078"/>
-                <a:ext cx="602201" cy="591967"/>
-              </a:xfrm>
-              <a:prstGeom prst="ellipse">
-                <a:avLst/>
-              </a:prstGeom>
-            </p:spPr>
-            <p:style>
-              <a:lnRef idx="2">
-                <a:schemeClr val="dk1"/>
-              </a:lnRef>
-              <a:fillRef idx="1">
-                <a:schemeClr val="lt1"/>
-              </a:fillRef>
-              <a:effectRef idx="0">
-                <a:schemeClr val="dk1"/>
-              </a:effectRef>
-              <a:fontRef idx="minor">
-                <a:schemeClr val="dk1"/>
-              </a:fontRef>
-            </p:style>
-            <p:txBody>
-              <a:bodyPr rtlCol="0" anchor="ctr"/>
-              <a:lstStyle/>
-              <a:p>
-                <a:pPr algn="ctr"/>
-                <a:endParaRPr lang="it-IT" dirty="0"/>
-              </a:p>
-            </p:txBody>
-          </p:sp>
-          <p:pic>
-            <p:nvPicPr>
-              <p:cNvPr id="503" name="Immagine 42">
-                <a:extLst>
-                  <a:ext uri="{FF2B5EF4-FFF2-40B4-BE49-F238E27FC236}">
-                    <a16:creationId xmlns:a16="http://schemas.microsoft.com/office/drawing/2014/main" id="{079BCF8E-DAC9-95E3-E194-74BB8452C271}"/>
-                  </a:ext>
-                </a:extLst>
-              </p:cNvPr>
-              <p:cNvPicPr>
-                <a:picLocks noChangeAspect="1"/>
-              </p:cNvPicPr>
-              <p:nvPr/>
-            </p:nvPicPr>
-            <p:blipFill>
-              <a:blip r:embed="rId13"/>
-              <a:stretch>
-                <a:fillRect/>
-              </a:stretch>
-            </p:blipFill>
-            <p:spPr>
-              <a:xfrm>
-                <a:off x="8232935" y="4351837"/>
-                <a:ext cx="557666" cy="557666"/>
-              </a:xfrm>
-              <a:prstGeom prst="rect">
-                <a:avLst/>
-              </a:prstGeom>
-            </p:spPr>
-          </p:pic>
-        </p:grpSp>
-        <p:grpSp>
-          <p:nvGrpSpPr>
-            <p:cNvPr id="499" name="Gruppo 3">
-              <a:extLst>
-                <a:ext uri="{FF2B5EF4-FFF2-40B4-BE49-F238E27FC236}">
-                  <a16:creationId xmlns:a16="http://schemas.microsoft.com/office/drawing/2014/main" id="{BD9914BC-63AD-8517-06F6-A068AB2645A6}"/>
-                </a:ext>
-              </a:extLst>
-            </p:cNvPr>
-            <p:cNvGrpSpPr/>
-            <p:nvPr/>
-          </p:nvGrpSpPr>
-          <p:grpSpPr>
-            <a:xfrm>
-              <a:off x="8232935" y="5083954"/>
-              <a:ext cx="602201" cy="591967"/>
-              <a:chOff x="8232935" y="5083954"/>
-              <a:chExt cx="602201" cy="591967"/>
-            </a:xfrm>
-          </p:grpSpPr>
-          <p:sp>
-            <p:nvSpPr>
-              <p:cNvPr id="500" name="Ovale 44">
-                <a:extLst>
-                  <a:ext uri="{FF2B5EF4-FFF2-40B4-BE49-F238E27FC236}">
-                    <a16:creationId xmlns:a16="http://schemas.microsoft.com/office/drawing/2014/main" id="{E47AD56F-B9FF-4A33-58D9-FA57DDA3EDFC}"/>
-                  </a:ext>
-                </a:extLst>
-              </p:cNvPr>
-              <p:cNvSpPr/>
-              <p:nvPr/>
-            </p:nvSpPr>
-            <p:spPr>
-              <a:xfrm>
-                <a:off x="8232935" y="5083954"/>
-                <a:ext cx="602201" cy="591967"/>
-              </a:xfrm>
-              <a:prstGeom prst="ellipse">
-                <a:avLst/>
-              </a:prstGeom>
-            </p:spPr>
-            <p:style>
-              <a:lnRef idx="2">
-                <a:schemeClr val="dk1"/>
-              </a:lnRef>
-              <a:fillRef idx="1">
-                <a:schemeClr val="lt1"/>
-              </a:fillRef>
-              <a:effectRef idx="0">
-                <a:schemeClr val="dk1"/>
-              </a:effectRef>
-              <a:fontRef idx="minor">
-                <a:schemeClr val="dk1"/>
-              </a:fontRef>
-            </p:style>
-            <p:txBody>
-              <a:bodyPr rtlCol="0" anchor="ctr"/>
-              <a:lstStyle/>
-              <a:p>
-                <a:pPr algn="ctr"/>
-                <a:endParaRPr lang="it-IT" dirty="0"/>
-              </a:p>
-            </p:txBody>
-          </p:sp>
-          <p:pic>
-            <p:nvPicPr>
-              <p:cNvPr id="501" name="Picture 5" descr="How to Deploy OKD Minishift onto a Publicly-Hosted VM">
-                <a:extLst>
-                  <a:ext uri="{FF2B5EF4-FFF2-40B4-BE49-F238E27FC236}">
-                    <a16:creationId xmlns:a16="http://schemas.microsoft.com/office/drawing/2014/main" id="{02318261-DF70-B43B-375F-F7E63817C4C2}"/>
-                  </a:ext>
-                </a:extLst>
-              </p:cNvPr>
-              <p:cNvPicPr>
-                <a:picLocks noChangeAspect="1" noChangeArrowheads="1"/>
-              </p:cNvPicPr>
-              <p:nvPr/>
-            </p:nvPicPr>
-            <p:blipFill>
-              <a:blip r:embed="rId14">
-                <a:extLst>
-                  <a:ext uri="{28A0092B-C50C-407E-A947-70E740481C1C}">
-                    <a14:useLocalDpi xmlns:a14="http://schemas.microsoft.com/office/drawing/2010/main" val="0"/>
-                  </a:ext>
-                </a:extLst>
-              </a:blip>
-              <a:srcRect/>
-              <a:stretch>
-                <a:fillRect/>
-              </a:stretch>
-            </p:blipFill>
-            <p:spPr bwMode="auto">
-              <a:xfrm>
-                <a:off x="8292511" y="5263298"/>
-                <a:ext cx="483047" cy="229670"/>
-              </a:xfrm>
-              <a:prstGeom prst="rect">
-                <a:avLst/>
-              </a:prstGeom>
-              <a:noFill/>
-              <a:extLst>
-                <a:ext uri="{909E8E84-426E-40DD-AFC4-6F175D3DCCD1}">
-                  <a14:hiddenFill xmlns:a14="http://schemas.microsoft.com/office/drawing/2010/main">
-                    <a:solidFill>
-                      <a:srgbClr val="FFFFFF"/>
-                    </a:solidFill>
-                  </a14:hiddenFill>
-                </a:ext>
-              </a:extLst>
-            </p:spPr>
-          </p:pic>
-        </p:grpSp>
-      </p:grpSp>
-    </p:spTree>
-    <p:extLst>
-      <p:ext uri="{BB962C8B-B14F-4D97-AF65-F5344CB8AC3E}">
-        <p14:creationId xmlns:p14="http://schemas.microsoft.com/office/powerpoint/2010/main" val="4211757087"/>
-      </p:ext>
-    </p:extLst>
-  </p:cSld>
-  <p:clrMapOvr>
-    <a:masterClrMapping/>
-  </p:clrMapOvr>
-</p:sld>
-</file>
-
 <file path=ppt/slides/slide2.xml><?xml version="1.0" encoding="utf-8"?>
 <p:sld xmlns:a="http://schemas.openxmlformats.org/drawingml/2006/main" xmlns:r="http://schemas.openxmlformats.org/officeDocument/2006/relationships" xmlns:p="http://schemas.openxmlformats.org/presentationml/2006/main">
   <p:cSld>
@@ -37604,7 +33085,7 @@
             </a:extLst>
           </p:cNvPr>
           <p:cNvPicPr>
-            <a:picLocks noChangeAspect="1"/>
+            <a:picLocks noGrp="1" noRot="1" noChangeAspect="1" noMove="1" noResize="1" noEditPoints="1" noAdjustHandles="1" noChangeArrowheads="1" noChangeShapeType="1" noCrop="1"/>
           </p:cNvPicPr>
           <p:nvPr/>
         </p:nvPicPr>
@@ -37624,6 +33105,1810 @@
           </a:prstGeom>
         </p:spPr>
       </p:pic>
+      <p:sp>
+        <p:nvSpPr>
+          <p:cNvPr id="6" name="Rounded Rectangle 5">
+            <a:extLst>
+              <a:ext uri="{FF2B5EF4-FFF2-40B4-BE49-F238E27FC236}">
+                <a16:creationId xmlns:a16="http://schemas.microsoft.com/office/drawing/2014/main" id="{480323FB-793C-98F4-B20A-BA59D48CCC79}"/>
+              </a:ext>
+            </a:extLst>
+          </p:cNvPr>
+          <p:cNvSpPr/>
+          <p:nvPr/>
+        </p:nvSpPr>
+        <p:spPr>
+          <a:xfrm>
+            <a:off x="5283679" y="1168879"/>
+            <a:ext cx="737560" cy="586596"/>
+          </a:xfrm>
+          <a:prstGeom prst="roundRect">
+            <a:avLst/>
+          </a:prstGeom>
+          <a:noFill/>
+          <a:ln w="28575">
+            <a:solidFill>
+              <a:schemeClr val="tx1"/>
+            </a:solidFill>
+            <a:prstDash val="solid"/>
+            <a:extLst>
+              <a:ext uri="{C807C97D-BFC1-408E-A445-0C87EB9F89A2}">
+                <ask:lineSketchStyleProps xmlns:ask="http://schemas.microsoft.com/office/drawing/2018/sketchyshapes" sd="1219033472">
+                  <a:custGeom>
+                    <a:avLst/>
+                    <a:gdLst>
+                      <a:gd name="csX0" fmla="*/ 0 w 737560"/>
+                      <a:gd name="csY0" fmla="*/ 97768 h 586596"/>
+                      <a:gd name="csX1" fmla="*/ 97768 w 737560"/>
+                      <a:gd name="csY1" fmla="*/ 0 h 586596"/>
+                      <a:gd name="csX2" fmla="*/ 639792 w 737560"/>
+                      <a:gd name="csY2" fmla="*/ 0 h 586596"/>
+                      <a:gd name="csX3" fmla="*/ 737560 w 737560"/>
+                      <a:gd name="csY3" fmla="*/ 97768 h 586596"/>
+                      <a:gd name="csX4" fmla="*/ 737560 w 737560"/>
+                      <a:gd name="csY4" fmla="*/ 488828 h 586596"/>
+                      <a:gd name="csX5" fmla="*/ 639792 w 737560"/>
+                      <a:gd name="csY5" fmla="*/ 586596 h 586596"/>
+                      <a:gd name="csX6" fmla="*/ 97768 w 737560"/>
+                      <a:gd name="csY6" fmla="*/ 586596 h 586596"/>
+                      <a:gd name="csX7" fmla="*/ 0 w 737560"/>
+                      <a:gd name="csY7" fmla="*/ 488828 h 586596"/>
+                      <a:gd name="csX8" fmla="*/ 0 w 737560"/>
+                      <a:gd name="csY8" fmla="*/ 97768 h 586596"/>
+                    </a:gdLst>
+                    <a:ahLst/>
+                    <a:cxnLst>
+                      <a:cxn ang="0">
+                        <a:pos x="csX0" y="csY0"/>
+                      </a:cxn>
+                      <a:cxn ang="0">
+                        <a:pos x="csX1" y="csY1"/>
+                      </a:cxn>
+                      <a:cxn ang="0">
+                        <a:pos x="csX2" y="csY2"/>
+                      </a:cxn>
+                      <a:cxn ang="0">
+                        <a:pos x="csX3" y="csY3"/>
+                      </a:cxn>
+                      <a:cxn ang="0">
+                        <a:pos x="csX4" y="csY4"/>
+                      </a:cxn>
+                      <a:cxn ang="0">
+                        <a:pos x="csX5" y="csY5"/>
+                      </a:cxn>
+                      <a:cxn ang="0">
+                        <a:pos x="csX6" y="csY6"/>
+                      </a:cxn>
+                      <a:cxn ang="0">
+                        <a:pos x="csX7" y="csY7"/>
+                      </a:cxn>
+                      <a:cxn ang="0">
+                        <a:pos x="csX8" y="csY8"/>
+                      </a:cxn>
+                    </a:cxnLst>
+                    <a:rect l="l" t="t" r="r" b="b"/>
+                    <a:pathLst>
+                      <a:path w="737560" h="586596" extrusionOk="0">
+                        <a:moveTo>
+                          <a:pt x="0" y="97768"/>
+                        </a:moveTo>
+                        <a:cubicBezTo>
+                          <a:pt x="-6431" y="39805"/>
+                          <a:pt x="33697" y="3781"/>
+                          <a:pt x="97768" y="0"/>
+                        </a:cubicBezTo>
+                        <a:cubicBezTo>
+                          <a:pt x="255097" y="-20758"/>
+                          <a:pt x="457435" y="-34569"/>
+                          <a:pt x="639792" y="0"/>
+                        </a:cubicBezTo>
+                        <a:cubicBezTo>
+                          <a:pt x="691126" y="2600"/>
+                          <a:pt x="736049" y="52125"/>
+                          <a:pt x="737560" y="97768"/>
+                        </a:cubicBezTo>
+                        <a:cubicBezTo>
+                          <a:pt x="711953" y="151225"/>
+                          <a:pt x="765743" y="336388"/>
+                          <a:pt x="737560" y="488828"/>
+                        </a:cubicBezTo>
+                        <a:cubicBezTo>
+                          <a:pt x="746763" y="543916"/>
+                          <a:pt x="697802" y="578334"/>
+                          <a:pt x="639792" y="586596"/>
+                        </a:cubicBezTo>
+                        <a:cubicBezTo>
+                          <a:pt x="566716" y="618226"/>
+                          <a:pt x="268905" y="572487"/>
+                          <a:pt x="97768" y="586596"/>
+                        </a:cubicBezTo>
+                        <a:cubicBezTo>
+                          <a:pt x="43026" y="579481"/>
+                          <a:pt x="-5993" y="551153"/>
+                          <a:pt x="0" y="488828"/>
+                        </a:cubicBezTo>
+                        <a:cubicBezTo>
+                          <a:pt x="33631" y="396284"/>
+                          <a:pt x="-14828" y="179198"/>
+                          <a:pt x="0" y="97768"/>
+                        </a:cubicBezTo>
+                        <a:close/>
+                      </a:path>
+                    </a:pathLst>
+                  </a:custGeom>
+                  <ask:type>
+                    <ask:lineSketchNone/>
+                  </ask:type>
+                </ask:lineSketchStyleProps>
+              </a:ext>
+            </a:extLst>
+          </a:ln>
+        </p:spPr>
+        <p:style>
+          <a:lnRef idx="2">
+            <a:schemeClr val="dk1">
+              <a:shade val="15000"/>
+            </a:schemeClr>
+          </a:lnRef>
+          <a:fillRef idx="1">
+            <a:schemeClr val="dk1"/>
+          </a:fillRef>
+          <a:effectRef idx="0">
+            <a:schemeClr val="dk1"/>
+          </a:effectRef>
+          <a:fontRef idx="minor">
+            <a:schemeClr val="lt1"/>
+          </a:fontRef>
+        </p:style>
+        <p:txBody>
+          <a:bodyPr rtlCol="0" anchor="ctr"/>
+          <a:lstStyle/>
+          <a:p>
+            <a:pPr algn="ctr"/>
+            <a:endParaRPr lang="en-IT"/>
+          </a:p>
+        </p:txBody>
+      </p:sp>
+      <p:sp>
+        <p:nvSpPr>
+          <p:cNvPr id="7" name="Rounded Rectangle 6">
+            <a:extLst>
+              <a:ext uri="{FF2B5EF4-FFF2-40B4-BE49-F238E27FC236}">
+                <a16:creationId xmlns:a16="http://schemas.microsoft.com/office/drawing/2014/main" id="{983D2C5C-CA8B-DA6C-2DB1-68C01AD6D0A6}"/>
+              </a:ext>
+            </a:extLst>
+          </p:cNvPr>
+          <p:cNvSpPr/>
+          <p:nvPr/>
+        </p:nvSpPr>
+        <p:spPr>
+          <a:xfrm>
+            <a:off x="5283679" y="1798680"/>
+            <a:ext cx="737560" cy="586596"/>
+          </a:xfrm>
+          <a:prstGeom prst="roundRect">
+            <a:avLst/>
+          </a:prstGeom>
+          <a:noFill/>
+          <a:ln w="28575">
+            <a:solidFill>
+              <a:schemeClr val="tx1"/>
+            </a:solidFill>
+            <a:prstDash val="solid"/>
+            <a:extLst>
+              <a:ext uri="{C807C97D-BFC1-408E-A445-0C87EB9F89A2}">
+                <ask:lineSketchStyleProps xmlns:ask="http://schemas.microsoft.com/office/drawing/2018/sketchyshapes" sd="1219033472">
+                  <a:custGeom>
+                    <a:avLst/>
+                    <a:gdLst>
+                      <a:gd name="csX0" fmla="*/ 0 w 737560"/>
+                      <a:gd name="csY0" fmla="*/ 97768 h 586596"/>
+                      <a:gd name="csX1" fmla="*/ 97768 w 737560"/>
+                      <a:gd name="csY1" fmla="*/ 0 h 586596"/>
+                      <a:gd name="csX2" fmla="*/ 639792 w 737560"/>
+                      <a:gd name="csY2" fmla="*/ 0 h 586596"/>
+                      <a:gd name="csX3" fmla="*/ 737560 w 737560"/>
+                      <a:gd name="csY3" fmla="*/ 97768 h 586596"/>
+                      <a:gd name="csX4" fmla="*/ 737560 w 737560"/>
+                      <a:gd name="csY4" fmla="*/ 488828 h 586596"/>
+                      <a:gd name="csX5" fmla="*/ 639792 w 737560"/>
+                      <a:gd name="csY5" fmla="*/ 586596 h 586596"/>
+                      <a:gd name="csX6" fmla="*/ 97768 w 737560"/>
+                      <a:gd name="csY6" fmla="*/ 586596 h 586596"/>
+                      <a:gd name="csX7" fmla="*/ 0 w 737560"/>
+                      <a:gd name="csY7" fmla="*/ 488828 h 586596"/>
+                      <a:gd name="csX8" fmla="*/ 0 w 737560"/>
+                      <a:gd name="csY8" fmla="*/ 97768 h 586596"/>
+                    </a:gdLst>
+                    <a:ahLst/>
+                    <a:cxnLst>
+                      <a:cxn ang="0">
+                        <a:pos x="csX0" y="csY0"/>
+                      </a:cxn>
+                      <a:cxn ang="0">
+                        <a:pos x="csX1" y="csY1"/>
+                      </a:cxn>
+                      <a:cxn ang="0">
+                        <a:pos x="csX2" y="csY2"/>
+                      </a:cxn>
+                      <a:cxn ang="0">
+                        <a:pos x="csX3" y="csY3"/>
+                      </a:cxn>
+                      <a:cxn ang="0">
+                        <a:pos x="csX4" y="csY4"/>
+                      </a:cxn>
+                      <a:cxn ang="0">
+                        <a:pos x="csX5" y="csY5"/>
+                      </a:cxn>
+                      <a:cxn ang="0">
+                        <a:pos x="csX6" y="csY6"/>
+                      </a:cxn>
+                      <a:cxn ang="0">
+                        <a:pos x="csX7" y="csY7"/>
+                      </a:cxn>
+                      <a:cxn ang="0">
+                        <a:pos x="csX8" y="csY8"/>
+                      </a:cxn>
+                    </a:cxnLst>
+                    <a:rect l="l" t="t" r="r" b="b"/>
+                    <a:pathLst>
+                      <a:path w="737560" h="586596" extrusionOk="0">
+                        <a:moveTo>
+                          <a:pt x="0" y="97768"/>
+                        </a:moveTo>
+                        <a:cubicBezTo>
+                          <a:pt x="-6431" y="39805"/>
+                          <a:pt x="33697" y="3781"/>
+                          <a:pt x="97768" y="0"/>
+                        </a:cubicBezTo>
+                        <a:cubicBezTo>
+                          <a:pt x="255097" y="-20758"/>
+                          <a:pt x="457435" y="-34569"/>
+                          <a:pt x="639792" y="0"/>
+                        </a:cubicBezTo>
+                        <a:cubicBezTo>
+                          <a:pt x="691126" y="2600"/>
+                          <a:pt x="736049" y="52125"/>
+                          <a:pt x="737560" y="97768"/>
+                        </a:cubicBezTo>
+                        <a:cubicBezTo>
+                          <a:pt x="711953" y="151225"/>
+                          <a:pt x="765743" y="336388"/>
+                          <a:pt x="737560" y="488828"/>
+                        </a:cubicBezTo>
+                        <a:cubicBezTo>
+                          <a:pt x="746763" y="543916"/>
+                          <a:pt x="697802" y="578334"/>
+                          <a:pt x="639792" y="586596"/>
+                        </a:cubicBezTo>
+                        <a:cubicBezTo>
+                          <a:pt x="566716" y="618226"/>
+                          <a:pt x="268905" y="572487"/>
+                          <a:pt x="97768" y="586596"/>
+                        </a:cubicBezTo>
+                        <a:cubicBezTo>
+                          <a:pt x="43026" y="579481"/>
+                          <a:pt x="-5993" y="551153"/>
+                          <a:pt x="0" y="488828"/>
+                        </a:cubicBezTo>
+                        <a:cubicBezTo>
+                          <a:pt x="33631" y="396284"/>
+                          <a:pt x="-14828" y="179198"/>
+                          <a:pt x="0" y="97768"/>
+                        </a:cubicBezTo>
+                        <a:close/>
+                      </a:path>
+                    </a:pathLst>
+                  </a:custGeom>
+                  <ask:type>
+                    <ask:lineSketchNone/>
+                  </ask:type>
+                </ask:lineSketchStyleProps>
+              </a:ext>
+            </a:extLst>
+          </a:ln>
+        </p:spPr>
+        <p:style>
+          <a:lnRef idx="2">
+            <a:schemeClr val="dk1">
+              <a:shade val="15000"/>
+            </a:schemeClr>
+          </a:lnRef>
+          <a:fillRef idx="1">
+            <a:schemeClr val="dk1"/>
+          </a:fillRef>
+          <a:effectRef idx="0">
+            <a:schemeClr val="dk1"/>
+          </a:effectRef>
+          <a:fontRef idx="minor">
+            <a:schemeClr val="lt1"/>
+          </a:fontRef>
+        </p:style>
+        <p:txBody>
+          <a:bodyPr rtlCol="0" anchor="ctr"/>
+          <a:lstStyle/>
+          <a:p>
+            <a:pPr algn="ctr"/>
+            <a:endParaRPr lang="en-IT"/>
+          </a:p>
+        </p:txBody>
+      </p:sp>
+      <p:sp>
+        <p:nvSpPr>
+          <p:cNvPr id="8" name="Rounded Rectangle 7">
+            <a:extLst>
+              <a:ext uri="{FF2B5EF4-FFF2-40B4-BE49-F238E27FC236}">
+                <a16:creationId xmlns:a16="http://schemas.microsoft.com/office/drawing/2014/main" id="{66804E21-7EDE-3EDD-D4D6-EEE98F6761EB}"/>
+              </a:ext>
+            </a:extLst>
+          </p:cNvPr>
+          <p:cNvSpPr/>
+          <p:nvPr/>
+        </p:nvSpPr>
+        <p:spPr>
+          <a:xfrm>
+            <a:off x="5283679" y="2424850"/>
+            <a:ext cx="737560" cy="586596"/>
+          </a:xfrm>
+          <a:prstGeom prst="roundRect">
+            <a:avLst/>
+          </a:prstGeom>
+          <a:noFill/>
+          <a:ln w="28575">
+            <a:solidFill>
+              <a:schemeClr val="tx1"/>
+            </a:solidFill>
+            <a:prstDash val="solid"/>
+            <a:extLst>
+              <a:ext uri="{C807C97D-BFC1-408E-A445-0C87EB9F89A2}">
+                <ask:lineSketchStyleProps xmlns:ask="http://schemas.microsoft.com/office/drawing/2018/sketchyshapes" sd="1219033472">
+                  <a:custGeom>
+                    <a:avLst/>
+                    <a:gdLst>
+                      <a:gd name="csX0" fmla="*/ 0 w 737560"/>
+                      <a:gd name="csY0" fmla="*/ 97768 h 586596"/>
+                      <a:gd name="csX1" fmla="*/ 97768 w 737560"/>
+                      <a:gd name="csY1" fmla="*/ 0 h 586596"/>
+                      <a:gd name="csX2" fmla="*/ 639792 w 737560"/>
+                      <a:gd name="csY2" fmla="*/ 0 h 586596"/>
+                      <a:gd name="csX3" fmla="*/ 737560 w 737560"/>
+                      <a:gd name="csY3" fmla="*/ 97768 h 586596"/>
+                      <a:gd name="csX4" fmla="*/ 737560 w 737560"/>
+                      <a:gd name="csY4" fmla="*/ 488828 h 586596"/>
+                      <a:gd name="csX5" fmla="*/ 639792 w 737560"/>
+                      <a:gd name="csY5" fmla="*/ 586596 h 586596"/>
+                      <a:gd name="csX6" fmla="*/ 97768 w 737560"/>
+                      <a:gd name="csY6" fmla="*/ 586596 h 586596"/>
+                      <a:gd name="csX7" fmla="*/ 0 w 737560"/>
+                      <a:gd name="csY7" fmla="*/ 488828 h 586596"/>
+                      <a:gd name="csX8" fmla="*/ 0 w 737560"/>
+                      <a:gd name="csY8" fmla="*/ 97768 h 586596"/>
+                    </a:gdLst>
+                    <a:ahLst/>
+                    <a:cxnLst>
+                      <a:cxn ang="0">
+                        <a:pos x="csX0" y="csY0"/>
+                      </a:cxn>
+                      <a:cxn ang="0">
+                        <a:pos x="csX1" y="csY1"/>
+                      </a:cxn>
+                      <a:cxn ang="0">
+                        <a:pos x="csX2" y="csY2"/>
+                      </a:cxn>
+                      <a:cxn ang="0">
+                        <a:pos x="csX3" y="csY3"/>
+                      </a:cxn>
+                      <a:cxn ang="0">
+                        <a:pos x="csX4" y="csY4"/>
+                      </a:cxn>
+                      <a:cxn ang="0">
+                        <a:pos x="csX5" y="csY5"/>
+                      </a:cxn>
+                      <a:cxn ang="0">
+                        <a:pos x="csX6" y="csY6"/>
+                      </a:cxn>
+                      <a:cxn ang="0">
+                        <a:pos x="csX7" y="csY7"/>
+                      </a:cxn>
+                      <a:cxn ang="0">
+                        <a:pos x="csX8" y="csY8"/>
+                      </a:cxn>
+                    </a:cxnLst>
+                    <a:rect l="l" t="t" r="r" b="b"/>
+                    <a:pathLst>
+                      <a:path w="737560" h="586596" extrusionOk="0">
+                        <a:moveTo>
+                          <a:pt x="0" y="97768"/>
+                        </a:moveTo>
+                        <a:cubicBezTo>
+                          <a:pt x="-6431" y="39805"/>
+                          <a:pt x="33697" y="3781"/>
+                          <a:pt x="97768" y="0"/>
+                        </a:cubicBezTo>
+                        <a:cubicBezTo>
+                          <a:pt x="255097" y="-20758"/>
+                          <a:pt x="457435" y="-34569"/>
+                          <a:pt x="639792" y="0"/>
+                        </a:cubicBezTo>
+                        <a:cubicBezTo>
+                          <a:pt x="691126" y="2600"/>
+                          <a:pt x="736049" y="52125"/>
+                          <a:pt x="737560" y="97768"/>
+                        </a:cubicBezTo>
+                        <a:cubicBezTo>
+                          <a:pt x="711953" y="151225"/>
+                          <a:pt x="765743" y="336388"/>
+                          <a:pt x="737560" y="488828"/>
+                        </a:cubicBezTo>
+                        <a:cubicBezTo>
+                          <a:pt x="746763" y="543916"/>
+                          <a:pt x="697802" y="578334"/>
+                          <a:pt x="639792" y="586596"/>
+                        </a:cubicBezTo>
+                        <a:cubicBezTo>
+                          <a:pt x="566716" y="618226"/>
+                          <a:pt x="268905" y="572487"/>
+                          <a:pt x="97768" y="586596"/>
+                        </a:cubicBezTo>
+                        <a:cubicBezTo>
+                          <a:pt x="43026" y="579481"/>
+                          <a:pt x="-5993" y="551153"/>
+                          <a:pt x="0" y="488828"/>
+                        </a:cubicBezTo>
+                        <a:cubicBezTo>
+                          <a:pt x="33631" y="396284"/>
+                          <a:pt x="-14828" y="179198"/>
+                          <a:pt x="0" y="97768"/>
+                        </a:cubicBezTo>
+                        <a:close/>
+                      </a:path>
+                    </a:pathLst>
+                  </a:custGeom>
+                  <ask:type>
+                    <ask:lineSketchNone/>
+                  </ask:type>
+                </ask:lineSketchStyleProps>
+              </a:ext>
+            </a:extLst>
+          </a:ln>
+        </p:spPr>
+        <p:style>
+          <a:lnRef idx="2">
+            <a:schemeClr val="dk1">
+              <a:shade val="15000"/>
+            </a:schemeClr>
+          </a:lnRef>
+          <a:fillRef idx="1">
+            <a:schemeClr val="dk1"/>
+          </a:fillRef>
+          <a:effectRef idx="0">
+            <a:schemeClr val="dk1"/>
+          </a:effectRef>
+          <a:fontRef idx="minor">
+            <a:schemeClr val="lt1"/>
+          </a:fontRef>
+        </p:style>
+        <p:txBody>
+          <a:bodyPr rtlCol="0" anchor="ctr"/>
+          <a:lstStyle/>
+          <a:p>
+            <a:pPr algn="ctr"/>
+            <a:endParaRPr lang="en-IT" dirty="0"/>
+          </a:p>
+        </p:txBody>
+      </p:sp>
+      <p:sp>
+        <p:nvSpPr>
+          <p:cNvPr id="9" name="Rounded Rectangle 8">
+            <a:extLst>
+              <a:ext uri="{FF2B5EF4-FFF2-40B4-BE49-F238E27FC236}">
+                <a16:creationId xmlns:a16="http://schemas.microsoft.com/office/drawing/2014/main" id="{310BDD20-8810-8893-53B5-6848D3FC7489}"/>
+              </a:ext>
+            </a:extLst>
+          </p:cNvPr>
+          <p:cNvSpPr/>
+          <p:nvPr/>
+        </p:nvSpPr>
+        <p:spPr>
+          <a:xfrm>
+            <a:off x="2831026" y="2918107"/>
+            <a:ext cx="737560" cy="586596"/>
+          </a:xfrm>
+          <a:prstGeom prst="roundRect">
+            <a:avLst/>
+          </a:prstGeom>
+          <a:noFill/>
+          <a:ln w="28575">
+            <a:solidFill>
+              <a:schemeClr val="tx1"/>
+            </a:solidFill>
+            <a:prstDash val="solid"/>
+            <a:extLst>
+              <a:ext uri="{C807C97D-BFC1-408E-A445-0C87EB9F89A2}">
+                <ask:lineSketchStyleProps xmlns:ask="http://schemas.microsoft.com/office/drawing/2018/sketchyshapes" sd="1219033472">
+                  <a:custGeom>
+                    <a:avLst/>
+                    <a:gdLst>
+                      <a:gd name="csX0" fmla="*/ 0 w 737560"/>
+                      <a:gd name="csY0" fmla="*/ 97768 h 586596"/>
+                      <a:gd name="csX1" fmla="*/ 97768 w 737560"/>
+                      <a:gd name="csY1" fmla="*/ 0 h 586596"/>
+                      <a:gd name="csX2" fmla="*/ 639792 w 737560"/>
+                      <a:gd name="csY2" fmla="*/ 0 h 586596"/>
+                      <a:gd name="csX3" fmla="*/ 737560 w 737560"/>
+                      <a:gd name="csY3" fmla="*/ 97768 h 586596"/>
+                      <a:gd name="csX4" fmla="*/ 737560 w 737560"/>
+                      <a:gd name="csY4" fmla="*/ 488828 h 586596"/>
+                      <a:gd name="csX5" fmla="*/ 639792 w 737560"/>
+                      <a:gd name="csY5" fmla="*/ 586596 h 586596"/>
+                      <a:gd name="csX6" fmla="*/ 97768 w 737560"/>
+                      <a:gd name="csY6" fmla="*/ 586596 h 586596"/>
+                      <a:gd name="csX7" fmla="*/ 0 w 737560"/>
+                      <a:gd name="csY7" fmla="*/ 488828 h 586596"/>
+                      <a:gd name="csX8" fmla="*/ 0 w 737560"/>
+                      <a:gd name="csY8" fmla="*/ 97768 h 586596"/>
+                    </a:gdLst>
+                    <a:ahLst/>
+                    <a:cxnLst>
+                      <a:cxn ang="0">
+                        <a:pos x="csX0" y="csY0"/>
+                      </a:cxn>
+                      <a:cxn ang="0">
+                        <a:pos x="csX1" y="csY1"/>
+                      </a:cxn>
+                      <a:cxn ang="0">
+                        <a:pos x="csX2" y="csY2"/>
+                      </a:cxn>
+                      <a:cxn ang="0">
+                        <a:pos x="csX3" y="csY3"/>
+                      </a:cxn>
+                      <a:cxn ang="0">
+                        <a:pos x="csX4" y="csY4"/>
+                      </a:cxn>
+                      <a:cxn ang="0">
+                        <a:pos x="csX5" y="csY5"/>
+                      </a:cxn>
+                      <a:cxn ang="0">
+                        <a:pos x="csX6" y="csY6"/>
+                      </a:cxn>
+                      <a:cxn ang="0">
+                        <a:pos x="csX7" y="csY7"/>
+                      </a:cxn>
+                      <a:cxn ang="0">
+                        <a:pos x="csX8" y="csY8"/>
+                      </a:cxn>
+                    </a:cxnLst>
+                    <a:rect l="l" t="t" r="r" b="b"/>
+                    <a:pathLst>
+                      <a:path w="737560" h="586596" extrusionOk="0">
+                        <a:moveTo>
+                          <a:pt x="0" y="97768"/>
+                        </a:moveTo>
+                        <a:cubicBezTo>
+                          <a:pt x="-6431" y="39805"/>
+                          <a:pt x="33697" y="3781"/>
+                          <a:pt x="97768" y="0"/>
+                        </a:cubicBezTo>
+                        <a:cubicBezTo>
+                          <a:pt x="255097" y="-20758"/>
+                          <a:pt x="457435" y="-34569"/>
+                          <a:pt x="639792" y="0"/>
+                        </a:cubicBezTo>
+                        <a:cubicBezTo>
+                          <a:pt x="691126" y="2600"/>
+                          <a:pt x="736049" y="52125"/>
+                          <a:pt x="737560" y="97768"/>
+                        </a:cubicBezTo>
+                        <a:cubicBezTo>
+                          <a:pt x="711953" y="151225"/>
+                          <a:pt x="765743" y="336388"/>
+                          <a:pt x="737560" y="488828"/>
+                        </a:cubicBezTo>
+                        <a:cubicBezTo>
+                          <a:pt x="746763" y="543916"/>
+                          <a:pt x="697802" y="578334"/>
+                          <a:pt x="639792" y="586596"/>
+                        </a:cubicBezTo>
+                        <a:cubicBezTo>
+                          <a:pt x="566716" y="618226"/>
+                          <a:pt x="268905" y="572487"/>
+                          <a:pt x="97768" y="586596"/>
+                        </a:cubicBezTo>
+                        <a:cubicBezTo>
+                          <a:pt x="43026" y="579481"/>
+                          <a:pt x="-5993" y="551153"/>
+                          <a:pt x="0" y="488828"/>
+                        </a:cubicBezTo>
+                        <a:cubicBezTo>
+                          <a:pt x="33631" y="396284"/>
+                          <a:pt x="-14828" y="179198"/>
+                          <a:pt x="0" y="97768"/>
+                        </a:cubicBezTo>
+                        <a:close/>
+                      </a:path>
+                    </a:pathLst>
+                  </a:custGeom>
+                  <ask:type>
+                    <ask:lineSketchNone/>
+                  </ask:type>
+                </ask:lineSketchStyleProps>
+              </a:ext>
+            </a:extLst>
+          </a:ln>
+        </p:spPr>
+        <p:style>
+          <a:lnRef idx="2">
+            <a:schemeClr val="dk1">
+              <a:shade val="15000"/>
+            </a:schemeClr>
+          </a:lnRef>
+          <a:fillRef idx="1">
+            <a:schemeClr val="dk1"/>
+          </a:fillRef>
+          <a:effectRef idx="0">
+            <a:schemeClr val="dk1"/>
+          </a:effectRef>
+          <a:fontRef idx="minor">
+            <a:schemeClr val="lt1"/>
+          </a:fontRef>
+        </p:style>
+        <p:txBody>
+          <a:bodyPr rtlCol="0" anchor="ctr"/>
+          <a:lstStyle/>
+          <a:p>
+            <a:pPr algn="ctr"/>
+            <a:endParaRPr lang="en-IT"/>
+          </a:p>
+        </p:txBody>
+      </p:sp>
+      <p:sp>
+        <p:nvSpPr>
+          <p:cNvPr id="12" name="Rounded Rectangle 11">
+            <a:extLst>
+              <a:ext uri="{FF2B5EF4-FFF2-40B4-BE49-F238E27FC236}">
+                <a16:creationId xmlns:a16="http://schemas.microsoft.com/office/drawing/2014/main" id="{32BBDE86-5A17-9DFF-467A-3B56C0611CDE}"/>
+              </a:ext>
+            </a:extLst>
+          </p:cNvPr>
+          <p:cNvSpPr/>
+          <p:nvPr/>
+        </p:nvSpPr>
+        <p:spPr>
+          <a:xfrm>
+            <a:off x="298108" y="1597593"/>
+            <a:ext cx="984682" cy="882470"/>
+          </a:xfrm>
+          <a:prstGeom prst="roundRect">
+            <a:avLst/>
+          </a:prstGeom>
+          <a:noFill/>
+          <a:ln w="28575">
+            <a:solidFill>
+              <a:schemeClr val="tx1"/>
+            </a:solidFill>
+            <a:prstDash val="solid"/>
+            <a:extLst>
+              <a:ext uri="{C807C97D-BFC1-408E-A445-0C87EB9F89A2}">
+                <ask:lineSketchStyleProps xmlns:ask="http://schemas.microsoft.com/office/drawing/2018/sketchyshapes" sd="1219033472">
+                  <a:custGeom>
+                    <a:avLst/>
+                    <a:gdLst>
+                      <a:gd name="csX0" fmla="*/ 0 w 737560"/>
+                      <a:gd name="csY0" fmla="*/ 97768 h 586596"/>
+                      <a:gd name="csX1" fmla="*/ 97768 w 737560"/>
+                      <a:gd name="csY1" fmla="*/ 0 h 586596"/>
+                      <a:gd name="csX2" fmla="*/ 639792 w 737560"/>
+                      <a:gd name="csY2" fmla="*/ 0 h 586596"/>
+                      <a:gd name="csX3" fmla="*/ 737560 w 737560"/>
+                      <a:gd name="csY3" fmla="*/ 97768 h 586596"/>
+                      <a:gd name="csX4" fmla="*/ 737560 w 737560"/>
+                      <a:gd name="csY4" fmla="*/ 488828 h 586596"/>
+                      <a:gd name="csX5" fmla="*/ 639792 w 737560"/>
+                      <a:gd name="csY5" fmla="*/ 586596 h 586596"/>
+                      <a:gd name="csX6" fmla="*/ 97768 w 737560"/>
+                      <a:gd name="csY6" fmla="*/ 586596 h 586596"/>
+                      <a:gd name="csX7" fmla="*/ 0 w 737560"/>
+                      <a:gd name="csY7" fmla="*/ 488828 h 586596"/>
+                      <a:gd name="csX8" fmla="*/ 0 w 737560"/>
+                      <a:gd name="csY8" fmla="*/ 97768 h 586596"/>
+                    </a:gdLst>
+                    <a:ahLst/>
+                    <a:cxnLst>
+                      <a:cxn ang="0">
+                        <a:pos x="csX0" y="csY0"/>
+                      </a:cxn>
+                      <a:cxn ang="0">
+                        <a:pos x="csX1" y="csY1"/>
+                      </a:cxn>
+                      <a:cxn ang="0">
+                        <a:pos x="csX2" y="csY2"/>
+                      </a:cxn>
+                      <a:cxn ang="0">
+                        <a:pos x="csX3" y="csY3"/>
+                      </a:cxn>
+                      <a:cxn ang="0">
+                        <a:pos x="csX4" y="csY4"/>
+                      </a:cxn>
+                      <a:cxn ang="0">
+                        <a:pos x="csX5" y="csY5"/>
+                      </a:cxn>
+                      <a:cxn ang="0">
+                        <a:pos x="csX6" y="csY6"/>
+                      </a:cxn>
+                      <a:cxn ang="0">
+                        <a:pos x="csX7" y="csY7"/>
+                      </a:cxn>
+                      <a:cxn ang="0">
+                        <a:pos x="csX8" y="csY8"/>
+                      </a:cxn>
+                    </a:cxnLst>
+                    <a:rect l="l" t="t" r="r" b="b"/>
+                    <a:pathLst>
+                      <a:path w="737560" h="586596" extrusionOk="0">
+                        <a:moveTo>
+                          <a:pt x="0" y="97768"/>
+                        </a:moveTo>
+                        <a:cubicBezTo>
+                          <a:pt x="-6431" y="39805"/>
+                          <a:pt x="33697" y="3781"/>
+                          <a:pt x="97768" y="0"/>
+                        </a:cubicBezTo>
+                        <a:cubicBezTo>
+                          <a:pt x="255097" y="-20758"/>
+                          <a:pt x="457435" y="-34569"/>
+                          <a:pt x="639792" y="0"/>
+                        </a:cubicBezTo>
+                        <a:cubicBezTo>
+                          <a:pt x="691126" y="2600"/>
+                          <a:pt x="736049" y="52125"/>
+                          <a:pt x="737560" y="97768"/>
+                        </a:cubicBezTo>
+                        <a:cubicBezTo>
+                          <a:pt x="711953" y="151225"/>
+                          <a:pt x="765743" y="336388"/>
+                          <a:pt x="737560" y="488828"/>
+                        </a:cubicBezTo>
+                        <a:cubicBezTo>
+                          <a:pt x="746763" y="543916"/>
+                          <a:pt x="697802" y="578334"/>
+                          <a:pt x="639792" y="586596"/>
+                        </a:cubicBezTo>
+                        <a:cubicBezTo>
+                          <a:pt x="566716" y="618226"/>
+                          <a:pt x="268905" y="572487"/>
+                          <a:pt x="97768" y="586596"/>
+                        </a:cubicBezTo>
+                        <a:cubicBezTo>
+                          <a:pt x="43026" y="579481"/>
+                          <a:pt x="-5993" y="551153"/>
+                          <a:pt x="0" y="488828"/>
+                        </a:cubicBezTo>
+                        <a:cubicBezTo>
+                          <a:pt x="33631" y="396284"/>
+                          <a:pt x="-14828" y="179198"/>
+                          <a:pt x="0" y="97768"/>
+                        </a:cubicBezTo>
+                        <a:close/>
+                      </a:path>
+                    </a:pathLst>
+                  </a:custGeom>
+                  <ask:type>
+                    <ask:lineSketchNone/>
+                  </ask:type>
+                </ask:lineSketchStyleProps>
+              </a:ext>
+            </a:extLst>
+          </a:ln>
+        </p:spPr>
+        <p:style>
+          <a:lnRef idx="2">
+            <a:schemeClr val="dk1">
+              <a:shade val="15000"/>
+            </a:schemeClr>
+          </a:lnRef>
+          <a:fillRef idx="1">
+            <a:schemeClr val="dk1"/>
+          </a:fillRef>
+          <a:effectRef idx="0">
+            <a:schemeClr val="dk1"/>
+          </a:effectRef>
+          <a:fontRef idx="minor">
+            <a:schemeClr val="lt1"/>
+          </a:fontRef>
+        </p:style>
+        <p:txBody>
+          <a:bodyPr rtlCol="0" anchor="ctr"/>
+          <a:lstStyle/>
+          <a:p>
+            <a:pPr algn="ctr"/>
+            <a:endParaRPr lang="en-IT"/>
+          </a:p>
+        </p:txBody>
+      </p:sp>
+      <p:sp>
+        <p:nvSpPr>
+          <p:cNvPr id="13" name="Rounded Rectangle 12">
+            <a:extLst>
+              <a:ext uri="{FF2B5EF4-FFF2-40B4-BE49-F238E27FC236}">
+                <a16:creationId xmlns:a16="http://schemas.microsoft.com/office/drawing/2014/main" id="{E63E1EFB-E612-5761-2962-AE40C8F2E539}"/>
+              </a:ext>
+            </a:extLst>
+          </p:cNvPr>
+          <p:cNvSpPr/>
+          <p:nvPr/>
+        </p:nvSpPr>
+        <p:spPr>
+          <a:xfrm>
+            <a:off x="2215124" y="1523518"/>
+            <a:ext cx="1764818" cy="1048231"/>
+          </a:xfrm>
+          <a:prstGeom prst="roundRect">
+            <a:avLst/>
+          </a:prstGeom>
+          <a:noFill/>
+          <a:ln w="28575">
+            <a:solidFill>
+              <a:schemeClr val="tx1"/>
+            </a:solidFill>
+            <a:prstDash val="solid"/>
+            <a:extLst>
+              <a:ext uri="{C807C97D-BFC1-408E-A445-0C87EB9F89A2}">
+                <ask:lineSketchStyleProps xmlns:ask="http://schemas.microsoft.com/office/drawing/2018/sketchyshapes" sd="1219033472">
+                  <a:custGeom>
+                    <a:avLst/>
+                    <a:gdLst>
+                      <a:gd name="csX0" fmla="*/ 0 w 737560"/>
+                      <a:gd name="csY0" fmla="*/ 97768 h 586596"/>
+                      <a:gd name="csX1" fmla="*/ 97768 w 737560"/>
+                      <a:gd name="csY1" fmla="*/ 0 h 586596"/>
+                      <a:gd name="csX2" fmla="*/ 639792 w 737560"/>
+                      <a:gd name="csY2" fmla="*/ 0 h 586596"/>
+                      <a:gd name="csX3" fmla="*/ 737560 w 737560"/>
+                      <a:gd name="csY3" fmla="*/ 97768 h 586596"/>
+                      <a:gd name="csX4" fmla="*/ 737560 w 737560"/>
+                      <a:gd name="csY4" fmla="*/ 488828 h 586596"/>
+                      <a:gd name="csX5" fmla="*/ 639792 w 737560"/>
+                      <a:gd name="csY5" fmla="*/ 586596 h 586596"/>
+                      <a:gd name="csX6" fmla="*/ 97768 w 737560"/>
+                      <a:gd name="csY6" fmla="*/ 586596 h 586596"/>
+                      <a:gd name="csX7" fmla="*/ 0 w 737560"/>
+                      <a:gd name="csY7" fmla="*/ 488828 h 586596"/>
+                      <a:gd name="csX8" fmla="*/ 0 w 737560"/>
+                      <a:gd name="csY8" fmla="*/ 97768 h 586596"/>
+                    </a:gdLst>
+                    <a:ahLst/>
+                    <a:cxnLst>
+                      <a:cxn ang="0">
+                        <a:pos x="csX0" y="csY0"/>
+                      </a:cxn>
+                      <a:cxn ang="0">
+                        <a:pos x="csX1" y="csY1"/>
+                      </a:cxn>
+                      <a:cxn ang="0">
+                        <a:pos x="csX2" y="csY2"/>
+                      </a:cxn>
+                      <a:cxn ang="0">
+                        <a:pos x="csX3" y="csY3"/>
+                      </a:cxn>
+                      <a:cxn ang="0">
+                        <a:pos x="csX4" y="csY4"/>
+                      </a:cxn>
+                      <a:cxn ang="0">
+                        <a:pos x="csX5" y="csY5"/>
+                      </a:cxn>
+                      <a:cxn ang="0">
+                        <a:pos x="csX6" y="csY6"/>
+                      </a:cxn>
+                      <a:cxn ang="0">
+                        <a:pos x="csX7" y="csY7"/>
+                      </a:cxn>
+                      <a:cxn ang="0">
+                        <a:pos x="csX8" y="csY8"/>
+                      </a:cxn>
+                    </a:cxnLst>
+                    <a:rect l="l" t="t" r="r" b="b"/>
+                    <a:pathLst>
+                      <a:path w="737560" h="586596" extrusionOk="0">
+                        <a:moveTo>
+                          <a:pt x="0" y="97768"/>
+                        </a:moveTo>
+                        <a:cubicBezTo>
+                          <a:pt x="-6431" y="39805"/>
+                          <a:pt x="33697" y="3781"/>
+                          <a:pt x="97768" y="0"/>
+                        </a:cubicBezTo>
+                        <a:cubicBezTo>
+                          <a:pt x="255097" y="-20758"/>
+                          <a:pt x="457435" y="-34569"/>
+                          <a:pt x="639792" y="0"/>
+                        </a:cubicBezTo>
+                        <a:cubicBezTo>
+                          <a:pt x="691126" y="2600"/>
+                          <a:pt x="736049" y="52125"/>
+                          <a:pt x="737560" y="97768"/>
+                        </a:cubicBezTo>
+                        <a:cubicBezTo>
+                          <a:pt x="711953" y="151225"/>
+                          <a:pt x="765743" y="336388"/>
+                          <a:pt x="737560" y="488828"/>
+                        </a:cubicBezTo>
+                        <a:cubicBezTo>
+                          <a:pt x="746763" y="543916"/>
+                          <a:pt x="697802" y="578334"/>
+                          <a:pt x="639792" y="586596"/>
+                        </a:cubicBezTo>
+                        <a:cubicBezTo>
+                          <a:pt x="566716" y="618226"/>
+                          <a:pt x="268905" y="572487"/>
+                          <a:pt x="97768" y="586596"/>
+                        </a:cubicBezTo>
+                        <a:cubicBezTo>
+                          <a:pt x="43026" y="579481"/>
+                          <a:pt x="-5993" y="551153"/>
+                          <a:pt x="0" y="488828"/>
+                        </a:cubicBezTo>
+                        <a:cubicBezTo>
+                          <a:pt x="33631" y="396284"/>
+                          <a:pt x="-14828" y="179198"/>
+                          <a:pt x="0" y="97768"/>
+                        </a:cubicBezTo>
+                        <a:close/>
+                      </a:path>
+                    </a:pathLst>
+                  </a:custGeom>
+                  <ask:type>
+                    <ask:lineSketchNone/>
+                  </ask:type>
+                </ask:lineSketchStyleProps>
+              </a:ext>
+            </a:extLst>
+          </a:ln>
+        </p:spPr>
+        <p:style>
+          <a:lnRef idx="2">
+            <a:schemeClr val="dk1">
+              <a:shade val="15000"/>
+            </a:schemeClr>
+          </a:lnRef>
+          <a:fillRef idx="1">
+            <a:schemeClr val="dk1"/>
+          </a:fillRef>
+          <a:effectRef idx="0">
+            <a:schemeClr val="dk1"/>
+          </a:effectRef>
+          <a:fontRef idx="minor">
+            <a:schemeClr val="lt1"/>
+          </a:fontRef>
+        </p:style>
+        <p:txBody>
+          <a:bodyPr rtlCol="0" anchor="ctr"/>
+          <a:lstStyle/>
+          <a:p>
+            <a:pPr algn="ctr"/>
+            <a:endParaRPr lang="en-IT"/>
+          </a:p>
+        </p:txBody>
+      </p:sp>
+      <p:sp>
+        <p:nvSpPr>
+          <p:cNvPr id="14" name="Rounded Rectangle 13">
+            <a:extLst>
+              <a:ext uri="{FF2B5EF4-FFF2-40B4-BE49-F238E27FC236}">
+                <a16:creationId xmlns:a16="http://schemas.microsoft.com/office/drawing/2014/main" id="{9A345A44-2146-9D94-D9B2-0DE437E991AC}"/>
+              </a:ext>
+            </a:extLst>
+          </p:cNvPr>
+          <p:cNvSpPr/>
+          <p:nvPr/>
+        </p:nvSpPr>
+        <p:spPr>
+          <a:xfrm>
+            <a:off x="6644200" y="1137937"/>
+            <a:ext cx="1217009" cy="2644653"/>
+          </a:xfrm>
+          <a:prstGeom prst="roundRect">
+            <a:avLst/>
+          </a:prstGeom>
+          <a:noFill/>
+          <a:ln w="28575">
+            <a:solidFill>
+              <a:schemeClr val="tx1"/>
+            </a:solidFill>
+            <a:prstDash val="solid"/>
+            <a:extLst>
+              <a:ext uri="{C807C97D-BFC1-408E-A445-0C87EB9F89A2}">
+                <ask:lineSketchStyleProps xmlns:ask="http://schemas.microsoft.com/office/drawing/2018/sketchyshapes" sd="1219033472">
+                  <a:custGeom>
+                    <a:avLst/>
+                    <a:gdLst>
+                      <a:gd name="csX0" fmla="*/ 0 w 737560"/>
+                      <a:gd name="csY0" fmla="*/ 97768 h 586596"/>
+                      <a:gd name="csX1" fmla="*/ 97768 w 737560"/>
+                      <a:gd name="csY1" fmla="*/ 0 h 586596"/>
+                      <a:gd name="csX2" fmla="*/ 639792 w 737560"/>
+                      <a:gd name="csY2" fmla="*/ 0 h 586596"/>
+                      <a:gd name="csX3" fmla="*/ 737560 w 737560"/>
+                      <a:gd name="csY3" fmla="*/ 97768 h 586596"/>
+                      <a:gd name="csX4" fmla="*/ 737560 w 737560"/>
+                      <a:gd name="csY4" fmla="*/ 488828 h 586596"/>
+                      <a:gd name="csX5" fmla="*/ 639792 w 737560"/>
+                      <a:gd name="csY5" fmla="*/ 586596 h 586596"/>
+                      <a:gd name="csX6" fmla="*/ 97768 w 737560"/>
+                      <a:gd name="csY6" fmla="*/ 586596 h 586596"/>
+                      <a:gd name="csX7" fmla="*/ 0 w 737560"/>
+                      <a:gd name="csY7" fmla="*/ 488828 h 586596"/>
+                      <a:gd name="csX8" fmla="*/ 0 w 737560"/>
+                      <a:gd name="csY8" fmla="*/ 97768 h 586596"/>
+                    </a:gdLst>
+                    <a:ahLst/>
+                    <a:cxnLst>
+                      <a:cxn ang="0">
+                        <a:pos x="csX0" y="csY0"/>
+                      </a:cxn>
+                      <a:cxn ang="0">
+                        <a:pos x="csX1" y="csY1"/>
+                      </a:cxn>
+                      <a:cxn ang="0">
+                        <a:pos x="csX2" y="csY2"/>
+                      </a:cxn>
+                      <a:cxn ang="0">
+                        <a:pos x="csX3" y="csY3"/>
+                      </a:cxn>
+                      <a:cxn ang="0">
+                        <a:pos x="csX4" y="csY4"/>
+                      </a:cxn>
+                      <a:cxn ang="0">
+                        <a:pos x="csX5" y="csY5"/>
+                      </a:cxn>
+                      <a:cxn ang="0">
+                        <a:pos x="csX6" y="csY6"/>
+                      </a:cxn>
+                      <a:cxn ang="0">
+                        <a:pos x="csX7" y="csY7"/>
+                      </a:cxn>
+                      <a:cxn ang="0">
+                        <a:pos x="csX8" y="csY8"/>
+                      </a:cxn>
+                    </a:cxnLst>
+                    <a:rect l="l" t="t" r="r" b="b"/>
+                    <a:pathLst>
+                      <a:path w="737560" h="586596" extrusionOk="0">
+                        <a:moveTo>
+                          <a:pt x="0" y="97768"/>
+                        </a:moveTo>
+                        <a:cubicBezTo>
+                          <a:pt x="-6431" y="39805"/>
+                          <a:pt x="33697" y="3781"/>
+                          <a:pt x="97768" y="0"/>
+                        </a:cubicBezTo>
+                        <a:cubicBezTo>
+                          <a:pt x="255097" y="-20758"/>
+                          <a:pt x="457435" y="-34569"/>
+                          <a:pt x="639792" y="0"/>
+                        </a:cubicBezTo>
+                        <a:cubicBezTo>
+                          <a:pt x="691126" y="2600"/>
+                          <a:pt x="736049" y="52125"/>
+                          <a:pt x="737560" y="97768"/>
+                        </a:cubicBezTo>
+                        <a:cubicBezTo>
+                          <a:pt x="711953" y="151225"/>
+                          <a:pt x="765743" y="336388"/>
+                          <a:pt x="737560" y="488828"/>
+                        </a:cubicBezTo>
+                        <a:cubicBezTo>
+                          <a:pt x="746763" y="543916"/>
+                          <a:pt x="697802" y="578334"/>
+                          <a:pt x="639792" y="586596"/>
+                        </a:cubicBezTo>
+                        <a:cubicBezTo>
+                          <a:pt x="566716" y="618226"/>
+                          <a:pt x="268905" y="572487"/>
+                          <a:pt x="97768" y="586596"/>
+                        </a:cubicBezTo>
+                        <a:cubicBezTo>
+                          <a:pt x="43026" y="579481"/>
+                          <a:pt x="-5993" y="551153"/>
+                          <a:pt x="0" y="488828"/>
+                        </a:cubicBezTo>
+                        <a:cubicBezTo>
+                          <a:pt x="33631" y="396284"/>
+                          <a:pt x="-14828" y="179198"/>
+                          <a:pt x="0" y="97768"/>
+                        </a:cubicBezTo>
+                        <a:close/>
+                      </a:path>
+                    </a:pathLst>
+                  </a:custGeom>
+                  <ask:type>
+                    <ask:lineSketchNone/>
+                  </ask:type>
+                </ask:lineSketchStyleProps>
+              </a:ext>
+            </a:extLst>
+          </a:ln>
+        </p:spPr>
+        <p:style>
+          <a:lnRef idx="2">
+            <a:schemeClr val="dk1">
+              <a:shade val="15000"/>
+            </a:schemeClr>
+          </a:lnRef>
+          <a:fillRef idx="1">
+            <a:schemeClr val="dk1"/>
+          </a:fillRef>
+          <a:effectRef idx="0">
+            <a:schemeClr val="dk1"/>
+          </a:effectRef>
+          <a:fontRef idx="minor">
+            <a:schemeClr val="lt1"/>
+          </a:fontRef>
+        </p:style>
+        <p:txBody>
+          <a:bodyPr rtlCol="0" anchor="ctr"/>
+          <a:lstStyle/>
+          <a:p>
+            <a:pPr algn="ctr"/>
+            <a:endParaRPr lang="en-IT"/>
+          </a:p>
+        </p:txBody>
+      </p:sp>
+      <p:sp>
+        <p:nvSpPr>
+          <p:cNvPr id="15" name="Rounded Rectangle 14">
+            <a:extLst>
+              <a:ext uri="{FF2B5EF4-FFF2-40B4-BE49-F238E27FC236}">
+                <a16:creationId xmlns:a16="http://schemas.microsoft.com/office/drawing/2014/main" id="{42165486-B2F7-6E95-15C8-ABF00340C37A}"/>
+              </a:ext>
+            </a:extLst>
+          </p:cNvPr>
+          <p:cNvSpPr/>
+          <p:nvPr/>
+        </p:nvSpPr>
+        <p:spPr>
+          <a:xfrm>
+            <a:off x="6789926" y="2973970"/>
+            <a:ext cx="885037" cy="736095"/>
+          </a:xfrm>
+          <a:prstGeom prst="roundRect">
+            <a:avLst/>
+          </a:prstGeom>
+          <a:noFill/>
+          <a:ln w="28575">
+            <a:solidFill>
+              <a:schemeClr val="tx1"/>
+            </a:solidFill>
+            <a:prstDash val="solid"/>
+            <a:extLst>
+              <a:ext uri="{C807C97D-BFC1-408E-A445-0C87EB9F89A2}">
+                <ask:lineSketchStyleProps xmlns:ask="http://schemas.microsoft.com/office/drawing/2018/sketchyshapes" sd="1219033472">
+                  <a:custGeom>
+                    <a:avLst/>
+                    <a:gdLst>
+                      <a:gd name="csX0" fmla="*/ 0 w 737560"/>
+                      <a:gd name="csY0" fmla="*/ 97768 h 586596"/>
+                      <a:gd name="csX1" fmla="*/ 97768 w 737560"/>
+                      <a:gd name="csY1" fmla="*/ 0 h 586596"/>
+                      <a:gd name="csX2" fmla="*/ 639792 w 737560"/>
+                      <a:gd name="csY2" fmla="*/ 0 h 586596"/>
+                      <a:gd name="csX3" fmla="*/ 737560 w 737560"/>
+                      <a:gd name="csY3" fmla="*/ 97768 h 586596"/>
+                      <a:gd name="csX4" fmla="*/ 737560 w 737560"/>
+                      <a:gd name="csY4" fmla="*/ 488828 h 586596"/>
+                      <a:gd name="csX5" fmla="*/ 639792 w 737560"/>
+                      <a:gd name="csY5" fmla="*/ 586596 h 586596"/>
+                      <a:gd name="csX6" fmla="*/ 97768 w 737560"/>
+                      <a:gd name="csY6" fmla="*/ 586596 h 586596"/>
+                      <a:gd name="csX7" fmla="*/ 0 w 737560"/>
+                      <a:gd name="csY7" fmla="*/ 488828 h 586596"/>
+                      <a:gd name="csX8" fmla="*/ 0 w 737560"/>
+                      <a:gd name="csY8" fmla="*/ 97768 h 586596"/>
+                    </a:gdLst>
+                    <a:ahLst/>
+                    <a:cxnLst>
+                      <a:cxn ang="0">
+                        <a:pos x="csX0" y="csY0"/>
+                      </a:cxn>
+                      <a:cxn ang="0">
+                        <a:pos x="csX1" y="csY1"/>
+                      </a:cxn>
+                      <a:cxn ang="0">
+                        <a:pos x="csX2" y="csY2"/>
+                      </a:cxn>
+                      <a:cxn ang="0">
+                        <a:pos x="csX3" y="csY3"/>
+                      </a:cxn>
+                      <a:cxn ang="0">
+                        <a:pos x="csX4" y="csY4"/>
+                      </a:cxn>
+                      <a:cxn ang="0">
+                        <a:pos x="csX5" y="csY5"/>
+                      </a:cxn>
+                      <a:cxn ang="0">
+                        <a:pos x="csX6" y="csY6"/>
+                      </a:cxn>
+                      <a:cxn ang="0">
+                        <a:pos x="csX7" y="csY7"/>
+                      </a:cxn>
+                      <a:cxn ang="0">
+                        <a:pos x="csX8" y="csY8"/>
+                      </a:cxn>
+                    </a:cxnLst>
+                    <a:rect l="l" t="t" r="r" b="b"/>
+                    <a:pathLst>
+                      <a:path w="737560" h="586596" extrusionOk="0">
+                        <a:moveTo>
+                          <a:pt x="0" y="97768"/>
+                        </a:moveTo>
+                        <a:cubicBezTo>
+                          <a:pt x="-6431" y="39805"/>
+                          <a:pt x="33697" y="3781"/>
+                          <a:pt x="97768" y="0"/>
+                        </a:cubicBezTo>
+                        <a:cubicBezTo>
+                          <a:pt x="255097" y="-20758"/>
+                          <a:pt x="457435" y="-34569"/>
+                          <a:pt x="639792" y="0"/>
+                        </a:cubicBezTo>
+                        <a:cubicBezTo>
+                          <a:pt x="691126" y="2600"/>
+                          <a:pt x="736049" y="52125"/>
+                          <a:pt x="737560" y="97768"/>
+                        </a:cubicBezTo>
+                        <a:cubicBezTo>
+                          <a:pt x="711953" y="151225"/>
+                          <a:pt x="765743" y="336388"/>
+                          <a:pt x="737560" y="488828"/>
+                        </a:cubicBezTo>
+                        <a:cubicBezTo>
+                          <a:pt x="746763" y="543916"/>
+                          <a:pt x="697802" y="578334"/>
+                          <a:pt x="639792" y="586596"/>
+                        </a:cubicBezTo>
+                        <a:cubicBezTo>
+                          <a:pt x="566716" y="618226"/>
+                          <a:pt x="268905" y="572487"/>
+                          <a:pt x="97768" y="586596"/>
+                        </a:cubicBezTo>
+                        <a:cubicBezTo>
+                          <a:pt x="43026" y="579481"/>
+                          <a:pt x="-5993" y="551153"/>
+                          <a:pt x="0" y="488828"/>
+                        </a:cubicBezTo>
+                        <a:cubicBezTo>
+                          <a:pt x="33631" y="396284"/>
+                          <a:pt x="-14828" y="179198"/>
+                          <a:pt x="0" y="97768"/>
+                        </a:cubicBezTo>
+                        <a:close/>
+                      </a:path>
+                    </a:pathLst>
+                  </a:custGeom>
+                  <ask:type>
+                    <ask:lineSketchNone/>
+                  </ask:type>
+                </ask:lineSketchStyleProps>
+              </a:ext>
+            </a:extLst>
+          </a:ln>
+        </p:spPr>
+        <p:style>
+          <a:lnRef idx="2">
+            <a:schemeClr val="dk1">
+              <a:shade val="15000"/>
+            </a:schemeClr>
+          </a:lnRef>
+          <a:fillRef idx="1">
+            <a:schemeClr val="dk1"/>
+          </a:fillRef>
+          <a:effectRef idx="0">
+            <a:schemeClr val="dk1"/>
+          </a:effectRef>
+          <a:fontRef idx="minor">
+            <a:schemeClr val="lt1"/>
+          </a:fontRef>
+        </p:style>
+        <p:txBody>
+          <a:bodyPr rtlCol="0" anchor="ctr"/>
+          <a:lstStyle/>
+          <a:p>
+            <a:pPr algn="ctr"/>
+            <a:endParaRPr lang="en-IT" dirty="0"/>
+          </a:p>
+        </p:txBody>
+      </p:sp>
+      <p:sp>
+        <p:nvSpPr>
+          <p:cNvPr id="16" name="Rounded Rectangle 15">
+            <a:extLst>
+              <a:ext uri="{FF2B5EF4-FFF2-40B4-BE49-F238E27FC236}">
+                <a16:creationId xmlns:a16="http://schemas.microsoft.com/office/drawing/2014/main" id="{699296A2-0B1B-36AE-D557-96452789338A}"/>
+              </a:ext>
+            </a:extLst>
+          </p:cNvPr>
+          <p:cNvSpPr/>
+          <p:nvPr/>
+        </p:nvSpPr>
+        <p:spPr>
+          <a:xfrm>
+            <a:off x="3296286" y="3890043"/>
+            <a:ext cx="945930" cy="869334"/>
+          </a:xfrm>
+          <a:prstGeom prst="roundRect">
+            <a:avLst/>
+          </a:prstGeom>
+          <a:noFill/>
+          <a:ln w="28575">
+            <a:solidFill>
+              <a:schemeClr val="tx1"/>
+            </a:solidFill>
+            <a:prstDash val="solid"/>
+            <a:extLst>
+              <a:ext uri="{C807C97D-BFC1-408E-A445-0C87EB9F89A2}">
+                <ask:lineSketchStyleProps xmlns:ask="http://schemas.microsoft.com/office/drawing/2018/sketchyshapes" sd="1219033472">
+                  <a:custGeom>
+                    <a:avLst/>
+                    <a:gdLst>
+                      <a:gd name="csX0" fmla="*/ 0 w 737560"/>
+                      <a:gd name="csY0" fmla="*/ 97768 h 586596"/>
+                      <a:gd name="csX1" fmla="*/ 97768 w 737560"/>
+                      <a:gd name="csY1" fmla="*/ 0 h 586596"/>
+                      <a:gd name="csX2" fmla="*/ 639792 w 737560"/>
+                      <a:gd name="csY2" fmla="*/ 0 h 586596"/>
+                      <a:gd name="csX3" fmla="*/ 737560 w 737560"/>
+                      <a:gd name="csY3" fmla="*/ 97768 h 586596"/>
+                      <a:gd name="csX4" fmla="*/ 737560 w 737560"/>
+                      <a:gd name="csY4" fmla="*/ 488828 h 586596"/>
+                      <a:gd name="csX5" fmla="*/ 639792 w 737560"/>
+                      <a:gd name="csY5" fmla="*/ 586596 h 586596"/>
+                      <a:gd name="csX6" fmla="*/ 97768 w 737560"/>
+                      <a:gd name="csY6" fmla="*/ 586596 h 586596"/>
+                      <a:gd name="csX7" fmla="*/ 0 w 737560"/>
+                      <a:gd name="csY7" fmla="*/ 488828 h 586596"/>
+                      <a:gd name="csX8" fmla="*/ 0 w 737560"/>
+                      <a:gd name="csY8" fmla="*/ 97768 h 586596"/>
+                    </a:gdLst>
+                    <a:ahLst/>
+                    <a:cxnLst>
+                      <a:cxn ang="0">
+                        <a:pos x="csX0" y="csY0"/>
+                      </a:cxn>
+                      <a:cxn ang="0">
+                        <a:pos x="csX1" y="csY1"/>
+                      </a:cxn>
+                      <a:cxn ang="0">
+                        <a:pos x="csX2" y="csY2"/>
+                      </a:cxn>
+                      <a:cxn ang="0">
+                        <a:pos x="csX3" y="csY3"/>
+                      </a:cxn>
+                      <a:cxn ang="0">
+                        <a:pos x="csX4" y="csY4"/>
+                      </a:cxn>
+                      <a:cxn ang="0">
+                        <a:pos x="csX5" y="csY5"/>
+                      </a:cxn>
+                      <a:cxn ang="0">
+                        <a:pos x="csX6" y="csY6"/>
+                      </a:cxn>
+                      <a:cxn ang="0">
+                        <a:pos x="csX7" y="csY7"/>
+                      </a:cxn>
+                      <a:cxn ang="0">
+                        <a:pos x="csX8" y="csY8"/>
+                      </a:cxn>
+                    </a:cxnLst>
+                    <a:rect l="l" t="t" r="r" b="b"/>
+                    <a:pathLst>
+                      <a:path w="737560" h="586596" extrusionOk="0">
+                        <a:moveTo>
+                          <a:pt x="0" y="97768"/>
+                        </a:moveTo>
+                        <a:cubicBezTo>
+                          <a:pt x="-6431" y="39805"/>
+                          <a:pt x="33697" y="3781"/>
+                          <a:pt x="97768" y="0"/>
+                        </a:cubicBezTo>
+                        <a:cubicBezTo>
+                          <a:pt x="255097" y="-20758"/>
+                          <a:pt x="457435" y="-34569"/>
+                          <a:pt x="639792" y="0"/>
+                        </a:cubicBezTo>
+                        <a:cubicBezTo>
+                          <a:pt x="691126" y="2600"/>
+                          <a:pt x="736049" y="52125"/>
+                          <a:pt x="737560" y="97768"/>
+                        </a:cubicBezTo>
+                        <a:cubicBezTo>
+                          <a:pt x="711953" y="151225"/>
+                          <a:pt x="765743" y="336388"/>
+                          <a:pt x="737560" y="488828"/>
+                        </a:cubicBezTo>
+                        <a:cubicBezTo>
+                          <a:pt x="746763" y="543916"/>
+                          <a:pt x="697802" y="578334"/>
+                          <a:pt x="639792" y="586596"/>
+                        </a:cubicBezTo>
+                        <a:cubicBezTo>
+                          <a:pt x="566716" y="618226"/>
+                          <a:pt x="268905" y="572487"/>
+                          <a:pt x="97768" y="586596"/>
+                        </a:cubicBezTo>
+                        <a:cubicBezTo>
+                          <a:pt x="43026" y="579481"/>
+                          <a:pt x="-5993" y="551153"/>
+                          <a:pt x="0" y="488828"/>
+                        </a:cubicBezTo>
+                        <a:cubicBezTo>
+                          <a:pt x="33631" y="396284"/>
+                          <a:pt x="-14828" y="179198"/>
+                          <a:pt x="0" y="97768"/>
+                        </a:cubicBezTo>
+                        <a:close/>
+                      </a:path>
+                    </a:pathLst>
+                  </a:custGeom>
+                  <ask:type>
+                    <ask:lineSketchNone/>
+                  </ask:type>
+                </ask:lineSketchStyleProps>
+              </a:ext>
+            </a:extLst>
+          </a:ln>
+        </p:spPr>
+        <p:style>
+          <a:lnRef idx="2">
+            <a:schemeClr val="dk1">
+              <a:shade val="15000"/>
+            </a:schemeClr>
+          </a:lnRef>
+          <a:fillRef idx="1">
+            <a:schemeClr val="dk1"/>
+          </a:fillRef>
+          <a:effectRef idx="0">
+            <a:schemeClr val="dk1"/>
+          </a:effectRef>
+          <a:fontRef idx="minor">
+            <a:schemeClr val="lt1"/>
+          </a:fontRef>
+        </p:style>
+        <p:txBody>
+          <a:bodyPr rtlCol="0" anchor="ctr"/>
+          <a:lstStyle/>
+          <a:p>
+            <a:pPr algn="ctr"/>
+            <a:endParaRPr lang="en-IT" dirty="0"/>
+          </a:p>
+        </p:txBody>
+      </p:sp>
+      <p:sp>
+        <p:nvSpPr>
+          <p:cNvPr id="17" name="Rounded Rectangle 16">
+            <a:extLst>
+              <a:ext uri="{FF2B5EF4-FFF2-40B4-BE49-F238E27FC236}">
+                <a16:creationId xmlns:a16="http://schemas.microsoft.com/office/drawing/2014/main" id="{2C50CCFC-E3B7-94EA-5463-B8687149B81D}"/>
+              </a:ext>
+            </a:extLst>
+          </p:cNvPr>
+          <p:cNvSpPr/>
+          <p:nvPr/>
+        </p:nvSpPr>
+        <p:spPr>
+          <a:xfrm>
+            <a:off x="5019223" y="3890043"/>
+            <a:ext cx="1209190" cy="869334"/>
+          </a:xfrm>
+          <a:prstGeom prst="roundRect">
+            <a:avLst/>
+          </a:prstGeom>
+          <a:noFill/>
+          <a:ln w="28575">
+            <a:solidFill>
+              <a:schemeClr val="tx1"/>
+            </a:solidFill>
+            <a:prstDash val="solid"/>
+            <a:extLst>
+              <a:ext uri="{C807C97D-BFC1-408E-A445-0C87EB9F89A2}">
+                <ask:lineSketchStyleProps xmlns:ask="http://schemas.microsoft.com/office/drawing/2018/sketchyshapes" sd="1219033472">
+                  <a:custGeom>
+                    <a:avLst/>
+                    <a:gdLst>
+                      <a:gd name="csX0" fmla="*/ 0 w 737560"/>
+                      <a:gd name="csY0" fmla="*/ 97768 h 586596"/>
+                      <a:gd name="csX1" fmla="*/ 97768 w 737560"/>
+                      <a:gd name="csY1" fmla="*/ 0 h 586596"/>
+                      <a:gd name="csX2" fmla="*/ 639792 w 737560"/>
+                      <a:gd name="csY2" fmla="*/ 0 h 586596"/>
+                      <a:gd name="csX3" fmla="*/ 737560 w 737560"/>
+                      <a:gd name="csY3" fmla="*/ 97768 h 586596"/>
+                      <a:gd name="csX4" fmla="*/ 737560 w 737560"/>
+                      <a:gd name="csY4" fmla="*/ 488828 h 586596"/>
+                      <a:gd name="csX5" fmla="*/ 639792 w 737560"/>
+                      <a:gd name="csY5" fmla="*/ 586596 h 586596"/>
+                      <a:gd name="csX6" fmla="*/ 97768 w 737560"/>
+                      <a:gd name="csY6" fmla="*/ 586596 h 586596"/>
+                      <a:gd name="csX7" fmla="*/ 0 w 737560"/>
+                      <a:gd name="csY7" fmla="*/ 488828 h 586596"/>
+                      <a:gd name="csX8" fmla="*/ 0 w 737560"/>
+                      <a:gd name="csY8" fmla="*/ 97768 h 586596"/>
+                    </a:gdLst>
+                    <a:ahLst/>
+                    <a:cxnLst>
+                      <a:cxn ang="0">
+                        <a:pos x="csX0" y="csY0"/>
+                      </a:cxn>
+                      <a:cxn ang="0">
+                        <a:pos x="csX1" y="csY1"/>
+                      </a:cxn>
+                      <a:cxn ang="0">
+                        <a:pos x="csX2" y="csY2"/>
+                      </a:cxn>
+                      <a:cxn ang="0">
+                        <a:pos x="csX3" y="csY3"/>
+                      </a:cxn>
+                      <a:cxn ang="0">
+                        <a:pos x="csX4" y="csY4"/>
+                      </a:cxn>
+                      <a:cxn ang="0">
+                        <a:pos x="csX5" y="csY5"/>
+                      </a:cxn>
+                      <a:cxn ang="0">
+                        <a:pos x="csX6" y="csY6"/>
+                      </a:cxn>
+                      <a:cxn ang="0">
+                        <a:pos x="csX7" y="csY7"/>
+                      </a:cxn>
+                      <a:cxn ang="0">
+                        <a:pos x="csX8" y="csY8"/>
+                      </a:cxn>
+                    </a:cxnLst>
+                    <a:rect l="l" t="t" r="r" b="b"/>
+                    <a:pathLst>
+                      <a:path w="737560" h="586596" extrusionOk="0">
+                        <a:moveTo>
+                          <a:pt x="0" y="97768"/>
+                        </a:moveTo>
+                        <a:cubicBezTo>
+                          <a:pt x="-6431" y="39805"/>
+                          <a:pt x="33697" y="3781"/>
+                          <a:pt x="97768" y="0"/>
+                        </a:cubicBezTo>
+                        <a:cubicBezTo>
+                          <a:pt x="255097" y="-20758"/>
+                          <a:pt x="457435" y="-34569"/>
+                          <a:pt x="639792" y="0"/>
+                        </a:cubicBezTo>
+                        <a:cubicBezTo>
+                          <a:pt x="691126" y="2600"/>
+                          <a:pt x="736049" y="52125"/>
+                          <a:pt x="737560" y="97768"/>
+                        </a:cubicBezTo>
+                        <a:cubicBezTo>
+                          <a:pt x="711953" y="151225"/>
+                          <a:pt x="765743" y="336388"/>
+                          <a:pt x="737560" y="488828"/>
+                        </a:cubicBezTo>
+                        <a:cubicBezTo>
+                          <a:pt x="746763" y="543916"/>
+                          <a:pt x="697802" y="578334"/>
+                          <a:pt x="639792" y="586596"/>
+                        </a:cubicBezTo>
+                        <a:cubicBezTo>
+                          <a:pt x="566716" y="618226"/>
+                          <a:pt x="268905" y="572487"/>
+                          <a:pt x="97768" y="586596"/>
+                        </a:cubicBezTo>
+                        <a:cubicBezTo>
+                          <a:pt x="43026" y="579481"/>
+                          <a:pt x="-5993" y="551153"/>
+                          <a:pt x="0" y="488828"/>
+                        </a:cubicBezTo>
+                        <a:cubicBezTo>
+                          <a:pt x="33631" y="396284"/>
+                          <a:pt x="-14828" y="179198"/>
+                          <a:pt x="0" y="97768"/>
+                        </a:cubicBezTo>
+                        <a:close/>
+                      </a:path>
+                    </a:pathLst>
+                  </a:custGeom>
+                  <ask:type>
+                    <ask:lineSketchNone/>
+                  </ask:type>
+                </ask:lineSketchStyleProps>
+              </a:ext>
+            </a:extLst>
+          </a:ln>
+        </p:spPr>
+        <p:style>
+          <a:lnRef idx="2">
+            <a:schemeClr val="dk1">
+              <a:shade val="15000"/>
+            </a:schemeClr>
+          </a:lnRef>
+          <a:fillRef idx="1">
+            <a:schemeClr val="dk1"/>
+          </a:fillRef>
+          <a:effectRef idx="0">
+            <a:schemeClr val="dk1"/>
+          </a:effectRef>
+          <a:fontRef idx="minor">
+            <a:schemeClr val="lt1"/>
+          </a:fontRef>
+        </p:style>
+        <p:txBody>
+          <a:bodyPr rtlCol="0" anchor="ctr"/>
+          <a:lstStyle/>
+          <a:p>
+            <a:pPr algn="ctr"/>
+            <a:endParaRPr lang="en-IT" dirty="0"/>
+          </a:p>
+        </p:txBody>
+      </p:sp>
+      <p:sp>
+        <p:nvSpPr>
+          <p:cNvPr id="18" name="Rounded Rectangle 17">
+            <a:extLst>
+              <a:ext uri="{FF2B5EF4-FFF2-40B4-BE49-F238E27FC236}">
+                <a16:creationId xmlns:a16="http://schemas.microsoft.com/office/drawing/2014/main" id="{0A7CE653-6F00-9E6F-99DB-CBBED4EFB019}"/>
+              </a:ext>
+            </a:extLst>
+          </p:cNvPr>
+          <p:cNvSpPr/>
+          <p:nvPr/>
+        </p:nvSpPr>
+        <p:spPr>
+          <a:xfrm>
+            <a:off x="2101385" y="3890043"/>
+            <a:ext cx="945930" cy="869334"/>
+          </a:xfrm>
+          <a:prstGeom prst="roundRect">
+            <a:avLst/>
+          </a:prstGeom>
+          <a:noFill/>
+          <a:ln w="28575">
+            <a:solidFill>
+              <a:schemeClr val="tx1"/>
+            </a:solidFill>
+            <a:prstDash val="solid"/>
+            <a:extLst>
+              <a:ext uri="{C807C97D-BFC1-408E-A445-0C87EB9F89A2}">
+                <ask:lineSketchStyleProps xmlns:ask="http://schemas.microsoft.com/office/drawing/2018/sketchyshapes" sd="1219033472">
+                  <a:custGeom>
+                    <a:avLst/>
+                    <a:gdLst>
+                      <a:gd name="csX0" fmla="*/ 0 w 737560"/>
+                      <a:gd name="csY0" fmla="*/ 97768 h 586596"/>
+                      <a:gd name="csX1" fmla="*/ 97768 w 737560"/>
+                      <a:gd name="csY1" fmla="*/ 0 h 586596"/>
+                      <a:gd name="csX2" fmla="*/ 639792 w 737560"/>
+                      <a:gd name="csY2" fmla="*/ 0 h 586596"/>
+                      <a:gd name="csX3" fmla="*/ 737560 w 737560"/>
+                      <a:gd name="csY3" fmla="*/ 97768 h 586596"/>
+                      <a:gd name="csX4" fmla="*/ 737560 w 737560"/>
+                      <a:gd name="csY4" fmla="*/ 488828 h 586596"/>
+                      <a:gd name="csX5" fmla="*/ 639792 w 737560"/>
+                      <a:gd name="csY5" fmla="*/ 586596 h 586596"/>
+                      <a:gd name="csX6" fmla="*/ 97768 w 737560"/>
+                      <a:gd name="csY6" fmla="*/ 586596 h 586596"/>
+                      <a:gd name="csX7" fmla="*/ 0 w 737560"/>
+                      <a:gd name="csY7" fmla="*/ 488828 h 586596"/>
+                      <a:gd name="csX8" fmla="*/ 0 w 737560"/>
+                      <a:gd name="csY8" fmla="*/ 97768 h 586596"/>
+                    </a:gdLst>
+                    <a:ahLst/>
+                    <a:cxnLst>
+                      <a:cxn ang="0">
+                        <a:pos x="csX0" y="csY0"/>
+                      </a:cxn>
+                      <a:cxn ang="0">
+                        <a:pos x="csX1" y="csY1"/>
+                      </a:cxn>
+                      <a:cxn ang="0">
+                        <a:pos x="csX2" y="csY2"/>
+                      </a:cxn>
+                      <a:cxn ang="0">
+                        <a:pos x="csX3" y="csY3"/>
+                      </a:cxn>
+                      <a:cxn ang="0">
+                        <a:pos x="csX4" y="csY4"/>
+                      </a:cxn>
+                      <a:cxn ang="0">
+                        <a:pos x="csX5" y="csY5"/>
+                      </a:cxn>
+                      <a:cxn ang="0">
+                        <a:pos x="csX6" y="csY6"/>
+                      </a:cxn>
+                      <a:cxn ang="0">
+                        <a:pos x="csX7" y="csY7"/>
+                      </a:cxn>
+                      <a:cxn ang="0">
+                        <a:pos x="csX8" y="csY8"/>
+                      </a:cxn>
+                    </a:cxnLst>
+                    <a:rect l="l" t="t" r="r" b="b"/>
+                    <a:pathLst>
+                      <a:path w="737560" h="586596" extrusionOk="0">
+                        <a:moveTo>
+                          <a:pt x="0" y="97768"/>
+                        </a:moveTo>
+                        <a:cubicBezTo>
+                          <a:pt x="-6431" y="39805"/>
+                          <a:pt x="33697" y="3781"/>
+                          <a:pt x="97768" y="0"/>
+                        </a:cubicBezTo>
+                        <a:cubicBezTo>
+                          <a:pt x="255097" y="-20758"/>
+                          <a:pt x="457435" y="-34569"/>
+                          <a:pt x="639792" y="0"/>
+                        </a:cubicBezTo>
+                        <a:cubicBezTo>
+                          <a:pt x="691126" y="2600"/>
+                          <a:pt x="736049" y="52125"/>
+                          <a:pt x="737560" y="97768"/>
+                        </a:cubicBezTo>
+                        <a:cubicBezTo>
+                          <a:pt x="711953" y="151225"/>
+                          <a:pt x="765743" y="336388"/>
+                          <a:pt x="737560" y="488828"/>
+                        </a:cubicBezTo>
+                        <a:cubicBezTo>
+                          <a:pt x="746763" y="543916"/>
+                          <a:pt x="697802" y="578334"/>
+                          <a:pt x="639792" y="586596"/>
+                        </a:cubicBezTo>
+                        <a:cubicBezTo>
+                          <a:pt x="566716" y="618226"/>
+                          <a:pt x="268905" y="572487"/>
+                          <a:pt x="97768" y="586596"/>
+                        </a:cubicBezTo>
+                        <a:cubicBezTo>
+                          <a:pt x="43026" y="579481"/>
+                          <a:pt x="-5993" y="551153"/>
+                          <a:pt x="0" y="488828"/>
+                        </a:cubicBezTo>
+                        <a:cubicBezTo>
+                          <a:pt x="33631" y="396284"/>
+                          <a:pt x="-14828" y="179198"/>
+                          <a:pt x="0" y="97768"/>
+                        </a:cubicBezTo>
+                        <a:close/>
+                      </a:path>
+                    </a:pathLst>
+                  </a:custGeom>
+                  <ask:type>
+                    <ask:lineSketchNone/>
+                  </ask:type>
+                </ask:lineSketchStyleProps>
+              </a:ext>
+            </a:extLst>
+          </a:ln>
+        </p:spPr>
+        <p:style>
+          <a:lnRef idx="2">
+            <a:schemeClr val="dk1">
+              <a:shade val="15000"/>
+            </a:schemeClr>
+          </a:lnRef>
+          <a:fillRef idx="1">
+            <a:schemeClr val="dk1"/>
+          </a:fillRef>
+          <a:effectRef idx="0">
+            <a:schemeClr val="dk1"/>
+          </a:effectRef>
+          <a:fontRef idx="minor">
+            <a:schemeClr val="lt1"/>
+          </a:fontRef>
+        </p:style>
+        <p:txBody>
+          <a:bodyPr rtlCol="0" anchor="ctr"/>
+          <a:lstStyle/>
+          <a:p>
+            <a:pPr algn="ctr"/>
+            <a:endParaRPr lang="en-IT" dirty="0"/>
+          </a:p>
+        </p:txBody>
+      </p:sp>
     </p:spTree>
     <p:extLst>
       <p:ext uri="{BB962C8B-B14F-4D97-AF65-F5344CB8AC3E}">
@@ -37634,6 +34919,758 @@
   <p:clrMapOvr>
     <a:masterClrMapping/>
   </p:clrMapOvr>
+  <p:timing>
+    <p:tnLst>
+      <p:par>
+        <p:cTn id="1" dur="indefinite" restart="never" nodeType="tmRoot">
+          <p:childTnLst>
+            <p:seq concurrent="1" nextAc="seek">
+              <p:cTn id="2" dur="indefinite" nodeType="mainSeq">
+                <p:childTnLst>
+                  <p:par>
+                    <p:cTn id="3" fill="hold">
+                      <p:stCondLst>
+                        <p:cond delay="indefinite"/>
+                      </p:stCondLst>
+                      <p:childTnLst>
+                        <p:par>
+                          <p:cTn id="4" fill="hold">
+                            <p:stCondLst>
+                              <p:cond delay="0"/>
+                            </p:stCondLst>
+                            <p:childTnLst>
+                              <p:par>
+                                <p:cTn id="5" presetID="10" presetClass="entr" presetSubtype="0" fill="hold" grpId="0" nodeType="clickEffect">
+                                  <p:stCondLst>
+                                    <p:cond delay="0"/>
+                                  </p:stCondLst>
+                                  <p:childTnLst>
+                                    <p:set>
+                                      <p:cBhvr>
+                                        <p:cTn id="6" dur="1" fill="hold">
+                                          <p:stCondLst>
+                                            <p:cond delay="0"/>
+                                          </p:stCondLst>
+                                        </p:cTn>
+                                        <p:tgtEl>
+                                          <p:spTgt spid="6"/>
+                                        </p:tgtEl>
+                                        <p:attrNameLst>
+                                          <p:attrName>style.visibility</p:attrName>
+                                        </p:attrNameLst>
+                                      </p:cBhvr>
+                                      <p:to>
+                                        <p:strVal val="visible"/>
+                                      </p:to>
+                                    </p:set>
+                                    <p:animEffect transition="in" filter="fade">
+                                      <p:cBhvr>
+                                        <p:cTn id="7" dur="500"/>
+                                        <p:tgtEl>
+                                          <p:spTgt spid="6"/>
+                                        </p:tgtEl>
+                                      </p:cBhvr>
+                                    </p:animEffect>
+                                  </p:childTnLst>
+                                </p:cTn>
+                              </p:par>
+                              <p:par>
+                                <p:cTn id="8" presetID="10" presetClass="entr" presetSubtype="0" fill="hold" grpId="0" nodeType="withEffect">
+                                  <p:stCondLst>
+                                    <p:cond delay="0"/>
+                                  </p:stCondLst>
+                                  <p:childTnLst>
+                                    <p:set>
+                                      <p:cBhvr>
+                                        <p:cTn id="9" dur="1" fill="hold">
+                                          <p:stCondLst>
+                                            <p:cond delay="0"/>
+                                          </p:stCondLst>
+                                        </p:cTn>
+                                        <p:tgtEl>
+                                          <p:spTgt spid="7"/>
+                                        </p:tgtEl>
+                                        <p:attrNameLst>
+                                          <p:attrName>style.visibility</p:attrName>
+                                        </p:attrNameLst>
+                                      </p:cBhvr>
+                                      <p:to>
+                                        <p:strVal val="visible"/>
+                                      </p:to>
+                                    </p:set>
+                                    <p:animEffect transition="in" filter="fade">
+                                      <p:cBhvr>
+                                        <p:cTn id="10" dur="500"/>
+                                        <p:tgtEl>
+                                          <p:spTgt spid="7"/>
+                                        </p:tgtEl>
+                                      </p:cBhvr>
+                                    </p:animEffect>
+                                  </p:childTnLst>
+                                </p:cTn>
+                              </p:par>
+                              <p:par>
+                                <p:cTn id="11" presetID="10" presetClass="entr" presetSubtype="0" fill="hold" grpId="0" nodeType="withEffect">
+                                  <p:stCondLst>
+                                    <p:cond delay="0"/>
+                                  </p:stCondLst>
+                                  <p:childTnLst>
+                                    <p:set>
+                                      <p:cBhvr>
+                                        <p:cTn id="12" dur="1" fill="hold">
+                                          <p:stCondLst>
+                                            <p:cond delay="0"/>
+                                          </p:stCondLst>
+                                        </p:cTn>
+                                        <p:tgtEl>
+                                          <p:spTgt spid="8"/>
+                                        </p:tgtEl>
+                                        <p:attrNameLst>
+                                          <p:attrName>style.visibility</p:attrName>
+                                        </p:attrNameLst>
+                                      </p:cBhvr>
+                                      <p:to>
+                                        <p:strVal val="visible"/>
+                                      </p:to>
+                                    </p:set>
+                                    <p:animEffect transition="in" filter="fade">
+                                      <p:cBhvr>
+                                        <p:cTn id="13" dur="500"/>
+                                        <p:tgtEl>
+                                          <p:spTgt spid="8"/>
+                                        </p:tgtEl>
+                                      </p:cBhvr>
+                                    </p:animEffect>
+                                  </p:childTnLst>
+                                </p:cTn>
+                              </p:par>
+                              <p:par>
+                                <p:cTn id="14" presetID="10" presetClass="entr" presetSubtype="0" fill="hold" grpId="0" nodeType="withEffect">
+                                  <p:stCondLst>
+                                    <p:cond delay="0"/>
+                                  </p:stCondLst>
+                                  <p:childTnLst>
+                                    <p:set>
+                                      <p:cBhvr>
+                                        <p:cTn id="15" dur="1" fill="hold">
+                                          <p:stCondLst>
+                                            <p:cond delay="0"/>
+                                          </p:stCondLst>
+                                        </p:cTn>
+                                        <p:tgtEl>
+                                          <p:spTgt spid="9"/>
+                                        </p:tgtEl>
+                                        <p:attrNameLst>
+                                          <p:attrName>style.visibility</p:attrName>
+                                        </p:attrNameLst>
+                                      </p:cBhvr>
+                                      <p:to>
+                                        <p:strVal val="visible"/>
+                                      </p:to>
+                                    </p:set>
+                                    <p:animEffect transition="in" filter="fade">
+                                      <p:cBhvr>
+                                        <p:cTn id="16" dur="500"/>
+                                        <p:tgtEl>
+                                          <p:spTgt spid="9"/>
+                                        </p:tgtEl>
+                                      </p:cBhvr>
+                                    </p:animEffect>
+                                  </p:childTnLst>
+                                </p:cTn>
+                              </p:par>
+                              <p:par>
+                                <p:cTn id="17" presetID="10" presetClass="entr" presetSubtype="0" fill="hold" grpId="0" nodeType="withEffect">
+                                  <p:stCondLst>
+                                    <p:cond delay="0"/>
+                                  </p:stCondLst>
+                                  <p:childTnLst>
+                                    <p:set>
+                                      <p:cBhvr>
+                                        <p:cTn id="18" dur="1" fill="hold">
+                                          <p:stCondLst>
+                                            <p:cond delay="0"/>
+                                          </p:stCondLst>
+                                        </p:cTn>
+                                        <p:tgtEl>
+                                          <p:spTgt spid="14"/>
+                                        </p:tgtEl>
+                                        <p:attrNameLst>
+                                          <p:attrName>style.visibility</p:attrName>
+                                        </p:attrNameLst>
+                                      </p:cBhvr>
+                                      <p:to>
+                                        <p:strVal val="visible"/>
+                                      </p:to>
+                                    </p:set>
+                                    <p:animEffect transition="in" filter="fade">
+                                      <p:cBhvr>
+                                        <p:cTn id="19" dur="500"/>
+                                        <p:tgtEl>
+                                          <p:spTgt spid="14"/>
+                                        </p:tgtEl>
+                                      </p:cBhvr>
+                                    </p:animEffect>
+                                  </p:childTnLst>
+                                </p:cTn>
+                              </p:par>
+                            </p:childTnLst>
+                          </p:cTn>
+                        </p:par>
+                      </p:childTnLst>
+                    </p:cTn>
+                  </p:par>
+                  <p:par>
+                    <p:cTn id="20" fill="hold">
+                      <p:stCondLst>
+                        <p:cond delay="indefinite"/>
+                      </p:stCondLst>
+                      <p:childTnLst>
+                        <p:par>
+                          <p:cTn id="21" fill="hold">
+                            <p:stCondLst>
+                              <p:cond delay="0"/>
+                            </p:stCondLst>
+                            <p:childTnLst>
+                              <p:par>
+                                <p:cTn id="22" presetID="10" presetClass="exit" presetSubtype="0" fill="hold" grpId="1" nodeType="clickEffect">
+                                  <p:stCondLst>
+                                    <p:cond delay="0"/>
+                                  </p:stCondLst>
+                                  <p:childTnLst>
+                                    <p:animEffect transition="out" filter="fade">
+                                      <p:cBhvr>
+                                        <p:cTn id="23" dur="500"/>
+                                        <p:tgtEl>
+                                          <p:spTgt spid="6"/>
+                                        </p:tgtEl>
+                                      </p:cBhvr>
+                                    </p:animEffect>
+                                    <p:set>
+                                      <p:cBhvr>
+                                        <p:cTn id="24" dur="1" fill="hold">
+                                          <p:stCondLst>
+                                            <p:cond delay="499"/>
+                                          </p:stCondLst>
+                                        </p:cTn>
+                                        <p:tgtEl>
+                                          <p:spTgt spid="6"/>
+                                        </p:tgtEl>
+                                        <p:attrNameLst>
+                                          <p:attrName>style.visibility</p:attrName>
+                                        </p:attrNameLst>
+                                      </p:cBhvr>
+                                      <p:to>
+                                        <p:strVal val="hidden"/>
+                                      </p:to>
+                                    </p:set>
+                                  </p:childTnLst>
+                                </p:cTn>
+                              </p:par>
+                              <p:par>
+                                <p:cTn id="25" presetID="10" presetClass="exit" presetSubtype="0" fill="hold" grpId="1" nodeType="withEffect">
+                                  <p:stCondLst>
+                                    <p:cond delay="0"/>
+                                  </p:stCondLst>
+                                  <p:childTnLst>
+                                    <p:animEffect transition="out" filter="fade">
+                                      <p:cBhvr>
+                                        <p:cTn id="26" dur="500"/>
+                                        <p:tgtEl>
+                                          <p:spTgt spid="7"/>
+                                        </p:tgtEl>
+                                      </p:cBhvr>
+                                    </p:animEffect>
+                                    <p:set>
+                                      <p:cBhvr>
+                                        <p:cTn id="27" dur="1" fill="hold">
+                                          <p:stCondLst>
+                                            <p:cond delay="499"/>
+                                          </p:stCondLst>
+                                        </p:cTn>
+                                        <p:tgtEl>
+                                          <p:spTgt spid="7"/>
+                                        </p:tgtEl>
+                                        <p:attrNameLst>
+                                          <p:attrName>style.visibility</p:attrName>
+                                        </p:attrNameLst>
+                                      </p:cBhvr>
+                                      <p:to>
+                                        <p:strVal val="hidden"/>
+                                      </p:to>
+                                    </p:set>
+                                  </p:childTnLst>
+                                </p:cTn>
+                              </p:par>
+                              <p:par>
+                                <p:cTn id="28" presetID="10" presetClass="exit" presetSubtype="0" fill="hold" grpId="1" nodeType="withEffect">
+                                  <p:stCondLst>
+                                    <p:cond delay="0"/>
+                                  </p:stCondLst>
+                                  <p:childTnLst>
+                                    <p:animEffect transition="out" filter="fade">
+                                      <p:cBhvr>
+                                        <p:cTn id="29" dur="500"/>
+                                        <p:tgtEl>
+                                          <p:spTgt spid="8"/>
+                                        </p:tgtEl>
+                                      </p:cBhvr>
+                                    </p:animEffect>
+                                    <p:set>
+                                      <p:cBhvr>
+                                        <p:cTn id="30" dur="1" fill="hold">
+                                          <p:stCondLst>
+                                            <p:cond delay="499"/>
+                                          </p:stCondLst>
+                                        </p:cTn>
+                                        <p:tgtEl>
+                                          <p:spTgt spid="8"/>
+                                        </p:tgtEl>
+                                        <p:attrNameLst>
+                                          <p:attrName>style.visibility</p:attrName>
+                                        </p:attrNameLst>
+                                      </p:cBhvr>
+                                      <p:to>
+                                        <p:strVal val="hidden"/>
+                                      </p:to>
+                                    </p:set>
+                                  </p:childTnLst>
+                                </p:cTn>
+                              </p:par>
+                              <p:par>
+                                <p:cTn id="31" presetID="10" presetClass="exit" presetSubtype="0" fill="hold" grpId="1" nodeType="withEffect">
+                                  <p:stCondLst>
+                                    <p:cond delay="0"/>
+                                  </p:stCondLst>
+                                  <p:childTnLst>
+                                    <p:animEffect transition="out" filter="fade">
+                                      <p:cBhvr>
+                                        <p:cTn id="32" dur="500"/>
+                                        <p:tgtEl>
+                                          <p:spTgt spid="9"/>
+                                        </p:tgtEl>
+                                      </p:cBhvr>
+                                    </p:animEffect>
+                                    <p:set>
+                                      <p:cBhvr>
+                                        <p:cTn id="33" dur="1" fill="hold">
+                                          <p:stCondLst>
+                                            <p:cond delay="499"/>
+                                          </p:stCondLst>
+                                        </p:cTn>
+                                        <p:tgtEl>
+                                          <p:spTgt spid="9"/>
+                                        </p:tgtEl>
+                                        <p:attrNameLst>
+                                          <p:attrName>style.visibility</p:attrName>
+                                        </p:attrNameLst>
+                                      </p:cBhvr>
+                                      <p:to>
+                                        <p:strVal val="hidden"/>
+                                      </p:to>
+                                    </p:set>
+                                  </p:childTnLst>
+                                </p:cTn>
+                              </p:par>
+                              <p:par>
+                                <p:cTn id="34" presetID="10" presetClass="exit" presetSubtype="0" fill="hold" grpId="1" nodeType="withEffect">
+                                  <p:stCondLst>
+                                    <p:cond delay="0"/>
+                                  </p:stCondLst>
+                                  <p:childTnLst>
+                                    <p:animEffect transition="out" filter="fade">
+                                      <p:cBhvr>
+                                        <p:cTn id="35" dur="500"/>
+                                        <p:tgtEl>
+                                          <p:spTgt spid="14"/>
+                                        </p:tgtEl>
+                                      </p:cBhvr>
+                                    </p:animEffect>
+                                    <p:set>
+                                      <p:cBhvr>
+                                        <p:cTn id="36" dur="1" fill="hold">
+                                          <p:stCondLst>
+                                            <p:cond delay="499"/>
+                                          </p:stCondLst>
+                                        </p:cTn>
+                                        <p:tgtEl>
+                                          <p:spTgt spid="14"/>
+                                        </p:tgtEl>
+                                        <p:attrNameLst>
+                                          <p:attrName>style.visibility</p:attrName>
+                                        </p:attrNameLst>
+                                      </p:cBhvr>
+                                      <p:to>
+                                        <p:strVal val="hidden"/>
+                                      </p:to>
+                                    </p:set>
+                                  </p:childTnLst>
+                                </p:cTn>
+                              </p:par>
+                            </p:childTnLst>
+                          </p:cTn>
+                        </p:par>
+                        <p:par>
+                          <p:cTn id="37" fill="hold">
+                            <p:stCondLst>
+                              <p:cond delay="500"/>
+                            </p:stCondLst>
+                            <p:childTnLst>
+                              <p:par>
+                                <p:cTn id="38" presetID="10" presetClass="entr" presetSubtype="0" fill="hold" grpId="0" nodeType="afterEffect">
+                                  <p:stCondLst>
+                                    <p:cond delay="0"/>
+                                  </p:stCondLst>
+                                  <p:childTnLst>
+                                    <p:set>
+                                      <p:cBhvr>
+                                        <p:cTn id="39" dur="1" fill="hold">
+                                          <p:stCondLst>
+                                            <p:cond delay="0"/>
+                                          </p:stCondLst>
+                                        </p:cTn>
+                                        <p:tgtEl>
+                                          <p:spTgt spid="12"/>
+                                        </p:tgtEl>
+                                        <p:attrNameLst>
+                                          <p:attrName>style.visibility</p:attrName>
+                                        </p:attrNameLst>
+                                      </p:cBhvr>
+                                      <p:to>
+                                        <p:strVal val="visible"/>
+                                      </p:to>
+                                    </p:set>
+                                    <p:animEffect transition="in" filter="fade">
+                                      <p:cBhvr>
+                                        <p:cTn id="40" dur="500"/>
+                                        <p:tgtEl>
+                                          <p:spTgt spid="12"/>
+                                        </p:tgtEl>
+                                      </p:cBhvr>
+                                    </p:animEffect>
+                                  </p:childTnLst>
+                                </p:cTn>
+                              </p:par>
+                              <p:par>
+                                <p:cTn id="41" presetID="10" presetClass="entr" presetSubtype="0" fill="hold" grpId="0" nodeType="withEffect">
+                                  <p:stCondLst>
+                                    <p:cond delay="0"/>
+                                  </p:stCondLst>
+                                  <p:childTnLst>
+                                    <p:set>
+                                      <p:cBhvr>
+                                        <p:cTn id="42" dur="1" fill="hold">
+                                          <p:stCondLst>
+                                            <p:cond delay="0"/>
+                                          </p:stCondLst>
+                                        </p:cTn>
+                                        <p:tgtEl>
+                                          <p:spTgt spid="13"/>
+                                        </p:tgtEl>
+                                        <p:attrNameLst>
+                                          <p:attrName>style.visibility</p:attrName>
+                                        </p:attrNameLst>
+                                      </p:cBhvr>
+                                      <p:to>
+                                        <p:strVal val="visible"/>
+                                      </p:to>
+                                    </p:set>
+                                    <p:animEffect transition="in" filter="fade">
+                                      <p:cBhvr>
+                                        <p:cTn id="43" dur="500"/>
+                                        <p:tgtEl>
+                                          <p:spTgt spid="13"/>
+                                        </p:tgtEl>
+                                      </p:cBhvr>
+                                    </p:animEffect>
+                                  </p:childTnLst>
+                                </p:cTn>
+                              </p:par>
+                            </p:childTnLst>
+                          </p:cTn>
+                        </p:par>
+                      </p:childTnLst>
+                    </p:cTn>
+                  </p:par>
+                  <p:par>
+                    <p:cTn id="44" fill="hold">
+                      <p:stCondLst>
+                        <p:cond delay="indefinite"/>
+                      </p:stCondLst>
+                      <p:childTnLst>
+                        <p:par>
+                          <p:cTn id="45" fill="hold">
+                            <p:stCondLst>
+                              <p:cond delay="0"/>
+                            </p:stCondLst>
+                            <p:childTnLst>
+                              <p:par>
+                                <p:cTn id="46" presetID="10" presetClass="exit" presetSubtype="0" fill="hold" grpId="1" nodeType="clickEffect">
+                                  <p:stCondLst>
+                                    <p:cond delay="0"/>
+                                  </p:stCondLst>
+                                  <p:childTnLst>
+                                    <p:animEffect transition="out" filter="fade">
+                                      <p:cBhvr>
+                                        <p:cTn id="47" dur="500"/>
+                                        <p:tgtEl>
+                                          <p:spTgt spid="12"/>
+                                        </p:tgtEl>
+                                      </p:cBhvr>
+                                    </p:animEffect>
+                                    <p:set>
+                                      <p:cBhvr>
+                                        <p:cTn id="48" dur="1" fill="hold">
+                                          <p:stCondLst>
+                                            <p:cond delay="499"/>
+                                          </p:stCondLst>
+                                        </p:cTn>
+                                        <p:tgtEl>
+                                          <p:spTgt spid="12"/>
+                                        </p:tgtEl>
+                                        <p:attrNameLst>
+                                          <p:attrName>style.visibility</p:attrName>
+                                        </p:attrNameLst>
+                                      </p:cBhvr>
+                                      <p:to>
+                                        <p:strVal val="hidden"/>
+                                      </p:to>
+                                    </p:set>
+                                  </p:childTnLst>
+                                </p:cTn>
+                              </p:par>
+                              <p:par>
+                                <p:cTn id="49" presetID="10" presetClass="exit" presetSubtype="0" fill="hold" grpId="1" nodeType="withEffect">
+                                  <p:stCondLst>
+                                    <p:cond delay="0"/>
+                                  </p:stCondLst>
+                                  <p:childTnLst>
+                                    <p:animEffect transition="out" filter="fade">
+                                      <p:cBhvr>
+                                        <p:cTn id="50" dur="500"/>
+                                        <p:tgtEl>
+                                          <p:spTgt spid="13"/>
+                                        </p:tgtEl>
+                                      </p:cBhvr>
+                                    </p:animEffect>
+                                    <p:set>
+                                      <p:cBhvr>
+                                        <p:cTn id="51" dur="1" fill="hold">
+                                          <p:stCondLst>
+                                            <p:cond delay="499"/>
+                                          </p:stCondLst>
+                                        </p:cTn>
+                                        <p:tgtEl>
+                                          <p:spTgt spid="13"/>
+                                        </p:tgtEl>
+                                        <p:attrNameLst>
+                                          <p:attrName>style.visibility</p:attrName>
+                                        </p:attrNameLst>
+                                      </p:cBhvr>
+                                      <p:to>
+                                        <p:strVal val="hidden"/>
+                                      </p:to>
+                                    </p:set>
+                                  </p:childTnLst>
+                                </p:cTn>
+                              </p:par>
+                            </p:childTnLst>
+                          </p:cTn>
+                        </p:par>
+                        <p:par>
+                          <p:cTn id="52" fill="hold">
+                            <p:stCondLst>
+                              <p:cond delay="500"/>
+                            </p:stCondLst>
+                            <p:childTnLst>
+                              <p:par>
+                                <p:cTn id="53" presetID="10" presetClass="entr" presetSubtype="0" fill="hold" grpId="0" nodeType="afterEffect">
+                                  <p:stCondLst>
+                                    <p:cond delay="0"/>
+                                  </p:stCondLst>
+                                  <p:childTnLst>
+                                    <p:set>
+                                      <p:cBhvr>
+                                        <p:cTn id="54" dur="1" fill="hold">
+                                          <p:stCondLst>
+                                            <p:cond delay="0"/>
+                                          </p:stCondLst>
+                                        </p:cTn>
+                                        <p:tgtEl>
+                                          <p:spTgt spid="18"/>
+                                        </p:tgtEl>
+                                        <p:attrNameLst>
+                                          <p:attrName>style.visibility</p:attrName>
+                                        </p:attrNameLst>
+                                      </p:cBhvr>
+                                      <p:to>
+                                        <p:strVal val="visible"/>
+                                      </p:to>
+                                    </p:set>
+                                    <p:animEffect transition="in" filter="fade">
+                                      <p:cBhvr>
+                                        <p:cTn id="55" dur="500"/>
+                                        <p:tgtEl>
+                                          <p:spTgt spid="18"/>
+                                        </p:tgtEl>
+                                      </p:cBhvr>
+                                    </p:animEffect>
+                                  </p:childTnLst>
+                                </p:cTn>
+                              </p:par>
+                              <p:par>
+                                <p:cTn id="56" presetID="10" presetClass="entr" presetSubtype="0" fill="hold" grpId="0" nodeType="withEffect">
+                                  <p:stCondLst>
+                                    <p:cond delay="0"/>
+                                  </p:stCondLst>
+                                  <p:childTnLst>
+                                    <p:set>
+                                      <p:cBhvr>
+                                        <p:cTn id="57" dur="1" fill="hold">
+                                          <p:stCondLst>
+                                            <p:cond delay="0"/>
+                                          </p:stCondLst>
+                                        </p:cTn>
+                                        <p:tgtEl>
+                                          <p:spTgt spid="16"/>
+                                        </p:tgtEl>
+                                        <p:attrNameLst>
+                                          <p:attrName>style.visibility</p:attrName>
+                                        </p:attrNameLst>
+                                      </p:cBhvr>
+                                      <p:to>
+                                        <p:strVal val="visible"/>
+                                      </p:to>
+                                    </p:set>
+                                    <p:animEffect transition="in" filter="fade">
+                                      <p:cBhvr>
+                                        <p:cTn id="58" dur="500"/>
+                                        <p:tgtEl>
+                                          <p:spTgt spid="16"/>
+                                        </p:tgtEl>
+                                      </p:cBhvr>
+                                    </p:animEffect>
+                                  </p:childTnLst>
+                                </p:cTn>
+                              </p:par>
+                              <p:par>
+                                <p:cTn id="59" presetID="10" presetClass="entr" presetSubtype="0" fill="hold" grpId="0" nodeType="withEffect">
+                                  <p:stCondLst>
+                                    <p:cond delay="0"/>
+                                  </p:stCondLst>
+                                  <p:childTnLst>
+                                    <p:set>
+                                      <p:cBhvr>
+                                        <p:cTn id="60" dur="1" fill="hold">
+                                          <p:stCondLst>
+                                            <p:cond delay="0"/>
+                                          </p:stCondLst>
+                                        </p:cTn>
+                                        <p:tgtEl>
+                                          <p:spTgt spid="17"/>
+                                        </p:tgtEl>
+                                        <p:attrNameLst>
+                                          <p:attrName>style.visibility</p:attrName>
+                                        </p:attrNameLst>
+                                      </p:cBhvr>
+                                      <p:to>
+                                        <p:strVal val="visible"/>
+                                      </p:to>
+                                    </p:set>
+                                    <p:animEffect transition="in" filter="fade">
+                                      <p:cBhvr>
+                                        <p:cTn id="61" dur="500"/>
+                                        <p:tgtEl>
+                                          <p:spTgt spid="17"/>
+                                        </p:tgtEl>
+                                      </p:cBhvr>
+                                    </p:animEffect>
+                                  </p:childTnLst>
+                                </p:cTn>
+                              </p:par>
+                              <p:par>
+                                <p:cTn id="62" presetID="10" presetClass="entr" presetSubtype="0" fill="hold" grpId="0" nodeType="withEffect">
+                                  <p:stCondLst>
+                                    <p:cond delay="0"/>
+                                  </p:stCondLst>
+                                  <p:childTnLst>
+                                    <p:set>
+                                      <p:cBhvr>
+                                        <p:cTn id="63" dur="1" fill="hold">
+                                          <p:stCondLst>
+                                            <p:cond delay="0"/>
+                                          </p:stCondLst>
+                                        </p:cTn>
+                                        <p:tgtEl>
+                                          <p:spTgt spid="15"/>
+                                        </p:tgtEl>
+                                        <p:attrNameLst>
+                                          <p:attrName>style.visibility</p:attrName>
+                                        </p:attrNameLst>
+                                      </p:cBhvr>
+                                      <p:to>
+                                        <p:strVal val="visible"/>
+                                      </p:to>
+                                    </p:set>
+                                    <p:animEffect transition="in" filter="fade">
+                                      <p:cBhvr>
+                                        <p:cTn id="64" dur="500"/>
+                                        <p:tgtEl>
+                                          <p:spTgt spid="15"/>
+                                        </p:tgtEl>
+                                      </p:cBhvr>
+                                    </p:animEffect>
+                                  </p:childTnLst>
+                                </p:cTn>
+                              </p:par>
+                            </p:childTnLst>
+                          </p:cTn>
+                        </p:par>
+                      </p:childTnLst>
+                    </p:cTn>
+                  </p:par>
+                </p:childTnLst>
+              </p:cTn>
+              <p:prevCondLst>
+                <p:cond evt="onPrev" delay="0">
+                  <p:tgtEl>
+                    <p:sldTgt/>
+                  </p:tgtEl>
+                </p:cond>
+              </p:prevCondLst>
+              <p:nextCondLst>
+                <p:cond evt="onNext" delay="0">
+                  <p:tgtEl>
+                    <p:sldTgt/>
+                  </p:tgtEl>
+                </p:cond>
+              </p:nextCondLst>
+            </p:seq>
+          </p:childTnLst>
+        </p:cTn>
+      </p:par>
+    </p:tnLst>
+    <p:bldLst>
+      <p:bldP spid="6" grpId="0" animBg="1"/>
+      <p:bldP spid="6" grpId="1" animBg="1"/>
+      <p:bldP spid="7" grpId="0" animBg="1"/>
+      <p:bldP spid="7" grpId="1" animBg="1"/>
+      <p:bldP spid="8" grpId="0" animBg="1"/>
+      <p:bldP spid="8" grpId="1" animBg="1"/>
+      <p:bldP spid="9" grpId="0" animBg="1"/>
+      <p:bldP spid="9" grpId="1" animBg="1"/>
+      <p:bldP spid="12" grpId="0" animBg="1"/>
+      <p:bldP spid="12" grpId="1" animBg="1"/>
+      <p:bldP spid="13" grpId="0" animBg="1"/>
+      <p:bldP spid="13" grpId="1" animBg="1"/>
+      <p:bldP spid="14" grpId="0" animBg="1"/>
+      <p:bldP spid="14" grpId="1" animBg="1"/>
+      <p:bldP spid="15" grpId="0" animBg="1"/>
+      <p:bldP spid="16" grpId="0" animBg="1"/>
+      <p:bldP spid="17" grpId="0" animBg="1"/>
+      <p:bldP spid="18" grpId="0" animBg="1"/>
+    </p:bldLst>
+  </p:timing>
 </p:sld>
 </file>
 
